--- a/docs/admin/slides/weekend_holiday_kpi/weekend_holiday_kpi.pptx
+++ b/docs/admin/slides/weekend_holiday_kpi/weekend_holiday_kpi.pptx
@@ -21,10 +21,9 @@
     <p:sldId id="269" r:id="rId15"/>
     <p:sldId id="270" r:id="rId16"/>
     <p:sldId id="271" r:id="rId17"/>
-    <p:sldId id="272" r:id="rId18"/>
   </p:sldIdLst>
   <p:notesMasterIdLst>
-    <p:notesMasterId r:id="rId19"/>
+    <p:notesMasterId r:id="rId18"/>
   </p:notesMasterIdLst>
   <p:sldSz cx="12192000" cy="6858000"/>
   <p:notesSz cx="6858000" cy="12192000"/>
@@ -1176,94 +1175,6 @@
 </p:notes>
 </file>
 
-<file path=ppt/notesSlides/notesSlide17.xml><?xml version="1.0" encoding="utf-8"?>
-<p:notes xmlns:a="http://schemas.openxmlformats.org/drawingml/2006/main" xmlns:r="http://schemas.openxmlformats.org/officeDocument/2006/relationships" xmlns:p="http://schemas.openxmlformats.org/presentationml/2006/main">
-  <p:cSld>
-    <p:spTree>
-      <p:nvGrpSpPr>
-        <p:cNvPr id="1" name=""/>
-        <p:cNvGrpSpPr/>
-        <p:nvPr/>
-      </p:nvGrpSpPr>
-      <p:grpSpPr>
-        <a:xfrm>
-          <a:off x="0" y="0"/>
-          <a:ext cx="0" cy="0"/>
-          <a:chOff x="0" y="0"/>
-          <a:chExt cx="0" cy="0"/>
-        </a:xfrm>
-      </p:grpSpPr>
-      <p:sp>
-        <p:nvSpPr>
-          <p:cNvPr id="2" name="Slide Image Placeholder 1"/>
-          <p:cNvSpPr>
-            <a:spLocks noGrp="1" noRot="1" noChangeAspect="1"/>
-          </p:cNvSpPr>
-          <p:nvPr>
-            <p:ph type="sldImg"/>
-          </p:nvPr>
-        </p:nvSpPr>
-        <p:spPr/>
-      </p:sp>
-      <p:sp>
-        <p:nvSpPr>
-          <p:cNvPr id="3" name="Notes Placeholder 2"/>
-          <p:cNvSpPr>
-            <a:spLocks noGrp="1"/>
-          </p:cNvSpPr>
-          <p:nvPr>
-            <p:ph type="body" idx="1"/>
-          </p:nvPr>
-        </p:nvSpPr>
-        <p:spPr/>
-        <p:txBody>
-          <a:bodyPr/>
-          <a:lstStyle/>
-          <a:p>
-            <a:r>
-              <a:rPr lang="en-US" dirty="0"/>
-              <a:t/>
-            </a:r>
-            <a:endParaRPr lang="en-US" dirty="0"/>
-          </a:p>
-        </p:txBody>
-      </p:sp>
-      <p:sp>
-        <p:nvSpPr>
-          <p:cNvPr id="4" name="Slide Number Placeholder 3"/>
-          <p:cNvSpPr>
-            <a:spLocks noGrp="1"/>
-          </p:cNvSpPr>
-          <p:nvPr>
-            <p:ph type="sldNum" sz="quarter" idx="10"/>
-          </p:nvPr>
-        </p:nvSpPr>
-        <p:spPr/>
-        <p:txBody>
-          <a:bodyPr/>
-          <a:lstStyle/>
-          <a:p>
-            <a:fld id="{F7021451-1387-4CA6-816F-3879F97B5CBC}" type="slidenum">
-              <a:rPr lang="en-US"/>
-              <a:t>17</a:t>
-            </a:fld>
-            <a:endParaRPr lang="en-US"/>
-          </a:p>
-        </p:txBody>
-      </p:sp>
-    </p:spTree>
-    <p:extLst>
-      <p:ext uri="{BB962C8B-B14F-4D97-AF65-F5344CB8AC3E}">
-        <p14:creationId xmlns:p14="http://schemas.microsoft.com/office/powerpoint/2010/main" val="1024086991"/>
-      </p:ext>
-    </p:extLst>
-  </p:cSld>
-  <p:clrMapOvr>
-    <a:masterClrMapping/>
-  </p:clrMapOvr>
-</p:notes>
-</file>
-
 <file path=ppt/notesSlides/notesSlide2.xml><?xml version="1.0" encoding="utf-8"?>
 <p:notes xmlns:a="http://schemas.openxmlformats.org/drawingml/2006/main" xmlns:r="http://schemas.openxmlformats.org/officeDocument/2006/relationships" xmlns:p="http://schemas.openxmlformats.org/presentationml/2006/main">
   <p:cSld>
@@ -2752,7 +2663,7 @@
                 <a:ea typeface="Yu Gothic" pitchFamily="34" charset="-122"/>
                 <a:cs typeface="Yu Gothic" pitchFamily="34" charset="-120"/>
               </a:rPr>
-              <a:t>10 / 17</a:t>
+              <a:t>10 / 16</a:t>
             </a:r>
             <a:endParaRPr lang="en-US" sz="900" dirty="0"/>
           </a:p>
@@ -3378,7 +3289,7 @@
                 <a:ea typeface="Yu Gothic" pitchFamily="34" charset="-122"/>
                 <a:cs typeface="Yu Gothic" pitchFamily="34" charset="-120"/>
               </a:rPr>
-              <a:t>11 / 17</a:t>
+              <a:t>11 / 16</a:t>
             </a:r>
             <a:endParaRPr lang="en-US" sz="900" dirty="0"/>
           </a:p>
@@ -4060,7 +3971,7 @@
                 <a:ea typeface="Yu Gothic" pitchFamily="34" charset="-122"/>
                 <a:cs typeface="Yu Gothic" pitchFamily="34" charset="-120"/>
               </a:rPr>
-              <a:t>12 / 17</a:t>
+              <a:t>12 / 16</a:t>
             </a:r>
             <a:endParaRPr lang="en-US" sz="900" dirty="0"/>
           </a:p>
@@ -4701,7 +4612,7 @@
                 <a:ea typeface="Yu Gothic" pitchFamily="34" charset="-122"/>
                 <a:cs typeface="Yu Gothic" pitchFamily="34" charset="-120"/>
               </a:rPr>
-              <a:t>13 / 17</a:t>
+              <a:t>13 / 16</a:t>
             </a:r>
             <a:endParaRPr lang="en-US" sz="900" dirty="0"/>
           </a:p>
@@ -5401,7 +5312,7 @@
                 <a:ea typeface="Yu Gothic" pitchFamily="34" charset="-122"/>
                 <a:cs typeface="Yu Gothic" pitchFamily="34" charset="-120"/>
               </a:rPr>
-              <a:t>14 / 17</a:t>
+              <a:t>14 / 16</a:t>
             </a:r>
             <a:endParaRPr lang="en-US" sz="900" dirty="0"/>
           </a:p>
@@ -6027,7 +5938,7 @@
                 <a:ea typeface="Yu Gothic" pitchFamily="34" charset="-122"/>
                 <a:cs typeface="Yu Gothic" pitchFamily="34" charset="-120"/>
               </a:rPr>
-              <a:t>15 / 17</a:t>
+              <a:t>15 / 16</a:t>
             </a:r>
             <a:endParaRPr lang="en-US" sz="900" dirty="0"/>
           </a:p>
@@ -6066,7 +5977,7 @@
                 <a:ea typeface="Yu Gothic UI" pitchFamily="34" charset="-122"/>
                 <a:cs typeface="Yu Gothic UI" pitchFamily="34" charset="-120"/>
               </a:rPr>
-              <a:t>Phase 1 — 選択的木曜前倒し（高需要週のみ発動）</a:t>
+              <a:t>Phase 2 — 連休対策：前退院枠 &amp; 予約枠最適化</a:t>
             </a:r>
             <a:endParaRPr lang="en-US" sz="2800" dirty="0"/>
           </a:p>
@@ -6105,7 +6016,7 @@
                 <a:ea typeface="Yu Gothic" pitchFamily="34" charset="-122"/>
                 <a:cs typeface="Yu Gothic" pitchFamily="34" charset="-120"/>
               </a:rPr>
-              <a:t>効果は週タイプで決まる — 需要条件付きロジックに改訂</a:t>
+              <a:t>連休 3週前 からの退院調整と連休明け予約枠の事前確保</a:t>
             </a:r>
             <a:endParaRPr lang="en-US" sz="1400" dirty="0"/>
           </a:p>
@@ -6131,59 +6042,16 @@
           <a:ln/>
         </p:spPr>
       </p:sp>
-      <p:pic>
-        <p:nvPicPr>
-          <p:cNvPr id="8" name="Image 0" descr="/Users/kubotatoru/ai-management/docs/admin/slides/weekend_holiday_kpi/charts/09_impact_simulation.png">    </p:cNvPr>
-          <p:cNvPicPr>
-            <a:picLocks noChangeAspect="1"/>
-          </p:cNvPicPr>
-          <p:nvPr/>
-        </p:nvPicPr>
-        <p:blipFill>
-          <a:blip r:embed="rId1"/>
-          <a:srcRect l="0" r="0" t="0" b="0"/>
-          <a:stretch/>
-        </p:blipFill>
-        <p:spPr>
-          <a:xfrm>
-            <a:off x="457200" y="1737360"/>
-            <a:ext cx="7315200" cy="4297680"/>
-          </a:xfrm>
-          <a:prstGeom prst="rect">
-            <a:avLst/>
-          </a:prstGeom>
-        </p:spPr>
-      </p:pic>
-      <p:sp>
-        <p:nvSpPr>
-          <p:cNvPr id="9" name="Shape 6"/>
-          <p:cNvSpPr/>
-          <p:nvPr/>
-        </p:nvSpPr>
-        <p:spPr>
-          <a:xfrm>
-            <a:off x="8046720" y="1828800"/>
-            <a:ext cx="3657600" cy="1645920"/>
-          </a:xfrm>
-          <a:prstGeom prst="rect">
-            <a:avLst/>
-          </a:prstGeom>
-          <a:solidFill>
-            <a:srgbClr val="4CAF50"/>
-          </a:solidFill>
-          <a:ln/>
-        </p:spPr>
-      </p:sp>
-      <p:sp>
-        <p:nvSpPr>
-          <p:cNvPr id="10" name="Text 7"/>
-          <p:cNvSpPr/>
-          <p:nvPr/>
-        </p:nvSpPr>
-        <p:spPr>
-          <a:xfrm>
-            <a:off x="8046720" y="1874520"/>
-            <a:ext cx="3657600" cy="914400"/>
+      <p:sp>
+        <p:nvSpPr>
+          <p:cNvPr id="8" name="Text 6"/>
+          <p:cNvSpPr/>
+          <p:nvPr/>
+        </p:nvSpPr>
+        <p:spPr>
+          <a:xfrm>
+            <a:off x="457200" y="1828800"/>
+            <a:ext cx="2194560" cy="320040"/>
           </a:xfrm>
           <a:prstGeom prst="rect">
             <a:avLst/>
@@ -6199,46 +6067,66 @@
               <a:buNone/>
             </a:pPr>
             <a:r>
-              <a:rPr lang="en-US" sz="3000" b="1" dirty="0">
-                <a:solidFill>
-                  <a:srgbClr val="FFFFFF"/>
+              <a:rPr lang="en-US" sz="1100" b="1" dirty="0">
+                <a:solidFill>
+                  <a:srgbClr val="1E3A5F"/>
                 </a:solidFill>
                 <a:latin typeface="Yu Gothic UI" pitchFamily="34" charset="0"/>
                 <a:ea typeface="Yu Gothic UI" pitchFamily="34" charset="-122"/>
                 <a:cs typeface="Yu Gothic UI" pitchFamily="34" charset="-120"/>
               </a:rPr>
-              <a:t>300〜700 万円</a:t>
-            </a:r>
-            <a:endParaRPr lang="en-US" sz="3000" dirty="0"/>
-          </a:p>
-        </p:txBody>
-      </p:sp>
-      <p:sp>
-        <p:nvSpPr>
-          <p:cNvPr id="11" name="Text 8"/>
-          <p:cNvSpPr/>
-          <p:nvPr/>
-        </p:nvSpPr>
-        <p:spPr>
-          <a:xfrm>
-            <a:off x="8046720" y="2788920"/>
-            <a:ext cx="3657600" cy="685800"/>
-          </a:xfrm>
-          <a:prstGeom prst="rect">
-            <a:avLst/>
-          </a:prstGeom>
-          <a:noFill/>
-          <a:ln/>
-        </p:spPr>
-        <p:txBody>
-          <a:bodyPr wrap="square" lIns="0" tIns="0" rIns="0" bIns="0" rtlCol="0" anchor="t"/>
+              <a:t>連休 3週前</a:t>
+            </a:r>
+            <a:endParaRPr lang="en-US" sz="1100" dirty="0"/>
+          </a:p>
+        </p:txBody>
+      </p:sp>
+      <p:sp>
+        <p:nvSpPr>
+          <p:cNvPr id="9" name="Shape 7"/>
+          <p:cNvSpPr/>
+          <p:nvPr/>
+        </p:nvSpPr>
+        <p:spPr>
+          <a:xfrm>
+            <a:off x="457200" y="2194560"/>
+            <a:ext cx="2194560" cy="1371600"/>
+          </a:xfrm>
+          <a:prstGeom prst="rect">
+            <a:avLst/>
+          </a:prstGeom>
+          <a:solidFill>
+            <a:srgbClr val="2E86AB"/>
+          </a:solidFill>
+          <a:ln/>
+        </p:spPr>
+      </p:sp>
+      <p:sp>
+        <p:nvSpPr>
+          <p:cNvPr id="10" name="Text 8"/>
+          <p:cNvSpPr/>
+          <p:nvPr/>
+        </p:nvSpPr>
+        <p:spPr>
+          <a:xfrm>
+            <a:off x="457200" y="2194560"/>
+            <a:ext cx="2194560" cy="1371600"/>
+          </a:xfrm>
+          <a:prstGeom prst="rect">
+            <a:avLst/>
+          </a:prstGeom>
+          <a:noFill/>
+          <a:ln/>
+        </p:spPr>
+        <p:txBody>
+          <a:bodyPr wrap="square" lIns="0" tIns="0" rIns="0" bIns="0" rtlCol="0" anchor="ctr"/>
           <a:lstStyle/>
           <a:p>
             <a:pPr algn="ctr" indent="0" marL="0">
               <a:buNone/>
             </a:pPr>
             <a:r>
-              <a:rPr lang="en-US" sz="1200" dirty="0">
+              <a:rPr lang="en-US" sz="1200" b="1" dirty="0">
                 <a:solidFill>
                   <a:srgbClr val="FFFFFF"/>
                 </a:solidFill>
@@ -6246,7 +6134,7 @@
                 <a:ea typeface="Yu Gothic" pitchFamily="34" charset="-122"/>
                 <a:cs typeface="Yu Gothic" pitchFamily="34" charset="-120"/>
               </a:rPr>
-              <a:t>年間吸収効果（P25-P75）</a:t>
+              <a:t>退院ターゲット</a:t>
             </a:r>
             <a:endParaRPr lang="en-US" sz="1200" dirty="0"/>
           </a:p>
@@ -6255,7 +6143,7 @@
               <a:buNone/>
             </a:pPr>
             <a:r>
-              <a:rPr lang="en-US" sz="1200" dirty="0">
+              <a:rPr lang="en-US" sz="1200" b="1" dirty="0">
                 <a:solidFill>
                   <a:srgbClr val="FFFFFF"/>
                 </a:solidFill>
@@ -6263,7 +6151,7 @@
                 <a:ea typeface="Yu Gothic" pitchFamily="34" charset="-122"/>
                 <a:cs typeface="Yu Gothic" pitchFamily="34" charset="-120"/>
               </a:rPr>
-              <a:t>中央値 503 万円</a:t>
+              <a:t>リスト作成</a:t>
             </a:r>
             <a:endParaRPr lang="en-US" sz="1200" dirty="0"/>
           </a:p>
@@ -6271,82 +6159,50 @@
       </p:sp>
       <p:sp>
         <p:nvSpPr>
-          <p:cNvPr id="12" name="Shape 9"/>
-          <p:cNvSpPr/>
-          <p:nvPr/>
-        </p:nvSpPr>
-        <p:spPr>
-          <a:xfrm>
-            <a:off x="8046720" y="3611880"/>
-            <a:ext cx="3657600" cy="822960"/>
-          </a:xfrm>
-          <a:prstGeom prst="rect">
-            <a:avLst/>
-          </a:prstGeom>
-          <a:solidFill>
-            <a:srgbClr val="FFFFFF"/>
-          </a:solidFill>
-          <a:ln w="6350">
-            <a:solidFill>
-              <a:srgbClr val="F1F5F9"/>
-            </a:solidFill>
-            <a:prstDash val="solid"/>
-          </a:ln>
-          <a:effectLst>
-            <a:outerShdw sx="100000" sy="100000" kx="0" ky="0" algn="bl" rotWithShape="0" blurRad="101600" dist="25400" dir="5400000">
-              <a:srgbClr val="000000">
-                <a:alpha val="8000"/>
-              </a:srgbClr>
-            </a:outerShdw>
-          </a:effectLst>
-        </p:spPr>
-      </p:sp>
-      <p:sp>
-        <p:nvSpPr>
-          <p:cNvPr id="13" name="Shape 10"/>
-          <p:cNvSpPr/>
-          <p:nvPr/>
-        </p:nvSpPr>
-        <p:spPr>
-          <a:xfrm>
-            <a:off x="8046720" y="3611880"/>
-            <a:ext cx="73152" cy="822960"/>
-          </a:xfrm>
-          <a:prstGeom prst="rect">
-            <a:avLst/>
-          </a:prstGeom>
-          <a:solidFill>
-            <a:srgbClr val="4CAF50"/>
-          </a:solidFill>
-          <a:ln/>
-        </p:spPr>
-      </p:sp>
-      <p:sp>
-        <p:nvSpPr>
-          <p:cNvPr id="14" name="Text 11"/>
-          <p:cNvSpPr/>
-          <p:nvPr/>
-        </p:nvSpPr>
-        <p:spPr>
-          <a:xfrm>
-            <a:off x="8275320" y="3721608"/>
-            <a:ext cx="3337560" cy="411480"/>
-          </a:xfrm>
-          <a:prstGeom prst="rect">
-            <a:avLst/>
-          </a:prstGeom>
-          <a:noFill/>
-          <a:ln/>
-        </p:spPr>
-        <p:txBody>
-          <a:bodyPr wrap="square" lIns="0" tIns="0" rIns="0" bIns="0" rtlCol="0" anchor="t"/>
-          <a:lstStyle/>
-          <a:p>
-            <a:pPr indent="0" marL="0">
-              <a:buNone/>
-            </a:pPr>
-            <a:r>
-              <a:rPr lang="en-US" sz="1400" b="1" dirty="0">
+          <p:cNvPr id="11" name="Shape 9"/>
+          <p:cNvSpPr/>
+          <p:nvPr/>
+        </p:nvSpPr>
+        <p:spPr>
+          <a:xfrm rot="5400000">
+            <a:off x="2697480" y="2788920"/>
+            <a:ext cx="109728" cy="182880"/>
+          </a:xfrm>
+          <a:prstGeom prst="rtTriangle">
+            <a:avLst/>
+          </a:prstGeom>
+          <a:solidFill>
+            <a:srgbClr val="1E3A5F"/>
+          </a:solidFill>
+          <a:ln/>
+        </p:spPr>
+      </p:sp>
+      <p:sp>
+        <p:nvSpPr>
+          <p:cNvPr id="12" name="Text 10"/>
+          <p:cNvSpPr/>
+          <p:nvPr/>
+        </p:nvSpPr>
+        <p:spPr>
+          <a:xfrm>
+            <a:off x="2798064" y="1828800"/>
+            <a:ext cx="2194560" cy="320040"/>
+          </a:xfrm>
+          <a:prstGeom prst="rect">
+            <a:avLst/>
+          </a:prstGeom>
+          <a:noFill/>
+          <a:ln/>
+        </p:spPr>
+        <p:txBody>
+          <a:bodyPr wrap="square" lIns="0" tIns="0" rIns="0" bIns="0" rtlCol="0" anchor="ctr"/>
+          <a:lstStyle/>
+          <a:p>
+            <a:pPr algn="ctr" indent="0" marL="0">
+              <a:buNone/>
+            </a:pPr>
+            <a:r>
+              <a:rPr lang="en-US" sz="1100" b="1" dirty="0">
                 <a:solidFill>
                   <a:srgbClr val="1E3A5F"/>
                 </a:solidFill>
@@ -6354,129 +6210,134 @@
                 <a:ea typeface="Yu Gothic UI" pitchFamily="34" charset="-122"/>
                 <a:cs typeface="Yu Gothic UI" pitchFamily="34" charset="-120"/>
               </a:rPr>
-              <a:t>対象週</a:t>
-            </a:r>
-            <a:endParaRPr lang="en-US" sz="1400" dirty="0"/>
-          </a:p>
-        </p:txBody>
-      </p:sp>
-      <p:sp>
-        <p:nvSpPr>
-          <p:cNvPr id="15" name="Text 12"/>
-          <p:cNvSpPr/>
-          <p:nvPr/>
-        </p:nvSpPr>
-        <p:spPr>
-          <a:xfrm>
-            <a:off x="8275320" y="4114800"/>
-            <a:ext cx="3337560" cy="228600"/>
-          </a:xfrm>
-          <a:prstGeom prst="rect">
-            <a:avLst/>
-          </a:prstGeom>
-          <a:noFill/>
-          <a:ln/>
-        </p:spPr>
-        <p:txBody>
-          <a:bodyPr wrap="square" lIns="0" tIns="0" rIns="0" bIns="0" rtlCol="0" anchor="t"/>
-          <a:lstStyle/>
-          <a:p>
-            <a:pPr indent="0" marL="0">
-              <a:buNone/>
-            </a:pPr>
-            <a:r>
-              <a:rPr lang="en-US" sz="1100" dirty="0">
-                <a:solidFill>
-                  <a:srgbClr val="475569"/>
+              <a:t>連休 2週前</a:t>
+            </a:r>
+            <a:endParaRPr lang="en-US" sz="1100" dirty="0"/>
+          </a:p>
+        </p:txBody>
+      </p:sp>
+      <p:sp>
+        <p:nvSpPr>
+          <p:cNvPr id="13" name="Shape 11"/>
+          <p:cNvSpPr/>
+          <p:nvPr/>
+        </p:nvSpPr>
+        <p:spPr>
+          <a:xfrm>
+            <a:off x="2798064" y="2194560"/>
+            <a:ext cx="2194560" cy="1371600"/>
+          </a:xfrm>
+          <a:prstGeom prst="rect">
+            <a:avLst/>
+          </a:prstGeom>
+          <a:solidFill>
+            <a:srgbClr val="4A6FA5"/>
+          </a:solidFill>
+          <a:ln/>
+        </p:spPr>
+      </p:sp>
+      <p:sp>
+        <p:nvSpPr>
+          <p:cNvPr id="14" name="Text 12"/>
+          <p:cNvSpPr/>
+          <p:nvPr/>
+        </p:nvSpPr>
+        <p:spPr>
+          <a:xfrm>
+            <a:off x="2798064" y="2194560"/>
+            <a:ext cx="2194560" cy="1371600"/>
+          </a:xfrm>
+          <a:prstGeom prst="rect">
+            <a:avLst/>
+          </a:prstGeom>
+          <a:noFill/>
+          <a:ln/>
+        </p:spPr>
+        <p:txBody>
+          <a:bodyPr wrap="square" lIns="0" tIns="0" rIns="0" bIns="0" rtlCol="0" anchor="ctr"/>
+          <a:lstStyle/>
+          <a:p>
+            <a:pPr algn="ctr" indent="0" marL="0">
+              <a:buNone/>
+            </a:pPr>
+            <a:r>
+              <a:rPr lang="en-US" sz="1200" b="1" dirty="0">
+                <a:solidFill>
+                  <a:srgbClr val="FFFFFF"/>
                 </a:solidFill>
                 <a:latin typeface="Yu Gothic" pitchFamily="34" charset="0"/>
                 <a:ea typeface="Yu Gothic" pitchFamily="34" charset="-122"/>
                 <a:cs typeface="Yu Gothic" pitchFamily="34" charset="-120"/>
               </a:rPr>
-              <a:t>高需要週のみ（全体の約 24% = 4週に1週）</a:t>
-            </a:r>
-            <a:endParaRPr lang="en-US" sz="1100" dirty="0"/>
-          </a:p>
-        </p:txBody>
-      </p:sp>
-      <p:sp>
-        <p:nvSpPr>
-          <p:cNvPr id="16" name="Shape 13"/>
-          <p:cNvSpPr/>
-          <p:nvPr/>
-        </p:nvSpPr>
-        <p:spPr>
-          <a:xfrm>
-            <a:off x="8046720" y="4526280"/>
-            <a:ext cx="3657600" cy="822960"/>
-          </a:xfrm>
-          <a:prstGeom prst="rect">
-            <a:avLst/>
-          </a:prstGeom>
-          <a:solidFill>
-            <a:srgbClr val="FFFFFF"/>
-          </a:solidFill>
-          <a:ln w="6350">
-            <a:solidFill>
-              <a:srgbClr val="F1F5F9"/>
-            </a:solidFill>
-            <a:prstDash val="solid"/>
-          </a:ln>
-          <a:effectLst>
-            <a:outerShdw sx="100000" sy="100000" kx="0" ky="0" algn="bl" rotWithShape="0" blurRad="101600" dist="25400" dir="5400000">
-              <a:srgbClr val="000000">
-                <a:alpha val="8000"/>
-              </a:srgbClr>
-            </a:outerShdw>
-          </a:effectLst>
-        </p:spPr>
-      </p:sp>
-      <p:sp>
-        <p:nvSpPr>
-          <p:cNvPr id="17" name="Shape 14"/>
-          <p:cNvSpPr/>
-          <p:nvPr/>
-        </p:nvSpPr>
-        <p:spPr>
-          <a:xfrm>
-            <a:off x="8046720" y="4526280"/>
-            <a:ext cx="73152" cy="822960"/>
-          </a:xfrm>
-          <a:prstGeom prst="rect">
-            <a:avLst/>
-          </a:prstGeom>
-          <a:solidFill>
-            <a:srgbClr val="C73E1D"/>
-          </a:solidFill>
-          <a:ln/>
-        </p:spPr>
-      </p:sp>
-      <p:sp>
-        <p:nvSpPr>
-          <p:cNvPr id="18" name="Text 15"/>
-          <p:cNvSpPr/>
-          <p:nvPr/>
-        </p:nvSpPr>
-        <p:spPr>
-          <a:xfrm>
-            <a:off x="8275320" y="4636008"/>
-            <a:ext cx="3337560" cy="411480"/>
-          </a:xfrm>
-          <a:prstGeom prst="rect">
-            <a:avLst/>
-          </a:prstGeom>
-          <a:noFill/>
-          <a:ln/>
-        </p:spPr>
-        <p:txBody>
-          <a:bodyPr wrap="square" lIns="0" tIns="0" rIns="0" bIns="0" rtlCol="0" anchor="t"/>
-          <a:lstStyle/>
-          <a:p>
-            <a:pPr indent="0" marL="0">
-              <a:buNone/>
-            </a:pPr>
-            <a:r>
-              <a:rPr lang="en-US" sz="1400" b="1" dirty="0">
+              <a:t>多職種会議で</a:t>
+            </a:r>
+            <a:endParaRPr lang="en-US" sz="1200" dirty="0"/>
+          </a:p>
+          <a:p>
+            <a:pPr algn="ctr" indent="0" marL="0">
+              <a:buNone/>
+            </a:pPr>
+            <a:r>
+              <a:rPr lang="en-US" sz="1200" b="1" dirty="0">
+                <a:solidFill>
+                  <a:srgbClr val="FFFFFF"/>
+                </a:solidFill>
+                <a:latin typeface="Yu Gothic" pitchFamily="34" charset="0"/>
+                <a:ea typeface="Yu Gothic" pitchFamily="34" charset="-122"/>
+                <a:cs typeface="Yu Gothic" pitchFamily="34" charset="-120"/>
+              </a:rPr>
+              <a:t>退院計画確定</a:t>
+            </a:r>
+            <a:endParaRPr lang="en-US" sz="1200" dirty="0"/>
+          </a:p>
+        </p:txBody>
+      </p:sp>
+      <p:sp>
+        <p:nvSpPr>
+          <p:cNvPr id="15" name="Shape 13"/>
+          <p:cNvSpPr/>
+          <p:nvPr/>
+        </p:nvSpPr>
+        <p:spPr>
+          <a:xfrm rot="5400000">
+            <a:off x="5038344" y="2788920"/>
+            <a:ext cx="109728" cy="182880"/>
+          </a:xfrm>
+          <a:prstGeom prst="rtTriangle">
+            <a:avLst/>
+          </a:prstGeom>
+          <a:solidFill>
+            <a:srgbClr val="1E3A5F"/>
+          </a:solidFill>
+          <a:ln/>
+        </p:spPr>
+      </p:sp>
+      <p:sp>
+        <p:nvSpPr>
+          <p:cNvPr id="16" name="Text 14"/>
+          <p:cNvSpPr/>
+          <p:nvPr/>
+        </p:nvSpPr>
+        <p:spPr>
+          <a:xfrm>
+            <a:off x="5138928" y="1828800"/>
+            <a:ext cx="2194560" cy="320040"/>
+          </a:xfrm>
+          <a:prstGeom prst="rect">
+            <a:avLst/>
+          </a:prstGeom>
+          <a:noFill/>
+          <a:ln/>
+        </p:spPr>
+        <p:txBody>
+          <a:bodyPr wrap="square" lIns="0" tIns="0" rIns="0" bIns="0" rtlCol="0" anchor="ctr"/>
+          <a:lstStyle/>
+          <a:p>
+            <a:pPr algn="ctr" indent="0" marL="0">
+              <a:buNone/>
+            </a:pPr>
+            <a:r>
+              <a:rPr lang="en-US" sz="1100" b="1" dirty="0">
                 <a:solidFill>
                   <a:srgbClr val="1E3A5F"/>
                 </a:solidFill>
@@ -6484,129 +6345,134 @@
                 <a:ea typeface="Yu Gothic UI" pitchFamily="34" charset="-122"/>
                 <a:cs typeface="Yu Gothic UI" pitchFamily="34" charset="-120"/>
               </a:rPr>
-              <a:t>必須前提</a:t>
-            </a:r>
-            <a:endParaRPr lang="en-US" sz="1400" dirty="0"/>
-          </a:p>
-        </p:txBody>
-      </p:sp>
-      <p:sp>
-        <p:nvSpPr>
-          <p:cNvPr id="19" name="Text 16"/>
-          <p:cNvSpPr/>
-          <p:nvPr/>
-        </p:nvSpPr>
-        <p:spPr>
-          <a:xfrm>
-            <a:off x="8275320" y="5029200"/>
-            <a:ext cx="3337560" cy="228600"/>
-          </a:xfrm>
-          <a:prstGeom prst="rect">
-            <a:avLst/>
-          </a:prstGeom>
-          <a:noFill/>
-          <a:ln/>
-        </p:spPr>
-        <p:txBody>
-          <a:bodyPr wrap="square" lIns="0" tIns="0" rIns="0" bIns="0" rtlCol="0" anchor="t"/>
-          <a:lstStyle/>
-          <a:p>
-            <a:pPr indent="0" marL="0">
-              <a:buNone/>
-            </a:pPr>
-            <a:r>
-              <a:rPr lang="en-US" sz="1100" dirty="0">
-                <a:solidFill>
-                  <a:srgbClr val="475569"/>
+              <a:t>連休 1週前</a:t>
+            </a:r>
+            <a:endParaRPr lang="en-US" sz="1100" dirty="0"/>
+          </a:p>
+        </p:txBody>
+      </p:sp>
+      <p:sp>
+        <p:nvSpPr>
+          <p:cNvPr id="17" name="Shape 15"/>
+          <p:cNvSpPr/>
+          <p:nvPr/>
+        </p:nvSpPr>
+        <p:spPr>
+          <a:xfrm>
+            <a:off x="5138928" y="2194560"/>
+            <a:ext cx="2194560" cy="1371600"/>
+          </a:xfrm>
+          <a:prstGeom prst="rect">
+            <a:avLst/>
+          </a:prstGeom>
+          <a:solidFill>
+            <a:srgbClr val="F18F01"/>
+          </a:solidFill>
+          <a:ln/>
+        </p:spPr>
+      </p:sp>
+      <p:sp>
+        <p:nvSpPr>
+          <p:cNvPr id="18" name="Text 16"/>
+          <p:cNvSpPr/>
+          <p:nvPr/>
+        </p:nvSpPr>
+        <p:spPr>
+          <a:xfrm>
+            <a:off x="5138928" y="2194560"/>
+            <a:ext cx="2194560" cy="1371600"/>
+          </a:xfrm>
+          <a:prstGeom prst="rect">
+            <a:avLst/>
+          </a:prstGeom>
+          <a:noFill/>
+          <a:ln/>
+        </p:spPr>
+        <p:txBody>
+          <a:bodyPr wrap="square" lIns="0" tIns="0" rIns="0" bIns="0" rtlCol="0" anchor="ctr"/>
+          <a:lstStyle/>
+          <a:p>
+            <a:pPr algn="ctr" indent="0" marL="0">
+              <a:buNone/>
+            </a:pPr>
+            <a:r>
+              <a:rPr lang="en-US" sz="1200" b="1" dirty="0">
+                <a:solidFill>
+                  <a:srgbClr val="FFFFFF"/>
                 </a:solidFill>
                 <a:latin typeface="Yu Gothic" pitchFamily="34" charset="0"/>
                 <a:ea typeface="Yu Gothic" pitchFamily="34" charset="-122"/>
                 <a:cs typeface="Yu Gothic" pitchFamily="34" charset="-120"/>
               </a:rPr>
-              <a:t>Phase 3α ダッシュボード（需要判定の自動化）</a:t>
-            </a:r>
-            <a:endParaRPr lang="en-US" sz="1100" dirty="0"/>
-          </a:p>
-        </p:txBody>
-      </p:sp>
-      <p:sp>
-        <p:nvSpPr>
-          <p:cNvPr id="20" name="Shape 17"/>
-          <p:cNvSpPr/>
-          <p:nvPr/>
-        </p:nvSpPr>
-        <p:spPr>
-          <a:xfrm>
-            <a:off x="8046720" y="5440680"/>
-            <a:ext cx="3657600" cy="822960"/>
-          </a:xfrm>
-          <a:prstGeom prst="rect">
-            <a:avLst/>
-          </a:prstGeom>
-          <a:solidFill>
-            <a:srgbClr val="FFFFFF"/>
-          </a:solidFill>
-          <a:ln w="6350">
-            <a:solidFill>
-              <a:srgbClr val="F1F5F9"/>
-            </a:solidFill>
-            <a:prstDash val="solid"/>
-          </a:ln>
-          <a:effectLst>
-            <a:outerShdw sx="100000" sy="100000" kx="0" ky="0" algn="bl" rotWithShape="0" blurRad="101600" dist="25400" dir="5400000">
-              <a:srgbClr val="000000">
-                <a:alpha val="8000"/>
-              </a:srgbClr>
-            </a:outerShdw>
-          </a:effectLst>
-        </p:spPr>
-      </p:sp>
-      <p:sp>
-        <p:nvSpPr>
-          <p:cNvPr id="21" name="Shape 18"/>
-          <p:cNvSpPr/>
-          <p:nvPr/>
-        </p:nvSpPr>
-        <p:spPr>
-          <a:xfrm>
-            <a:off x="8046720" y="5440680"/>
-            <a:ext cx="73152" cy="822960"/>
-          </a:xfrm>
-          <a:prstGeom prst="rect">
-            <a:avLst/>
-          </a:prstGeom>
-          <a:solidFill>
-            <a:srgbClr val="4A6FA5"/>
-          </a:solidFill>
-          <a:ln/>
-        </p:spPr>
-      </p:sp>
-      <p:sp>
-        <p:nvSpPr>
-          <p:cNvPr id="22" name="Text 19"/>
-          <p:cNvSpPr/>
-          <p:nvPr/>
-        </p:nvSpPr>
-        <p:spPr>
-          <a:xfrm>
-            <a:off x="8275320" y="5550408"/>
-            <a:ext cx="3337560" cy="411480"/>
-          </a:xfrm>
-          <a:prstGeom prst="rect">
-            <a:avLst/>
-          </a:prstGeom>
-          <a:noFill/>
-          <a:ln/>
-        </p:spPr>
-        <p:txBody>
-          <a:bodyPr wrap="square" lIns="0" tIns="0" rIns="0" bIns="0" rtlCol="0" anchor="t"/>
-          <a:lstStyle/>
-          <a:p>
-            <a:pPr indent="0" marL="0">
-              <a:buNone/>
-            </a:pPr>
-            <a:r>
-              <a:rPr lang="en-US" sz="1400" b="1" dirty="0">
+              <a:t>退院実行</a:t>
+            </a:r>
+            <a:endParaRPr lang="en-US" sz="1200" dirty="0"/>
+          </a:p>
+          <a:p>
+            <a:pPr algn="ctr" indent="0" marL="0">
+              <a:buNone/>
+            </a:pPr>
+            <a:r>
+              <a:rPr lang="en-US" sz="1200" b="1" dirty="0">
+                <a:solidFill>
+                  <a:srgbClr val="FFFFFF"/>
+                </a:solidFill>
+                <a:latin typeface="Yu Gothic" pitchFamily="34" charset="0"/>
+                <a:ea typeface="Yu Gothic" pitchFamily="34" charset="-122"/>
+                <a:cs typeface="Yu Gothic" pitchFamily="34" charset="-120"/>
+              </a:rPr>
+              <a:t>病棟空床準備</a:t>
+            </a:r>
+            <a:endParaRPr lang="en-US" sz="1200" dirty="0"/>
+          </a:p>
+        </p:txBody>
+      </p:sp>
+      <p:sp>
+        <p:nvSpPr>
+          <p:cNvPr id="19" name="Shape 17"/>
+          <p:cNvSpPr/>
+          <p:nvPr/>
+        </p:nvSpPr>
+        <p:spPr>
+          <a:xfrm rot="5400000">
+            <a:off x="7379208" y="2788920"/>
+            <a:ext cx="109728" cy="182880"/>
+          </a:xfrm>
+          <a:prstGeom prst="rtTriangle">
+            <a:avLst/>
+          </a:prstGeom>
+          <a:solidFill>
+            <a:srgbClr val="1E3A5F"/>
+          </a:solidFill>
+          <a:ln/>
+        </p:spPr>
+      </p:sp>
+      <p:sp>
+        <p:nvSpPr>
+          <p:cNvPr id="20" name="Text 18"/>
+          <p:cNvSpPr/>
+          <p:nvPr/>
+        </p:nvSpPr>
+        <p:spPr>
+          <a:xfrm>
+            <a:off x="7479792" y="1828800"/>
+            <a:ext cx="2194560" cy="320040"/>
+          </a:xfrm>
+          <a:prstGeom prst="rect">
+            <a:avLst/>
+          </a:prstGeom>
+          <a:noFill/>
+          <a:ln/>
+        </p:spPr>
+        <p:txBody>
+          <a:bodyPr wrap="square" lIns="0" tIns="0" rIns="0" bIns="0" rtlCol="0" anchor="ctr"/>
+          <a:lstStyle/>
+          <a:p>
+            <a:pPr algn="ctr" indent="0" marL="0">
+              <a:buNone/>
+            </a:pPr>
+            <a:r>
+              <a:rPr lang="en-US" sz="1100" b="1" dirty="0">
                 <a:solidFill>
                   <a:srgbClr val="1E3A5F"/>
                 </a:solidFill>
@@ -6614,48 +6480,841 @@
                 <a:ea typeface="Yu Gothic UI" pitchFamily="34" charset="-122"/>
                 <a:cs typeface="Yu Gothic UI" pitchFamily="34" charset="-120"/>
               </a:rPr>
-              <a:t>試験運用</a:t>
-            </a:r>
-            <a:endParaRPr lang="en-US" sz="1400" dirty="0"/>
-          </a:p>
-        </p:txBody>
-      </p:sp>
-      <p:sp>
-        <p:nvSpPr>
-          <p:cNvPr id="23" name="Text 20"/>
-          <p:cNvSpPr/>
-          <p:nvPr/>
-        </p:nvSpPr>
-        <p:spPr>
-          <a:xfrm>
-            <a:off x="8275320" y="5943600"/>
-            <a:ext cx="3337560" cy="228600"/>
-          </a:xfrm>
-          <a:prstGeom prst="rect">
-            <a:avLst/>
-          </a:prstGeom>
-          <a:noFill/>
-          <a:ln/>
-        </p:spPr>
-        <p:txBody>
-          <a:bodyPr wrap="square" lIns="0" tIns="0" rIns="0" bIns="0" rtlCol="0" anchor="t"/>
-          <a:lstStyle/>
-          <a:p>
-            <a:pPr indent="0" marL="0">
-              <a:buNone/>
-            </a:pPr>
-            <a:r>
-              <a:rPr lang="en-US" sz="1100" dirty="0">
-                <a:solidFill>
-                  <a:srgbClr val="475569"/>
+              <a:t>連休中</a:t>
+            </a:r>
+            <a:endParaRPr lang="en-US" sz="1100" dirty="0"/>
+          </a:p>
+        </p:txBody>
+      </p:sp>
+      <p:sp>
+        <p:nvSpPr>
+          <p:cNvPr id="21" name="Shape 19"/>
+          <p:cNvSpPr/>
+          <p:nvPr/>
+        </p:nvSpPr>
+        <p:spPr>
+          <a:xfrm>
+            <a:off x="7479792" y="2194560"/>
+            <a:ext cx="2194560" cy="1371600"/>
+          </a:xfrm>
+          <a:prstGeom prst="rect">
+            <a:avLst/>
+          </a:prstGeom>
+          <a:solidFill>
+            <a:srgbClr val="C73E1D"/>
+          </a:solidFill>
+          <a:ln/>
+        </p:spPr>
+      </p:sp>
+      <p:sp>
+        <p:nvSpPr>
+          <p:cNvPr id="22" name="Text 20"/>
+          <p:cNvSpPr/>
+          <p:nvPr/>
+        </p:nvSpPr>
+        <p:spPr>
+          <a:xfrm>
+            <a:off x="7479792" y="2194560"/>
+            <a:ext cx="2194560" cy="1371600"/>
+          </a:xfrm>
+          <a:prstGeom prst="rect">
+            <a:avLst/>
+          </a:prstGeom>
+          <a:noFill/>
+          <a:ln/>
+        </p:spPr>
+        <p:txBody>
+          <a:bodyPr wrap="square" lIns="0" tIns="0" rIns="0" bIns="0" rtlCol="0" anchor="ctr"/>
+          <a:lstStyle/>
+          <a:p>
+            <a:pPr algn="ctr" indent="0" marL="0">
+              <a:buNone/>
+            </a:pPr>
+            <a:r>
+              <a:rPr lang="en-US" sz="1200" b="1" dirty="0">
+                <a:solidFill>
+                  <a:srgbClr val="FFFFFF"/>
                 </a:solidFill>
                 <a:latin typeface="Yu Gothic" pitchFamily="34" charset="0"/>
                 <a:ea typeface="Yu Gothic" pitchFamily="34" charset="-122"/>
                 <a:cs typeface="Yu Gothic" pitchFamily="34" charset="-120"/>
               </a:rPr>
-              <a:t>2026年5月中旬〜、Phase 3α 完成後に開始</a:t>
+              <a:t>低稼働を前提とした</a:t>
+            </a:r>
+            <a:endParaRPr lang="en-US" sz="1200" dirty="0"/>
+          </a:p>
+          <a:p>
+            <a:pPr algn="ctr" indent="0" marL="0">
+              <a:buNone/>
+            </a:pPr>
+            <a:r>
+              <a:rPr lang="en-US" sz="1200" b="1" dirty="0">
+                <a:solidFill>
+                  <a:srgbClr val="FFFFFF"/>
+                </a:solidFill>
+                <a:latin typeface="Yu Gothic" pitchFamily="34" charset="0"/>
+                <a:ea typeface="Yu Gothic" pitchFamily="34" charset="-122"/>
+                <a:cs typeface="Yu Gothic" pitchFamily="34" charset="-120"/>
+              </a:rPr>
+              <a:t>運営体制</a:t>
+            </a:r>
+            <a:endParaRPr lang="en-US" sz="1200" dirty="0"/>
+          </a:p>
+        </p:txBody>
+      </p:sp>
+      <p:sp>
+        <p:nvSpPr>
+          <p:cNvPr id="23" name="Shape 21"/>
+          <p:cNvSpPr/>
+          <p:nvPr/>
+        </p:nvSpPr>
+        <p:spPr>
+          <a:xfrm rot="5400000">
+            <a:off x="9720072" y="2788920"/>
+            <a:ext cx="109728" cy="182880"/>
+          </a:xfrm>
+          <a:prstGeom prst="rtTriangle">
+            <a:avLst/>
+          </a:prstGeom>
+          <a:solidFill>
+            <a:srgbClr val="1E3A5F"/>
+          </a:solidFill>
+          <a:ln/>
+        </p:spPr>
+      </p:sp>
+      <p:sp>
+        <p:nvSpPr>
+          <p:cNvPr id="24" name="Text 22"/>
+          <p:cNvSpPr/>
+          <p:nvPr/>
+        </p:nvSpPr>
+        <p:spPr>
+          <a:xfrm>
+            <a:off x="9820656" y="1828800"/>
+            <a:ext cx="2194560" cy="320040"/>
+          </a:xfrm>
+          <a:prstGeom prst="rect">
+            <a:avLst/>
+          </a:prstGeom>
+          <a:noFill/>
+          <a:ln/>
+        </p:spPr>
+        <p:txBody>
+          <a:bodyPr wrap="square" lIns="0" tIns="0" rIns="0" bIns="0" rtlCol="0" anchor="ctr"/>
+          <a:lstStyle/>
+          <a:p>
+            <a:pPr algn="ctr" indent="0" marL="0">
+              <a:buNone/>
+            </a:pPr>
+            <a:r>
+              <a:rPr lang="en-US" sz="1100" b="1" dirty="0">
+                <a:solidFill>
+                  <a:srgbClr val="1E3A5F"/>
+                </a:solidFill>
+                <a:latin typeface="Yu Gothic UI" pitchFamily="34" charset="0"/>
+                <a:ea typeface="Yu Gothic UI" pitchFamily="34" charset="-122"/>
+                <a:cs typeface="Yu Gothic UI" pitchFamily="34" charset="-120"/>
+              </a:rPr>
+              <a:t>連休明け</a:t>
             </a:r>
             <a:endParaRPr lang="en-US" sz="1100" dirty="0"/>
+          </a:p>
+        </p:txBody>
+      </p:sp>
+      <p:sp>
+        <p:nvSpPr>
+          <p:cNvPr id="25" name="Shape 23"/>
+          <p:cNvSpPr/>
+          <p:nvPr/>
+        </p:nvSpPr>
+        <p:spPr>
+          <a:xfrm>
+            <a:off x="9820656" y="2194560"/>
+            <a:ext cx="2194560" cy="1371600"/>
+          </a:xfrm>
+          <a:prstGeom prst="rect">
+            <a:avLst/>
+          </a:prstGeom>
+          <a:solidFill>
+            <a:srgbClr val="4CAF50"/>
+          </a:solidFill>
+          <a:ln/>
+        </p:spPr>
+      </p:sp>
+      <p:sp>
+        <p:nvSpPr>
+          <p:cNvPr id="26" name="Text 24"/>
+          <p:cNvSpPr/>
+          <p:nvPr/>
+        </p:nvSpPr>
+        <p:spPr>
+          <a:xfrm>
+            <a:off x="9820656" y="2194560"/>
+            <a:ext cx="2194560" cy="1371600"/>
+          </a:xfrm>
+          <a:prstGeom prst="rect">
+            <a:avLst/>
+          </a:prstGeom>
+          <a:noFill/>
+          <a:ln/>
+        </p:spPr>
+        <p:txBody>
+          <a:bodyPr wrap="square" lIns="0" tIns="0" rIns="0" bIns="0" rtlCol="0" anchor="ctr"/>
+          <a:lstStyle/>
+          <a:p>
+            <a:pPr algn="ctr" indent="0" marL="0">
+              <a:buNone/>
+            </a:pPr>
+            <a:r>
+              <a:rPr lang="en-US" sz="1200" b="1" dirty="0">
+                <a:solidFill>
+                  <a:srgbClr val="FFFFFF"/>
+                </a:solidFill>
+                <a:latin typeface="Yu Gothic" pitchFamily="34" charset="0"/>
+                <a:ea typeface="Yu Gothic" pitchFamily="34" charset="-122"/>
+                <a:cs typeface="Yu Gothic" pitchFamily="34" charset="-120"/>
+              </a:rPr>
+              <a:t>予約枠最大活用で</a:t>
+            </a:r>
+            <a:endParaRPr lang="en-US" sz="1200" dirty="0"/>
+          </a:p>
+          <a:p>
+            <a:pPr algn="ctr" indent="0" marL="0">
+              <a:buNone/>
+            </a:pPr>
+            <a:r>
+              <a:rPr lang="en-US" sz="1200" b="1" dirty="0">
+                <a:solidFill>
+                  <a:srgbClr val="FFFFFF"/>
+                </a:solidFill>
+                <a:latin typeface="Yu Gothic" pitchFamily="34" charset="0"/>
+                <a:ea typeface="Yu Gothic" pitchFamily="34" charset="-122"/>
+                <a:cs typeface="Yu Gothic" pitchFamily="34" charset="-120"/>
+              </a:rPr>
+              <a:t>需要の波を受ける</a:t>
+            </a:r>
+            <a:endParaRPr lang="en-US" sz="1200" dirty="0"/>
+          </a:p>
+        </p:txBody>
+      </p:sp>
+      <p:sp>
+        <p:nvSpPr>
+          <p:cNvPr id="27" name="Shape 25"/>
+          <p:cNvSpPr/>
+          <p:nvPr/>
+        </p:nvSpPr>
+        <p:spPr>
+          <a:xfrm>
+            <a:off x="457200" y="3977640"/>
+            <a:ext cx="457200" cy="457200"/>
+          </a:xfrm>
+          <a:prstGeom prst="ellipse">
+            <a:avLst/>
+          </a:prstGeom>
+          <a:solidFill>
+            <a:srgbClr val="1E3A5F"/>
+          </a:solidFill>
+          <a:ln/>
+        </p:spPr>
+      </p:sp>
+      <p:sp>
+        <p:nvSpPr>
+          <p:cNvPr id="28" name="Text 26"/>
+          <p:cNvSpPr/>
+          <p:nvPr/>
+        </p:nvSpPr>
+        <p:spPr>
+          <a:xfrm>
+            <a:off x="457200" y="3977640"/>
+            <a:ext cx="457200" cy="457200"/>
+          </a:xfrm>
+          <a:prstGeom prst="rect">
+            <a:avLst/>
+          </a:prstGeom>
+          <a:noFill/>
+          <a:ln/>
+        </p:spPr>
+        <p:txBody>
+          <a:bodyPr wrap="square" lIns="0" tIns="0" rIns="0" bIns="0" rtlCol="0" anchor="ctr"/>
+          <a:lstStyle/>
+          <a:p>
+            <a:pPr algn="ctr" indent="0" marL="0">
+              <a:buNone/>
+            </a:pPr>
+            <a:r>
+              <a:rPr lang="en-US" sz="2000" b="1" dirty="0">
+                <a:solidFill>
+                  <a:srgbClr val="FFFFFF"/>
+                </a:solidFill>
+                <a:latin typeface="Yu Gothic UI" pitchFamily="34" charset="0"/>
+                <a:ea typeface="Yu Gothic UI" pitchFamily="34" charset="-122"/>
+                <a:cs typeface="Yu Gothic UI" pitchFamily="34" charset="-120"/>
+              </a:rPr>
+              <a:t>1</a:t>
+            </a:r>
+            <a:endParaRPr lang="en-US" sz="2000" dirty="0"/>
+          </a:p>
+        </p:txBody>
+      </p:sp>
+      <p:sp>
+        <p:nvSpPr>
+          <p:cNvPr id="29" name="Text 27"/>
+          <p:cNvSpPr/>
+          <p:nvPr/>
+        </p:nvSpPr>
+        <p:spPr>
+          <a:xfrm>
+            <a:off x="1051560" y="3950208"/>
+            <a:ext cx="5120640" cy="365760"/>
+          </a:xfrm>
+          <a:prstGeom prst="rect">
+            <a:avLst/>
+          </a:prstGeom>
+          <a:noFill/>
+          <a:ln/>
+        </p:spPr>
+        <p:txBody>
+          <a:bodyPr wrap="square" lIns="0" tIns="0" rIns="0" bIns="0" rtlCol="0" anchor="t"/>
+          <a:lstStyle/>
+          <a:p>
+            <a:pPr indent="0" marL="0">
+              <a:buNone/>
+            </a:pPr>
+            <a:r>
+              <a:rPr lang="en-US" sz="1200" b="1" dirty="0">
+                <a:solidFill>
+                  <a:srgbClr val="1E3A5F"/>
+                </a:solidFill>
+                <a:latin typeface="Yu Gothic UI" pitchFamily="34" charset="0"/>
+                <a:ea typeface="Yu Gothic UI" pitchFamily="34" charset="-122"/>
+                <a:cs typeface="Yu Gothic UI" pitchFamily="34" charset="-120"/>
+              </a:rPr>
+              <a:t>同日充填は効かない</a:t>
+            </a:r>
+            <a:endParaRPr lang="en-US" sz="1200" dirty="0"/>
+          </a:p>
+        </p:txBody>
+      </p:sp>
+      <p:sp>
+        <p:nvSpPr>
+          <p:cNvPr id="30" name="Text 28"/>
+          <p:cNvSpPr/>
+          <p:nvPr/>
+        </p:nvSpPr>
+        <p:spPr>
+          <a:xfrm>
+            <a:off x="1051560" y="4297680"/>
+            <a:ext cx="5120640" cy="457200"/>
+          </a:xfrm>
+          <a:prstGeom prst="rect">
+            <a:avLst/>
+          </a:prstGeom>
+          <a:noFill/>
+          <a:ln/>
+        </p:spPr>
+        <p:txBody>
+          <a:bodyPr wrap="square" lIns="0" tIns="0" rIns="0" bIns="0" rtlCol="0" anchor="t"/>
+          <a:lstStyle/>
+          <a:p>
+            <a:pPr indent="0" marL="0">
+              <a:buNone/>
+            </a:pPr>
+            <a:r>
+              <a:rPr lang="en-US" sz="1000" dirty="0">
+                <a:solidFill>
+                  <a:srgbClr val="475569"/>
+                </a:solidFill>
+                <a:latin typeface="Yu Gothic" pitchFamily="34" charset="0"/>
+                <a:ea typeface="Yu Gothic" pitchFamily="34" charset="-122"/>
+                <a:cs typeface="Yu Gothic" pitchFamily="34" charset="-120"/>
+              </a:rPr>
+              <a:t>連休中は緊急入院も激減 — Phase 1 の発想が通用しない</a:t>
+            </a:r>
+            <a:endParaRPr lang="en-US" sz="1000" dirty="0"/>
+          </a:p>
+        </p:txBody>
+      </p:sp>
+      <p:sp>
+        <p:nvSpPr>
+          <p:cNvPr id="31" name="Shape 29"/>
+          <p:cNvSpPr/>
+          <p:nvPr/>
+        </p:nvSpPr>
+        <p:spPr>
+          <a:xfrm>
+            <a:off x="6309360" y="3977640"/>
+            <a:ext cx="457200" cy="457200"/>
+          </a:xfrm>
+          <a:prstGeom prst="ellipse">
+            <a:avLst/>
+          </a:prstGeom>
+          <a:solidFill>
+            <a:srgbClr val="1E3A5F"/>
+          </a:solidFill>
+          <a:ln/>
+        </p:spPr>
+      </p:sp>
+      <p:sp>
+        <p:nvSpPr>
+          <p:cNvPr id="32" name="Text 30"/>
+          <p:cNvSpPr/>
+          <p:nvPr/>
+        </p:nvSpPr>
+        <p:spPr>
+          <a:xfrm>
+            <a:off x="6309360" y="3977640"/>
+            <a:ext cx="457200" cy="457200"/>
+          </a:xfrm>
+          <a:prstGeom prst="rect">
+            <a:avLst/>
+          </a:prstGeom>
+          <a:noFill/>
+          <a:ln/>
+        </p:spPr>
+        <p:txBody>
+          <a:bodyPr wrap="square" lIns="0" tIns="0" rIns="0" bIns="0" rtlCol="0" anchor="ctr"/>
+          <a:lstStyle/>
+          <a:p>
+            <a:pPr algn="ctr" indent="0" marL="0">
+              <a:buNone/>
+            </a:pPr>
+            <a:r>
+              <a:rPr lang="en-US" sz="2000" b="1" dirty="0">
+                <a:solidFill>
+                  <a:srgbClr val="FFFFFF"/>
+                </a:solidFill>
+                <a:latin typeface="Yu Gothic UI" pitchFamily="34" charset="0"/>
+                <a:ea typeface="Yu Gothic UI" pitchFamily="34" charset="-122"/>
+                <a:cs typeface="Yu Gothic UI" pitchFamily="34" charset="-120"/>
+              </a:rPr>
+              <a:t>2</a:t>
+            </a:r>
+            <a:endParaRPr lang="en-US" sz="2000" dirty="0"/>
+          </a:p>
+        </p:txBody>
+      </p:sp>
+      <p:sp>
+        <p:nvSpPr>
+          <p:cNvPr id="33" name="Text 31"/>
+          <p:cNvSpPr/>
+          <p:nvPr/>
+        </p:nvSpPr>
+        <p:spPr>
+          <a:xfrm>
+            <a:off x="6903720" y="3950208"/>
+            <a:ext cx="5120640" cy="365760"/>
+          </a:xfrm>
+          <a:prstGeom prst="rect">
+            <a:avLst/>
+          </a:prstGeom>
+          <a:noFill/>
+          <a:ln/>
+        </p:spPr>
+        <p:txBody>
+          <a:bodyPr wrap="square" lIns="0" tIns="0" rIns="0" bIns="0" rtlCol="0" anchor="t"/>
+          <a:lstStyle/>
+          <a:p>
+            <a:pPr indent="0" marL="0">
+              <a:buNone/>
+            </a:pPr>
+            <a:r>
+              <a:rPr lang="en-US" sz="1200" b="1" dirty="0">
+                <a:solidFill>
+                  <a:srgbClr val="1E3A5F"/>
+                </a:solidFill>
+                <a:latin typeface="Yu Gothic UI" pitchFamily="34" charset="0"/>
+                <a:ea typeface="Yu Gothic UI" pitchFamily="34" charset="-122"/>
+                <a:cs typeface="Yu Gothic UI" pitchFamily="34" charset="-120"/>
+              </a:rPr>
+              <a:t>連休前に退院を済ませる</a:t>
+            </a:r>
+            <a:endParaRPr lang="en-US" sz="1200" dirty="0"/>
+          </a:p>
+        </p:txBody>
+      </p:sp>
+      <p:sp>
+        <p:nvSpPr>
+          <p:cNvPr id="34" name="Text 32"/>
+          <p:cNvSpPr/>
+          <p:nvPr/>
+        </p:nvSpPr>
+        <p:spPr>
+          <a:xfrm>
+            <a:off x="6903720" y="4297680"/>
+            <a:ext cx="5120640" cy="457200"/>
+          </a:xfrm>
+          <a:prstGeom prst="rect">
+            <a:avLst/>
+          </a:prstGeom>
+          <a:noFill/>
+          <a:ln/>
+        </p:spPr>
+        <p:txBody>
+          <a:bodyPr wrap="square" lIns="0" tIns="0" rIns="0" bIns="0" rtlCol="0" anchor="t"/>
+          <a:lstStyle/>
+          <a:p>
+            <a:pPr indent="0" marL="0">
+              <a:buNone/>
+            </a:pPr>
+            <a:r>
+              <a:rPr lang="en-US" sz="1000" dirty="0">
+                <a:solidFill>
+                  <a:srgbClr val="475569"/>
+                </a:solidFill>
+                <a:latin typeface="Yu Gothic" pitchFamily="34" charset="0"/>
+                <a:ea typeface="Yu Gothic" pitchFamily="34" charset="-122"/>
+                <a:cs typeface="Yu Gothic" pitchFamily="34" charset="-120"/>
+              </a:rPr>
+              <a:t>3週前からの退院調整 + ターゲット患者リスト</a:t>
+            </a:r>
+            <a:endParaRPr lang="en-US" sz="1000" dirty="0"/>
+          </a:p>
+        </p:txBody>
+      </p:sp>
+      <p:sp>
+        <p:nvSpPr>
+          <p:cNvPr id="35" name="Shape 33"/>
+          <p:cNvSpPr/>
+          <p:nvPr/>
+        </p:nvSpPr>
+        <p:spPr>
+          <a:xfrm>
+            <a:off x="457200" y="5029200"/>
+            <a:ext cx="457200" cy="457200"/>
+          </a:xfrm>
+          <a:prstGeom prst="ellipse">
+            <a:avLst/>
+          </a:prstGeom>
+          <a:solidFill>
+            <a:srgbClr val="1E3A5F"/>
+          </a:solidFill>
+          <a:ln/>
+        </p:spPr>
+      </p:sp>
+      <p:sp>
+        <p:nvSpPr>
+          <p:cNvPr id="36" name="Text 34"/>
+          <p:cNvSpPr/>
+          <p:nvPr/>
+        </p:nvSpPr>
+        <p:spPr>
+          <a:xfrm>
+            <a:off x="457200" y="5029200"/>
+            <a:ext cx="457200" cy="457200"/>
+          </a:xfrm>
+          <a:prstGeom prst="rect">
+            <a:avLst/>
+          </a:prstGeom>
+          <a:noFill/>
+          <a:ln/>
+        </p:spPr>
+        <p:txBody>
+          <a:bodyPr wrap="square" lIns="0" tIns="0" rIns="0" bIns="0" rtlCol="0" anchor="ctr"/>
+          <a:lstStyle/>
+          <a:p>
+            <a:pPr algn="ctr" indent="0" marL="0">
+              <a:buNone/>
+            </a:pPr>
+            <a:r>
+              <a:rPr lang="en-US" sz="2000" b="1" dirty="0">
+                <a:solidFill>
+                  <a:srgbClr val="FFFFFF"/>
+                </a:solidFill>
+                <a:latin typeface="Yu Gothic UI" pitchFamily="34" charset="0"/>
+                <a:ea typeface="Yu Gothic UI" pitchFamily="34" charset="-122"/>
+                <a:cs typeface="Yu Gothic UI" pitchFamily="34" charset="-120"/>
+              </a:rPr>
+              <a:t>3</a:t>
+            </a:r>
+            <a:endParaRPr lang="en-US" sz="2000" dirty="0"/>
+          </a:p>
+        </p:txBody>
+      </p:sp>
+      <p:sp>
+        <p:nvSpPr>
+          <p:cNvPr id="37" name="Text 35"/>
+          <p:cNvSpPr/>
+          <p:nvPr/>
+        </p:nvSpPr>
+        <p:spPr>
+          <a:xfrm>
+            <a:off x="1051560" y="5001768"/>
+            <a:ext cx="5120640" cy="365760"/>
+          </a:xfrm>
+          <a:prstGeom prst="rect">
+            <a:avLst/>
+          </a:prstGeom>
+          <a:noFill/>
+          <a:ln/>
+        </p:spPr>
+        <p:txBody>
+          <a:bodyPr wrap="square" lIns="0" tIns="0" rIns="0" bIns="0" rtlCol="0" anchor="t"/>
+          <a:lstStyle/>
+          <a:p>
+            <a:pPr indent="0" marL="0">
+              <a:buNone/>
+            </a:pPr>
+            <a:r>
+              <a:rPr lang="en-US" sz="1200" b="1" dirty="0">
+                <a:solidFill>
+                  <a:srgbClr val="1E3A5F"/>
+                </a:solidFill>
+                <a:latin typeface="Yu Gothic UI" pitchFamily="34" charset="0"/>
+                <a:ea typeface="Yu Gothic UI" pitchFamily="34" charset="-122"/>
+                <a:cs typeface="Yu Gothic UI" pitchFamily="34" charset="-120"/>
+              </a:rPr>
+              <a:t>連休明け初日の受入最大化</a:t>
+            </a:r>
+            <a:endParaRPr lang="en-US" sz="1200" dirty="0"/>
+          </a:p>
+        </p:txBody>
+      </p:sp>
+      <p:sp>
+        <p:nvSpPr>
+          <p:cNvPr id="38" name="Text 36"/>
+          <p:cNvSpPr/>
+          <p:nvPr/>
+        </p:nvSpPr>
+        <p:spPr>
+          <a:xfrm>
+            <a:off x="1051560" y="5349240"/>
+            <a:ext cx="5120640" cy="457200"/>
+          </a:xfrm>
+          <a:prstGeom prst="rect">
+            <a:avLst/>
+          </a:prstGeom>
+          <a:noFill/>
+          <a:ln/>
+        </p:spPr>
+        <p:txBody>
+          <a:bodyPr wrap="square" lIns="0" tIns="0" rIns="0" bIns="0" rtlCol="0" anchor="t"/>
+          <a:lstStyle/>
+          <a:p>
+            <a:pPr indent="0" marL="0">
+              <a:buNone/>
+            </a:pPr>
+            <a:r>
+              <a:rPr lang="en-US" sz="1000" dirty="0">
+                <a:solidFill>
+                  <a:srgbClr val="475569"/>
+                </a:solidFill>
+                <a:latin typeface="Yu Gothic" pitchFamily="34" charset="0"/>
+                <a:ea typeface="Yu Gothic" pitchFamily="34" charset="-122"/>
+                <a:cs typeface="Yu Gothic" pitchFamily="34" charset="-120"/>
+              </a:rPr>
+              <a:t>GW2025 では明け水曜に 13件の突発対応が発生</a:t>
+            </a:r>
+            <a:endParaRPr lang="en-US" sz="1000" dirty="0"/>
+          </a:p>
+        </p:txBody>
+      </p:sp>
+      <p:sp>
+        <p:nvSpPr>
+          <p:cNvPr id="39" name="Shape 37"/>
+          <p:cNvSpPr/>
+          <p:nvPr/>
+        </p:nvSpPr>
+        <p:spPr>
+          <a:xfrm>
+            <a:off x="6309360" y="5029200"/>
+            <a:ext cx="457200" cy="457200"/>
+          </a:xfrm>
+          <a:prstGeom prst="ellipse">
+            <a:avLst/>
+          </a:prstGeom>
+          <a:solidFill>
+            <a:srgbClr val="1E3A5F"/>
+          </a:solidFill>
+          <a:ln/>
+        </p:spPr>
+      </p:sp>
+      <p:sp>
+        <p:nvSpPr>
+          <p:cNvPr id="40" name="Text 38"/>
+          <p:cNvSpPr/>
+          <p:nvPr/>
+        </p:nvSpPr>
+        <p:spPr>
+          <a:xfrm>
+            <a:off x="6309360" y="5029200"/>
+            <a:ext cx="457200" cy="457200"/>
+          </a:xfrm>
+          <a:prstGeom prst="rect">
+            <a:avLst/>
+          </a:prstGeom>
+          <a:noFill/>
+          <a:ln/>
+        </p:spPr>
+        <p:txBody>
+          <a:bodyPr wrap="square" lIns="0" tIns="0" rIns="0" bIns="0" rtlCol="0" anchor="ctr"/>
+          <a:lstStyle/>
+          <a:p>
+            <a:pPr algn="ctr" indent="0" marL="0">
+              <a:buNone/>
+            </a:pPr>
+            <a:r>
+              <a:rPr lang="en-US" sz="2000" b="1" dirty="0">
+                <a:solidFill>
+                  <a:srgbClr val="FFFFFF"/>
+                </a:solidFill>
+                <a:latin typeface="Yu Gothic UI" pitchFamily="34" charset="0"/>
+                <a:ea typeface="Yu Gothic UI" pitchFamily="34" charset="-122"/>
+                <a:cs typeface="Yu Gothic UI" pitchFamily="34" charset="-120"/>
+              </a:rPr>
+              <a:t>4</a:t>
+            </a:r>
+            <a:endParaRPr lang="en-US" sz="2000" dirty="0"/>
+          </a:p>
+        </p:txBody>
+      </p:sp>
+      <p:sp>
+        <p:nvSpPr>
+          <p:cNvPr id="41" name="Text 39"/>
+          <p:cNvSpPr/>
+          <p:nvPr/>
+        </p:nvSpPr>
+        <p:spPr>
+          <a:xfrm>
+            <a:off x="6903720" y="5001768"/>
+            <a:ext cx="5120640" cy="365760"/>
+          </a:xfrm>
+          <a:prstGeom prst="rect">
+            <a:avLst/>
+          </a:prstGeom>
+          <a:noFill/>
+          <a:ln/>
+        </p:spPr>
+        <p:txBody>
+          <a:bodyPr wrap="square" lIns="0" tIns="0" rIns="0" bIns="0" rtlCol="0" anchor="t"/>
+          <a:lstStyle/>
+          <a:p>
+            <a:pPr indent="0" marL="0">
+              <a:buNone/>
+            </a:pPr>
+            <a:r>
+              <a:rPr lang="en-US" sz="1200" b="1" dirty="0">
+                <a:solidFill>
+                  <a:srgbClr val="1E3A5F"/>
+                </a:solidFill>
+                <a:latin typeface="Yu Gothic UI" pitchFamily="34" charset="0"/>
+                <a:ea typeface="Yu Gothic UI" pitchFamily="34" charset="-122"/>
+                <a:cs typeface="Yu Gothic UI" pitchFamily="34" charset="-120"/>
+              </a:rPr>
+              <a:t>既に動いている運用の延長</a:t>
+            </a:r>
+            <a:endParaRPr lang="en-US" sz="1200" dirty="0"/>
+          </a:p>
+        </p:txBody>
+      </p:sp>
+      <p:sp>
+        <p:nvSpPr>
+          <p:cNvPr id="42" name="Text 40"/>
+          <p:cNvSpPr/>
+          <p:nvPr/>
+        </p:nvSpPr>
+        <p:spPr>
+          <a:xfrm>
+            <a:off x="6903720" y="5349240"/>
+            <a:ext cx="5120640" cy="457200"/>
+          </a:xfrm>
+          <a:prstGeom prst="rect">
+            <a:avLst/>
+          </a:prstGeom>
+          <a:noFill/>
+          <a:ln/>
+        </p:spPr>
+        <p:txBody>
+          <a:bodyPr wrap="square" lIns="0" tIns="0" rIns="0" bIns="0" rtlCol="0" anchor="t"/>
+          <a:lstStyle/>
+          <a:p>
+            <a:pPr indent="0" marL="0">
+              <a:buNone/>
+            </a:pPr>
+            <a:r>
+              <a:rPr lang="en-US" sz="1000" dirty="0">
+                <a:solidFill>
+                  <a:srgbClr val="475569"/>
+                </a:solidFill>
+                <a:latin typeface="Yu Gothic" pitchFamily="34" charset="0"/>
+                <a:ea typeface="Yu Gothic" pitchFamily="34" charset="-122"/>
+                <a:cs typeface="Yu Gothic" pitchFamily="34" charset="-120"/>
+              </a:rPr>
+              <a:t>Slide 13 のとおり、現場では部分的に実施中 → 体系化</a:t>
+            </a:r>
+            <a:endParaRPr lang="en-US" sz="1000" dirty="0"/>
+          </a:p>
+        </p:txBody>
+      </p:sp>
+      <p:sp>
+        <p:nvSpPr>
+          <p:cNvPr id="43" name="Shape 41"/>
+          <p:cNvSpPr/>
+          <p:nvPr/>
+        </p:nvSpPr>
+        <p:spPr>
+          <a:xfrm>
+            <a:off x="457200" y="6035040"/>
+            <a:ext cx="11247120" cy="548640"/>
+          </a:xfrm>
+          <a:prstGeom prst="rect">
+            <a:avLst/>
+          </a:prstGeom>
+          <a:solidFill>
+            <a:srgbClr val="C73E1D"/>
+          </a:solidFill>
+          <a:ln/>
+        </p:spPr>
+      </p:sp>
+      <p:sp>
+        <p:nvSpPr>
+          <p:cNvPr id="44" name="Text 42"/>
+          <p:cNvSpPr/>
+          <p:nvPr/>
+        </p:nvSpPr>
+        <p:spPr>
+          <a:xfrm>
+            <a:off x="640080" y="6035040"/>
+            <a:ext cx="10881360" cy="548640"/>
+          </a:xfrm>
+          <a:prstGeom prst="rect">
+            <a:avLst/>
+          </a:prstGeom>
+          <a:noFill/>
+          <a:ln/>
+        </p:spPr>
+        <p:txBody>
+          <a:bodyPr wrap="square" lIns="0" tIns="0" rIns="0" bIns="0" rtlCol="0" anchor="ctr"/>
+          <a:lstStyle/>
+          <a:p>
+            <a:pPr algn="ctr" indent="0" marL="0">
+              <a:buNone/>
+            </a:pPr>
+            <a:r>
+              <a:rPr lang="en-US" sz="1400" b="1" dirty="0">
+                <a:solidFill>
+                  <a:srgbClr val="C9A961"/>
+                </a:solidFill>
+                <a:latin typeface="Yu Gothic" pitchFamily="34" charset="0"/>
+                <a:ea typeface="Yu Gothic" pitchFamily="34" charset="-122"/>
+                <a:cs typeface="Yu Gothic" pitchFamily="34" charset="-120"/>
+              </a:rPr>
+              <a:t>緊急提案: </a:t>
+            </a:r>
+            <a:pPr algn="ctr" indent="0" marL="0">
+              <a:buNone/>
+            </a:pPr>
+            <a:r>
+              <a:rPr lang="en-US" sz="1300" dirty="0">
+                <a:solidFill>
+                  <a:srgbClr val="FFFFFF"/>
+                </a:solidFill>
+                <a:latin typeface="Yu Gothic" pitchFamily="34" charset="0"/>
+                <a:ea typeface="Yu Gothic" pitchFamily="34" charset="-122"/>
+                <a:cs typeface="Yu Gothic" pitchFamily="34" charset="-120"/>
+              </a:rPr>
+              <a:t>GW2026（4/29〜5/5 の9連休）を Phase 2 の緊急パイロットに設定し、今月下旬から退院調整会議で試行</a:t>
+            </a:r>
+            <a:endParaRPr lang="en-US" sz="1400" dirty="0"/>
           </a:p>
         </p:txBody>
       </p:sp>
@@ -6670,1510 +7329,6 @@
 <file path=ppt/slides/slide16.xml><?xml version="1.0" encoding="utf-8"?>
 <p:sld xmlns:a="http://schemas.openxmlformats.org/drawingml/2006/main" xmlns:r="http://schemas.openxmlformats.org/officeDocument/2006/relationships" xmlns:p="http://schemas.openxmlformats.org/presentationml/2006/main">
   <p:cSld name="Slide 16">
-    <p:bg>
-      <p:bgPr>
-        <a:solidFill>
-          <a:srgbClr val="F7F5F0"/>
-        </a:solidFill>
-      </p:bgPr>
-    </p:bg>
-    <p:spTree>
-      <p:nvGrpSpPr>
-        <p:cNvPr id="1" name=""/>
-        <p:cNvGrpSpPr/>
-        <p:nvPr/>
-      </p:nvGrpSpPr>
-      <p:grpSpPr>
-        <a:xfrm>
-          <a:off x="0" y="0"/>
-          <a:ext cx="0" cy="0"/>
-          <a:chOff x="0" y="0"/>
-          <a:chExt cx="0" cy="0"/>
-        </a:xfrm>
-      </p:grpSpPr>
-      <p:sp>
-        <p:nvSpPr>
-          <p:cNvPr id="2" name="Shape 0"/>
-          <p:cNvSpPr/>
-          <p:nvPr/>
-        </p:nvSpPr>
-        <p:spPr>
-          <a:xfrm>
-            <a:off x="0" y="0"/>
-            <a:ext cx="12161520" cy="109728"/>
-          </a:xfrm>
-          <a:prstGeom prst="rect">
-            <a:avLst/>
-          </a:prstGeom>
-          <a:solidFill>
-            <a:srgbClr val="1E3A5F"/>
-          </a:solidFill>
-          <a:ln/>
-        </p:spPr>
-      </p:sp>
-      <p:sp>
-        <p:nvSpPr>
-          <p:cNvPr id="3" name="Text 1"/>
-          <p:cNvSpPr/>
-          <p:nvPr/>
-        </p:nvSpPr>
-        <p:spPr>
-          <a:xfrm>
-            <a:off x="457200" y="6537960"/>
-            <a:ext cx="8229600" cy="256032"/>
-          </a:xfrm>
-          <a:prstGeom prst="rect">
-            <a:avLst/>
-          </a:prstGeom>
-          <a:noFill/>
-          <a:ln/>
-        </p:spPr>
-        <p:txBody>
-          <a:bodyPr wrap="square" lIns="0" tIns="0" rIns="0" bIns="0" rtlCol="0" anchor="ctr"/>
-          <a:lstStyle/>
-          <a:p>
-            <a:pPr indent="0" marL="0">
-              <a:buNone/>
-            </a:pPr>
-            <a:r>
-              <a:rPr lang="en-US" sz="900" dirty="0">
-                <a:solidFill>
-                  <a:srgbClr val="94A3B8"/>
-                </a:solidFill>
-                <a:latin typeface="Yu Gothic" pitchFamily="34" charset="0"/>
-                <a:ea typeface="Yu Gothic" pitchFamily="34" charset="-122"/>
-                <a:cs typeface="Yu Gothic" pitchFamily="34" charset="-120"/>
-              </a:rPr>
-              <a:t>おもろまちメディカルセンター 経営会議資料 | 2026-04-17</a:t>
-            </a:r>
-            <a:endParaRPr lang="en-US" sz="900" dirty="0"/>
-          </a:p>
-        </p:txBody>
-      </p:sp>
-      <p:sp>
-        <p:nvSpPr>
-          <p:cNvPr id="4" name="Text 2"/>
-          <p:cNvSpPr/>
-          <p:nvPr/>
-        </p:nvSpPr>
-        <p:spPr>
-          <a:xfrm>
-            <a:off x="10972800" y="6537960"/>
-            <a:ext cx="731520" cy="256032"/>
-          </a:xfrm>
-          <a:prstGeom prst="rect">
-            <a:avLst/>
-          </a:prstGeom>
-          <a:noFill/>
-          <a:ln/>
-        </p:spPr>
-        <p:txBody>
-          <a:bodyPr wrap="square" lIns="0" tIns="0" rIns="0" bIns="0" rtlCol="0" anchor="ctr"/>
-          <a:lstStyle/>
-          <a:p>
-            <a:pPr algn="r" indent="0" marL="0">
-              <a:buNone/>
-            </a:pPr>
-            <a:r>
-              <a:rPr lang="en-US" sz="900" dirty="0">
-                <a:solidFill>
-                  <a:srgbClr val="94A3B8"/>
-                </a:solidFill>
-                <a:latin typeface="Yu Gothic" pitchFamily="34" charset="0"/>
-                <a:ea typeface="Yu Gothic" pitchFamily="34" charset="-122"/>
-                <a:cs typeface="Yu Gothic" pitchFamily="34" charset="-120"/>
-              </a:rPr>
-              <a:t>16 / 17</a:t>
-            </a:r>
-            <a:endParaRPr lang="en-US" sz="900" dirty="0"/>
-          </a:p>
-        </p:txBody>
-      </p:sp>
-      <p:sp>
-        <p:nvSpPr>
-          <p:cNvPr id="5" name="Text 3"/>
-          <p:cNvSpPr/>
-          <p:nvPr/>
-        </p:nvSpPr>
-        <p:spPr>
-          <a:xfrm>
-            <a:off x="457200" y="320040"/>
-            <a:ext cx="11247120" cy="685800"/>
-          </a:xfrm>
-          <a:prstGeom prst="rect">
-            <a:avLst/>
-          </a:prstGeom>
-          <a:noFill/>
-          <a:ln/>
-        </p:spPr>
-        <p:txBody>
-          <a:bodyPr wrap="square" lIns="0" tIns="0" rIns="0" bIns="0" rtlCol="0" anchor="ctr"/>
-          <a:lstStyle/>
-          <a:p>
-            <a:pPr indent="0" marL="0">
-              <a:buNone/>
-            </a:pPr>
-            <a:r>
-              <a:rPr lang="en-US" sz="2800" b="1" dirty="0">
-                <a:solidFill>
-                  <a:srgbClr val="1E3A5F"/>
-                </a:solidFill>
-                <a:latin typeface="Yu Gothic UI" pitchFamily="34" charset="0"/>
-                <a:ea typeface="Yu Gothic UI" pitchFamily="34" charset="-122"/>
-                <a:cs typeface="Yu Gothic UI" pitchFamily="34" charset="-120"/>
-              </a:rPr>
-              <a:t>Phase 2 — 連休対策：前退院枠 &amp; 予約枠最適化</a:t>
-            </a:r>
-            <a:endParaRPr lang="en-US" sz="2800" dirty="0"/>
-          </a:p>
-        </p:txBody>
-      </p:sp>
-      <p:sp>
-        <p:nvSpPr>
-          <p:cNvPr id="6" name="Text 4"/>
-          <p:cNvSpPr/>
-          <p:nvPr/>
-        </p:nvSpPr>
-        <p:spPr>
-          <a:xfrm>
-            <a:off x="457200" y="1005840"/>
-            <a:ext cx="11247120" cy="365760"/>
-          </a:xfrm>
-          <a:prstGeom prst="rect">
-            <a:avLst/>
-          </a:prstGeom>
-          <a:noFill/>
-          <a:ln/>
-        </p:spPr>
-        <p:txBody>
-          <a:bodyPr wrap="square" lIns="0" tIns="0" rIns="0" bIns="0" rtlCol="0" anchor="ctr"/>
-          <a:lstStyle/>
-          <a:p>
-            <a:pPr indent="0" marL="0">
-              <a:buNone/>
-            </a:pPr>
-            <a:r>
-              <a:rPr lang="en-US" sz="1400" i="1" dirty="0">
-                <a:solidFill>
-                  <a:srgbClr val="4A6FA5"/>
-                </a:solidFill>
-                <a:latin typeface="Yu Gothic" pitchFamily="34" charset="0"/>
-                <a:ea typeface="Yu Gothic" pitchFamily="34" charset="-122"/>
-                <a:cs typeface="Yu Gothic" pitchFamily="34" charset="-120"/>
-              </a:rPr>
-              <a:t>連休 3週前 からの退院調整と連休明け予約枠の事前確保</a:t>
-            </a:r>
-            <a:endParaRPr lang="en-US" sz="1400" dirty="0"/>
-          </a:p>
-        </p:txBody>
-      </p:sp>
-      <p:sp>
-        <p:nvSpPr>
-          <p:cNvPr id="7" name="Shape 5"/>
-          <p:cNvSpPr/>
-          <p:nvPr/>
-        </p:nvSpPr>
-        <p:spPr>
-          <a:xfrm>
-            <a:off x="457200" y="1417320"/>
-            <a:ext cx="1097280" cy="36576"/>
-          </a:xfrm>
-          <a:prstGeom prst="rect">
-            <a:avLst/>
-          </a:prstGeom>
-          <a:solidFill>
-            <a:srgbClr val="C9A961"/>
-          </a:solidFill>
-          <a:ln/>
-        </p:spPr>
-      </p:sp>
-      <p:sp>
-        <p:nvSpPr>
-          <p:cNvPr id="8" name="Text 6"/>
-          <p:cNvSpPr/>
-          <p:nvPr/>
-        </p:nvSpPr>
-        <p:spPr>
-          <a:xfrm>
-            <a:off x="457200" y="1828800"/>
-            <a:ext cx="2194560" cy="320040"/>
-          </a:xfrm>
-          <a:prstGeom prst="rect">
-            <a:avLst/>
-          </a:prstGeom>
-          <a:noFill/>
-          <a:ln/>
-        </p:spPr>
-        <p:txBody>
-          <a:bodyPr wrap="square" lIns="0" tIns="0" rIns="0" bIns="0" rtlCol="0" anchor="ctr"/>
-          <a:lstStyle/>
-          <a:p>
-            <a:pPr algn="ctr" indent="0" marL="0">
-              <a:buNone/>
-            </a:pPr>
-            <a:r>
-              <a:rPr lang="en-US" sz="1100" b="1" dirty="0">
-                <a:solidFill>
-                  <a:srgbClr val="1E3A5F"/>
-                </a:solidFill>
-                <a:latin typeface="Yu Gothic UI" pitchFamily="34" charset="0"/>
-                <a:ea typeface="Yu Gothic UI" pitchFamily="34" charset="-122"/>
-                <a:cs typeface="Yu Gothic UI" pitchFamily="34" charset="-120"/>
-              </a:rPr>
-              <a:t>連休 3週前</a:t>
-            </a:r>
-            <a:endParaRPr lang="en-US" sz="1100" dirty="0"/>
-          </a:p>
-        </p:txBody>
-      </p:sp>
-      <p:sp>
-        <p:nvSpPr>
-          <p:cNvPr id="9" name="Shape 7"/>
-          <p:cNvSpPr/>
-          <p:nvPr/>
-        </p:nvSpPr>
-        <p:spPr>
-          <a:xfrm>
-            <a:off x="457200" y="2194560"/>
-            <a:ext cx="2194560" cy="1371600"/>
-          </a:xfrm>
-          <a:prstGeom prst="rect">
-            <a:avLst/>
-          </a:prstGeom>
-          <a:solidFill>
-            <a:srgbClr val="2E86AB"/>
-          </a:solidFill>
-          <a:ln/>
-        </p:spPr>
-      </p:sp>
-      <p:sp>
-        <p:nvSpPr>
-          <p:cNvPr id="10" name="Text 8"/>
-          <p:cNvSpPr/>
-          <p:nvPr/>
-        </p:nvSpPr>
-        <p:spPr>
-          <a:xfrm>
-            <a:off x="457200" y="2194560"/>
-            <a:ext cx="2194560" cy="1371600"/>
-          </a:xfrm>
-          <a:prstGeom prst="rect">
-            <a:avLst/>
-          </a:prstGeom>
-          <a:noFill/>
-          <a:ln/>
-        </p:spPr>
-        <p:txBody>
-          <a:bodyPr wrap="square" lIns="0" tIns="0" rIns="0" bIns="0" rtlCol="0" anchor="ctr"/>
-          <a:lstStyle/>
-          <a:p>
-            <a:pPr algn="ctr" indent="0" marL="0">
-              <a:buNone/>
-            </a:pPr>
-            <a:r>
-              <a:rPr lang="en-US" sz="1200" b="1" dirty="0">
-                <a:solidFill>
-                  <a:srgbClr val="FFFFFF"/>
-                </a:solidFill>
-                <a:latin typeface="Yu Gothic" pitchFamily="34" charset="0"/>
-                <a:ea typeface="Yu Gothic" pitchFamily="34" charset="-122"/>
-                <a:cs typeface="Yu Gothic" pitchFamily="34" charset="-120"/>
-              </a:rPr>
-              <a:t>退院ターゲット</a:t>
-            </a:r>
-            <a:endParaRPr lang="en-US" sz="1200" dirty="0"/>
-          </a:p>
-          <a:p>
-            <a:pPr algn="ctr" indent="0" marL="0">
-              <a:buNone/>
-            </a:pPr>
-            <a:r>
-              <a:rPr lang="en-US" sz="1200" b="1" dirty="0">
-                <a:solidFill>
-                  <a:srgbClr val="FFFFFF"/>
-                </a:solidFill>
-                <a:latin typeface="Yu Gothic" pitchFamily="34" charset="0"/>
-                <a:ea typeface="Yu Gothic" pitchFamily="34" charset="-122"/>
-                <a:cs typeface="Yu Gothic" pitchFamily="34" charset="-120"/>
-              </a:rPr>
-              <a:t>リスト作成</a:t>
-            </a:r>
-            <a:endParaRPr lang="en-US" sz="1200" dirty="0"/>
-          </a:p>
-        </p:txBody>
-      </p:sp>
-      <p:sp>
-        <p:nvSpPr>
-          <p:cNvPr id="11" name="Shape 9"/>
-          <p:cNvSpPr/>
-          <p:nvPr/>
-        </p:nvSpPr>
-        <p:spPr>
-          <a:xfrm rot="5400000">
-            <a:off x="2697480" y="2788920"/>
-            <a:ext cx="109728" cy="182880"/>
-          </a:xfrm>
-          <a:prstGeom prst="rtTriangle">
-            <a:avLst/>
-          </a:prstGeom>
-          <a:solidFill>
-            <a:srgbClr val="1E3A5F"/>
-          </a:solidFill>
-          <a:ln/>
-        </p:spPr>
-      </p:sp>
-      <p:sp>
-        <p:nvSpPr>
-          <p:cNvPr id="12" name="Text 10"/>
-          <p:cNvSpPr/>
-          <p:nvPr/>
-        </p:nvSpPr>
-        <p:spPr>
-          <a:xfrm>
-            <a:off x="2798064" y="1828800"/>
-            <a:ext cx="2194560" cy="320040"/>
-          </a:xfrm>
-          <a:prstGeom prst="rect">
-            <a:avLst/>
-          </a:prstGeom>
-          <a:noFill/>
-          <a:ln/>
-        </p:spPr>
-        <p:txBody>
-          <a:bodyPr wrap="square" lIns="0" tIns="0" rIns="0" bIns="0" rtlCol="0" anchor="ctr"/>
-          <a:lstStyle/>
-          <a:p>
-            <a:pPr algn="ctr" indent="0" marL="0">
-              <a:buNone/>
-            </a:pPr>
-            <a:r>
-              <a:rPr lang="en-US" sz="1100" b="1" dirty="0">
-                <a:solidFill>
-                  <a:srgbClr val="1E3A5F"/>
-                </a:solidFill>
-                <a:latin typeface="Yu Gothic UI" pitchFamily="34" charset="0"/>
-                <a:ea typeface="Yu Gothic UI" pitchFamily="34" charset="-122"/>
-                <a:cs typeface="Yu Gothic UI" pitchFamily="34" charset="-120"/>
-              </a:rPr>
-              <a:t>連休 2週前</a:t>
-            </a:r>
-            <a:endParaRPr lang="en-US" sz="1100" dirty="0"/>
-          </a:p>
-        </p:txBody>
-      </p:sp>
-      <p:sp>
-        <p:nvSpPr>
-          <p:cNvPr id="13" name="Shape 11"/>
-          <p:cNvSpPr/>
-          <p:nvPr/>
-        </p:nvSpPr>
-        <p:spPr>
-          <a:xfrm>
-            <a:off x="2798064" y="2194560"/>
-            <a:ext cx="2194560" cy="1371600"/>
-          </a:xfrm>
-          <a:prstGeom prst="rect">
-            <a:avLst/>
-          </a:prstGeom>
-          <a:solidFill>
-            <a:srgbClr val="4A6FA5"/>
-          </a:solidFill>
-          <a:ln/>
-        </p:spPr>
-      </p:sp>
-      <p:sp>
-        <p:nvSpPr>
-          <p:cNvPr id="14" name="Text 12"/>
-          <p:cNvSpPr/>
-          <p:nvPr/>
-        </p:nvSpPr>
-        <p:spPr>
-          <a:xfrm>
-            <a:off x="2798064" y="2194560"/>
-            <a:ext cx="2194560" cy="1371600"/>
-          </a:xfrm>
-          <a:prstGeom prst="rect">
-            <a:avLst/>
-          </a:prstGeom>
-          <a:noFill/>
-          <a:ln/>
-        </p:spPr>
-        <p:txBody>
-          <a:bodyPr wrap="square" lIns="0" tIns="0" rIns="0" bIns="0" rtlCol="0" anchor="ctr"/>
-          <a:lstStyle/>
-          <a:p>
-            <a:pPr algn="ctr" indent="0" marL="0">
-              <a:buNone/>
-            </a:pPr>
-            <a:r>
-              <a:rPr lang="en-US" sz="1200" b="1" dirty="0">
-                <a:solidFill>
-                  <a:srgbClr val="FFFFFF"/>
-                </a:solidFill>
-                <a:latin typeface="Yu Gothic" pitchFamily="34" charset="0"/>
-                <a:ea typeface="Yu Gothic" pitchFamily="34" charset="-122"/>
-                <a:cs typeface="Yu Gothic" pitchFamily="34" charset="-120"/>
-              </a:rPr>
-              <a:t>多職種会議で</a:t>
-            </a:r>
-            <a:endParaRPr lang="en-US" sz="1200" dirty="0"/>
-          </a:p>
-          <a:p>
-            <a:pPr algn="ctr" indent="0" marL="0">
-              <a:buNone/>
-            </a:pPr>
-            <a:r>
-              <a:rPr lang="en-US" sz="1200" b="1" dirty="0">
-                <a:solidFill>
-                  <a:srgbClr val="FFFFFF"/>
-                </a:solidFill>
-                <a:latin typeface="Yu Gothic" pitchFamily="34" charset="0"/>
-                <a:ea typeface="Yu Gothic" pitchFamily="34" charset="-122"/>
-                <a:cs typeface="Yu Gothic" pitchFamily="34" charset="-120"/>
-              </a:rPr>
-              <a:t>退院計画確定</a:t>
-            </a:r>
-            <a:endParaRPr lang="en-US" sz="1200" dirty="0"/>
-          </a:p>
-        </p:txBody>
-      </p:sp>
-      <p:sp>
-        <p:nvSpPr>
-          <p:cNvPr id="15" name="Shape 13"/>
-          <p:cNvSpPr/>
-          <p:nvPr/>
-        </p:nvSpPr>
-        <p:spPr>
-          <a:xfrm rot="5400000">
-            <a:off x="5038344" y="2788920"/>
-            <a:ext cx="109728" cy="182880"/>
-          </a:xfrm>
-          <a:prstGeom prst="rtTriangle">
-            <a:avLst/>
-          </a:prstGeom>
-          <a:solidFill>
-            <a:srgbClr val="1E3A5F"/>
-          </a:solidFill>
-          <a:ln/>
-        </p:spPr>
-      </p:sp>
-      <p:sp>
-        <p:nvSpPr>
-          <p:cNvPr id="16" name="Text 14"/>
-          <p:cNvSpPr/>
-          <p:nvPr/>
-        </p:nvSpPr>
-        <p:spPr>
-          <a:xfrm>
-            <a:off x="5138928" y="1828800"/>
-            <a:ext cx="2194560" cy="320040"/>
-          </a:xfrm>
-          <a:prstGeom prst="rect">
-            <a:avLst/>
-          </a:prstGeom>
-          <a:noFill/>
-          <a:ln/>
-        </p:spPr>
-        <p:txBody>
-          <a:bodyPr wrap="square" lIns="0" tIns="0" rIns="0" bIns="0" rtlCol="0" anchor="ctr"/>
-          <a:lstStyle/>
-          <a:p>
-            <a:pPr algn="ctr" indent="0" marL="0">
-              <a:buNone/>
-            </a:pPr>
-            <a:r>
-              <a:rPr lang="en-US" sz="1100" b="1" dirty="0">
-                <a:solidFill>
-                  <a:srgbClr val="1E3A5F"/>
-                </a:solidFill>
-                <a:latin typeface="Yu Gothic UI" pitchFamily="34" charset="0"/>
-                <a:ea typeface="Yu Gothic UI" pitchFamily="34" charset="-122"/>
-                <a:cs typeface="Yu Gothic UI" pitchFamily="34" charset="-120"/>
-              </a:rPr>
-              <a:t>連休 1週前</a:t>
-            </a:r>
-            <a:endParaRPr lang="en-US" sz="1100" dirty="0"/>
-          </a:p>
-        </p:txBody>
-      </p:sp>
-      <p:sp>
-        <p:nvSpPr>
-          <p:cNvPr id="17" name="Shape 15"/>
-          <p:cNvSpPr/>
-          <p:nvPr/>
-        </p:nvSpPr>
-        <p:spPr>
-          <a:xfrm>
-            <a:off x="5138928" y="2194560"/>
-            <a:ext cx="2194560" cy="1371600"/>
-          </a:xfrm>
-          <a:prstGeom prst="rect">
-            <a:avLst/>
-          </a:prstGeom>
-          <a:solidFill>
-            <a:srgbClr val="F18F01"/>
-          </a:solidFill>
-          <a:ln/>
-        </p:spPr>
-      </p:sp>
-      <p:sp>
-        <p:nvSpPr>
-          <p:cNvPr id="18" name="Text 16"/>
-          <p:cNvSpPr/>
-          <p:nvPr/>
-        </p:nvSpPr>
-        <p:spPr>
-          <a:xfrm>
-            <a:off x="5138928" y="2194560"/>
-            <a:ext cx="2194560" cy="1371600"/>
-          </a:xfrm>
-          <a:prstGeom prst="rect">
-            <a:avLst/>
-          </a:prstGeom>
-          <a:noFill/>
-          <a:ln/>
-        </p:spPr>
-        <p:txBody>
-          <a:bodyPr wrap="square" lIns="0" tIns="0" rIns="0" bIns="0" rtlCol="0" anchor="ctr"/>
-          <a:lstStyle/>
-          <a:p>
-            <a:pPr algn="ctr" indent="0" marL="0">
-              <a:buNone/>
-            </a:pPr>
-            <a:r>
-              <a:rPr lang="en-US" sz="1200" b="1" dirty="0">
-                <a:solidFill>
-                  <a:srgbClr val="FFFFFF"/>
-                </a:solidFill>
-                <a:latin typeface="Yu Gothic" pitchFamily="34" charset="0"/>
-                <a:ea typeface="Yu Gothic" pitchFamily="34" charset="-122"/>
-                <a:cs typeface="Yu Gothic" pitchFamily="34" charset="-120"/>
-              </a:rPr>
-              <a:t>退院実行</a:t>
-            </a:r>
-            <a:endParaRPr lang="en-US" sz="1200" dirty="0"/>
-          </a:p>
-          <a:p>
-            <a:pPr algn="ctr" indent="0" marL="0">
-              <a:buNone/>
-            </a:pPr>
-            <a:r>
-              <a:rPr lang="en-US" sz="1200" b="1" dirty="0">
-                <a:solidFill>
-                  <a:srgbClr val="FFFFFF"/>
-                </a:solidFill>
-                <a:latin typeface="Yu Gothic" pitchFamily="34" charset="0"/>
-                <a:ea typeface="Yu Gothic" pitchFamily="34" charset="-122"/>
-                <a:cs typeface="Yu Gothic" pitchFamily="34" charset="-120"/>
-              </a:rPr>
-              <a:t>病棟空床準備</a:t>
-            </a:r>
-            <a:endParaRPr lang="en-US" sz="1200" dirty="0"/>
-          </a:p>
-        </p:txBody>
-      </p:sp>
-      <p:sp>
-        <p:nvSpPr>
-          <p:cNvPr id="19" name="Shape 17"/>
-          <p:cNvSpPr/>
-          <p:nvPr/>
-        </p:nvSpPr>
-        <p:spPr>
-          <a:xfrm rot="5400000">
-            <a:off x="7379208" y="2788920"/>
-            <a:ext cx="109728" cy="182880"/>
-          </a:xfrm>
-          <a:prstGeom prst="rtTriangle">
-            <a:avLst/>
-          </a:prstGeom>
-          <a:solidFill>
-            <a:srgbClr val="1E3A5F"/>
-          </a:solidFill>
-          <a:ln/>
-        </p:spPr>
-      </p:sp>
-      <p:sp>
-        <p:nvSpPr>
-          <p:cNvPr id="20" name="Text 18"/>
-          <p:cNvSpPr/>
-          <p:nvPr/>
-        </p:nvSpPr>
-        <p:spPr>
-          <a:xfrm>
-            <a:off x="7479792" y="1828800"/>
-            <a:ext cx="2194560" cy="320040"/>
-          </a:xfrm>
-          <a:prstGeom prst="rect">
-            <a:avLst/>
-          </a:prstGeom>
-          <a:noFill/>
-          <a:ln/>
-        </p:spPr>
-        <p:txBody>
-          <a:bodyPr wrap="square" lIns="0" tIns="0" rIns="0" bIns="0" rtlCol="0" anchor="ctr"/>
-          <a:lstStyle/>
-          <a:p>
-            <a:pPr algn="ctr" indent="0" marL="0">
-              <a:buNone/>
-            </a:pPr>
-            <a:r>
-              <a:rPr lang="en-US" sz="1100" b="1" dirty="0">
-                <a:solidFill>
-                  <a:srgbClr val="1E3A5F"/>
-                </a:solidFill>
-                <a:latin typeface="Yu Gothic UI" pitchFamily="34" charset="0"/>
-                <a:ea typeface="Yu Gothic UI" pitchFamily="34" charset="-122"/>
-                <a:cs typeface="Yu Gothic UI" pitchFamily="34" charset="-120"/>
-              </a:rPr>
-              <a:t>連休中</a:t>
-            </a:r>
-            <a:endParaRPr lang="en-US" sz="1100" dirty="0"/>
-          </a:p>
-        </p:txBody>
-      </p:sp>
-      <p:sp>
-        <p:nvSpPr>
-          <p:cNvPr id="21" name="Shape 19"/>
-          <p:cNvSpPr/>
-          <p:nvPr/>
-        </p:nvSpPr>
-        <p:spPr>
-          <a:xfrm>
-            <a:off x="7479792" y="2194560"/>
-            <a:ext cx="2194560" cy="1371600"/>
-          </a:xfrm>
-          <a:prstGeom prst="rect">
-            <a:avLst/>
-          </a:prstGeom>
-          <a:solidFill>
-            <a:srgbClr val="C73E1D"/>
-          </a:solidFill>
-          <a:ln/>
-        </p:spPr>
-      </p:sp>
-      <p:sp>
-        <p:nvSpPr>
-          <p:cNvPr id="22" name="Text 20"/>
-          <p:cNvSpPr/>
-          <p:nvPr/>
-        </p:nvSpPr>
-        <p:spPr>
-          <a:xfrm>
-            <a:off x="7479792" y="2194560"/>
-            <a:ext cx="2194560" cy="1371600"/>
-          </a:xfrm>
-          <a:prstGeom prst="rect">
-            <a:avLst/>
-          </a:prstGeom>
-          <a:noFill/>
-          <a:ln/>
-        </p:spPr>
-        <p:txBody>
-          <a:bodyPr wrap="square" lIns="0" tIns="0" rIns="0" bIns="0" rtlCol="0" anchor="ctr"/>
-          <a:lstStyle/>
-          <a:p>
-            <a:pPr algn="ctr" indent="0" marL="0">
-              <a:buNone/>
-            </a:pPr>
-            <a:r>
-              <a:rPr lang="en-US" sz="1200" b="1" dirty="0">
-                <a:solidFill>
-                  <a:srgbClr val="FFFFFF"/>
-                </a:solidFill>
-                <a:latin typeface="Yu Gothic" pitchFamily="34" charset="0"/>
-                <a:ea typeface="Yu Gothic" pitchFamily="34" charset="-122"/>
-                <a:cs typeface="Yu Gothic" pitchFamily="34" charset="-120"/>
-              </a:rPr>
-              <a:t>低稼働を前提とした</a:t>
-            </a:r>
-            <a:endParaRPr lang="en-US" sz="1200" dirty="0"/>
-          </a:p>
-          <a:p>
-            <a:pPr algn="ctr" indent="0" marL="0">
-              <a:buNone/>
-            </a:pPr>
-            <a:r>
-              <a:rPr lang="en-US" sz="1200" b="1" dirty="0">
-                <a:solidFill>
-                  <a:srgbClr val="FFFFFF"/>
-                </a:solidFill>
-                <a:latin typeface="Yu Gothic" pitchFamily="34" charset="0"/>
-                <a:ea typeface="Yu Gothic" pitchFamily="34" charset="-122"/>
-                <a:cs typeface="Yu Gothic" pitchFamily="34" charset="-120"/>
-              </a:rPr>
-              <a:t>運営体制</a:t>
-            </a:r>
-            <a:endParaRPr lang="en-US" sz="1200" dirty="0"/>
-          </a:p>
-        </p:txBody>
-      </p:sp>
-      <p:sp>
-        <p:nvSpPr>
-          <p:cNvPr id="23" name="Shape 21"/>
-          <p:cNvSpPr/>
-          <p:nvPr/>
-        </p:nvSpPr>
-        <p:spPr>
-          <a:xfrm rot="5400000">
-            <a:off x="9720072" y="2788920"/>
-            <a:ext cx="109728" cy="182880"/>
-          </a:xfrm>
-          <a:prstGeom prst="rtTriangle">
-            <a:avLst/>
-          </a:prstGeom>
-          <a:solidFill>
-            <a:srgbClr val="1E3A5F"/>
-          </a:solidFill>
-          <a:ln/>
-        </p:spPr>
-      </p:sp>
-      <p:sp>
-        <p:nvSpPr>
-          <p:cNvPr id="24" name="Text 22"/>
-          <p:cNvSpPr/>
-          <p:nvPr/>
-        </p:nvSpPr>
-        <p:spPr>
-          <a:xfrm>
-            <a:off x="9820656" y="1828800"/>
-            <a:ext cx="2194560" cy="320040"/>
-          </a:xfrm>
-          <a:prstGeom prst="rect">
-            <a:avLst/>
-          </a:prstGeom>
-          <a:noFill/>
-          <a:ln/>
-        </p:spPr>
-        <p:txBody>
-          <a:bodyPr wrap="square" lIns="0" tIns="0" rIns="0" bIns="0" rtlCol="0" anchor="ctr"/>
-          <a:lstStyle/>
-          <a:p>
-            <a:pPr algn="ctr" indent="0" marL="0">
-              <a:buNone/>
-            </a:pPr>
-            <a:r>
-              <a:rPr lang="en-US" sz="1100" b="1" dirty="0">
-                <a:solidFill>
-                  <a:srgbClr val="1E3A5F"/>
-                </a:solidFill>
-                <a:latin typeface="Yu Gothic UI" pitchFamily="34" charset="0"/>
-                <a:ea typeface="Yu Gothic UI" pitchFamily="34" charset="-122"/>
-                <a:cs typeface="Yu Gothic UI" pitchFamily="34" charset="-120"/>
-              </a:rPr>
-              <a:t>連休明け</a:t>
-            </a:r>
-            <a:endParaRPr lang="en-US" sz="1100" dirty="0"/>
-          </a:p>
-        </p:txBody>
-      </p:sp>
-      <p:sp>
-        <p:nvSpPr>
-          <p:cNvPr id="25" name="Shape 23"/>
-          <p:cNvSpPr/>
-          <p:nvPr/>
-        </p:nvSpPr>
-        <p:spPr>
-          <a:xfrm>
-            <a:off x="9820656" y="2194560"/>
-            <a:ext cx="2194560" cy="1371600"/>
-          </a:xfrm>
-          <a:prstGeom prst="rect">
-            <a:avLst/>
-          </a:prstGeom>
-          <a:solidFill>
-            <a:srgbClr val="4CAF50"/>
-          </a:solidFill>
-          <a:ln/>
-        </p:spPr>
-      </p:sp>
-      <p:sp>
-        <p:nvSpPr>
-          <p:cNvPr id="26" name="Text 24"/>
-          <p:cNvSpPr/>
-          <p:nvPr/>
-        </p:nvSpPr>
-        <p:spPr>
-          <a:xfrm>
-            <a:off x="9820656" y="2194560"/>
-            <a:ext cx="2194560" cy="1371600"/>
-          </a:xfrm>
-          <a:prstGeom prst="rect">
-            <a:avLst/>
-          </a:prstGeom>
-          <a:noFill/>
-          <a:ln/>
-        </p:spPr>
-        <p:txBody>
-          <a:bodyPr wrap="square" lIns="0" tIns="0" rIns="0" bIns="0" rtlCol="0" anchor="ctr"/>
-          <a:lstStyle/>
-          <a:p>
-            <a:pPr algn="ctr" indent="0" marL="0">
-              <a:buNone/>
-            </a:pPr>
-            <a:r>
-              <a:rPr lang="en-US" sz="1200" b="1" dirty="0">
-                <a:solidFill>
-                  <a:srgbClr val="FFFFFF"/>
-                </a:solidFill>
-                <a:latin typeface="Yu Gothic" pitchFamily="34" charset="0"/>
-                <a:ea typeface="Yu Gothic" pitchFamily="34" charset="-122"/>
-                <a:cs typeface="Yu Gothic" pitchFamily="34" charset="-120"/>
-              </a:rPr>
-              <a:t>予約枠最大活用で</a:t>
-            </a:r>
-            <a:endParaRPr lang="en-US" sz="1200" dirty="0"/>
-          </a:p>
-          <a:p>
-            <a:pPr algn="ctr" indent="0" marL="0">
-              <a:buNone/>
-            </a:pPr>
-            <a:r>
-              <a:rPr lang="en-US" sz="1200" b="1" dirty="0">
-                <a:solidFill>
-                  <a:srgbClr val="FFFFFF"/>
-                </a:solidFill>
-                <a:latin typeface="Yu Gothic" pitchFamily="34" charset="0"/>
-                <a:ea typeface="Yu Gothic" pitchFamily="34" charset="-122"/>
-                <a:cs typeface="Yu Gothic" pitchFamily="34" charset="-120"/>
-              </a:rPr>
-              <a:t>需要の波を受ける</a:t>
-            </a:r>
-            <a:endParaRPr lang="en-US" sz="1200" dirty="0"/>
-          </a:p>
-        </p:txBody>
-      </p:sp>
-      <p:sp>
-        <p:nvSpPr>
-          <p:cNvPr id="27" name="Shape 25"/>
-          <p:cNvSpPr/>
-          <p:nvPr/>
-        </p:nvSpPr>
-        <p:spPr>
-          <a:xfrm>
-            <a:off x="457200" y="3977640"/>
-            <a:ext cx="457200" cy="457200"/>
-          </a:xfrm>
-          <a:prstGeom prst="ellipse">
-            <a:avLst/>
-          </a:prstGeom>
-          <a:solidFill>
-            <a:srgbClr val="1E3A5F"/>
-          </a:solidFill>
-          <a:ln/>
-        </p:spPr>
-      </p:sp>
-      <p:sp>
-        <p:nvSpPr>
-          <p:cNvPr id="28" name="Text 26"/>
-          <p:cNvSpPr/>
-          <p:nvPr/>
-        </p:nvSpPr>
-        <p:spPr>
-          <a:xfrm>
-            <a:off x="457200" y="3977640"/>
-            <a:ext cx="457200" cy="457200"/>
-          </a:xfrm>
-          <a:prstGeom prst="rect">
-            <a:avLst/>
-          </a:prstGeom>
-          <a:noFill/>
-          <a:ln/>
-        </p:spPr>
-        <p:txBody>
-          <a:bodyPr wrap="square" lIns="0" tIns="0" rIns="0" bIns="0" rtlCol="0" anchor="ctr"/>
-          <a:lstStyle/>
-          <a:p>
-            <a:pPr algn="ctr" indent="0" marL="0">
-              <a:buNone/>
-            </a:pPr>
-            <a:r>
-              <a:rPr lang="en-US" sz="2000" b="1" dirty="0">
-                <a:solidFill>
-                  <a:srgbClr val="FFFFFF"/>
-                </a:solidFill>
-                <a:latin typeface="Yu Gothic UI" pitchFamily="34" charset="0"/>
-                <a:ea typeface="Yu Gothic UI" pitchFamily="34" charset="-122"/>
-                <a:cs typeface="Yu Gothic UI" pitchFamily="34" charset="-120"/>
-              </a:rPr>
-              <a:t>1</a:t>
-            </a:r>
-            <a:endParaRPr lang="en-US" sz="2000" dirty="0"/>
-          </a:p>
-        </p:txBody>
-      </p:sp>
-      <p:sp>
-        <p:nvSpPr>
-          <p:cNvPr id="29" name="Text 27"/>
-          <p:cNvSpPr/>
-          <p:nvPr/>
-        </p:nvSpPr>
-        <p:spPr>
-          <a:xfrm>
-            <a:off x="1051560" y="3950208"/>
-            <a:ext cx="5120640" cy="365760"/>
-          </a:xfrm>
-          <a:prstGeom prst="rect">
-            <a:avLst/>
-          </a:prstGeom>
-          <a:noFill/>
-          <a:ln/>
-        </p:spPr>
-        <p:txBody>
-          <a:bodyPr wrap="square" lIns="0" tIns="0" rIns="0" bIns="0" rtlCol="0" anchor="t"/>
-          <a:lstStyle/>
-          <a:p>
-            <a:pPr indent="0" marL="0">
-              <a:buNone/>
-            </a:pPr>
-            <a:r>
-              <a:rPr lang="en-US" sz="1200" b="1" dirty="0">
-                <a:solidFill>
-                  <a:srgbClr val="1E3A5F"/>
-                </a:solidFill>
-                <a:latin typeface="Yu Gothic UI" pitchFamily="34" charset="0"/>
-                <a:ea typeface="Yu Gothic UI" pitchFamily="34" charset="-122"/>
-                <a:cs typeface="Yu Gothic UI" pitchFamily="34" charset="-120"/>
-              </a:rPr>
-              <a:t>同日充填は効かない</a:t>
-            </a:r>
-            <a:endParaRPr lang="en-US" sz="1200" dirty="0"/>
-          </a:p>
-        </p:txBody>
-      </p:sp>
-      <p:sp>
-        <p:nvSpPr>
-          <p:cNvPr id="30" name="Text 28"/>
-          <p:cNvSpPr/>
-          <p:nvPr/>
-        </p:nvSpPr>
-        <p:spPr>
-          <a:xfrm>
-            <a:off x="1051560" y="4297680"/>
-            <a:ext cx="5120640" cy="457200"/>
-          </a:xfrm>
-          <a:prstGeom prst="rect">
-            <a:avLst/>
-          </a:prstGeom>
-          <a:noFill/>
-          <a:ln/>
-        </p:spPr>
-        <p:txBody>
-          <a:bodyPr wrap="square" lIns="0" tIns="0" rIns="0" bIns="0" rtlCol="0" anchor="t"/>
-          <a:lstStyle/>
-          <a:p>
-            <a:pPr indent="0" marL="0">
-              <a:buNone/>
-            </a:pPr>
-            <a:r>
-              <a:rPr lang="en-US" sz="1000" dirty="0">
-                <a:solidFill>
-                  <a:srgbClr val="475569"/>
-                </a:solidFill>
-                <a:latin typeface="Yu Gothic" pitchFamily="34" charset="0"/>
-                <a:ea typeface="Yu Gothic" pitchFamily="34" charset="-122"/>
-                <a:cs typeface="Yu Gothic" pitchFamily="34" charset="-120"/>
-              </a:rPr>
-              <a:t>連休中は緊急入院も激減 — Phase 1 の発想が通用しない</a:t>
-            </a:r>
-            <a:endParaRPr lang="en-US" sz="1000" dirty="0"/>
-          </a:p>
-        </p:txBody>
-      </p:sp>
-      <p:sp>
-        <p:nvSpPr>
-          <p:cNvPr id="31" name="Shape 29"/>
-          <p:cNvSpPr/>
-          <p:nvPr/>
-        </p:nvSpPr>
-        <p:spPr>
-          <a:xfrm>
-            <a:off x="6309360" y="3977640"/>
-            <a:ext cx="457200" cy="457200"/>
-          </a:xfrm>
-          <a:prstGeom prst="ellipse">
-            <a:avLst/>
-          </a:prstGeom>
-          <a:solidFill>
-            <a:srgbClr val="1E3A5F"/>
-          </a:solidFill>
-          <a:ln/>
-        </p:spPr>
-      </p:sp>
-      <p:sp>
-        <p:nvSpPr>
-          <p:cNvPr id="32" name="Text 30"/>
-          <p:cNvSpPr/>
-          <p:nvPr/>
-        </p:nvSpPr>
-        <p:spPr>
-          <a:xfrm>
-            <a:off x="6309360" y="3977640"/>
-            <a:ext cx="457200" cy="457200"/>
-          </a:xfrm>
-          <a:prstGeom prst="rect">
-            <a:avLst/>
-          </a:prstGeom>
-          <a:noFill/>
-          <a:ln/>
-        </p:spPr>
-        <p:txBody>
-          <a:bodyPr wrap="square" lIns="0" tIns="0" rIns="0" bIns="0" rtlCol="0" anchor="ctr"/>
-          <a:lstStyle/>
-          <a:p>
-            <a:pPr algn="ctr" indent="0" marL="0">
-              <a:buNone/>
-            </a:pPr>
-            <a:r>
-              <a:rPr lang="en-US" sz="2000" b="1" dirty="0">
-                <a:solidFill>
-                  <a:srgbClr val="FFFFFF"/>
-                </a:solidFill>
-                <a:latin typeface="Yu Gothic UI" pitchFamily="34" charset="0"/>
-                <a:ea typeface="Yu Gothic UI" pitchFamily="34" charset="-122"/>
-                <a:cs typeface="Yu Gothic UI" pitchFamily="34" charset="-120"/>
-              </a:rPr>
-              <a:t>2</a:t>
-            </a:r>
-            <a:endParaRPr lang="en-US" sz="2000" dirty="0"/>
-          </a:p>
-        </p:txBody>
-      </p:sp>
-      <p:sp>
-        <p:nvSpPr>
-          <p:cNvPr id="33" name="Text 31"/>
-          <p:cNvSpPr/>
-          <p:nvPr/>
-        </p:nvSpPr>
-        <p:spPr>
-          <a:xfrm>
-            <a:off x="6903720" y="3950208"/>
-            <a:ext cx="5120640" cy="365760"/>
-          </a:xfrm>
-          <a:prstGeom prst="rect">
-            <a:avLst/>
-          </a:prstGeom>
-          <a:noFill/>
-          <a:ln/>
-        </p:spPr>
-        <p:txBody>
-          <a:bodyPr wrap="square" lIns="0" tIns="0" rIns="0" bIns="0" rtlCol="0" anchor="t"/>
-          <a:lstStyle/>
-          <a:p>
-            <a:pPr indent="0" marL="0">
-              <a:buNone/>
-            </a:pPr>
-            <a:r>
-              <a:rPr lang="en-US" sz="1200" b="1" dirty="0">
-                <a:solidFill>
-                  <a:srgbClr val="1E3A5F"/>
-                </a:solidFill>
-                <a:latin typeface="Yu Gothic UI" pitchFamily="34" charset="0"/>
-                <a:ea typeface="Yu Gothic UI" pitchFamily="34" charset="-122"/>
-                <a:cs typeface="Yu Gothic UI" pitchFamily="34" charset="-120"/>
-              </a:rPr>
-              <a:t>連休前に退院を済ませる</a:t>
-            </a:r>
-            <a:endParaRPr lang="en-US" sz="1200" dirty="0"/>
-          </a:p>
-        </p:txBody>
-      </p:sp>
-      <p:sp>
-        <p:nvSpPr>
-          <p:cNvPr id="34" name="Text 32"/>
-          <p:cNvSpPr/>
-          <p:nvPr/>
-        </p:nvSpPr>
-        <p:spPr>
-          <a:xfrm>
-            <a:off x="6903720" y="4297680"/>
-            <a:ext cx="5120640" cy="457200"/>
-          </a:xfrm>
-          <a:prstGeom prst="rect">
-            <a:avLst/>
-          </a:prstGeom>
-          <a:noFill/>
-          <a:ln/>
-        </p:spPr>
-        <p:txBody>
-          <a:bodyPr wrap="square" lIns="0" tIns="0" rIns="0" bIns="0" rtlCol="0" anchor="t"/>
-          <a:lstStyle/>
-          <a:p>
-            <a:pPr indent="0" marL="0">
-              <a:buNone/>
-            </a:pPr>
-            <a:r>
-              <a:rPr lang="en-US" sz="1000" dirty="0">
-                <a:solidFill>
-                  <a:srgbClr val="475569"/>
-                </a:solidFill>
-                <a:latin typeface="Yu Gothic" pitchFamily="34" charset="0"/>
-                <a:ea typeface="Yu Gothic" pitchFamily="34" charset="-122"/>
-                <a:cs typeface="Yu Gothic" pitchFamily="34" charset="-120"/>
-              </a:rPr>
-              <a:t>3週前からの退院調整 + ターゲット患者リスト</a:t>
-            </a:r>
-            <a:endParaRPr lang="en-US" sz="1000" dirty="0"/>
-          </a:p>
-        </p:txBody>
-      </p:sp>
-      <p:sp>
-        <p:nvSpPr>
-          <p:cNvPr id="35" name="Shape 33"/>
-          <p:cNvSpPr/>
-          <p:nvPr/>
-        </p:nvSpPr>
-        <p:spPr>
-          <a:xfrm>
-            <a:off x="457200" y="5029200"/>
-            <a:ext cx="457200" cy="457200"/>
-          </a:xfrm>
-          <a:prstGeom prst="ellipse">
-            <a:avLst/>
-          </a:prstGeom>
-          <a:solidFill>
-            <a:srgbClr val="1E3A5F"/>
-          </a:solidFill>
-          <a:ln/>
-        </p:spPr>
-      </p:sp>
-      <p:sp>
-        <p:nvSpPr>
-          <p:cNvPr id="36" name="Text 34"/>
-          <p:cNvSpPr/>
-          <p:nvPr/>
-        </p:nvSpPr>
-        <p:spPr>
-          <a:xfrm>
-            <a:off x="457200" y="5029200"/>
-            <a:ext cx="457200" cy="457200"/>
-          </a:xfrm>
-          <a:prstGeom prst="rect">
-            <a:avLst/>
-          </a:prstGeom>
-          <a:noFill/>
-          <a:ln/>
-        </p:spPr>
-        <p:txBody>
-          <a:bodyPr wrap="square" lIns="0" tIns="0" rIns="0" bIns="0" rtlCol="0" anchor="ctr"/>
-          <a:lstStyle/>
-          <a:p>
-            <a:pPr algn="ctr" indent="0" marL="0">
-              <a:buNone/>
-            </a:pPr>
-            <a:r>
-              <a:rPr lang="en-US" sz="2000" b="1" dirty="0">
-                <a:solidFill>
-                  <a:srgbClr val="FFFFFF"/>
-                </a:solidFill>
-                <a:latin typeface="Yu Gothic UI" pitchFamily="34" charset="0"/>
-                <a:ea typeface="Yu Gothic UI" pitchFamily="34" charset="-122"/>
-                <a:cs typeface="Yu Gothic UI" pitchFamily="34" charset="-120"/>
-              </a:rPr>
-              <a:t>3</a:t>
-            </a:r>
-            <a:endParaRPr lang="en-US" sz="2000" dirty="0"/>
-          </a:p>
-        </p:txBody>
-      </p:sp>
-      <p:sp>
-        <p:nvSpPr>
-          <p:cNvPr id="37" name="Text 35"/>
-          <p:cNvSpPr/>
-          <p:nvPr/>
-        </p:nvSpPr>
-        <p:spPr>
-          <a:xfrm>
-            <a:off x="1051560" y="5001768"/>
-            <a:ext cx="5120640" cy="365760"/>
-          </a:xfrm>
-          <a:prstGeom prst="rect">
-            <a:avLst/>
-          </a:prstGeom>
-          <a:noFill/>
-          <a:ln/>
-        </p:spPr>
-        <p:txBody>
-          <a:bodyPr wrap="square" lIns="0" tIns="0" rIns="0" bIns="0" rtlCol="0" anchor="t"/>
-          <a:lstStyle/>
-          <a:p>
-            <a:pPr indent="0" marL="0">
-              <a:buNone/>
-            </a:pPr>
-            <a:r>
-              <a:rPr lang="en-US" sz="1200" b="1" dirty="0">
-                <a:solidFill>
-                  <a:srgbClr val="1E3A5F"/>
-                </a:solidFill>
-                <a:latin typeface="Yu Gothic UI" pitchFamily="34" charset="0"/>
-                <a:ea typeface="Yu Gothic UI" pitchFamily="34" charset="-122"/>
-                <a:cs typeface="Yu Gothic UI" pitchFamily="34" charset="-120"/>
-              </a:rPr>
-              <a:t>連休明け初日の受入最大化</a:t>
-            </a:r>
-            <a:endParaRPr lang="en-US" sz="1200" dirty="0"/>
-          </a:p>
-        </p:txBody>
-      </p:sp>
-      <p:sp>
-        <p:nvSpPr>
-          <p:cNvPr id="38" name="Text 36"/>
-          <p:cNvSpPr/>
-          <p:nvPr/>
-        </p:nvSpPr>
-        <p:spPr>
-          <a:xfrm>
-            <a:off x="1051560" y="5349240"/>
-            <a:ext cx="5120640" cy="457200"/>
-          </a:xfrm>
-          <a:prstGeom prst="rect">
-            <a:avLst/>
-          </a:prstGeom>
-          <a:noFill/>
-          <a:ln/>
-        </p:spPr>
-        <p:txBody>
-          <a:bodyPr wrap="square" lIns="0" tIns="0" rIns="0" bIns="0" rtlCol="0" anchor="t"/>
-          <a:lstStyle/>
-          <a:p>
-            <a:pPr indent="0" marL="0">
-              <a:buNone/>
-            </a:pPr>
-            <a:r>
-              <a:rPr lang="en-US" sz="1000" dirty="0">
-                <a:solidFill>
-                  <a:srgbClr val="475569"/>
-                </a:solidFill>
-                <a:latin typeface="Yu Gothic" pitchFamily="34" charset="0"/>
-                <a:ea typeface="Yu Gothic" pitchFamily="34" charset="-122"/>
-                <a:cs typeface="Yu Gothic" pitchFamily="34" charset="-120"/>
-              </a:rPr>
-              <a:t>GW2025 では明け水曜に 13件の突発対応が発生</a:t>
-            </a:r>
-            <a:endParaRPr lang="en-US" sz="1000" dirty="0"/>
-          </a:p>
-        </p:txBody>
-      </p:sp>
-      <p:sp>
-        <p:nvSpPr>
-          <p:cNvPr id="39" name="Shape 37"/>
-          <p:cNvSpPr/>
-          <p:nvPr/>
-        </p:nvSpPr>
-        <p:spPr>
-          <a:xfrm>
-            <a:off x="6309360" y="5029200"/>
-            <a:ext cx="457200" cy="457200"/>
-          </a:xfrm>
-          <a:prstGeom prst="ellipse">
-            <a:avLst/>
-          </a:prstGeom>
-          <a:solidFill>
-            <a:srgbClr val="1E3A5F"/>
-          </a:solidFill>
-          <a:ln/>
-        </p:spPr>
-      </p:sp>
-      <p:sp>
-        <p:nvSpPr>
-          <p:cNvPr id="40" name="Text 38"/>
-          <p:cNvSpPr/>
-          <p:nvPr/>
-        </p:nvSpPr>
-        <p:spPr>
-          <a:xfrm>
-            <a:off x="6309360" y="5029200"/>
-            <a:ext cx="457200" cy="457200"/>
-          </a:xfrm>
-          <a:prstGeom prst="rect">
-            <a:avLst/>
-          </a:prstGeom>
-          <a:noFill/>
-          <a:ln/>
-        </p:spPr>
-        <p:txBody>
-          <a:bodyPr wrap="square" lIns="0" tIns="0" rIns="0" bIns="0" rtlCol="0" anchor="ctr"/>
-          <a:lstStyle/>
-          <a:p>
-            <a:pPr algn="ctr" indent="0" marL="0">
-              <a:buNone/>
-            </a:pPr>
-            <a:r>
-              <a:rPr lang="en-US" sz="2000" b="1" dirty="0">
-                <a:solidFill>
-                  <a:srgbClr val="FFFFFF"/>
-                </a:solidFill>
-                <a:latin typeface="Yu Gothic UI" pitchFamily="34" charset="0"/>
-                <a:ea typeface="Yu Gothic UI" pitchFamily="34" charset="-122"/>
-                <a:cs typeface="Yu Gothic UI" pitchFamily="34" charset="-120"/>
-              </a:rPr>
-              <a:t>4</a:t>
-            </a:r>
-            <a:endParaRPr lang="en-US" sz="2000" dirty="0"/>
-          </a:p>
-        </p:txBody>
-      </p:sp>
-      <p:sp>
-        <p:nvSpPr>
-          <p:cNvPr id="41" name="Text 39"/>
-          <p:cNvSpPr/>
-          <p:nvPr/>
-        </p:nvSpPr>
-        <p:spPr>
-          <a:xfrm>
-            <a:off x="6903720" y="5001768"/>
-            <a:ext cx="5120640" cy="365760"/>
-          </a:xfrm>
-          <a:prstGeom prst="rect">
-            <a:avLst/>
-          </a:prstGeom>
-          <a:noFill/>
-          <a:ln/>
-        </p:spPr>
-        <p:txBody>
-          <a:bodyPr wrap="square" lIns="0" tIns="0" rIns="0" bIns="0" rtlCol="0" anchor="t"/>
-          <a:lstStyle/>
-          <a:p>
-            <a:pPr indent="0" marL="0">
-              <a:buNone/>
-            </a:pPr>
-            <a:r>
-              <a:rPr lang="en-US" sz="1200" b="1" dirty="0">
-                <a:solidFill>
-                  <a:srgbClr val="1E3A5F"/>
-                </a:solidFill>
-                <a:latin typeface="Yu Gothic UI" pitchFamily="34" charset="0"/>
-                <a:ea typeface="Yu Gothic UI" pitchFamily="34" charset="-122"/>
-                <a:cs typeface="Yu Gothic UI" pitchFamily="34" charset="-120"/>
-              </a:rPr>
-              <a:t>既に動いている運用の延長</a:t>
-            </a:r>
-            <a:endParaRPr lang="en-US" sz="1200" dirty="0"/>
-          </a:p>
-        </p:txBody>
-      </p:sp>
-      <p:sp>
-        <p:nvSpPr>
-          <p:cNvPr id="42" name="Text 40"/>
-          <p:cNvSpPr/>
-          <p:nvPr/>
-        </p:nvSpPr>
-        <p:spPr>
-          <a:xfrm>
-            <a:off x="6903720" y="5349240"/>
-            <a:ext cx="5120640" cy="457200"/>
-          </a:xfrm>
-          <a:prstGeom prst="rect">
-            <a:avLst/>
-          </a:prstGeom>
-          <a:noFill/>
-          <a:ln/>
-        </p:spPr>
-        <p:txBody>
-          <a:bodyPr wrap="square" lIns="0" tIns="0" rIns="0" bIns="0" rtlCol="0" anchor="t"/>
-          <a:lstStyle/>
-          <a:p>
-            <a:pPr indent="0" marL="0">
-              <a:buNone/>
-            </a:pPr>
-            <a:r>
-              <a:rPr lang="en-US" sz="1000" dirty="0">
-                <a:solidFill>
-                  <a:srgbClr val="475569"/>
-                </a:solidFill>
-                <a:latin typeface="Yu Gothic" pitchFamily="34" charset="0"/>
-                <a:ea typeface="Yu Gothic" pitchFamily="34" charset="-122"/>
-                <a:cs typeface="Yu Gothic" pitchFamily="34" charset="-120"/>
-              </a:rPr>
-              <a:t>Slide 13 のとおり、現場では部分的に実施中 → 体系化</a:t>
-            </a:r>
-            <a:endParaRPr lang="en-US" sz="1000" dirty="0"/>
-          </a:p>
-        </p:txBody>
-      </p:sp>
-      <p:sp>
-        <p:nvSpPr>
-          <p:cNvPr id="43" name="Shape 41"/>
-          <p:cNvSpPr/>
-          <p:nvPr/>
-        </p:nvSpPr>
-        <p:spPr>
-          <a:xfrm>
-            <a:off x="457200" y="6035040"/>
-            <a:ext cx="11247120" cy="548640"/>
-          </a:xfrm>
-          <a:prstGeom prst="rect">
-            <a:avLst/>
-          </a:prstGeom>
-          <a:solidFill>
-            <a:srgbClr val="C73E1D"/>
-          </a:solidFill>
-          <a:ln/>
-        </p:spPr>
-      </p:sp>
-      <p:sp>
-        <p:nvSpPr>
-          <p:cNvPr id="44" name="Text 42"/>
-          <p:cNvSpPr/>
-          <p:nvPr/>
-        </p:nvSpPr>
-        <p:spPr>
-          <a:xfrm>
-            <a:off x="640080" y="6035040"/>
-            <a:ext cx="10881360" cy="548640"/>
-          </a:xfrm>
-          <a:prstGeom prst="rect">
-            <a:avLst/>
-          </a:prstGeom>
-          <a:noFill/>
-          <a:ln/>
-        </p:spPr>
-        <p:txBody>
-          <a:bodyPr wrap="square" lIns="0" tIns="0" rIns="0" bIns="0" rtlCol="0" anchor="ctr"/>
-          <a:lstStyle/>
-          <a:p>
-            <a:pPr algn="ctr" indent="0" marL="0">
-              <a:buNone/>
-            </a:pPr>
-            <a:r>
-              <a:rPr lang="en-US" sz="1400" b="1" dirty="0">
-                <a:solidFill>
-                  <a:srgbClr val="C9A961"/>
-                </a:solidFill>
-                <a:latin typeface="Yu Gothic" pitchFamily="34" charset="0"/>
-                <a:ea typeface="Yu Gothic" pitchFamily="34" charset="-122"/>
-                <a:cs typeface="Yu Gothic" pitchFamily="34" charset="-120"/>
-              </a:rPr>
-              <a:t>緊急提案: </a:t>
-            </a:r>
-            <a:pPr algn="ctr" indent="0" marL="0">
-              <a:buNone/>
-            </a:pPr>
-            <a:r>
-              <a:rPr lang="en-US" sz="1300" dirty="0">
-                <a:solidFill>
-                  <a:srgbClr val="FFFFFF"/>
-                </a:solidFill>
-                <a:latin typeface="Yu Gothic" pitchFamily="34" charset="0"/>
-                <a:ea typeface="Yu Gothic" pitchFamily="34" charset="-122"/>
-                <a:cs typeface="Yu Gothic" pitchFamily="34" charset="-120"/>
-              </a:rPr>
-              <a:t>GW2026（4/29〜5/5 の9連休）を Phase 2 の緊急パイロットに設定し、今月下旬から退院調整会議で試行</a:t>
-            </a:r>
-            <a:endParaRPr lang="en-US" sz="1400" dirty="0"/>
-          </a:p>
-        </p:txBody>
-      </p:sp>
-    </p:spTree>
-  </p:cSld>
-  <p:clrMapOvr>
-    <a:masterClrMapping/>
-  </p:clrMapOvr>
-</p:sld>
-</file>
-
-<file path=ppt/slides/slide17.xml><?xml version="1.0" encoding="utf-8"?>
-<p:sld xmlns:a="http://schemas.openxmlformats.org/drawingml/2006/main" xmlns:r="http://schemas.openxmlformats.org/officeDocument/2006/relationships" xmlns:p="http://schemas.openxmlformats.org/presentationml/2006/main">
-  <p:cSld name="Slide 17">
     <p:bg>
       <p:bgPr>
         <a:solidFill>
@@ -8287,7 +7442,7 @@
                 <a:ea typeface="Yu Gothic" pitchFamily="34" charset="-122"/>
                 <a:cs typeface="Yu Gothic" pitchFamily="34" charset="-120"/>
               </a:rPr>
-              <a:t>17 / 17</a:t>
+              <a:t>16 / 16</a:t>
             </a:r>
             <a:endParaRPr lang="en-US" sz="900" dirty="0"/>
           </a:p>
@@ -8365,7 +7520,7 @@
                 <a:ea typeface="Yu Gothic" pitchFamily="34" charset="-122"/>
                 <a:cs typeface="Yu Gothic" pitchFamily="34" charset="-120"/>
               </a:rPr>
-              <a:t>Phase 3α 緊急追加で 4 フェーズ + GW パイロット — 本則適用と同期して稼働</a:t>
+              <a:t>Phase 3α 緊急追加で 4 フェーズ構成 — 本則適用と同期して稼働</a:t>
             </a:r>
             <a:endParaRPr lang="en-US" sz="1400" dirty="0"/>
           </a:p>
@@ -8422,8 +7577,8 @@
         </p:nvSpPr>
         <p:spPr>
           <a:xfrm>
-            <a:off x="8503920" y="1691640"/>
-            <a:ext cx="3200400" cy="621792"/>
+            <a:off x="8503920" y="1783080"/>
+            <a:ext cx="3200400" cy="749808"/>
           </a:xfrm>
           <a:prstGeom prst="rect">
             <a:avLst/>
@@ -8447,8 +7602,8 @@
         </p:nvSpPr>
         <p:spPr>
           <a:xfrm>
-            <a:off x="8503920" y="1691640"/>
-            <a:ext cx="73152" cy="621792"/>
+            <a:off x="8503920" y="1783080"/>
+            <a:ext cx="73152" cy="749808"/>
           </a:xfrm>
           <a:prstGeom prst="rect">
             <a:avLst/>
@@ -8467,8 +7622,8 @@
         </p:nvSpPr>
         <p:spPr>
           <a:xfrm>
-            <a:off x="8641080" y="1737360"/>
-            <a:ext cx="3017520" cy="274320"/>
+            <a:off x="8641080" y="1856232"/>
+            <a:ext cx="3017520" cy="292608"/>
           </a:xfrm>
           <a:prstGeom prst="rect">
             <a:avLst/>
@@ -8484,7 +7639,7 @@
               <a:buNone/>
             </a:pPr>
             <a:r>
-              <a:rPr lang="en-US" sz="1100" b="1" dirty="0">
+              <a:rPr lang="en-US" sz="1200" b="1" dirty="0">
                 <a:solidFill>
                   <a:srgbClr val="1E3A5F"/>
                 </a:solidFill>
@@ -8494,7 +7649,7 @@
               </a:rPr>
               <a:t>Phase 3α (4月下旬〜)</a:t>
             </a:r>
-            <a:endParaRPr lang="en-US" sz="1100" dirty="0"/>
+            <a:endParaRPr lang="en-US" sz="1200" dirty="0"/>
           </a:p>
         </p:txBody>
       </p:sp>
@@ -8506,8 +7661,8 @@
         </p:nvSpPr>
         <p:spPr>
           <a:xfrm>
-            <a:off x="8641080" y="2020824"/>
-            <a:ext cx="3017520" cy="274320"/>
+            <a:off x="8641080" y="2167128"/>
+            <a:ext cx="3017520" cy="347472"/>
           </a:xfrm>
           <a:prstGeom prst="rect">
             <a:avLst/>
@@ -8523,7 +7678,7 @@
               <a:buNone/>
             </a:pPr>
             <a:r>
-              <a:rPr lang="en-US" sz="900" dirty="0">
+              <a:rPr lang="en-US" sz="1000" dirty="0">
                 <a:solidFill>
                   <a:srgbClr val="475569"/>
                 </a:solidFill>
@@ -8533,7 +7688,7 @@
               </a:rPr>
               <a:t>アプリ緊急改修・需要予測モジュール</a:t>
             </a:r>
-            <a:endParaRPr lang="en-US" sz="900" dirty="0"/>
+            <a:endParaRPr lang="en-US" sz="1000" dirty="0"/>
           </a:p>
         </p:txBody>
       </p:sp>
@@ -8545,8 +7700,8 @@
         </p:nvSpPr>
         <p:spPr>
           <a:xfrm>
-            <a:off x="8503920" y="2377440"/>
-            <a:ext cx="3200400" cy="621792"/>
+            <a:off x="8503920" y="2624328"/>
+            <a:ext cx="3200400" cy="749808"/>
           </a:xfrm>
           <a:prstGeom prst="rect">
             <a:avLst/>
@@ -8570,8 +7725,8 @@
         </p:nvSpPr>
         <p:spPr>
           <a:xfrm>
-            <a:off x="8503920" y="2377440"/>
-            <a:ext cx="73152" cy="621792"/>
+            <a:off x="8503920" y="2624328"/>
+            <a:ext cx="73152" cy="749808"/>
           </a:xfrm>
           <a:prstGeom prst="rect">
             <a:avLst/>
@@ -8590,8 +7745,8 @@
         </p:nvSpPr>
         <p:spPr>
           <a:xfrm>
-            <a:off x="8641080" y="2423160"/>
-            <a:ext cx="3017520" cy="274320"/>
+            <a:off x="8641080" y="2697480"/>
+            <a:ext cx="3017520" cy="292608"/>
           </a:xfrm>
           <a:prstGeom prst="rect">
             <a:avLst/>
@@ -8607,7 +7762,7 @@
               <a:buNone/>
             </a:pPr>
             <a:r>
-              <a:rPr lang="en-US" sz="1100" b="1" dirty="0">
+              <a:rPr lang="en-US" sz="1200" b="1" dirty="0">
                 <a:solidFill>
                   <a:srgbClr val="1E3A5F"/>
                 </a:solidFill>
@@ -8617,7 +7772,7 @@
               </a:rPr>
               <a:t>GW 緊急パイロット</a:t>
             </a:r>
-            <a:endParaRPr lang="en-US" sz="1100" dirty="0"/>
+            <a:endParaRPr lang="en-US" sz="1200" dirty="0"/>
           </a:p>
         </p:txBody>
       </p:sp>
@@ -8629,8 +7784,8 @@
         </p:nvSpPr>
         <p:spPr>
           <a:xfrm>
-            <a:off x="8641080" y="2706624"/>
-            <a:ext cx="3017520" cy="274320"/>
+            <a:off x="8641080" y="3008376"/>
+            <a:ext cx="3017520" cy="347472"/>
           </a:xfrm>
           <a:prstGeom prst="rect">
             <a:avLst/>
@@ -8646,7 +7801,7 @@
               <a:buNone/>
             </a:pPr>
             <a:r>
-              <a:rPr lang="en-US" sz="900" dirty="0">
+              <a:rPr lang="en-US" sz="1000" dirty="0">
                 <a:solidFill>
                   <a:srgbClr val="475569"/>
                 </a:solidFill>
@@ -8656,7 +7811,7 @@
               </a:rPr>
               <a:t>4/20〜5/7 先行試行（α 版活用）</a:t>
             </a:r>
-            <a:endParaRPr lang="en-US" sz="900" dirty="0"/>
+            <a:endParaRPr lang="en-US" sz="1000" dirty="0"/>
           </a:p>
         </p:txBody>
       </p:sp>
@@ -8668,131 +7823,8 @@
         </p:nvSpPr>
         <p:spPr>
           <a:xfrm>
-            <a:off x="8503920" y="3063240"/>
-            <a:ext cx="3200400" cy="621792"/>
-          </a:xfrm>
-          <a:prstGeom prst="rect">
-            <a:avLst/>
-          </a:prstGeom>
-          <a:solidFill>
-            <a:srgbClr val="FFFFFF"/>
-          </a:solidFill>
-          <a:ln w="19050">
-            <a:solidFill>
-              <a:srgbClr val="2E86AB"/>
-            </a:solidFill>
-            <a:prstDash val="solid"/>
-          </a:ln>
-        </p:spPr>
-      </p:sp>
-      <p:sp>
-        <p:nvSpPr>
-          <p:cNvPr id="18" name="Shape 15"/>
-          <p:cNvSpPr/>
-          <p:nvPr/>
-        </p:nvSpPr>
-        <p:spPr>
-          <a:xfrm>
-            <a:off x="8503920" y="3063240"/>
-            <a:ext cx="73152" cy="621792"/>
-          </a:xfrm>
-          <a:prstGeom prst="rect">
-            <a:avLst/>
-          </a:prstGeom>
-          <a:solidFill>
-            <a:srgbClr val="2E86AB"/>
-          </a:solidFill>
-          <a:ln/>
-        </p:spPr>
-      </p:sp>
-      <p:sp>
-        <p:nvSpPr>
-          <p:cNvPr id="19" name="Text 16"/>
-          <p:cNvSpPr/>
-          <p:nvPr/>
-        </p:nvSpPr>
-        <p:spPr>
-          <a:xfrm>
-            <a:off x="8641080" y="3108960"/>
-            <a:ext cx="3017520" cy="274320"/>
-          </a:xfrm>
-          <a:prstGeom prst="rect">
-            <a:avLst/>
-          </a:prstGeom>
-          <a:noFill/>
-          <a:ln/>
-        </p:spPr>
-        <p:txBody>
-          <a:bodyPr wrap="square" lIns="0" tIns="0" rIns="0" bIns="0" rtlCol="0" anchor="ctr"/>
-          <a:lstStyle/>
-          <a:p>
-            <a:pPr indent="0" marL="0">
-              <a:buNone/>
-            </a:pPr>
-            <a:r>
-              <a:rPr lang="en-US" sz="1100" b="1" dirty="0">
-                <a:solidFill>
-                  <a:srgbClr val="1E3A5F"/>
-                </a:solidFill>
-                <a:latin typeface="Yu Gothic UI" pitchFamily="34" charset="0"/>
-                <a:ea typeface="Yu Gothic UI" pitchFamily="34" charset="-122"/>
-                <a:cs typeface="Yu Gothic UI" pitchFamily="34" charset="-120"/>
-              </a:rPr>
-              <a:t>Phase 1 (5月中旬〜)</a:t>
-            </a:r>
-            <a:endParaRPr lang="en-US" sz="1100" dirty="0"/>
-          </a:p>
-        </p:txBody>
-      </p:sp>
-      <p:sp>
-        <p:nvSpPr>
-          <p:cNvPr id="20" name="Text 17"/>
-          <p:cNvSpPr/>
-          <p:nvPr/>
-        </p:nvSpPr>
-        <p:spPr>
-          <a:xfrm>
-            <a:off x="8641080" y="3392424"/>
-            <a:ext cx="3017520" cy="274320"/>
-          </a:xfrm>
-          <a:prstGeom prst="rect">
-            <a:avLst/>
-          </a:prstGeom>
-          <a:noFill/>
-          <a:ln/>
-        </p:spPr>
-        <p:txBody>
-          <a:bodyPr wrap="square" lIns="0" tIns="0" rIns="0" bIns="0" rtlCol="0" anchor="t"/>
-          <a:lstStyle/>
-          <a:p>
-            <a:pPr indent="0" marL="0">
-              <a:buNone/>
-            </a:pPr>
-            <a:r>
-              <a:rPr lang="en-US" sz="900" dirty="0">
-                <a:solidFill>
-                  <a:srgbClr val="475569"/>
-                </a:solidFill>
-                <a:latin typeface="Yu Gothic" pitchFamily="34" charset="0"/>
-                <a:ea typeface="Yu Gothic" pitchFamily="34" charset="-122"/>
-                <a:cs typeface="Yu Gothic" pitchFamily="34" charset="-120"/>
-              </a:rPr>
-              <a:t>選択的木曜前倒し試験運用</a:t>
-            </a:r>
-            <a:endParaRPr lang="en-US" sz="900" dirty="0"/>
-          </a:p>
-        </p:txBody>
-      </p:sp>
-      <p:sp>
-        <p:nvSpPr>
-          <p:cNvPr id="21" name="Shape 18"/>
-          <p:cNvSpPr/>
-          <p:nvPr/>
-        </p:nvSpPr>
-        <p:spPr>
-          <a:xfrm>
-            <a:off x="8503920" y="3749040"/>
-            <a:ext cx="3200400" cy="621792"/>
+            <a:off x="8503920" y="3465576"/>
+            <a:ext cx="3200400" cy="749808"/>
           </a:xfrm>
           <a:prstGeom prst="rect">
             <a:avLst/>
@@ -8810,14 +7842,14 @@
       </p:sp>
       <p:sp>
         <p:nvSpPr>
-          <p:cNvPr id="22" name="Shape 19"/>
-          <p:cNvSpPr/>
-          <p:nvPr/>
-        </p:nvSpPr>
-        <p:spPr>
-          <a:xfrm>
-            <a:off x="8503920" y="3749040"/>
-            <a:ext cx="73152" cy="621792"/>
+          <p:cNvPr id="18" name="Shape 15"/>
+          <p:cNvSpPr/>
+          <p:nvPr/>
+        </p:nvSpPr>
+        <p:spPr>
+          <a:xfrm>
+            <a:off x="8503920" y="3465576"/>
+            <a:ext cx="73152" cy="749808"/>
           </a:xfrm>
           <a:prstGeom prst="rect">
             <a:avLst/>
@@ -8830,14 +7862,14 @@
       </p:sp>
       <p:sp>
         <p:nvSpPr>
-          <p:cNvPr id="23" name="Text 20"/>
-          <p:cNvSpPr/>
-          <p:nvPr/>
-        </p:nvSpPr>
-        <p:spPr>
-          <a:xfrm>
-            <a:off x="8641080" y="3794760"/>
-            <a:ext cx="3017520" cy="274320"/>
+          <p:cNvPr id="19" name="Text 16"/>
+          <p:cNvSpPr/>
+          <p:nvPr/>
+        </p:nvSpPr>
+        <p:spPr>
+          <a:xfrm>
+            <a:off x="8641080" y="3538728"/>
+            <a:ext cx="3017520" cy="292608"/>
           </a:xfrm>
           <a:prstGeom prst="rect">
             <a:avLst/>
@@ -8853,7 +7885,7 @@
               <a:buNone/>
             </a:pPr>
             <a:r>
-              <a:rPr lang="en-US" sz="1100" b="1" dirty="0">
+              <a:rPr lang="en-US" sz="1200" b="1" dirty="0">
                 <a:solidFill>
                   <a:srgbClr val="1E3A5F"/>
                 </a:solidFill>
@@ -8863,20 +7895,20 @@
               </a:rPr>
               <a:t>Phase 2 (8月〜)</a:t>
             </a:r>
-            <a:endParaRPr lang="en-US" sz="1100" dirty="0"/>
-          </a:p>
-        </p:txBody>
-      </p:sp>
-      <p:sp>
-        <p:nvSpPr>
-          <p:cNvPr id="24" name="Text 21"/>
-          <p:cNvSpPr/>
-          <p:nvPr/>
-        </p:nvSpPr>
-        <p:spPr>
-          <a:xfrm>
-            <a:off x="8641080" y="4078224"/>
-            <a:ext cx="3017520" cy="274320"/>
+            <a:endParaRPr lang="en-US" sz="1200" dirty="0"/>
+          </a:p>
+        </p:txBody>
+      </p:sp>
+      <p:sp>
+        <p:nvSpPr>
+          <p:cNvPr id="20" name="Text 17"/>
+          <p:cNvSpPr/>
+          <p:nvPr/>
+        </p:nvSpPr>
+        <p:spPr>
+          <a:xfrm>
+            <a:off x="8641080" y="3849624"/>
+            <a:ext cx="3017520" cy="347472"/>
           </a:xfrm>
           <a:prstGeom prst="rect">
             <a:avLst/>
@@ -8892,7 +7924,7 @@
               <a:buNone/>
             </a:pPr>
             <a:r>
-              <a:rPr lang="en-US" sz="900" dirty="0">
+              <a:rPr lang="en-US" sz="1000" dirty="0">
                 <a:solidFill>
                   <a:srgbClr val="475569"/>
                 </a:solidFill>
@@ -8902,20 +7934,20 @@
               </a:rPr>
               <a:t>連休前退院枠・予約枠最適化</a:t>
             </a:r>
-            <a:endParaRPr lang="en-US" sz="900" dirty="0"/>
-          </a:p>
-        </p:txBody>
-      </p:sp>
-      <p:sp>
-        <p:nvSpPr>
-          <p:cNvPr id="25" name="Shape 22"/>
-          <p:cNvSpPr/>
-          <p:nvPr/>
-        </p:nvSpPr>
-        <p:spPr>
-          <a:xfrm>
-            <a:off x="8503920" y="4434840"/>
-            <a:ext cx="3200400" cy="621792"/>
+            <a:endParaRPr lang="en-US" sz="1000" dirty="0"/>
+          </a:p>
+        </p:txBody>
+      </p:sp>
+      <p:sp>
+        <p:nvSpPr>
+          <p:cNvPr id="21" name="Shape 18"/>
+          <p:cNvSpPr/>
+          <p:nvPr/>
+        </p:nvSpPr>
+        <p:spPr>
+          <a:xfrm>
+            <a:off x="8503920" y="4306824"/>
+            <a:ext cx="3200400" cy="749808"/>
           </a:xfrm>
           <a:prstGeom prst="rect">
             <a:avLst/>
@@ -8933,14 +7965,14 @@
       </p:sp>
       <p:sp>
         <p:nvSpPr>
-          <p:cNvPr id="26" name="Shape 23"/>
-          <p:cNvSpPr/>
-          <p:nvPr/>
-        </p:nvSpPr>
-        <p:spPr>
-          <a:xfrm>
-            <a:off x="8503920" y="4434840"/>
-            <a:ext cx="73152" cy="621792"/>
+          <p:cNvPr id="22" name="Shape 19"/>
+          <p:cNvSpPr/>
+          <p:nvPr/>
+        </p:nvSpPr>
+        <p:spPr>
+          <a:xfrm>
+            <a:off x="8503920" y="4306824"/>
+            <a:ext cx="73152" cy="749808"/>
           </a:xfrm>
           <a:prstGeom prst="rect">
             <a:avLst/>
@@ -8953,14 +7985,14 @@
       </p:sp>
       <p:sp>
         <p:nvSpPr>
-          <p:cNvPr id="27" name="Text 24"/>
-          <p:cNvSpPr/>
-          <p:nvPr/>
-        </p:nvSpPr>
-        <p:spPr>
-          <a:xfrm>
-            <a:off x="8641080" y="4480560"/>
-            <a:ext cx="3017520" cy="274320"/>
+          <p:cNvPr id="23" name="Text 20"/>
+          <p:cNvSpPr/>
+          <p:nvPr/>
+        </p:nvSpPr>
+        <p:spPr>
+          <a:xfrm>
+            <a:off x="8641080" y="4379976"/>
+            <a:ext cx="3017520" cy="292608"/>
           </a:xfrm>
           <a:prstGeom prst="rect">
             <a:avLst/>
@@ -8976,7 +8008,7 @@
               <a:buNone/>
             </a:pPr>
             <a:r>
-              <a:rPr lang="en-US" sz="1100" b="1" dirty="0">
+              <a:rPr lang="en-US" sz="1200" b="1" dirty="0">
                 <a:solidFill>
                   <a:srgbClr val="1E3A5F"/>
                 </a:solidFill>
@@ -8986,20 +8018,20 @@
               </a:rPr>
               <a:t>Phase 3β (10月〜)</a:t>
             </a:r>
-            <a:endParaRPr lang="en-US" sz="1100" dirty="0"/>
-          </a:p>
-        </p:txBody>
-      </p:sp>
-      <p:sp>
-        <p:nvSpPr>
-          <p:cNvPr id="28" name="Text 25"/>
-          <p:cNvSpPr/>
-          <p:nvPr/>
-        </p:nvSpPr>
-        <p:spPr>
-          <a:xfrm>
-            <a:off x="8641080" y="4764024"/>
-            <a:ext cx="3017520" cy="274320"/>
+            <a:endParaRPr lang="en-US" sz="1200" dirty="0"/>
+          </a:p>
+        </p:txBody>
+      </p:sp>
+      <p:sp>
+        <p:nvSpPr>
+          <p:cNvPr id="24" name="Text 21"/>
+          <p:cNvSpPr/>
+          <p:nvPr/>
+        </p:nvSpPr>
+        <p:spPr>
+          <a:xfrm>
+            <a:off x="8641080" y="4690872"/>
+            <a:ext cx="3017520" cy="347472"/>
           </a:xfrm>
           <a:prstGeom prst="rect">
             <a:avLst/>
@@ -9015,7 +8047,7 @@
               <a:buNone/>
             </a:pPr>
             <a:r>
-              <a:rPr lang="en-US" sz="900" dirty="0">
+              <a:rPr lang="en-US" sz="1000" dirty="0">
                 <a:solidFill>
                   <a:srgbClr val="475569"/>
                 </a:solidFill>
@@ -9025,13 +8057,13 @@
               </a:rPr>
               <a:t>ダッシュボード完成・院内展開</a:t>
             </a:r>
-            <a:endParaRPr lang="en-US" sz="900" dirty="0"/>
-          </a:p>
-        </p:txBody>
-      </p:sp>
-      <p:sp>
-        <p:nvSpPr>
-          <p:cNvPr id="29" name="Shape 26"/>
+            <a:endParaRPr lang="en-US" sz="1000" dirty="0"/>
+          </a:p>
+        </p:txBody>
+      </p:sp>
+      <p:sp>
+        <p:nvSpPr>
+          <p:cNvPr id="25" name="Shape 22"/>
           <p:cNvSpPr/>
           <p:nvPr/>
         </p:nvSpPr>
@@ -9051,7 +8083,7 @@
       </p:sp>
       <p:sp>
         <p:nvSpPr>
-          <p:cNvPr id="30" name="Text 27"/>
+          <p:cNvPr id="26" name="Text 23"/>
           <p:cNvSpPr/>
           <p:nvPr/>
         </p:nvSpPr>
@@ -9082,7 +8114,7 @@
                 <a:ea typeface="Yu Gothic UI" pitchFamily="34" charset="-122"/>
                 <a:cs typeface="Yu Gothic UI" pitchFamily="34" charset="-120"/>
               </a:rPr>
-              <a:t>本日のご決裁事項（3 項目）</a:t>
+              <a:t>本日のご決裁事項（2 項目）</a:t>
             </a:r>
             <a:endParaRPr lang="en-US" sz="1500" dirty="0"/>
           </a:p>
@@ -9090,14 +8122,14 @@
       </p:sp>
       <p:sp>
         <p:nvSpPr>
-          <p:cNvPr id="31" name="Text 28"/>
-          <p:cNvSpPr/>
-          <p:nvPr/>
-        </p:nvSpPr>
-        <p:spPr>
-          <a:xfrm>
-            <a:off x="640080" y="5760720"/>
-            <a:ext cx="10881360" cy="777240"/>
+          <p:cNvPr id="27" name="Text 24"/>
+          <p:cNvSpPr/>
+          <p:nvPr/>
+        </p:nvSpPr>
+        <p:spPr>
+          <a:xfrm>
+            <a:off x="640080" y="5806440"/>
+            <a:ext cx="10881360" cy="731520"/>
           </a:xfrm>
           <a:prstGeom prst="rect">
             <a:avLst/>
@@ -9138,24 +8170,7 @@
                 <a:ea typeface="Yu Gothic" pitchFamily="34" charset="-122"/>
                 <a:cs typeface="Yu Gothic" pitchFamily="34" charset="-120"/>
               </a:rPr>
-              <a:t>② Phase 1 試験運用の開始承認（Phase 3α 完成後、5月中旬〜8月中旬）</a:t>
-            </a:r>
-            <a:endParaRPr lang="en-US" sz="1100" dirty="0"/>
-          </a:p>
-          <a:p>
-            <a:pPr indent="0" marL="0">
-              <a:buNone/>
-            </a:pPr>
-            <a:r>
-              <a:rPr lang="en-US" sz="1100" b="1" dirty="0">
-                <a:solidFill>
-                  <a:srgbClr val="122342"/>
-                </a:solidFill>
-                <a:latin typeface="Yu Gothic" pitchFamily="34" charset="0"/>
-                <a:ea typeface="Yu Gothic" pitchFamily="34" charset="-122"/>
-                <a:cs typeface="Yu Gothic" pitchFamily="34" charset="-120"/>
-              </a:rPr>
-              <a:t>③ GW2026 緊急パイロットの可否判断（4/20 頃からの退院調整試行）</a:t>
+              <a:t>② GW2026 緊急パイロットの可否判断（4/20 頃からの退院調整試行）</a:t>
             </a:r>
             <a:endParaRPr lang="en-US" sz="1100" dirty="0"/>
           </a:p>
@@ -9285,7 +8300,7 @@
                 <a:ea typeface="Yu Gothic" pitchFamily="34" charset="-122"/>
                 <a:cs typeface="Yu Gothic" pitchFamily="34" charset="-120"/>
               </a:rPr>
-              <a:t>2 / 17</a:t>
+              <a:t>2 / 16</a:t>
             </a:r>
             <a:endParaRPr lang="en-US" sz="900" dirty="0"/>
           </a:p>
@@ -9363,7 +8378,7 @@
                 <a:ea typeface="Yu Gothic" pitchFamily="34" charset="-122"/>
                 <a:cs typeface="Yu Gothic" pitchFamily="34" charset="-120"/>
               </a:rPr>
-              <a:t>4つの発見と、そこから導かれる 4つの提案</a:t>
+              <a:t>4つの発見と、そこから導かれる 3つの提案</a:t>
             </a:r>
             <a:endParaRPr lang="en-US" sz="1400" dirty="0"/>
           </a:p>
@@ -9461,7 +8476,7 @@
                 <a:ea typeface="Yu Gothic UI" pitchFamily="34" charset="-122"/>
                 <a:cs typeface="Yu Gothic UI" pitchFamily="34" charset="-120"/>
               </a:rPr>
-              <a:t>4 つの提案</a:t>
+              <a:t>3 つの提案</a:t>
             </a:r>
             <a:endParaRPr lang="en-US" sz="1600" dirty="0"/>
           </a:p>
@@ -9612,7 +8627,7 @@
         </p:nvSpPr>
         <p:spPr>
           <a:xfrm>
-            <a:off x="457200" y="3200400"/>
+            <a:off x="457200" y="3154680"/>
             <a:ext cx="457200" cy="457200"/>
           </a:xfrm>
           <a:prstGeom prst="ellipse">
@@ -9632,7 +8647,7 @@
         </p:nvSpPr>
         <p:spPr>
           <a:xfrm>
-            <a:off x="457200" y="3200400"/>
+            <a:off x="457200" y="3154680"/>
             <a:ext cx="457200" cy="457200"/>
           </a:xfrm>
           <a:prstGeom prst="rect">
@@ -9671,7 +8686,7 @@
         </p:nvSpPr>
         <p:spPr>
           <a:xfrm>
-            <a:off x="1051560" y="3182112"/>
+            <a:off x="1051560" y="3136392"/>
             <a:ext cx="4983480" cy="365760"/>
           </a:xfrm>
           <a:prstGeom prst="rect">
@@ -9710,7 +8725,7 @@
         </p:nvSpPr>
         <p:spPr>
           <a:xfrm>
-            <a:off x="1051560" y="3584448"/>
+            <a:off x="1051560" y="3538728"/>
             <a:ext cx="4983480" cy="457200"/>
           </a:xfrm>
           <a:prstGeom prst="rect">
@@ -9749,7 +8764,7 @@
         </p:nvSpPr>
         <p:spPr>
           <a:xfrm>
-            <a:off x="457200" y="4251960"/>
+            <a:off x="457200" y="4160520"/>
             <a:ext cx="457200" cy="457200"/>
           </a:xfrm>
           <a:prstGeom prst="ellipse">
@@ -9769,7 +8784,7 @@
         </p:nvSpPr>
         <p:spPr>
           <a:xfrm>
-            <a:off x="457200" y="4251960"/>
+            <a:off x="457200" y="4160520"/>
             <a:ext cx="457200" cy="457200"/>
           </a:xfrm>
           <a:prstGeom prst="rect">
@@ -9808,7 +8823,7 @@
         </p:nvSpPr>
         <p:spPr>
           <a:xfrm>
-            <a:off x="1051560" y="4233672"/>
+            <a:off x="1051560" y="4142232"/>
             <a:ext cx="4983480" cy="365760"/>
           </a:xfrm>
           <a:prstGeom prst="rect">
@@ -9847,7 +8862,7 @@
         </p:nvSpPr>
         <p:spPr>
           <a:xfrm>
-            <a:off x="1051560" y="4636008"/>
+            <a:off x="1051560" y="4544568"/>
             <a:ext cx="4983480" cy="457200"/>
           </a:xfrm>
           <a:prstGeom prst="rect">
@@ -9886,7 +8901,7 @@
         </p:nvSpPr>
         <p:spPr>
           <a:xfrm>
-            <a:off x="457200" y="5303520"/>
+            <a:off x="457200" y="5166360"/>
             <a:ext cx="457200" cy="457200"/>
           </a:xfrm>
           <a:prstGeom prst="ellipse">
@@ -9906,7 +8921,7 @@
         </p:nvSpPr>
         <p:spPr>
           <a:xfrm>
-            <a:off x="457200" y="5303520"/>
+            <a:off x="457200" y="5166360"/>
             <a:ext cx="457200" cy="457200"/>
           </a:xfrm>
           <a:prstGeom prst="rect">
@@ -9945,7 +8960,7 @@
         </p:nvSpPr>
         <p:spPr>
           <a:xfrm>
-            <a:off x="1051560" y="5285232"/>
+            <a:off x="1051560" y="5148072"/>
             <a:ext cx="4983480" cy="365760"/>
           </a:xfrm>
           <a:prstGeom prst="rect">
@@ -9984,7 +8999,7 @@
         </p:nvSpPr>
         <p:spPr>
           <a:xfrm>
-            <a:off x="1051560" y="5687568"/>
+            <a:off x="1051560" y="5550408"/>
             <a:ext cx="4983480" cy="457200"/>
           </a:xfrm>
           <a:prstGeom prst="rect">
@@ -10043,7 +9058,7 @@
         </p:nvSpPr>
         <p:spPr>
           <a:xfrm>
-            <a:off x="6309360" y="2148840"/>
+            <a:off x="6309360" y="2331720"/>
             <a:ext cx="457200" cy="457200"/>
           </a:xfrm>
           <a:prstGeom prst="ellipse">
@@ -10063,7 +9078,7 @@
         </p:nvSpPr>
         <p:spPr>
           <a:xfrm>
-            <a:off x="6309360" y="2148840"/>
+            <a:off x="6309360" y="2331720"/>
             <a:ext cx="457200" cy="457200"/>
           </a:xfrm>
           <a:prstGeom prst="rect">
@@ -10102,8 +9117,8 @@
         </p:nvSpPr>
         <p:spPr>
           <a:xfrm>
-            <a:off x="6903720" y="2130552"/>
-            <a:ext cx="4800600" cy="365760"/>
+            <a:off x="6903720" y="2313432"/>
+            <a:ext cx="4800600" cy="411480"/>
           </a:xfrm>
           <a:prstGeom prst="rect">
             <a:avLst/>
@@ -10119,7 +9134,7 @@
               <a:buNone/>
             </a:pPr>
             <a:r>
-              <a:rPr lang="en-US" sz="1300" b="1" dirty="0">
+              <a:rPr lang="en-US" sz="1400" b="1" dirty="0">
                 <a:solidFill>
                   <a:srgbClr val="1E3A5F"/>
                 </a:solidFill>
@@ -10127,9 +9142,9 @@
                 <a:ea typeface="Yu Gothic UI" pitchFamily="34" charset="-122"/>
                 <a:cs typeface="Yu Gothic UI" pitchFamily="34" charset="-120"/>
               </a:rPr>
-              <a:t>木曜退院の前倒し</a:t>
-            </a:r>
-            <a:endParaRPr lang="en-US" sz="1300" dirty="0"/>
+              <a:t>大型連休前の退院枠 事前確保</a:t>
+            </a:r>
+            <a:endParaRPr lang="en-US" sz="1400" dirty="0"/>
           </a:p>
         </p:txBody>
       </p:sp>
@@ -10141,8 +9156,8 @@
         </p:nvSpPr>
         <p:spPr>
           <a:xfrm>
-            <a:off x="6903720" y="2532888"/>
-            <a:ext cx="4800600" cy="457200"/>
+            <a:off x="6903720" y="2752344"/>
+            <a:ext cx="4800600" cy="548640"/>
           </a:xfrm>
           <a:prstGeom prst="rect">
             <a:avLst/>
@@ -10166,7 +9181,7 @@
                 <a:ea typeface="Yu Gothic" pitchFamily="34" charset="-122"/>
                 <a:cs typeface="Yu Gothic" pitchFamily="34" charset="-120"/>
               </a:rPr>
-              <a:t>週末空床を同日中の緊急需要で吸収</a:t>
+              <a:t>連休明け詰め込みの回避</a:t>
             </a:r>
             <a:endParaRPr lang="en-US" sz="1100" dirty="0"/>
           </a:p>
@@ -10180,7 +9195,7 @@
         </p:nvSpPr>
         <p:spPr>
           <a:xfrm>
-            <a:off x="6309360" y="3200400"/>
+            <a:off x="6309360" y="3657600"/>
             <a:ext cx="457200" cy="457200"/>
           </a:xfrm>
           <a:prstGeom prst="ellipse">
@@ -10200,7 +9215,7 @@
         </p:nvSpPr>
         <p:spPr>
           <a:xfrm>
-            <a:off x="6309360" y="3200400"/>
+            <a:off x="6309360" y="3657600"/>
             <a:ext cx="457200" cy="457200"/>
           </a:xfrm>
           <a:prstGeom prst="rect">
@@ -10239,8 +9254,8 @@
         </p:nvSpPr>
         <p:spPr>
           <a:xfrm>
-            <a:off x="6903720" y="3182112"/>
-            <a:ext cx="4800600" cy="365760"/>
+            <a:off x="6903720" y="3639312"/>
+            <a:ext cx="4800600" cy="411480"/>
           </a:xfrm>
           <a:prstGeom prst="rect">
             <a:avLst/>
@@ -10256,7 +9271,7 @@
               <a:buNone/>
             </a:pPr>
             <a:r>
-              <a:rPr lang="en-US" sz="1300" b="1" dirty="0">
+              <a:rPr lang="en-US" sz="1400" b="1" dirty="0">
                 <a:solidFill>
                   <a:srgbClr val="1E3A5F"/>
                 </a:solidFill>
@@ -10264,9 +9279,9 @@
                 <a:ea typeface="Yu Gothic UI" pitchFamily="34" charset="-122"/>
                 <a:cs typeface="Yu Gothic UI" pitchFamily="34" charset="-120"/>
               </a:rPr>
-              <a:t>大型連休前の退院枠 事前確保</a:t>
-            </a:r>
-            <a:endParaRPr lang="en-US" sz="1300" dirty="0"/>
+              <a:t>連休前後の予約枠を data-driven 配置</a:t>
+            </a:r>
+            <a:endParaRPr lang="en-US" sz="1400" dirty="0"/>
           </a:p>
         </p:txBody>
       </p:sp>
@@ -10278,8 +9293,8 @@
         </p:nvSpPr>
         <p:spPr>
           <a:xfrm>
-            <a:off x="6903720" y="3584448"/>
-            <a:ext cx="4800600" cy="457200"/>
+            <a:off x="6903720" y="4078224"/>
+            <a:ext cx="4800600" cy="548640"/>
           </a:xfrm>
           <a:prstGeom prst="rect">
             <a:avLst/>
@@ -10303,7 +9318,7 @@
                 <a:ea typeface="Yu Gothic" pitchFamily="34" charset="-122"/>
                 <a:cs typeface="Yu Gothic" pitchFamily="34" charset="-120"/>
               </a:rPr>
-              <a:t>連休明け詰め込みの回避</a:t>
+              <a:t>既存運用の体系化</a:t>
             </a:r>
             <a:endParaRPr lang="en-US" sz="1100" dirty="0"/>
           </a:p>
@@ -10317,7 +9332,7 @@
         </p:nvSpPr>
         <p:spPr>
           <a:xfrm>
-            <a:off x="6309360" y="4251960"/>
+            <a:off x="6309360" y="4983480"/>
             <a:ext cx="457200" cy="457200"/>
           </a:xfrm>
           <a:prstGeom prst="ellipse">
@@ -10337,7 +9352,7 @@
         </p:nvSpPr>
         <p:spPr>
           <a:xfrm>
-            <a:off x="6309360" y="4251960"/>
+            <a:off x="6309360" y="4983480"/>
             <a:ext cx="457200" cy="457200"/>
           </a:xfrm>
           <a:prstGeom prst="rect">
@@ -10376,8 +9391,8 @@
         </p:nvSpPr>
         <p:spPr>
           <a:xfrm>
-            <a:off x="6903720" y="4233672"/>
-            <a:ext cx="4800600" cy="365760"/>
+            <a:off x="6903720" y="4965192"/>
+            <a:ext cx="4800600" cy="411480"/>
           </a:xfrm>
           <a:prstGeom prst="rect">
             <a:avLst/>
@@ -10393,7 +9408,7 @@
               <a:buNone/>
             </a:pPr>
             <a:r>
-              <a:rPr lang="en-US" sz="1300" b="1" dirty="0">
+              <a:rPr lang="en-US" sz="1400" b="1" dirty="0">
                 <a:solidFill>
                   <a:srgbClr val="1E3A5F"/>
                 </a:solidFill>
@@ -10401,9 +9416,9 @@
                 <a:ea typeface="Yu Gothic UI" pitchFamily="34" charset="-122"/>
                 <a:cs typeface="Yu Gothic UI" pitchFamily="34" charset="-120"/>
               </a:rPr>
-              <a:t>連休前後の予約枠を data-driven 配置</a:t>
-            </a:r>
-            <a:endParaRPr lang="en-US" sz="1300" dirty="0"/>
+              <a:t>Phase 3α 需要予測ダッシュボード</a:t>
+            </a:r>
+            <a:endParaRPr lang="en-US" sz="1400" dirty="0"/>
           </a:p>
         </p:txBody>
       </p:sp>
@@ -10415,8 +9430,8 @@
         </p:nvSpPr>
         <p:spPr>
           <a:xfrm>
-            <a:off x="6903720" y="4636008"/>
-            <a:ext cx="4800600" cy="457200"/>
+            <a:off x="6903720" y="5404104"/>
+            <a:ext cx="4800600" cy="548640"/>
           </a:xfrm>
           <a:prstGeom prst="rect">
             <a:avLst/>
@@ -10440,7 +9455,7 @@
                 <a:ea typeface="Yu Gothic" pitchFamily="34" charset="-122"/>
                 <a:cs typeface="Yu Gothic" pitchFamily="34" charset="-120"/>
               </a:rPr>
-              <a:t>既存運用の体系化</a:t>
+              <a:t>病棟運用判断の数字化基盤を緊急実装</a:t>
             </a:r>
             <a:endParaRPr lang="en-US" sz="1100" dirty="0"/>
           </a:p>
@@ -10454,14 +9469,14 @@
         </p:nvSpPr>
         <p:spPr>
           <a:xfrm>
-            <a:off x="6309360" y="5303520"/>
-            <a:ext cx="457200" cy="457200"/>
-          </a:xfrm>
-          <a:prstGeom prst="ellipse">
-            <a:avLst/>
-          </a:prstGeom>
-          <a:solidFill>
-            <a:srgbClr val="C73E1D"/>
+            <a:off x="457200" y="6217920"/>
+            <a:ext cx="11247120" cy="365760"/>
+          </a:xfrm>
+          <a:prstGeom prst="rect">
+            <a:avLst/>
+          </a:prstGeom>
+          <a:solidFill>
+            <a:srgbClr val="1E3A5F"/>
           </a:solidFill>
           <a:ln/>
         </p:spPr>
@@ -10474,8 +9489,8 @@
         </p:nvSpPr>
         <p:spPr>
           <a:xfrm>
-            <a:off x="6309360" y="5303520"/>
-            <a:ext cx="457200" cy="457200"/>
+            <a:off x="640080" y="6217920"/>
+            <a:ext cx="10881360" cy="365760"/>
           </a:xfrm>
           <a:prstGeom prst="rect">
             <a:avLst/>
@@ -10491,168 +9506,70 @@
               <a:buNone/>
             </a:pPr>
             <a:r>
-              <a:rPr lang="en-US" sz="2000" b="1" dirty="0">
-                <a:solidFill>
-                  <a:srgbClr val="FFFFFF"/>
-                </a:solidFill>
-                <a:latin typeface="Yu Gothic UI" pitchFamily="34" charset="0"/>
-                <a:ea typeface="Yu Gothic UI" pitchFamily="34" charset="-122"/>
-                <a:cs typeface="Yu Gothic UI" pitchFamily="34" charset="-120"/>
-              </a:rPr>
-              <a:t>4</a:t>
-            </a:r>
-            <a:endParaRPr lang="en-US" sz="2000" dirty="0"/>
-          </a:p>
-        </p:txBody>
-      </p:sp>
-      <p:sp>
-        <p:nvSpPr>
-          <p:cNvPr id="41" name="Text 39"/>
-          <p:cNvSpPr/>
-          <p:nvPr/>
-        </p:nvSpPr>
-        <p:spPr>
-          <a:xfrm>
-            <a:off x="6903720" y="5285232"/>
-            <a:ext cx="4800600" cy="365760"/>
-          </a:xfrm>
-          <a:prstGeom prst="rect">
-            <a:avLst/>
-          </a:prstGeom>
-          <a:noFill/>
-          <a:ln/>
-        </p:spPr>
-        <p:txBody>
-          <a:bodyPr wrap="square" lIns="0" tIns="0" rIns="0" bIns="0" rtlCol="0" anchor="t"/>
-          <a:lstStyle/>
-          <a:p>
-            <a:pPr indent="0" marL="0">
-              <a:buNone/>
-            </a:pPr>
-            <a:r>
-              <a:rPr lang="en-US" sz="1300" b="1" dirty="0">
-                <a:solidFill>
-                  <a:srgbClr val="1E3A5F"/>
-                </a:solidFill>
-                <a:latin typeface="Yu Gothic UI" pitchFamily="34" charset="0"/>
-                <a:ea typeface="Yu Gothic UI" pitchFamily="34" charset="-122"/>
-                <a:cs typeface="Yu Gothic UI" pitchFamily="34" charset="-120"/>
-              </a:rPr>
-              <a:t>充填確率ダッシュボード</a:t>
-            </a:r>
-            <a:endParaRPr lang="en-US" sz="1300" dirty="0"/>
-          </a:p>
-        </p:txBody>
-      </p:sp>
-      <p:sp>
-        <p:nvSpPr>
-          <p:cNvPr id="42" name="Text 40"/>
-          <p:cNvSpPr/>
-          <p:nvPr/>
-        </p:nvSpPr>
-        <p:spPr>
-          <a:xfrm>
-            <a:off x="6903720" y="5687568"/>
-            <a:ext cx="4800600" cy="457200"/>
-          </a:xfrm>
-          <a:prstGeom prst="rect">
-            <a:avLst/>
-          </a:prstGeom>
-          <a:noFill/>
-          <a:ln/>
-        </p:spPr>
-        <p:txBody>
-          <a:bodyPr wrap="square" lIns="0" tIns="0" rIns="0" bIns="0" rtlCol="0" anchor="t"/>
-          <a:lstStyle/>
-          <a:p>
-            <a:pPr indent="0" marL="0">
-              <a:buNone/>
-            </a:pPr>
-            <a:r>
-              <a:rPr lang="en-US" sz="1100" dirty="0">
-                <a:solidFill>
-                  <a:srgbClr val="475569"/>
+              <a:rPr lang="en-US" sz="1100" b="1" dirty="0">
+                <a:solidFill>
+                  <a:srgbClr val="C9A961"/>
                 </a:solidFill>
                 <a:latin typeface="Yu Gothic" pitchFamily="34" charset="0"/>
                 <a:ea typeface="Yu Gothic" pitchFamily="34" charset="-122"/>
                 <a:cs typeface="Yu Gothic" pitchFamily="34" charset="-120"/>
               </a:rPr>
-              <a:t>v3.5 への機能追加で運用判断を数字化</a:t>
-            </a:r>
-            <a:endParaRPr lang="en-US" sz="1100" dirty="0"/>
-          </a:p>
-        </p:txBody>
-      </p:sp>
-      <p:sp>
-        <p:nvSpPr>
-          <p:cNvPr id="43" name="Shape 41"/>
-          <p:cNvSpPr/>
-          <p:nvPr/>
-        </p:nvSpPr>
-        <p:spPr>
-          <a:xfrm>
-            <a:off x="457200" y="6217920"/>
-            <a:ext cx="11247120" cy="365760"/>
-          </a:xfrm>
-          <a:prstGeom prst="rect">
-            <a:avLst/>
-          </a:prstGeom>
-          <a:solidFill>
-            <a:srgbClr val="1E3A5F"/>
-          </a:solidFill>
-          <a:ln/>
-        </p:spPr>
-      </p:sp>
-      <p:sp>
-        <p:nvSpPr>
-          <p:cNvPr id="44" name="Text 42"/>
-          <p:cNvSpPr/>
-          <p:nvPr/>
-        </p:nvSpPr>
-        <p:spPr>
-          <a:xfrm>
-            <a:off x="640080" y="6217920"/>
-            <a:ext cx="10881360" cy="365760"/>
-          </a:xfrm>
-          <a:prstGeom prst="rect">
-            <a:avLst/>
-          </a:prstGeom>
-          <a:noFill/>
-          <a:ln/>
-        </p:spPr>
-        <p:txBody>
-          <a:bodyPr wrap="square" lIns="0" tIns="0" rIns="0" bIns="0" rtlCol="0" anchor="ctr"/>
-          <a:lstStyle/>
-          <a:p>
+              <a:t>目標 KPI  </a:t>
+            </a:r>
             <a:pPr algn="ctr" indent="0" marL="0">
               <a:buNone/>
             </a:pPr>
             <a:r>
-              <a:rPr lang="en-US" sz="1100" b="1" dirty="0">
-                <a:solidFill>
-                  <a:srgbClr val="C9A961"/>
+              <a:rPr lang="en-US" sz="1100" dirty="0">
+                <a:solidFill>
+                  <a:srgbClr val="FFFFFF"/>
                 </a:solidFill>
                 <a:latin typeface="Yu Gothic" pitchFamily="34" charset="0"/>
                 <a:ea typeface="Yu Gothic" pitchFamily="34" charset="-122"/>
                 <a:cs typeface="Yu Gothic" pitchFamily="34" charset="-120"/>
               </a:rPr>
-              <a:t>目標 KPI  </a:t>
-            </a:r>
+              <a:t>Phase 2 連休対策で 年間 300〜500 万円の空床ロス回収（5 大型連休合計）</a:t>
+            </a:r>
+            <a:endParaRPr lang="en-US" sz="1100" dirty="0"/>
+          </a:p>
+        </p:txBody>
+      </p:sp>
+      <p:sp>
+        <p:nvSpPr>
+          <p:cNvPr id="41" name="Text 39"/>
+          <p:cNvSpPr/>
+          <p:nvPr/>
+        </p:nvSpPr>
+        <p:spPr>
+          <a:xfrm>
+            <a:off x="457200" y="6629400"/>
+            <a:ext cx="11247120" cy="274320"/>
+          </a:xfrm>
+          <a:prstGeom prst="rect">
+            <a:avLst/>
+          </a:prstGeom>
+          <a:noFill/>
+          <a:ln/>
+        </p:spPr>
+        <p:txBody>
+          <a:bodyPr wrap="square" lIns="0" tIns="0" rIns="0" bIns="0" rtlCol="0" anchor="ctr"/>
+          <a:lstStyle/>
+          <a:p>
             <a:pPr algn="ctr" indent="0" marL="0">
               <a:buNone/>
             </a:pPr>
             <a:r>
-              <a:rPr lang="en-US" sz="1100" dirty="0">
-                <a:solidFill>
-                  <a:srgbClr val="FFFFFF"/>
+              <a:rPr lang="en-US" sz="900" i="1" dirty="0">
+                <a:solidFill>
+                  <a:srgbClr val="94A3B8"/>
                 </a:solidFill>
                 <a:latin typeface="Yu Gothic" pitchFamily="34" charset="0"/>
                 <a:ea typeface="Yu Gothic" pitchFamily="34" charset="-122"/>
                 <a:cs typeface="Yu Gothic" pitchFamily="34" charset="-120"/>
               </a:rPr>
-              <a:t>高需要週のみ選択発動  |   年間吸収効果  300〜700 万円（P25-P75、中央値 503 万円）</a:t>
-            </a:r>
-            <a:endParaRPr lang="en-US" sz="1100" dirty="0"/>
+              <a:t>※ 当初検討の「Phase 1 木曜退院前倒し」はデータ精査により撤回（高需要週は年 2〜3回のみ、経営インパクト限定的）。提案を 3 項目に精査。</a:t>
+            </a:r>
+            <a:endParaRPr lang="en-US" sz="900" dirty="0"/>
           </a:p>
         </p:txBody>
       </p:sp>
@@ -10780,7 +9697,7 @@
                 <a:ea typeface="Yu Gothic" pitchFamily="34" charset="-122"/>
                 <a:cs typeface="Yu Gothic" pitchFamily="34" charset="-120"/>
               </a:rPr>
-              <a:t>3 / 17</a:t>
+              <a:t>3 / 16</a:t>
             </a:r>
             <a:endParaRPr lang="en-US" sz="900" dirty="0"/>
           </a:p>
@@ -12066,7 +10983,7 @@
                 <a:ea typeface="Yu Gothic" pitchFamily="34" charset="-122"/>
                 <a:cs typeface="Yu Gothic" pitchFamily="34" charset="-120"/>
               </a:rPr>
-              <a:t>4 / 17</a:t>
+              <a:t>4 / 16</a:t>
             </a:r>
             <a:endParaRPr lang="en-US" sz="900" dirty="0"/>
           </a:p>
@@ -12707,7 +11624,7 @@
                 <a:ea typeface="Yu Gothic" pitchFamily="34" charset="-122"/>
                 <a:cs typeface="Yu Gothic" pitchFamily="34" charset="-120"/>
               </a:rPr>
-              <a:t>5 / 17</a:t>
+              <a:t>5 / 16</a:t>
             </a:r>
             <a:endParaRPr lang="en-US" sz="900" dirty="0"/>
           </a:p>
@@ -13348,7 +12265,7 @@
                 <a:ea typeface="Yu Gothic" pitchFamily="34" charset="-122"/>
                 <a:cs typeface="Yu Gothic" pitchFamily="34" charset="-120"/>
               </a:rPr>
-              <a:t>6 / 17</a:t>
+              <a:t>6 / 16</a:t>
             </a:r>
             <a:endParaRPr lang="en-US" sz="900" dirty="0"/>
           </a:p>
@@ -14030,7 +12947,7 @@
                 <a:ea typeface="Yu Gothic" pitchFamily="34" charset="-122"/>
                 <a:cs typeface="Yu Gothic" pitchFamily="34" charset="-120"/>
               </a:rPr>
-              <a:t>7 / 17</a:t>
+              <a:t>7 / 16</a:t>
             </a:r>
             <a:endParaRPr lang="en-US" sz="900" dirty="0"/>
           </a:p>
@@ -14786,7 +13703,7 @@
                 <a:ea typeface="Yu Gothic" pitchFamily="34" charset="-122"/>
                 <a:cs typeface="Yu Gothic" pitchFamily="34" charset="-120"/>
               </a:rPr>
-              <a:t>8 / 17</a:t>
+              <a:t>8 / 16</a:t>
             </a:r>
             <a:endParaRPr lang="en-US" sz="900" dirty="0"/>
           </a:p>
@@ -15427,7 +14344,7 @@
                 <a:ea typeface="Yu Gothic" pitchFamily="34" charset="-122"/>
                 <a:cs typeface="Yu Gothic" pitchFamily="34" charset="-120"/>
               </a:rPr>
-              <a:t>9 / 17</a:t>
+              <a:t>9 / 16</a:t>
             </a:r>
             <a:endParaRPr lang="en-US" sz="900" dirty="0"/>
           </a:p>

--- a/docs/admin/slides/weekend_holiday_kpi/weekend_holiday_kpi.pptx
+++ b/docs/admin/slides/weekend_holiday_kpi/weekend_holiday_kpi.pptx
@@ -4,6 +4,9 @@
   <p:sldMasterIdLst>
     <p:sldMasterId id="2147483648" r:id="rId1"/>
   </p:sldMasterIdLst>
+  <p:notesMasterIdLst>
+    <p:notesMasterId r:id="rId18"/>
+  </p:notesMasterIdLst>
   <p:sldIdLst>
     <p:sldId id="256" r:id="rId2"/>
     <p:sldId id="257" r:id="rId3"/>
@@ -22,9 +25,6 @@
     <p:sldId id="270" r:id="rId16"/>
     <p:sldId id="271" r:id="rId17"/>
   </p:sldIdLst>
-  <p:notesMasterIdLst>
-    <p:notesMasterId r:id="rId18"/>
-  </p:notesMasterIdLst>
   <p:sldSz cx="12192000" cy="6858000"/>
   <p:notesSz cx="6858000" cy="12192000"/>
   <p:defaultTextStyle>
@@ -119,6 +119,11 @@
       </a:defRPr>
     </a:lvl9pPr>
   </p:defaultTextStyle>
+  <p:extLst>
+    <p:ext uri="{EFAFB233-063F-42B5-8137-9DF3F51BA10A}">
+      <p15:sldGuideLst xmlns:p15="http://schemas.microsoft.com/office/powerpoint/2012/main"/>
+    </p:ext>
+  </p:extLst>
 </p:presentation>
 </file>
 
@@ -144,241 +149,17 @@
           <a:chExt cx="0" cy="0"/>
         </a:xfrm>
       </p:grpSpPr>
-      <p:sp>
-        <p:nvSpPr>
-          <p:cNvPr id="2" name="Header Placeholder 1"/>
-          <p:cNvSpPr>
-            <a:spLocks noGrp="1"/>
-          </p:cNvSpPr>
-          <p:nvPr>
-            <p:ph type="hdr" sz="quarter"/>
-          </p:nvPr>
-        </p:nvSpPr>
-        <p:spPr>
-          <a:xfrm>
-            <a:off x="0" y="0"/>
-            <a:ext cx="2971800" cy="458788"/>
-          </a:xfrm>
-          <a:prstGeom prst="rect">
-            <a:avLst/>
-          </a:prstGeom>
-        </p:spPr>
-        <p:txBody>
-          <a:bodyPr vert="horz" lIns="91440" tIns="45720" rIns="91440" bIns="45720" rtlCol="0"/>
-          <a:lstStyle>
-            <a:lvl1pPr algn="l">
-              <a:defRPr sz="1200"/>
-            </a:lvl1pPr>
-          </a:lstStyle>
-          <a:p>
-            <a:endParaRPr lang="en-US"/>
-          </a:p>
-        </p:txBody>
-      </p:sp>
-      <p:sp>
-        <p:nvSpPr>
-          <p:cNvPr id="3" name="Date Placeholder 2"/>
-          <p:cNvSpPr>
-            <a:spLocks noGrp="1"/>
-          </p:cNvSpPr>
-          <p:nvPr>
-            <p:ph type="dt" idx="1"/>
-          </p:nvPr>
-        </p:nvSpPr>
-        <p:spPr>
-          <a:xfrm>
-            <a:off x="3884613" y="0"/>
-            <a:ext cx="2971800" cy="458788"/>
-          </a:xfrm>
-          <a:prstGeom prst="rect">
-            <a:avLst/>
-          </a:prstGeom>
-        </p:spPr>
-        <p:txBody>
-          <a:bodyPr vert="horz" lIns="91440" tIns="45720" rIns="91440" bIns="45720" rtlCol="0"/>
-          <a:lstStyle>
-            <a:lvl1pPr algn="r">
-              <a:defRPr sz="1200"/>
-            </a:lvl1pPr>
-          </a:lstStyle>
-          <a:p>
-            <a:fld id="{5282F153-3F37-0F45-9E97-73ACFA13230C}" type="datetimeFigureOut">
-              <a:rPr lang="en-US"/>
-              <a:t>7/23/19</a:t>
-            </a:fld>
-            <a:endParaRPr lang="en-US"/>
-          </a:p>
-        </p:txBody>
-      </p:sp>
-      <p:sp>
-        <p:nvSpPr>
-          <p:cNvPr id="4" name="Slide Image Placeholder 3"/>
-          <p:cNvSpPr>
-            <a:spLocks noGrp="1" noRot="1" noChangeAspect="1"/>
-          </p:cNvSpPr>
-          <p:nvPr>
-            <p:ph type="sldImg" idx="2"/>
-          </p:nvPr>
-        </p:nvSpPr>
-        <p:spPr>
-          <a:xfrm>
-            <a:off x="685800" y="1143000"/>
-            <a:ext cx="5486400" cy="3086100"/>
-          </a:xfrm>
-          <a:prstGeom prst="rect">
-            <a:avLst/>
-          </a:prstGeom>
-          <a:noFill/>
-          <a:ln w="12700">
-            <a:solidFill>
-              <a:prstClr val="black"/>
-            </a:solidFill>
-          </a:ln>
-        </p:spPr>
-        <p:txBody>
-          <a:bodyPr vert="horz" lIns="91440" tIns="45720" rIns="91440" bIns="45720" rtlCol="0" anchor="ctr"/>
-          <a:lstStyle/>
-          <a:p>
-            <a:endParaRPr lang="en-US"/>
-          </a:p>
-        </p:txBody>
-      </p:sp>
-      <p:sp>
-        <p:nvSpPr>
-          <p:cNvPr id="5" name="Notes Placeholder 4"/>
-          <p:cNvSpPr>
-            <a:spLocks noGrp="1"/>
-          </p:cNvSpPr>
-          <p:nvPr>
-            <p:ph type="body" sz="quarter" idx="3"/>
-          </p:nvPr>
-        </p:nvSpPr>
-        <p:spPr>
-          <a:xfrm>
-            <a:off x="685800" y="4400550"/>
-            <a:ext cx="5486400" cy="3600450"/>
-          </a:xfrm>
-          <a:prstGeom prst="rect">
-            <a:avLst/>
-          </a:prstGeom>
-        </p:spPr>
-        <p:txBody>
-          <a:bodyPr vert="horz" lIns="91440" tIns="45720" rIns="91440" bIns="45720" rtlCol="0"/>
-          <a:lstStyle/>
-          <a:p>
-            <a:pPr lvl="0"/>
-            <a:r>
-              <a:rPr lang="en-US"/>
-              <a:t>Click to edit Master text styles</a:t>
-            </a:r>
-          </a:p>
-          <a:p>
-            <a:pPr lvl="1"/>
-            <a:r>
-              <a:rPr lang="en-US"/>
-              <a:t>Second level</a:t>
-            </a:r>
-          </a:p>
-          <a:p>
-            <a:pPr lvl="2"/>
-            <a:r>
-              <a:rPr lang="en-US"/>
-              <a:t>Third level</a:t>
-            </a:r>
-          </a:p>
-          <a:p>
-            <a:pPr lvl="3"/>
-            <a:r>
-              <a:rPr lang="en-US"/>
-              <a:t>Fourth level</a:t>
-            </a:r>
-          </a:p>
-          <a:p>
-            <a:pPr lvl="4"/>
-            <a:r>
-              <a:rPr lang="en-US"/>
-              <a:t>Fifth level</a:t>
-            </a:r>
-          </a:p>
-        </p:txBody>
-      </p:sp>
-      <p:sp>
-        <p:nvSpPr>
-          <p:cNvPr id="6" name="Footer Placeholder 5"/>
-          <p:cNvSpPr>
-            <a:spLocks noGrp="1"/>
-          </p:cNvSpPr>
-          <p:nvPr>
-            <p:ph type="ftr" sz="quarter" idx="4"/>
-          </p:nvPr>
-        </p:nvSpPr>
-        <p:spPr>
-          <a:xfrm>
-            <a:off x="0" y="8685213"/>
-            <a:ext cx="2971800" cy="458787"/>
-          </a:xfrm>
-          <a:prstGeom prst="rect">
-            <a:avLst/>
-          </a:prstGeom>
-        </p:spPr>
-        <p:txBody>
-          <a:bodyPr vert="horz" lIns="91440" tIns="45720" rIns="91440" bIns="45720" rtlCol="0" anchor="b"/>
-          <a:lstStyle>
-            <a:lvl1pPr algn="l">
-              <a:defRPr sz="1200"/>
-            </a:lvl1pPr>
-          </a:lstStyle>
-          <a:p>
-            <a:endParaRPr lang="en-US"/>
-          </a:p>
-        </p:txBody>
-      </p:sp>
-      <p:sp>
-        <p:nvSpPr>
-          <p:cNvPr id="7" name="Slide Number Placeholder 6"/>
-          <p:cNvSpPr>
-            <a:spLocks noGrp="1"/>
-          </p:cNvSpPr>
-          <p:nvPr>
-            <p:ph type="sldNum" sz="quarter" idx="5"/>
-          </p:nvPr>
-        </p:nvSpPr>
-        <p:spPr>
-          <a:xfrm>
-            <a:off x="3884613" y="8685213"/>
-            <a:ext cx="2971800" cy="458787"/>
-          </a:xfrm>
-          <a:prstGeom prst="rect">
-            <a:avLst/>
-          </a:prstGeom>
-        </p:spPr>
-        <p:txBody>
-          <a:bodyPr vert="horz" lIns="91440" tIns="45720" rIns="91440" bIns="45720" rtlCol="0" anchor="b"/>
-          <a:lstStyle>
-            <a:lvl1pPr algn="r">
-              <a:defRPr sz="1200"/>
-            </a:lvl1pPr>
-          </a:lstStyle>
-          <a:p>
-            <a:fld id="{CE5E9CC1-C706-0F49-92D6-E571CC5EEA8F}" type="slidenum">
-              <a:rPr lang="en-US"/>
-              <a:t>‹#›</a:t>
-            </a:fld>
-            <a:endParaRPr lang="en-US"/>
-          </a:p>
-        </p:txBody>
-      </p:sp>
     </p:spTree>
     <p:extLst>
       <p:ext uri="{BB962C8B-B14F-4D97-AF65-F5344CB8AC3E}">
-        <p14:creationId xmlns:p14="http://schemas.microsoft.com/office/powerpoint/2010/main" val="1024086991"/>
+        <p14:creationId xmlns:p14="http://schemas.microsoft.com/office/powerpoint/2010/main" val="4076009257"/>
       </p:ext>
     </p:extLst>
   </p:cSld>
   <p:clrMap bg1="lt1" tx1="dk1" bg2="lt2" tx2="dk2" accent1="accent1" accent2="accent2" accent3="accent3" accent4="accent4" accent5="accent5" accent6="accent6" hlink="hlink" folHlink="folHlink"/>
   <p:notesStyle>
     <a:lvl1pPr marL="0" algn="l" defTabSz="914400" rtl="0" eaLnBrk="1" latinLnBrk="0" hangingPunct="1">
-      <a:defRPr sz="1200" kern="1200">
+      <a:defRPr kumimoji="1" sz="1200" kern="1200">
         <a:solidFill>
           <a:schemeClr val="tx1"/>
         </a:solidFill>
@@ -388,7 +169,7 @@
       </a:defRPr>
     </a:lvl1pPr>
     <a:lvl2pPr marL="457200" algn="l" defTabSz="914400" rtl="0" eaLnBrk="1" latinLnBrk="0" hangingPunct="1">
-      <a:defRPr sz="1200" kern="1200">
+      <a:defRPr kumimoji="1" sz="1200" kern="1200">
         <a:solidFill>
           <a:schemeClr val="tx1"/>
         </a:solidFill>
@@ -398,7 +179,7 @@
       </a:defRPr>
     </a:lvl2pPr>
     <a:lvl3pPr marL="914400" algn="l" defTabSz="914400" rtl="0" eaLnBrk="1" latinLnBrk="0" hangingPunct="1">
-      <a:defRPr sz="1200" kern="1200">
+      <a:defRPr kumimoji="1" sz="1200" kern="1200">
         <a:solidFill>
           <a:schemeClr val="tx1"/>
         </a:solidFill>
@@ -408,7 +189,7 @@
       </a:defRPr>
     </a:lvl3pPr>
     <a:lvl4pPr marL="1371600" algn="l" defTabSz="914400" rtl="0" eaLnBrk="1" latinLnBrk="0" hangingPunct="1">
-      <a:defRPr sz="1200" kern="1200">
+      <a:defRPr kumimoji="1" sz="1200" kern="1200">
         <a:solidFill>
           <a:schemeClr val="tx1"/>
         </a:solidFill>
@@ -418,7 +199,7 @@
       </a:defRPr>
     </a:lvl4pPr>
     <a:lvl5pPr marL="1828800" algn="l" defTabSz="914400" rtl="0" eaLnBrk="1" latinLnBrk="0" hangingPunct="1">
-      <a:defRPr sz="1200" kern="1200">
+      <a:defRPr kumimoji="1" sz="1200" kern="1200">
         <a:solidFill>
           <a:schemeClr val="tx1"/>
         </a:solidFill>
@@ -428,7 +209,7 @@
       </a:defRPr>
     </a:lvl5pPr>
     <a:lvl6pPr marL="2286000" algn="l" defTabSz="914400" rtl="0" eaLnBrk="1" latinLnBrk="0" hangingPunct="1">
-      <a:defRPr sz="1200" kern="1200">
+      <a:defRPr kumimoji="1" sz="1200" kern="1200">
         <a:solidFill>
           <a:schemeClr val="tx1"/>
         </a:solidFill>
@@ -438,7 +219,7 @@
       </a:defRPr>
     </a:lvl6pPr>
     <a:lvl7pPr marL="2743200" algn="l" defTabSz="914400" rtl="0" eaLnBrk="1" latinLnBrk="0" hangingPunct="1">
-      <a:defRPr sz="1200" kern="1200">
+      <a:defRPr kumimoji="1" sz="1200" kern="1200">
         <a:solidFill>
           <a:schemeClr val="tx1"/>
         </a:solidFill>
@@ -448,7 +229,7 @@
       </a:defRPr>
     </a:lvl7pPr>
     <a:lvl8pPr marL="3200400" algn="l" defTabSz="914400" rtl="0" eaLnBrk="1" latinLnBrk="0" hangingPunct="1">
-      <a:defRPr sz="1200" kern="1200">
+      <a:defRPr kumimoji="1" sz="1200" kern="1200">
         <a:solidFill>
           <a:schemeClr val="tx1"/>
         </a:solidFill>
@@ -458,7 +239,7 @@
       </a:defRPr>
     </a:lvl8pPr>
     <a:lvl9pPr marL="3657600" algn="l" defTabSz="914400" rtl="0" eaLnBrk="1" latinLnBrk="0" hangingPunct="1">
-      <a:defRPr sz="1200" kern="1200">
+      <a:defRPr kumimoji="1" sz="1200" kern="1200">
         <a:solidFill>
           <a:schemeClr val="tx1"/>
         </a:solidFill>
@@ -515,10 +296,6 @@
           <a:bodyPr/>
           <a:lstStyle/>
           <a:p>
-            <a:r>
-              <a:rPr lang="en-US" dirty="0"/>
-              <a:t/>
-            </a:r>
             <a:endParaRPr lang="en-US" dirty="0"/>
           </a:p>
         </p:txBody>
@@ -603,10 +380,6 @@
           <a:bodyPr/>
           <a:lstStyle/>
           <a:p>
-            <a:r>
-              <a:rPr lang="en-US" dirty="0"/>
-              <a:t/>
-            </a:r>
             <a:endParaRPr lang="en-US" dirty="0"/>
           </a:p>
         </p:txBody>
@@ -691,10 +464,6 @@
           <a:bodyPr/>
           <a:lstStyle/>
           <a:p>
-            <a:r>
-              <a:rPr lang="en-US" dirty="0"/>
-              <a:t/>
-            </a:r>
             <a:endParaRPr lang="en-US" dirty="0"/>
           </a:p>
         </p:txBody>
@@ -779,10 +548,6 @@
           <a:bodyPr/>
           <a:lstStyle/>
           <a:p>
-            <a:r>
-              <a:rPr lang="en-US" dirty="0"/>
-              <a:t/>
-            </a:r>
             <a:endParaRPr lang="en-US" dirty="0"/>
           </a:p>
         </p:txBody>
@@ -867,10 +632,6 @@
           <a:bodyPr/>
           <a:lstStyle/>
           <a:p>
-            <a:r>
-              <a:rPr lang="en-US" dirty="0"/>
-              <a:t/>
-            </a:r>
             <a:endParaRPr lang="en-US" dirty="0"/>
           </a:p>
         </p:txBody>
@@ -955,10 +716,6 @@
           <a:bodyPr/>
           <a:lstStyle/>
           <a:p>
-            <a:r>
-              <a:rPr lang="en-US" dirty="0"/>
-              <a:t/>
-            </a:r>
             <a:endParaRPr lang="en-US" dirty="0"/>
           </a:p>
         </p:txBody>
@@ -1043,10 +800,6 @@
           <a:bodyPr/>
           <a:lstStyle/>
           <a:p>
-            <a:r>
-              <a:rPr lang="en-US" dirty="0"/>
-              <a:t/>
-            </a:r>
             <a:endParaRPr lang="en-US" dirty="0"/>
           </a:p>
         </p:txBody>
@@ -1131,10 +884,6 @@
           <a:bodyPr/>
           <a:lstStyle/>
           <a:p>
-            <a:r>
-              <a:rPr lang="en-US" dirty="0"/>
-              <a:t/>
-            </a:r>
             <a:endParaRPr lang="en-US" dirty="0"/>
           </a:p>
         </p:txBody>
@@ -1219,10 +968,6 @@
           <a:bodyPr/>
           <a:lstStyle/>
           <a:p>
-            <a:r>
-              <a:rPr lang="en-US" dirty="0"/>
-              <a:t/>
-            </a:r>
             <a:endParaRPr lang="en-US" dirty="0"/>
           </a:p>
         </p:txBody>
@@ -1307,10 +1052,6 @@
           <a:bodyPr/>
           <a:lstStyle/>
           <a:p>
-            <a:r>
-              <a:rPr lang="en-US" dirty="0"/>
-              <a:t/>
-            </a:r>
             <a:endParaRPr lang="en-US" dirty="0"/>
           </a:p>
         </p:txBody>
@@ -1395,10 +1136,6 @@
           <a:bodyPr/>
           <a:lstStyle/>
           <a:p>
-            <a:r>
-              <a:rPr lang="en-US" dirty="0"/>
-              <a:t/>
-            </a:r>
             <a:endParaRPr lang="en-US" dirty="0"/>
           </a:p>
         </p:txBody>
@@ -1483,10 +1220,6 @@
           <a:bodyPr/>
           <a:lstStyle/>
           <a:p>
-            <a:r>
-              <a:rPr lang="en-US" dirty="0"/>
-              <a:t/>
-            </a:r>
             <a:endParaRPr lang="en-US" dirty="0"/>
           </a:p>
         </p:txBody>
@@ -1571,10 +1304,6 @@
           <a:bodyPr/>
           <a:lstStyle/>
           <a:p>
-            <a:r>
-              <a:rPr lang="en-US" dirty="0"/>
-              <a:t/>
-            </a:r>
             <a:endParaRPr lang="en-US" dirty="0"/>
           </a:p>
         </p:txBody>
@@ -1659,10 +1388,6 @@
           <a:bodyPr/>
           <a:lstStyle/>
           <a:p>
-            <a:r>
-              <a:rPr lang="en-US" dirty="0"/>
-              <a:t/>
-            </a:r>
             <a:endParaRPr lang="en-US" dirty="0"/>
           </a:p>
         </p:txBody>
@@ -1747,10 +1472,6 @@
           <a:bodyPr/>
           <a:lstStyle/>
           <a:p>
-            <a:r>
-              <a:rPr lang="en-US" dirty="0"/>
-              <a:t/>
-            </a:r>
             <a:endParaRPr lang="en-US" dirty="0"/>
           </a:p>
         </p:txBody>
@@ -1835,10 +1556,6 @@
           <a:bodyPr/>
           <a:lstStyle/>
           <a:p>
-            <a:r>
-              <a:rPr lang="en-US" dirty="0"/>
-              <a:t/>
-            </a:r>
             <a:endParaRPr lang="en-US" dirty="0"/>
           </a:p>
         </p:txBody>
@@ -1912,6 +1629,11 @@
 <file path=ppt/slideMasters/slideMaster1.xml><?xml version="1.0" encoding="utf-8"?>
 <p:sldMaster xmlns:a="http://schemas.openxmlformats.org/drawingml/2006/main" xmlns:r="http://schemas.openxmlformats.org/officeDocument/2006/relationships" xmlns:p="http://schemas.openxmlformats.org/presentationml/2006/main">
   <p:cSld>
+    <p:bg>
+      <p:bgRef idx="1001">
+        <a:schemeClr val="bg1"/>
+      </p:bgRef>
+    </p:bg>
     <p:spTree>
       <p:nvGrpSpPr>
         <p:cNvPr id="1" name=""/>
@@ -2194,6 +1916,7 @@
         <a:solidFill>
           <a:srgbClr val="122342"/>
         </a:solidFill>
+        <a:effectLst/>
       </p:bgPr>
     </p:bg>
     <p:spTree>
@@ -2229,6 +1952,13 @@
           </a:solidFill>
           <a:ln/>
         </p:spPr>
+        <p:txBody>
+          <a:bodyPr/>
+          <a:lstStyle/>
+          <a:p>
+            <a:endParaRPr lang="ja-JP" altLang="en-US"/>
+          </a:p>
+        </p:txBody>
       </p:sp>
       <p:sp>
         <p:nvSpPr>
@@ -2251,11 +1981,11 @@
           <a:bodyPr wrap="square" lIns="0" tIns="0" rIns="0" bIns="0" rtlCol="0" anchor="ctr"/>
           <a:lstStyle/>
           <a:p>
-            <a:pPr indent="0" marL="0">
-              <a:buNone/>
-            </a:pPr>
-            <a:r>
-              <a:rPr lang="en-US" sz="1200" b="1" spc="600" kern="0" dirty="0">
+            <a:pPr marL="0" indent="0">
+              <a:buNone/>
+            </a:pPr>
+            <a:r>
+              <a:rPr lang="en-US" sz="1200" b="1" kern="0" spc="600" dirty="0">
                 <a:solidFill>
                   <a:srgbClr val="C9A961"/>
                 </a:solidFill>
@@ -2290,7 +2020,7 @@
           <a:bodyPr wrap="square" lIns="0" tIns="0" rIns="0" bIns="0" rtlCol="0" anchor="ctr"/>
           <a:lstStyle/>
           <a:p>
-            <a:pPr indent="0" marL="0">
+            <a:pPr marL="0" indent="0">
               <a:lnSpc>
                 <a:spcPct val="105000"/>
               </a:lnSpc>
@@ -2310,7 +2040,7 @@
             <a:endParaRPr lang="en-US" sz="5600" dirty="0"/>
           </a:p>
           <a:p>
-            <a:pPr indent="0" marL="0">
+            <a:pPr marL="0" indent="0">
               <a:lnSpc>
                 <a:spcPct val="105000"/>
               </a:lnSpc>
@@ -2350,6 +2080,13 @@
           </a:solidFill>
           <a:ln/>
         </p:spPr>
+        <p:txBody>
+          <a:bodyPr/>
+          <a:lstStyle/>
+          <a:p>
+            <a:endParaRPr lang="ja-JP" altLang="en-US"/>
+          </a:p>
+        </p:txBody>
       </p:sp>
       <p:sp>
         <p:nvSpPr>
@@ -2372,7 +2109,7 @@
           <a:bodyPr wrap="square" lIns="0" tIns="0" rIns="0" bIns="0" rtlCol="0" anchor="ctr"/>
           <a:lstStyle/>
           <a:p>
-            <a:pPr indent="0" marL="0">
+            <a:pPr marL="0" indent="0">
               <a:buNone/>
             </a:pPr>
             <a:r>
@@ -2411,7 +2148,7 @@
           <a:bodyPr wrap="square" lIns="0" tIns="0" rIns="0" bIns="0" rtlCol="0" anchor="t"/>
           <a:lstStyle/>
           <a:p>
-            <a:pPr indent="0" marL="0">
+            <a:pPr marL="0" indent="0">
               <a:buNone/>
             </a:pPr>
             <a:r>
@@ -2425,9 +2162,6 @@
               </a:rPr>
               <a:t>発表者 </a:t>
             </a:r>
-            <a:pPr indent="0" marL="0">
-              <a:buNone/>
-            </a:pPr>
             <a:r>
               <a:rPr lang="en-US" sz="1400" b="1" dirty="0">
                 <a:solidFill>
@@ -2442,7 +2176,7 @@
             <a:endParaRPr lang="en-US" sz="1100" dirty="0"/>
           </a:p>
           <a:p>
-            <a:pPr indent="0" marL="0">
+            <a:pPr marL="0" indent="0">
               <a:buNone/>
             </a:pPr>
             <a:r>
@@ -2459,13 +2193,13 @@
             <a:endParaRPr lang="en-US" sz="1100" dirty="0"/>
           </a:p>
           <a:p>
-            <a:pPr indent="0" marL="0">
+            <a:pPr marL="0" indent="0">
               <a:buNone/>
             </a:pPr>
             <a:endParaRPr lang="en-US" sz="1100" dirty="0"/>
           </a:p>
           <a:p>
-            <a:pPr indent="0" marL="0">
+            <a:pPr marL="0" indent="0">
               <a:buNone/>
             </a:pPr>
             <a:r>
@@ -2504,7 +2238,7 @@
           <a:bodyPr wrap="square" lIns="0" tIns="0" rIns="0" bIns="0" rtlCol="0" anchor="ctr"/>
           <a:lstStyle/>
           <a:p>
-            <a:pPr algn="r" indent="0" marL="0">
+            <a:pPr marL="0" indent="0" algn="r">
               <a:buNone/>
             </a:pPr>
             <a:r>
@@ -2521,11 +2255,11 @@
             <a:endParaRPr lang="en-US" sz="1400" dirty="0"/>
           </a:p>
           <a:p>
-            <a:pPr algn="r" indent="0" marL="0">
-              <a:buNone/>
-            </a:pPr>
-            <a:r>
-              <a:rPr lang="en-US" sz="900" spc="400" kern="0" dirty="0">
+            <a:pPr marL="0" indent="0" algn="r">
+              <a:buNone/>
+            </a:pPr>
+            <a:r>
+              <a:rPr lang="en-US" sz="900" kern="0" spc="400" dirty="0">
                 <a:solidFill>
                   <a:srgbClr val="C9A961"/>
                 </a:solidFill>
@@ -2555,6 +2289,7 @@
         <a:solidFill>
           <a:srgbClr val="F7F5F0"/>
         </a:solidFill>
+        <a:effectLst/>
       </p:bgPr>
     </p:bg>
     <p:spTree>
@@ -2590,6 +2325,13 @@
           </a:solidFill>
           <a:ln/>
         </p:spPr>
+        <p:txBody>
+          <a:bodyPr/>
+          <a:lstStyle/>
+          <a:p>
+            <a:endParaRPr lang="ja-JP" altLang="en-US"/>
+          </a:p>
+        </p:txBody>
       </p:sp>
       <p:sp>
         <p:nvSpPr>
@@ -2612,7 +2354,7 @@
           <a:bodyPr wrap="square" lIns="0" tIns="0" rIns="0" bIns="0" rtlCol="0" anchor="ctr"/>
           <a:lstStyle/>
           <a:p>
-            <a:pPr indent="0" marL="0">
+            <a:pPr marL="0" indent="0">
               <a:buNone/>
             </a:pPr>
             <a:r>
@@ -2651,7 +2393,7 @@
           <a:bodyPr wrap="square" lIns="0" tIns="0" rIns="0" bIns="0" rtlCol="0" anchor="ctr"/>
           <a:lstStyle/>
           <a:p>
-            <a:pPr algn="r" indent="0" marL="0">
+            <a:pPr marL="0" indent="0" algn="r">
               <a:buNone/>
             </a:pPr>
             <a:r>
@@ -2690,7 +2432,7 @@
           <a:bodyPr wrap="square" lIns="0" tIns="0" rIns="0" bIns="0" rtlCol="0" anchor="ctr"/>
           <a:lstStyle/>
           <a:p>
-            <a:pPr indent="0" marL="0">
+            <a:pPr marL="0" indent="0">
               <a:buNone/>
             </a:pPr>
             <a:r>
@@ -2729,7 +2471,7 @@
           <a:bodyPr wrap="square" lIns="0" tIns="0" rIns="0" bIns="0" rtlCol="0" anchor="ctr"/>
           <a:lstStyle/>
           <a:p>
-            <a:pPr indent="0" marL="0">
+            <a:pPr marL="0" indent="0">
               <a:buNone/>
             </a:pPr>
             <a:r>
@@ -2766,18 +2508,25 @@
           </a:solidFill>
           <a:ln/>
         </p:spPr>
+        <p:txBody>
+          <a:bodyPr/>
+          <a:lstStyle/>
+          <a:p>
+            <a:endParaRPr lang="ja-JP" altLang="en-US"/>
+          </a:p>
+        </p:txBody>
       </p:sp>
       <p:pic>
         <p:nvPicPr>
-          <p:cNvPr id="8" name="Image 0" descr="/Users/kubotatoru/ai-management/docs/admin/slides/weekend_holiday_kpi/charts/05_emergency_hour.png">    </p:cNvPr>
+          <p:cNvPr id="8" name="Image 0" descr="/Users/kubotatoru/ai-management/docs/admin/slides/weekend_holiday_kpi/charts/05_emergency_hour.png"/>
           <p:cNvPicPr>
             <a:picLocks noChangeAspect="1"/>
           </p:cNvPicPr>
           <p:nvPr/>
         </p:nvPicPr>
         <p:blipFill>
-          <a:blip r:embed="rId1"/>
-          <a:srcRect l="0" r="0" t="0" b="0"/>
+          <a:blip r:embed="rId3"/>
+          <a:srcRect/>
           <a:stretch/>
         </p:blipFill>
         <p:spPr>
@@ -2809,6 +2558,13 @@
           </a:solidFill>
           <a:ln/>
         </p:spPr>
+        <p:txBody>
+          <a:bodyPr/>
+          <a:lstStyle/>
+          <a:p>
+            <a:endParaRPr lang="ja-JP" altLang="en-US"/>
+          </a:p>
+        </p:txBody>
       </p:sp>
       <p:sp>
         <p:nvSpPr>
@@ -2831,7 +2587,7 @@
           <a:bodyPr wrap="square" lIns="0" tIns="0" rIns="0" bIns="0" rtlCol="0" anchor="ctr"/>
           <a:lstStyle/>
           <a:p>
-            <a:pPr algn="ctr" indent="0" marL="0">
+            <a:pPr marL="0" indent="0" algn="ctr">
               <a:buNone/>
             </a:pPr>
             <a:r>
@@ -2870,7 +2626,7 @@
           <a:bodyPr wrap="square" lIns="0" tIns="0" rIns="0" bIns="0" rtlCol="0" anchor="t"/>
           <a:lstStyle/>
           <a:p>
-            <a:pPr algn="ctr" indent="0" marL="0">
+            <a:pPr marL="0" indent="0" algn="ctr">
               <a:buNone/>
             </a:pPr>
             <a:r>
@@ -2887,7 +2643,7 @@
             <a:endParaRPr lang="en-US" sz="1300" dirty="0"/>
           </a:p>
           <a:p>
-            <a:pPr algn="ctr" indent="0" marL="0">
+            <a:pPr marL="0" indent="0" algn="ctr">
               <a:buNone/>
             </a:pPr>
             <a:r>
@@ -2929,13 +2685,20 @@
             <a:prstDash val="solid"/>
           </a:ln>
           <a:effectLst>
-            <a:outerShdw sx="100000" sy="100000" kx="0" ky="0" algn="bl" rotWithShape="0" blurRad="101600" dist="25400" dir="5400000">
+            <a:outerShdw blurRad="101600" dist="25400" dir="5400000" algn="bl" rotWithShape="0">
               <a:srgbClr val="000000">
                 <a:alpha val="8000"/>
               </a:srgbClr>
             </a:outerShdw>
           </a:effectLst>
         </p:spPr>
+        <p:txBody>
+          <a:bodyPr/>
+          <a:lstStyle/>
+          <a:p>
+            <a:endParaRPr lang="ja-JP" altLang="en-US"/>
+          </a:p>
+        </p:txBody>
       </p:sp>
       <p:sp>
         <p:nvSpPr>
@@ -2956,6 +2719,13 @@
           </a:solidFill>
           <a:ln/>
         </p:spPr>
+        <p:txBody>
+          <a:bodyPr/>
+          <a:lstStyle/>
+          <a:p>
+            <a:endParaRPr lang="ja-JP" altLang="en-US"/>
+          </a:p>
+        </p:txBody>
       </p:sp>
       <p:sp>
         <p:nvSpPr>
@@ -2978,7 +2748,7 @@
           <a:bodyPr wrap="square" lIns="0" tIns="0" rIns="0" bIns="0" rtlCol="0" anchor="t"/>
           <a:lstStyle/>
           <a:p>
-            <a:pPr indent="0" marL="0">
+            <a:pPr marL="0" indent="0">
               <a:buNone/>
             </a:pPr>
             <a:r>
@@ -3017,7 +2787,7 @@
           <a:bodyPr wrap="square" lIns="0" tIns="0" rIns="0" bIns="0" rtlCol="0" anchor="t"/>
           <a:lstStyle/>
           <a:p>
-            <a:pPr indent="0" marL="0">
+            <a:pPr marL="0" indent="0">
               <a:buNone/>
             </a:pPr>
             <a:r>
@@ -3059,13 +2829,20 @@
             <a:prstDash val="solid"/>
           </a:ln>
           <a:effectLst>
-            <a:outerShdw sx="100000" sy="100000" kx="0" ky="0" algn="bl" rotWithShape="0" blurRad="101600" dist="25400" dir="5400000">
+            <a:outerShdw blurRad="101600" dist="25400" dir="5400000" algn="bl" rotWithShape="0">
               <a:srgbClr val="000000">
                 <a:alpha val="8000"/>
               </a:srgbClr>
             </a:outerShdw>
           </a:effectLst>
         </p:spPr>
+        <p:txBody>
+          <a:bodyPr/>
+          <a:lstStyle/>
+          <a:p>
+            <a:endParaRPr lang="ja-JP" altLang="en-US"/>
+          </a:p>
+        </p:txBody>
       </p:sp>
       <p:sp>
         <p:nvSpPr>
@@ -3086,6 +2863,13 @@
           </a:solidFill>
           <a:ln/>
         </p:spPr>
+        <p:txBody>
+          <a:bodyPr/>
+          <a:lstStyle/>
+          <a:p>
+            <a:endParaRPr lang="ja-JP" altLang="en-US"/>
+          </a:p>
+        </p:txBody>
       </p:sp>
       <p:sp>
         <p:nvSpPr>
@@ -3108,7 +2892,7 @@
           <a:bodyPr wrap="square" lIns="0" tIns="0" rIns="0" bIns="0" rtlCol="0" anchor="t"/>
           <a:lstStyle/>
           <a:p>
-            <a:pPr indent="0" marL="0">
+            <a:pPr marL="0" indent="0">
               <a:buNone/>
             </a:pPr>
             <a:r>
@@ -3147,7 +2931,7 @@
           <a:bodyPr wrap="square" lIns="0" tIns="0" rIns="0" bIns="0" rtlCol="0" anchor="t"/>
           <a:lstStyle/>
           <a:p>
-            <a:pPr indent="0" marL="0">
+            <a:pPr marL="0" indent="0">
               <a:buNone/>
             </a:pPr>
             <a:r>
@@ -3181,6 +2965,7 @@
         <a:solidFill>
           <a:srgbClr val="F7F5F0"/>
         </a:solidFill>
+        <a:effectLst/>
       </p:bgPr>
     </p:bg>
     <p:spTree>
@@ -3216,6 +3001,13 @@
           </a:solidFill>
           <a:ln/>
         </p:spPr>
+        <p:txBody>
+          <a:bodyPr/>
+          <a:lstStyle/>
+          <a:p>
+            <a:endParaRPr lang="ja-JP" altLang="en-US"/>
+          </a:p>
+        </p:txBody>
       </p:sp>
       <p:sp>
         <p:nvSpPr>
@@ -3238,7 +3030,7 @@
           <a:bodyPr wrap="square" lIns="0" tIns="0" rIns="0" bIns="0" rtlCol="0" anchor="ctr"/>
           <a:lstStyle/>
           <a:p>
-            <a:pPr indent="0" marL="0">
+            <a:pPr marL="0" indent="0">
               <a:buNone/>
             </a:pPr>
             <a:r>
@@ -3277,7 +3069,7 @@
           <a:bodyPr wrap="square" lIns="0" tIns="0" rIns="0" bIns="0" rtlCol="0" anchor="ctr"/>
           <a:lstStyle/>
           <a:p>
-            <a:pPr algn="r" indent="0" marL="0">
+            <a:pPr marL="0" indent="0" algn="r">
               <a:buNone/>
             </a:pPr>
             <a:r>
@@ -3316,7 +3108,7 @@
           <a:bodyPr wrap="square" lIns="0" tIns="0" rIns="0" bIns="0" rtlCol="0" anchor="ctr"/>
           <a:lstStyle/>
           <a:p>
-            <a:pPr indent="0" marL="0">
+            <a:pPr marL="0" indent="0">
               <a:buNone/>
             </a:pPr>
             <a:r>
@@ -3355,7 +3147,7 @@
           <a:bodyPr wrap="square" lIns="0" tIns="0" rIns="0" bIns="0" rtlCol="0" anchor="ctr"/>
           <a:lstStyle/>
           <a:p>
-            <a:pPr indent="0" marL="0">
+            <a:pPr marL="0" indent="0">
               <a:buNone/>
             </a:pPr>
             <a:r>
@@ -3392,18 +3184,25 @@
           </a:solidFill>
           <a:ln/>
         </p:spPr>
+        <p:txBody>
+          <a:bodyPr/>
+          <a:lstStyle/>
+          <a:p>
+            <a:endParaRPr lang="ja-JP" altLang="en-US"/>
+          </a:p>
+        </p:txBody>
       </p:sp>
       <p:pic>
         <p:nvPicPr>
-          <p:cNvPr id="8" name="Image 0" descr="/Users/kubotatoru/ai-management/docs/admin/slides/weekend_holiday_kpi/charts/11_lead_time_dist.png">    </p:cNvPr>
+          <p:cNvPr id="8" name="Image 0" descr="/Users/kubotatoru/ai-management/docs/admin/slides/weekend_holiday_kpi/charts/11_lead_time_dist.png"/>
           <p:cNvPicPr>
             <a:picLocks noChangeAspect="1"/>
           </p:cNvPicPr>
           <p:nvPr/>
         </p:nvPicPr>
         <p:blipFill>
-          <a:blip r:embed="rId1"/>
-          <a:srcRect l="0" r="0" t="0" b="0"/>
+          <a:blip r:embed="rId3"/>
+          <a:srcRect/>
           <a:stretch/>
         </p:blipFill>
         <p:spPr>
@@ -3440,13 +3239,20 @@
             <a:prstDash val="solid"/>
           </a:ln>
           <a:effectLst>
-            <a:outerShdw sx="100000" sy="100000" kx="0" ky="0" algn="bl" rotWithShape="0" blurRad="127000" dist="38100" dir="5400000">
+            <a:outerShdw blurRad="127000" dist="38100" dir="5400000" algn="bl" rotWithShape="0">
               <a:srgbClr val="000000">
                 <a:alpha val="8000"/>
               </a:srgbClr>
             </a:outerShdw>
           </a:effectLst>
         </p:spPr>
+        <p:txBody>
+          <a:bodyPr/>
+          <a:lstStyle/>
+          <a:p>
+            <a:endParaRPr lang="ja-JP" altLang="en-US"/>
+          </a:p>
+        </p:txBody>
       </p:sp>
       <p:sp>
         <p:nvSpPr>
@@ -3469,7 +3275,7 @@
           <a:bodyPr wrap="square" lIns="0" tIns="0" rIns="0" bIns="0" rtlCol="0" anchor="ctr"/>
           <a:lstStyle/>
           <a:p>
-            <a:pPr algn="l" indent="0" marL="0">
+            <a:pPr marL="0" indent="0" algn="l">
               <a:buNone/>
             </a:pPr>
             <a:r>
@@ -3483,9 +3289,6 @@
               </a:rPr>
               <a:t>12.0</a:t>
             </a:r>
-            <a:pPr algn="l" indent="0" marL="0">
-              <a:buNone/>
-            </a:pPr>
             <a:r>
               <a:rPr lang="en-US" sz="1300" dirty="0">
                 <a:solidFill>
@@ -3522,7 +3325,7 @@
           <a:bodyPr wrap="square" lIns="0" tIns="0" rIns="0" bIns="0" rtlCol="0" anchor="t"/>
           <a:lstStyle/>
           <a:p>
-            <a:pPr indent="0" marL="0">
+            <a:pPr marL="0" indent="0">
               <a:buNone/>
             </a:pPr>
             <a:r>
@@ -3564,13 +3367,20 @@
             <a:prstDash val="solid"/>
           </a:ln>
           <a:effectLst>
-            <a:outerShdw sx="100000" sy="100000" kx="0" ky="0" algn="bl" rotWithShape="0" blurRad="127000" dist="38100" dir="5400000">
+            <a:outerShdw blurRad="127000" dist="38100" dir="5400000" algn="bl" rotWithShape="0">
               <a:srgbClr val="000000">
                 <a:alpha val="8000"/>
               </a:srgbClr>
             </a:outerShdw>
           </a:effectLst>
         </p:spPr>
+        <p:txBody>
+          <a:bodyPr/>
+          <a:lstStyle/>
+          <a:p>
+            <a:endParaRPr lang="ja-JP" altLang="en-US"/>
+          </a:p>
+        </p:txBody>
       </p:sp>
       <p:sp>
         <p:nvSpPr>
@@ -3593,7 +3403,7 @@
           <a:bodyPr wrap="square" lIns="0" tIns="0" rIns="0" bIns="0" rtlCol="0" anchor="ctr"/>
           <a:lstStyle/>
           <a:p>
-            <a:pPr algn="l" indent="0" marL="0">
+            <a:pPr marL="0" indent="0" algn="l">
               <a:buNone/>
             </a:pPr>
             <a:r>
@@ -3607,9 +3417,6 @@
               </a:rPr>
               <a:t>61%</a:t>
             </a:r>
-            <a:pPr algn="l" indent="0" marL="0">
-              <a:buNone/>
-            </a:pPr>
             <a:r>
               <a:rPr lang="en-US" sz="1300" dirty="0">
                 <a:solidFill>
@@ -3646,7 +3453,7 @@
           <a:bodyPr wrap="square" lIns="0" tIns="0" rIns="0" bIns="0" rtlCol="0" anchor="t"/>
           <a:lstStyle/>
           <a:p>
-            <a:pPr indent="0" marL="0">
+            <a:pPr marL="0" indent="0">
               <a:buNone/>
             </a:pPr>
             <a:r>
@@ -3688,13 +3495,20 @@
             <a:prstDash val="solid"/>
           </a:ln>
           <a:effectLst>
-            <a:outerShdw sx="100000" sy="100000" kx="0" ky="0" algn="bl" rotWithShape="0" blurRad="127000" dist="38100" dir="5400000">
+            <a:outerShdw blurRad="127000" dist="38100" dir="5400000" algn="bl" rotWithShape="0">
               <a:srgbClr val="000000">
                 <a:alpha val="8000"/>
               </a:srgbClr>
             </a:outerShdw>
           </a:effectLst>
         </p:spPr>
+        <p:txBody>
+          <a:bodyPr/>
+          <a:lstStyle/>
+          <a:p>
+            <a:endParaRPr lang="ja-JP" altLang="en-US"/>
+          </a:p>
+        </p:txBody>
       </p:sp>
       <p:sp>
         <p:nvSpPr>
@@ -3717,7 +3531,7 @@
           <a:bodyPr wrap="square" lIns="0" tIns="0" rIns="0" bIns="0" rtlCol="0" anchor="ctr"/>
           <a:lstStyle/>
           <a:p>
-            <a:pPr algn="l" indent="0" marL="0">
+            <a:pPr marL="0" indent="0" algn="l">
               <a:buNone/>
             </a:pPr>
             <a:r>
@@ -3731,9 +3545,6 @@
               </a:rPr>
               <a:t>3 – 21</a:t>
             </a:r>
-            <a:pPr algn="l" indent="0" marL="0">
-              <a:buNone/>
-            </a:pPr>
             <a:r>
               <a:rPr lang="en-US" sz="1300" dirty="0">
                 <a:solidFill>
@@ -3770,7 +3581,7 @@
           <a:bodyPr wrap="square" lIns="0" tIns="0" rIns="0" bIns="0" rtlCol="0" anchor="t"/>
           <a:lstStyle/>
           <a:p>
-            <a:pPr indent="0" marL="0">
+            <a:pPr marL="0" indent="0">
               <a:buNone/>
             </a:pPr>
             <a:r>
@@ -3807,6 +3618,13 @@
           </a:solidFill>
           <a:ln/>
         </p:spPr>
+        <p:txBody>
+          <a:bodyPr/>
+          <a:lstStyle/>
+          <a:p>
+            <a:endParaRPr lang="ja-JP" altLang="en-US"/>
+          </a:p>
+        </p:txBody>
       </p:sp>
       <p:sp>
         <p:nvSpPr>
@@ -3829,7 +3647,7 @@
           <a:bodyPr wrap="square" lIns="0" tIns="0" rIns="0" bIns="0" rtlCol="0" anchor="ctr"/>
           <a:lstStyle/>
           <a:p>
-            <a:pPr algn="ctr" indent="0" marL="0">
+            <a:pPr marL="0" indent="0" algn="ctr">
               <a:buNone/>
             </a:pPr>
             <a:r>
@@ -3863,6 +3681,7 @@
         <a:solidFill>
           <a:srgbClr val="F7F5F0"/>
         </a:solidFill>
+        <a:effectLst/>
       </p:bgPr>
     </p:bg>
     <p:spTree>
@@ -3898,6 +3717,13 @@
           </a:solidFill>
           <a:ln/>
         </p:spPr>
+        <p:txBody>
+          <a:bodyPr/>
+          <a:lstStyle/>
+          <a:p>
+            <a:endParaRPr lang="ja-JP" altLang="en-US"/>
+          </a:p>
+        </p:txBody>
       </p:sp>
       <p:sp>
         <p:nvSpPr>
@@ -3920,7 +3746,7 @@
           <a:bodyPr wrap="square" lIns="0" tIns="0" rIns="0" bIns="0" rtlCol="0" anchor="ctr"/>
           <a:lstStyle/>
           <a:p>
-            <a:pPr indent="0" marL="0">
+            <a:pPr marL="0" indent="0">
               <a:buNone/>
             </a:pPr>
             <a:r>
@@ -3959,7 +3785,7 @@
           <a:bodyPr wrap="square" lIns="0" tIns="0" rIns="0" bIns="0" rtlCol="0" anchor="ctr"/>
           <a:lstStyle/>
           <a:p>
-            <a:pPr algn="r" indent="0" marL="0">
+            <a:pPr marL="0" indent="0" algn="r">
               <a:buNone/>
             </a:pPr>
             <a:r>
@@ -3998,7 +3824,7 @@
           <a:bodyPr wrap="square" lIns="0" tIns="0" rIns="0" bIns="0" rtlCol="0" anchor="ctr"/>
           <a:lstStyle/>
           <a:p>
-            <a:pPr indent="0" marL="0">
+            <a:pPr marL="0" indent="0">
               <a:buNone/>
             </a:pPr>
             <a:r>
@@ -4037,7 +3863,7 @@
           <a:bodyPr wrap="square" lIns="0" tIns="0" rIns="0" bIns="0" rtlCol="0" anchor="ctr"/>
           <a:lstStyle/>
           <a:p>
-            <a:pPr indent="0" marL="0">
+            <a:pPr marL="0" indent="0">
               <a:buNone/>
             </a:pPr>
             <a:r>
@@ -4074,18 +3900,25 @@
           </a:solidFill>
           <a:ln/>
         </p:spPr>
+        <p:txBody>
+          <a:bodyPr/>
+          <a:lstStyle/>
+          <a:p>
+            <a:endParaRPr lang="ja-JP" altLang="en-US"/>
+          </a:p>
+        </p:txBody>
       </p:sp>
       <p:pic>
         <p:nvPicPr>
-          <p:cNvPr id="8" name="Image 0" descr="/Users/kubotatoru/ai-management/docs/admin/slides/weekend_holiday_kpi/charts/12_register_dow_vs_admit_dow.png">    </p:cNvPr>
+          <p:cNvPr id="8" name="Image 0" descr="/Users/kubotatoru/ai-management/docs/admin/slides/weekend_holiday_kpi/charts/12_register_dow_vs_admit_dow.png"/>
           <p:cNvPicPr>
             <a:picLocks noChangeAspect="1"/>
           </p:cNvPicPr>
           <p:nvPr/>
         </p:nvPicPr>
         <p:blipFill>
-          <a:blip r:embed="rId1"/>
-          <a:srcRect l="0" r="0" t="0" b="0"/>
+          <a:blip r:embed="rId3"/>
+          <a:srcRect/>
           <a:stretch/>
         </p:blipFill>
         <p:spPr>
@@ -4122,13 +3955,20 @@
             <a:prstDash val="solid"/>
           </a:ln>
           <a:effectLst>
-            <a:outerShdw sx="100000" sy="100000" kx="0" ky="0" algn="bl" rotWithShape="0" blurRad="101600" dist="25400" dir="5400000">
+            <a:outerShdw blurRad="101600" dist="25400" dir="5400000" algn="bl" rotWithShape="0">
               <a:srgbClr val="000000">
                 <a:alpha val="8000"/>
               </a:srgbClr>
             </a:outerShdw>
           </a:effectLst>
         </p:spPr>
+        <p:txBody>
+          <a:bodyPr/>
+          <a:lstStyle/>
+          <a:p>
+            <a:endParaRPr lang="ja-JP" altLang="en-US"/>
+          </a:p>
+        </p:txBody>
       </p:sp>
       <p:sp>
         <p:nvSpPr>
@@ -4149,6 +3989,13 @@
           </a:solidFill>
           <a:ln/>
         </p:spPr>
+        <p:txBody>
+          <a:bodyPr/>
+          <a:lstStyle/>
+          <a:p>
+            <a:endParaRPr lang="ja-JP" altLang="en-US"/>
+          </a:p>
+        </p:txBody>
       </p:sp>
       <p:sp>
         <p:nvSpPr>
@@ -4171,7 +4018,7 @@
           <a:bodyPr wrap="square" lIns="0" tIns="0" rIns="0" bIns="0" rtlCol="0" anchor="t"/>
           <a:lstStyle/>
           <a:p>
-            <a:pPr indent="0" marL="0">
+            <a:pPr marL="0" indent="0">
               <a:buNone/>
             </a:pPr>
             <a:r>
@@ -4210,7 +4057,7 @@
           <a:bodyPr wrap="square" lIns="0" tIns="0" rIns="0" bIns="0" rtlCol="0" anchor="t"/>
           <a:lstStyle/>
           <a:p>
-            <a:pPr indent="0" marL="0">
+            <a:pPr marL="0" indent="0">
               <a:buNone/>
             </a:pPr>
             <a:r>
@@ -4252,13 +4099,20 @@
             <a:prstDash val="solid"/>
           </a:ln>
           <a:effectLst>
-            <a:outerShdw sx="100000" sy="100000" kx="0" ky="0" algn="bl" rotWithShape="0" blurRad="101600" dist="25400" dir="5400000">
+            <a:outerShdw blurRad="101600" dist="25400" dir="5400000" algn="bl" rotWithShape="0">
               <a:srgbClr val="000000">
                 <a:alpha val="8000"/>
               </a:srgbClr>
             </a:outerShdw>
           </a:effectLst>
         </p:spPr>
+        <p:txBody>
+          <a:bodyPr/>
+          <a:lstStyle/>
+          <a:p>
+            <a:endParaRPr lang="ja-JP" altLang="en-US"/>
+          </a:p>
+        </p:txBody>
       </p:sp>
       <p:sp>
         <p:nvSpPr>
@@ -4279,6 +4133,13 @@
           </a:solidFill>
           <a:ln/>
         </p:spPr>
+        <p:txBody>
+          <a:bodyPr/>
+          <a:lstStyle/>
+          <a:p>
+            <a:endParaRPr lang="ja-JP" altLang="en-US"/>
+          </a:p>
+        </p:txBody>
       </p:sp>
       <p:sp>
         <p:nvSpPr>
@@ -4301,7 +4162,7 @@
           <a:bodyPr wrap="square" lIns="0" tIns="0" rIns="0" bIns="0" rtlCol="0" anchor="t"/>
           <a:lstStyle/>
           <a:p>
-            <a:pPr indent="0" marL="0">
+            <a:pPr marL="0" indent="0">
               <a:buNone/>
             </a:pPr>
             <a:r>
@@ -4340,7 +4201,7 @@
           <a:bodyPr wrap="square" lIns="0" tIns="0" rIns="0" bIns="0" rtlCol="0" anchor="t"/>
           <a:lstStyle/>
           <a:p>
-            <a:pPr indent="0" marL="0">
+            <a:pPr marL="0" indent="0">
               <a:buNone/>
             </a:pPr>
             <a:r>
@@ -4382,13 +4243,20 @@
             <a:prstDash val="solid"/>
           </a:ln>
           <a:effectLst>
-            <a:outerShdw sx="100000" sy="100000" kx="0" ky="0" algn="bl" rotWithShape="0" blurRad="101600" dist="25400" dir="5400000">
+            <a:outerShdw blurRad="101600" dist="25400" dir="5400000" algn="bl" rotWithShape="0">
               <a:srgbClr val="000000">
                 <a:alpha val="8000"/>
               </a:srgbClr>
             </a:outerShdw>
           </a:effectLst>
         </p:spPr>
+        <p:txBody>
+          <a:bodyPr/>
+          <a:lstStyle/>
+          <a:p>
+            <a:endParaRPr lang="ja-JP" altLang="en-US"/>
+          </a:p>
+        </p:txBody>
       </p:sp>
       <p:sp>
         <p:nvSpPr>
@@ -4409,6 +4277,13 @@
           </a:solidFill>
           <a:ln/>
         </p:spPr>
+        <p:txBody>
+          <a:bodyPr/>
+          <a:lstStyle/>
+          <a:p>
+            <a:endParaRPr lang="ja-JP" altLang="en-US"/>
+          </a:p>
+        </p:txBody>
       </p:sp>
       <p:sp>
         <p:nvSpPr>
@@ -4431,7 +4306,7 @@
           <a:bodyPr wrap="square" lIns="0" tIns="0" rIns="0" bIns="0" rtlCol="0" anchor="t"/>
           <a:lstStyle/>
           <a:p>
-            <a:pPr indent="0" marL="0">
+            <a:pPr marL="0" indent="0">
               <a:buNone/>
             </a:pPr>
             <a:r>
@@ -4470,7 +4345,7 @@
           <a:bodyPr wrap="square" lIns="0" tIns="0" rIns="0" bIns="0" rtlCol="0" anchor="t"/>
           <a:lstStyle/>
           <a:p>
-            <a:pPr indent="0" marL="0">
+            <a:pPr marL="0" indent="0">
               <a:buNone/>
             </a:pPr>
             <a:r>
@@ -4504,6 +4379,7 @@
         <a:solidFill>
           <a:srgbClr val="F7F5F0"/>
         </a:solidFill>
+        <a:effectLst/>
       </p:bgPr>
     </p:bg>
     <p:spTree>
@@ -4539,6 +4415,13 @@
           </a:solidFill>
           <a:ln/>
         </p:spPr>
+        <p:txBody>
+          <a:bodyPr/>
+          <a:lstStyle/>
+          <a:p>
+            <a:endParaRPr lang="ja-JP" altLang="en-US"/>
+          </a:p>
+        </p:txBody>
       </p:sp>
       <p:sp>
         <p:nvSpPr>
@@ -4561,7 +4444,7 @@
           <a:bodyPr wrap="square" lIns="0" tIns="0" rIns="0" bIns="0" rtlCol="0" anchor="ctr"/>
           <a:lstStyle/>
           <a:p>
-            <a:pPr indent="0" marL="0">
+            <a:pPr marL="0" indent="0">
               <a:buNone/>
             </a:pPr>
             <a:r>
@@ -4600,7 +4483,7 @@
           <a:bodyPr wrap="square" lIns="0" tIns="0" rIns="0" bIns="0" rtlCol="0" anchor="ctr"/>
           <a:lstStyle/>
           <a:p>
-            <a:pPr algn="r" indent="0" marL="0">
+            <a:pPr marL="0" indent="0" algn="r">
               <a:buNone/>
             </a:pPr>
             <a:r>
@@ -4639,7 +4522,7 @@
           <a:bodyPr wrap="square" lIns="0" tIns="0" rIns="0" bIns="0" rtlCol="0" anchor="ctr"/>
           <a:lstStyle/>
           <a:p>
-            <a:pPr indent="0" marL="0">
+            <a:pPr marL="0" indent="0">
               <a:buNone/>
             </a:pPr>
             <a:r>
@@ -4678,7 +4561,7 @@
           <a:bodyPr wrap="square" lIns="0" tIns="0" rIns="0" bIns="0" rtlCol="0" anchor="ctr"/>
           <a:lstStyle/>
           <a:p>
-            <a:pPr indent="0" marL="0">
+            <a:pPr marL="0" indent="0">
               <a:buNone/>
             </a:pPr>
             <a:r>
@@ -4715,18 +4598,25 @@
           </a:solidFill>
           <a:ln/>
         </p:spPr>
+        <p:txBody>
+          <a:bodyPr/>
+          <a:lstStyle/>
+          <a:p>
+            <a:endParaRPr lang="ja-JP" altLang="en-US"/>
+          </a:p>
+        </p:txBody>
       </p:sp>
       <p:pic>
         <p:nvPicPr>
-          <p:cNvPr id="8" name="Image 0" descr="/Users/kubotatoru/ai-management/docs/admin/slides/weekend_holiday_kpi/charts/13_holiday_lead_window.png">    </p:cNvPr>
+          <p:cNvPr id="8" name="Image 0" descr="/Users/kubotatoru/ai-management/docs/admin/slides/weekend_holiday_kpi/charts/13_holiday_lead_window.png"/>
           <p:cNvPicPr>
             <a:picLocks noChangeAspect="1"/>
           </p:cNvPicPr>
           <p:nvPr/>
         </p:nvPicPr>
         <p:blipFill>
-          <a:blip r:embed="rId1"/>
-          <a:srcRect l="0" r="0" t="0" b="0"/>
+          <a:blip r:embed="rId3"/>
+          <a:srcRect/>
           <a:stretch/>
         </p:blipFill>
         <p:spPr>
@@ -4763,13 +4653,20 @@
             <a:prstDash val="solid"/>
           </a:ln>
           <a:effectLst>
-            <a:outerShdw sx="100000" sy="100000" kx="0" ky="0" algn="bl" rotWithShape="0" blurRad="101600" dist="25400" dir="5400000">
+            <a:outerShdw blurRad="101600" dist="25400" dir="5400000" algn="bl" rotWithShape="0">
               <a:srgbClr val="000000">
                 <a:alpha val="8000"/>
               </a:srgbClr>
             </a:outerShdw>
           </a:effectLst>
         </p:spPr>
+        <p:txBody>
+          <a:bodyPr/>
+          <a:lstStyle/>
+          <a:p>
+            <a:endParaRPr lang="ja-JP" altLang="en-US"/>
+          </a:p>
+        </p:txBody>
       </p:sp>
       <p:sp>
         <p:nvSpPr>
@@ -4790,6 +4687,13 @@
           </a:solidFill>
           <a:ln/>
         </p:spPr>
+        <p:txBody>
+          <a:bodyPr/>
+          <a:lstStyle/>
+          <a:p>
+            <a:endParaRPr lang="ja-JP" altLang="en-US"/>
+          </a:p>
+        </p:txBody>
       </p:sp>
       <p:sp>
         <p:nvSpPr>
@@ -4812,7 +4716,7 @@
           <a:bodyPr wrap="square" lIns="0" tIns="0" rIns="0" bIns="0" rtlCol="0" anchor="t"/>
           <a:lstStyle/>
           <a:p>
-            <a:pPr indent="0" marL="0">
+            <a:pPr marL="0" indent="0">
               <a:buNone/>
             </a:pPr>
             <a:r>
@@ -4851,7 +4755,7 @@
           <a:bodyPr wrap="square" lIns="0" tIns="0" rIns="0" bIns="0" rtlCol="0" anchor="t"/>
           <a:lstStyle/>
           <a:p>
-            <a:pPr indent="0" marL="0">
+            <a:pPr marL="0" indent="0">
               <a:buNone/>
             </a:pPr>
             <a:r>
@@ -4893,13 +4797,20 @@
             <a:prstDash val="solid"/>
           </a:ln>
           <a:effectLst>
-            <a:outerShdw sx="100000" sy="100000" kx="0" ky="0" algn="bl" rotWithShape="0" blurRad="101600" dist="25400" dir="5400000">
+            <a:outerShdw blurRad="101600" dist="25400" dir="5400000" algn="bl" rotWithShape="0">
               <a:srgbClr val="000000">
                 <a:alpha val="8000"/>
               </a:srgbClr>
             </a:outerShdw>
           </a:effectLst>
         </p:spPr>
+        <p:txBody>
+          <a:bodyPr/>
+          <a:lstStyle/>
+          <a:p>
+            <a:endParaRPr lang="ja-JP" altLang="en-US"/>
+          </a:p>
+        </p:txBody>
       </p:sp>
       <p:sp>
         <p:nvSpPr>
@@ -4920,6 +4831,13 @@
           </a:solidFill>
           <a:ln/>
         </p:spPr>
+        <p:txBody>
+          <a:bodyPr/>
+          <a:lstStyle/>
+          <a:p>
+            <a:endParaRPr lang="ja-JP" altLang="en-US"/>
+          </a:p>
+        </p:txBody>
       </p:sp>
       <p:sp>
         <p:nvSpPr>
@@ -4942,7 +4860,7 @@
           <a:bodyPr wrap="square" lIns="0" tIns="0" rIns="0" bIns="0" rtlCol="0" anchor="t"/>
           <a:lstStyle/>
           <a:p>
-            <a:pPr indent="0" marL="0">
+            <a:pPr marL="0" indent="0">
               <a:buNone/>
             </a:pPr>
             <a:r>
@@ -4981,7 +4899,7 @@
           <a:bodyPr wrap="square" lIns="0" tIns="0" rIns="0" bIns="0" rtlCol="0" anchor="t"/>
           <a:lstStyle/>
           <a:p>
-            <a:pPr indent="0" marL="0">
+            <a:pPr marL="0" indent="0">
               <a:buNone/>
             </a:pPr>
             <a:r>
@@ -5023,13 +4941,20 @@
             <a:prstDash val="solid"/>
           </a:ln>
           <a:effectLst>
-            <a:outerShdw sx="100000" sy="100000" kx="0" ky="0" algn="bl" rotWithShape="0" blurRad="101600" dist="25400" dir="5400000">
+            <a:outerShdw blurRad="101600" dist="25400" dir="5400000" algn="bl" rotWithShape="0">
               <a:srgbClr val="000000">
                 <a:alpha val="8000"/>
               </a:srgbClr>
             </a:outerShdw>
           </a:effectLst>
         </p:spPr>
+        <p:txBody>
+          <a:bodyPr/>
+          <a:lstStyle/>
+          <a:p>
+            <a:endParaRPr lang="ja-JP" altLang="en-US"/>
+          </a:p>
+        </p:txBody>
       </p:sp>
       <p:sp>
         <p:nvSpPr>
@@ -5050,6 +4975,13 @@
           </a:solidFill>
           <a:ln/>
         </p:spPr>
+        <p:txBody>
+          <a:bodyPr/>
+          <a:lstStyle/>
+          <a:p>
+            <a:endParaRPr lang="ja-JP" altLang="en-US"/>
+          </a:p>
+        </p:txBody>
       </p:sp>
       <p:sp>
         <p:nvSpPr>
@@ -5072,7 +5004,7 @@
           <a:bodyPr wrap="square" lIns="0" tIns="0" rIns="0" bIns="0" rtlCol="0" anchor="t"/>
           <a:lstStyle/>
           <a:p>
-            <a:pPr indent="0" marL="0">
+            <a:pPr marL="0" indent="0">
               <a:buNone/>
             </a:pPr>
             <a:r>
@@ -5111,7 +5043,7 @@
           <a:bodyPr wrap="square" lIns="0" tIns="0" rIns="0" bIns="0" rtlCol="0" anchor="t"/>
           <a:lstStyle/>
           <a:p>
-            <a:pPr indent="0" marL="0">
+            <a:pPr marL="0" indent="0">
               <a:buNone/>
             </a:pPr>
             <a:r>
@@ -5148,6 +5080,13 @@
           </a:solidFill>
           <a:ln/>
         </p:spPr>
+        <p:txBody>
+          <a:bodyPr/>
+          <a:lstStyle/>
+          <a:p>
+            <a:endParaRPr lang="ja-JP" altLang="en-US"/>
+          </a:p>
+        </p:txBody>
       </p:sp>
       <p:sp>
         <p:nvSpPr>
@@ -5170,7 +5109,7 @@
           <a:bodyPr wrap="square" lIns="0" tIns="0" rIns="0" bIns="0" rtlCol="0" anchor="ctr"/>
           <a:lstStyle/>
           <a:p>
-            <a:pPr algn="ctr" indent="0" marL="0">
+            <a:pPr marL="0" indent="0" algn="ctr">
               <a:buNone/>
             </a:pPr>
             <a:r>
@@ -5204,6 +5143,7 @@
         <a:solidFill>
           <a:srgbClr val="F7F5F0"/>
         </a:solidFill>
+        <a:effectLst/>
       </p:bgPr>
     </p:bg>
     <p:spTree>
@@ -5239,6 +5179,13 @@
           </a:solidFill>
           <a:ln/>
         </p:spPr>
+        <p:txBody>
+          <a:bodyPr/>
+          <a:lstStyle/>
+          <a:p>
+            <a:endParaRPr lang="ja-JP" altLang="en-US"/>
+          </a:p>
+        </p:txBody>
       </p:sp>
       <p:sp>
         <p:nvSpPr>
@@ -5261,7 +5208,7 @@
           <a:bodyPr wrap="square" lIns="0" tIns="0" rIns="0" bIns="0" rtlCol="0" anchor="ctr"/>
           <a:lstStyle/>
           <a:p>
-            <a:pPr indent="0" marL="0">
+            <a:pPr marL="0" indent="0">
               <a:buNone/>
             </a:pPr>
             <a:r>
@@ -5300,7 +5247,7 @@
           <a:bodyPr wrap="square" lIns="0" tIns="0" rIns="0" bIns="0" rtlCol="0" anchor="ctr"/>
           <a:lstStyle/>
           <a:p>
-            <a:pPr algn="r" indent="0" marL="0">
+            <a:pPr marL="0" indent="0" algn="r">
               <a:buNone/>
             </a:pPr>
             <a:r>
@@ -5339,7 +5286,7 @@
           <a:bodyPr wrap="square" lIns="0" tIns="0" rIns="0" bIns="0" rtlCol="0" anchor="ctr"/>
           <a:lstStyle/>
           <a:p>
-            <a:pPr indent="0" marL="0">
+            <a:pPr marL="0" indent="0">
               <a:buNone/>
             </a:pPr>
             <a:r>
@@ -5378,7 +5325,7 @@
           <a:bodyPr wrap="square" lIns="0" tIns="0" rIns="0" bIns="0" rtlCol="0" anchor="ctr"/>
           <a:lstStyle/>
           <a:p>
-            <a:pPr indent="0" marL="0">
+            <a:pPr marL="0" indent="0">
               <a:buNone/>
             </a:pPr>
             <a:r>
@@ -5415,18 +5362,25 @@
           </a:solidFill>
           <a:ln/>
         </p:spPr>
+        <p:txBody>
+          <a:bodyPr/>
+          <a:lstStyle/>
+          <a:p>
+            <a:endParaRPr lang="ja-JP" altLang="en-US"/>
+          </a:p>
+        </p:txBody>
       </p:sp>
       <p:pic>
         <p:nvPicPr>
-          <p:cNvPr id="8" name="Image 0" descr="/Users/kubotatoru/ai-management/docs/admin/slides/weekend_holiday_kpi/charts/06_category_comparison.png">    </p:cNvPr>
+          <p:cNvPr id="8" name="Image 0" descr="/Users/kubotatoru/ai-management/docs/admin/slides/weekend_holiday_kpi/charts/06_category_comparison.png"/>
           <p:cNvPicPr>
             <a:picLocks noChangeAspect="1"/>
           </p:cNvPicPr>
           <p:nvPr/>
         </p:nvPicPr>
         <p:blipFill>
-          <a:blip r:embed="rId1"/>
-          <a:srcRect l="0" r="0" t="0" b="0"/>
+          <a:blip r:embed="rId3"/>
+          <a:srcRect/>
           <a:stretch/>
         </p:blipFill>
         <p:spPr>
@@ -5458,6 +5412,13 @@
           </a:solidFill>
           <a:ln/>
         </p:spPr>
+        <p:txBody>
+          <a:bodyPr/>
+          <a:lstStyle/>
+          <a:p>
+            <a:endParaRPr lang="ja-JP" altLang="en-US"/>
+          </a:p>
+        </p:txBody>
       </p:sp>
       <p:sp>
         <p:nvSpPr>
@@ -5480,7 +5441,7 @@
           <a:bodyPr wrap="square" lIns="0" tIns="0" rIns="0" bIns="0" rtlCol="0" anchor="ctr"/>
           <a:lstStyle/>
           <a:p>
-            <a:pPr algn="ctr" indent="0" marL="0">
+            <a:pPr marL="0" indent="0" algn="ctr">
               <a:buNone/>
             </a:pPr>
             <a:r>
@@ -5519,7 +5480,7 @@
           <a:bodyPr wrap="square" lIns="0" tIns="0" rIns="0" bIns="0" rtlCol="0" anchor="t"/>
           <a:lstStyle/>
           <a:p>
-            <a:pPr algn="ctr" indent="0" marL="0">
+            <a:pPr marL="0" indent="0" algn="ctr">
               <a:buNone/>
             </a:pPr>
             <a:r>
@@ -5536,7 +5497,7 @@
             <a:endParaRPr lang="en-US" sz="1300" dirty="0"/>
           </a:p>
           <a:p>
-            <a:pPr algn="ctr" indent="0" marL="0">
+            <a:pPr marL="0" indent="0" algn="ctr">
               <a:buNone/>
             </a:pPr>
             <a:r>
@@ -5578,13 +5539,20 @@
             <a:prstDash val="solid"/>
           </a:ln>
           <a:effectLst>
-            <a:outerShdw sx="100000" sy="100000" kx="0" ky="0" algn="bl" rotWithShape="0" blurRad="101600" dist="25400" dir="5400000">
+            <a:outerShdw blurRad="101600" dist="25400" dir="5400000" algn="bl" rotWithShape="0">
               <a:srgbClr val="000000">
                 <a:alpha val="8000"/>
               </a:srgbClr>
             </a:outerShdw>
           </a:effectLst>
         </p:spPr>
+        <p:txBody>
+          <a:bodyPr/>
+          <a:lstStyle/>
+          <a:p>
+            <a:endParaRPr lang="ja-JP" altLang="en-US"/>
+          </a:p>
+        </p:txBody>
       </p:sp>
       <p:sp>
         <p:nvSpPr>
@@ -5605,6 +5573,13 @@
           </a:solidFill>
           <a:ln/>
         </p:spPr>
+        <p:txBody>
+          <a:bodyPr/>
+          <a:lstStyle/>
+          <a:p>
+            <a:endParaRPr lang="ja-JP" altLang="en-US"/>
+          </a:p>
+        </p:txBody>
       </p:sp>
       <p:sp>
         <p:nvSpPr>
@@ -5627,7 +5602,7 @@
           <a:bodyPr wrap="square" lIns="0" tIns="0" rIns="0" bIns="0" rtlCol="0" anchor="t"/>
           <a:lstStyle/>
           <a:p>
-            <a:pPr indent="0" marL="0">
+            <a:pPr marL="0" indent="0">
               <a:buNone/>
             </a:pPr>
             <a:r>
@@ -5666,7 +5641,7 @@
           <a:bodyPr wrap="square" lIns="0" tIns="0" rIns="0" bIns="0" rtlCol="0" anchor="t"/>
           <a:lstStyle/>
           <a:p>
-            <a:pPr indent="0" marL="0">
+            <a:pPr marL="0" indent="0">
               <a:buNone/>
             </a:pPr>
             <a:r>
@@ -5708,13 +5683,20 @@
             <a:prstDash val="solid"/>
           </a:ln>
           <a:effectLst>
-            <a:outerShdw sx="100000" sy="100000" kx="0" ky="0" algn="bl" rotWithShape="0" blurRad="101600" dist="25400" dir="5400000">
+            <a:outerShdw blurRad="101600" dist="25400" dir="5400000" algn="bl" rotWithShape="0">
               <a:srgbClr val="000000">
                 <a:alpha val="8000"/>
               </a:srgbClr>
             </a:outerShdw>
           </a:effectLst>
         </p:spPr>
+        <p:txBody>
+          <a:bodyPr/>
+          <a:lstStyle/>
+          <a:p>
+            <a:endParaRPr lang="ja-JP" altLang="en-US"/>
+          </a:p>
+        </p:txBody>
       </p:sp>
       <p:sp>
         <p:nvSpPr>
@@ -5735,6 +5717,13 @@
           </a:solidFill>
           <a:ln/>
         </p:spPr>
+        <p:txBody>
+          <a:bodyPr/>
+          <a:lstStyle/>
+          <a:p>
+            <a:endParaRPr lang="ja-JP" altLang="en-US"/>
+          </a:p>
+        </p:txBody>
       </p:sp>
       <p:sp>
         <p:nvSpPr>
@@ -5757,7 +5746,7 @@
           <a:bodyPr wrap="square" lIns="0" tIns="0" rIns="0" bIns="0" rtlCol="0" anchor="t"/>
           <a:lstStyle/>
           <a:p>
-            <a:pPr indent="0" marL="0">
+            <a:pPr marL="0" indent="0">
               <a:buNone/>
             </a:pPr>
             <a:r>
@@ -5796,7 +5785,7 @@
           <a:bodyPr wrap="square" lIns="0" tIns="0" rIns="0" bIns="0" rtlCol="0" anchor="t"/>
           <a:lstStyle/>
           <a:p>
-            <a:pPr indent="0" marL="0">
+            <a:pPr marL="0" indent="0">
               <a:buNone/>
             </a:pPr>
             <a:r>
@@ -5830,6 +5819,7 @@
         <a:solidFill>
           <a:srgbClr val="F7F5F0"/>
         </a:solidFill>
+        <a:effectLst/>
       </p:bgPr>
     </p:bg>
     <p:spTree>
@@ -5865,6 +5855,13 @@
           </a:solidFill>
           <a:ln/>
         </p:spPr>
+        <p:txBody>
+          <a:bodyPr/>
+          <a:lstStyle/>
+          <a:p>
+            <a:endParaRPr lang="ja-JP" altLang="en-US"/>
+          </a:p>
+        </p:txBody>
       </p:sp>
       <p:sp>
         <p:nvSpPr>
@@ -5887,7 +5884,7 @@
           <a:bodyPr wrap="square" lIns="0" tIns="0" rIns="0" bIns="0" rtlCol="0" anchor="ctr"/>
           <a:lstStyle/>
           <a:p>
-            <a:pPr indent="0" marL="0">
+            <a:pPr marL="0" indent="0">
               <a:buNone/>
             </a:pPr>
             <a:r>
@@ -5926,7 +5923,7 @@
           <a:bodyPr wrap="square" lIns="0" tIns="0" rIns="0" bIns="0" rtlCol="0" anchor="ctr"/>
           <a:lstStyle/>
           <a:p>
-            <a:pPr algn="r" indent="0" marL="0">
+            <a:pPr marL="0" indent="0" algn="r">
               <a:buNone/>
             </a:pPr>
             <a:r>
@@ -5965,7 +5962,7 @@
           <a:bodyPr wrap="square" lIns="0" tIns="0" rIns="0" bIns="0" rtlCol="0" anchor="ctr"/>
           <a:lstStyle/>
           <a:p>
-            <a:pPr indent="0" marL="0">
+            <a:pPr marL="0" indent="0">
               <a:buNone/>
             </a:pPr>
             <a:r>
@@ -6004,7 +6001,7 @@
           <a:bodyPr wrap="square" lIns="0" tIns="0" rIns="0" bIns="0" rtlCol="0" anchor="ctr"/>
           <a:lstStyle/>
           <a:p>
-            <a:pPr indent="0" marL="0">
+            <a:pPr marL="0" indent="0">
               <a:buNone/>
             </a:pPr>
             <a:r>
@@ -6041,6 +6038,13 @@
           </a:solidFill>
           <a:ln/>
         </p:spPr>
+        <p:txBody>
+          <a:bodyPr/>
+          <a:lstStyle/>
+          <a:p>
+            <a:endParaRPr lang="ja-JP" altLang="en-US"/>
+          </a:p>
+        </p:txBody>
       </p:sp>
       <p:sp>
         <p:nvSpPr>
@@ -6063,7 +6067,7 @@
           <a:bodyPr wrap="square" lIns="0" tIns="0" rIns="0" bIns="0" rtlCol="0" anchor="ctr"/>
           <a:lstStyle/>
           <a:p>
-            <a:pPr algn="ctr" indent="0" marL="0">
+            <a:pPr marL="0" indent="0" algn="ctr">
               <a:buNone/>
             </a:pPr>
             <a:r>
@@ -6100,6 +6104,13 @@
           </a:solidFill>
           <a:ln/>
         </p:spPr>
+        <p:txBody>
+          <a:bodyPr/>
+          <a:lstStyle/>
+          <a:p>
+            <a:endParaRPr lang="ja-JP" altLang="en-US"/>
+          </a:p>
+        </p:txBody>
       </p:sp>
       <p:sp>
         <p:nvSpPr>
@@ -6122,7 +6133,7 @@
           <a:bodyPr wrap="square" lIns="0" tIns="0" rIns="0" bIns="0" rtlCol="0" anchor="ctr"/>
           <a:lstStyle/>
           <a:p>
-            <a:pPr algn="ctr" indent="0" marL="0">
+            <a:pPr marL="0" indent="0" algn="ctr">
               <a:buNone/>
             </a:pPr>
             <a:r>
@@ -6139,7 +6150,7 @@
             <a:endParaRPr lang="en-US" sz="1200" dirty="0"/>
           </a:p>
           <a:p>
-            <a:pPr algn="ctr" indent="0" marL="0">
+            <a:pPr marL="0" indent="0" algn="ctr">
               <a:buNone/>
             </a:pPr>
             <a:r>
@@ -6176,6 +6187,13 @@
           </a:solidFill>
           <a:ln/>
         </p:spPr>
+        <p:txBody>
+          <a:bodyPr/>
+          <a:lstStyle/>
+          <a:p>
+            <a:endParaRPr lang="ja-JP" altLang="en-US"/>
+          </a:p>
+        </p:txBody>
       </p:sp>
       <p:sp>
         <p:nvSpPr>
@@ -6198,7 +6216,7 @@
           <a:bodyPr wrap="square" lIns="0" tIns="0" rIns="0" bIns="0" rtlCol="0" anchor="ctr"/>
           <a:lstStyle/>
           <a:p>
-            <a:pPr algn="ctr" indent="0" marL="0">
+            <a:pPr marL="0" indent="0" algn="ctr">
               <a:buNone/>
             </a:pPr>
             <a:r>
@@ -6235,6 +6253,13 @@
           </a:solidFill>
           <a:ln/>
         </p:spPr>
+        <p:txBody>
+          <a:bodyPr/>
+          <a:lstStyle/>
+          <a:p>
+            <a:endParaRPr lang="ja-JP" altLang="en-US"/>
+          </a:p>
+        </p:txBody>
       </p:sp>
       <p:sp>
         <p:nvSpPr>
@@ -6257,7 +6282,7 @@
           <a:bodyPr wrap="square" lIns="0" tIns="0" rIns="0" bIns="0" rtlCol="0" anchor="ctr"/>
           <a:lstStyle/>
           <a:p>
-            <a:pPr algn="ctr" indent="0" marL="0">
+            <a:pPr marL="0" indent="0" algn="ctr">
               <a:buNone/>
             </a:pPr>
             <a:r>
@@ -6274,7 +6299,7 @@
             <a:endParaRPr lang="en-US" sz="1200" dirty="0"/>
           </a:p>
           <a:p>
-            <a:pPr algn="ctr" indent="0" marL="0">
+            <a:pPr marL="0" indent="0" algn="ctr">
               <a:buNone/>
             </a:pPr>
             <a:r>
@@ -6311,6 +6336,13 @@
           </a:solidFill>
           <a:ln/>
         </p:spPr>
+        <p:txBody>
+          <a:bodyPr/>
+          <a:lstStyle/>
+          <a:p>
+            <a:endParaRPr lang="ja-JP" altLang="en-US"/>
+          </a:p>
+        </p:txBody>
       </p:sp>
       <p:sp>
         <p:nvSpPr>
@@ -6333,7 +6365,7 @@
           <a:bodyPr wrap="square" lIns="0" tIns="0" rIns="0" bIns="0" rtlCol="0" anchor="ctr"/>
           <a:lstStyle/>
           <a:p>
-            <a:pPr algn="ctr" indent="0" marL="0">
+            <a:pPr marL="0" indent="0" algn="ctr">
               <a:buNone/>
             </a:pPr>
             <a:r>
@@ -6370,6 +6402,13 @@
           </a:solidFill>
           <a:ln/>
         </p:spPr>
+        <p:txBody>
+          <a:bodyPr/>
+          <a:lstStyle/>
+          <a:p>
+            <a:endParaRPr lang="ja-JP" altLang="en-US"/>
+          </a:p>
+        </p:txBody>
       </p:sp>
       <p:sp>
         <p:nvSpPr>
@@ -6392,7 +6431,7 @@
           <a:bodyPr wrap="square" lIns="0" tIns="0" rIns="0" bIns="0" rtlCol="0" anchor="ctr"/>
           <a:lstStyle/>
           <a:p>
-            <a:pPr algn="ctr" indent="0" marL="0">
+            <a:pPr marL="0" indent="0" algn="ctr">
               <a:buNone/>
             </a:pPr>
             <a:r>
@@ -6409,7 +6448,7 @@
             <a:endParaRPr lang="en-US" sz="1200" dirty="0"/>
           </a:p>
           <a:p>
-            <a:pPr algn="ctr" indent="0" marL="0">
+            <a:pPr marL="0" indent="0" algn="ctr">
               <a:buNone/>
             </a:pPr>
             <a:r>
@@ -6446,6 +6485,13 @@
           </a:solidFill>
           <a:ln/>
         </p:spPr>
+        <p:txBody>
+          <a:bodyPr/>
+          <a:lstStyle/>
+          <a:p>
+            <a:endParaRPr lang="ja-JP" altLang="en-US"/>
+          </a:p>
+        </p:txBody>
       </p:sp>
       <p:sp>
         <p:nvSpPr>
@@ -6468,7 +6514,7 @@
           <a:bodyPr wrap="square" lIns="0" tIns="0" rIns="0" bIns="0" rtlCol="0" anchor="ctr"/>
           <a:lstStyle/>
           <a:p>
-            <a:pPr algn="ctr" indent="0" marL="0">
+            <a:pPr marL="0" indent="0" algn="ctr">
               <a:buNone/>
             </a:pPr>
             <a:r>
@@ -6505,6 +6551,13 @@
           </a:solidFill>
           <a:ln/>
         </p:spPr>
+        <p:txBody>
+          <a:bodyPr/>
+          <a:lstStyle/>
+          <a:p>
+            <a:endParaRPr lang="ja-JP" altLang="en-US"/>
+          </a:p>
+        </p:txBody>
       </p:sp>
       <p:sp>
         <p:nvSpPr>
@@ -6527,7 +6580,7 @@
           <a:bodyPr wrap="square" lIns="0" tIns="0" rIns="0" bIns="0" rtlCol="0" anchor="ctr"/>
           <a:lstStyle/>
           <a:p>
-            <a:pPr algn="ctr" indent="0" marL="0">
+            <a:pPr marL="0" indent="0" algn="ctr">
               <a:buNone/>
             </a:pPr>
             <a:r>
@@ -6544,7 +6597,7 @@
             <a:endParaRPr lang="en-US" sz="1200" dirty="0"/>
           </a:p>
           <a:p>
-            <a:pPr algn="ctr" indent="0" marL="0">
+            <a:pPr marL="0" indent="0" algn="ctr">
               <a:buNone/>
             </a:pPr>
             <a:r>
@@ -6581,6 +6634,13 @@
           </a:solidFill>
           <a:ln/>
         </p:spPr>
+        <p:txBody>
+          <a:bodyPr/>
+          <a:lstStyle/>
+          <a:p>
+            <a:endParaRPr lang="ja-JP" altLang="en-US"/>
+          </a:p>
+        </p:txBody>
       </p:sp>
       <p:sp>
         <p:nvSpPr>
@@ -6603,7 +6663,7 @@
           <a:bodyPr wrap="square" lIns="0" tIns="0" rIns="0" bIns="0" rtlCol="0" anchor="ctr"/>
           <a:lstStyle/>
           <a:p>
-            <a:pPr algn="ctr" indent="0" marL="0">
+            <a:pPr marL="0" indent="0" algn="ctr">
               <a:buNone/>
             </a:pPr>
             <a:r>
@@ -6640,6 +6700,13 @@
           </a:solidFill>
           <a:ln/>
         </p:spPr>
+        <p:txBody>
+          <a:bodyPr/>
+          <a:lstStyle/>
+          <a:p>
+            <a:endParaRPr lang="ja-JP" altLang="en-US"/>
+          </a:p>
+        </p:txBody>
       </p:sp>
       <p:sp>
         <p:nvSpPr>
@@ -6662,7 +6729,7 @@
           <a:bodyPr wrap="square" lIns="0" tIns="0" rIns="0" bIns="0" rtlCol="0" anchor="ctr"/>
           <a:lstStyle/>
           <a:p>
-            <a:pPr algn="ctr" indent="0" marL="0">
+            <a:pPr marL="0" indent="0" algn="ctr">
               <a:buNone/>
             </a:pPr>
             <a:r>
@@ -6679,7 +6746,7 @@
             <a:endParaRPr lang="en-US" sz="1200" dirty="0"/>
           </a:p>
           <a:p>
-            <a:pPr algn="ctr" indent="0" marL="0">
+            <a:pPr marL="0" indent="0" algn="ctr">
               <a:buNone/>
             </a:pPr>
             <a:r>
@@ -6716,6 +6783,13 @@
           </a:solidFill>
           <a:ln/>
         </p:spPr>
+        <p:txBody>
+          <a:bodyPr/>
+          <a:lstStyle/>
+          <a:p>
+            <a:endParaRPr lang="ja-JP" altLang="en-US"/>
+          </a:p>
+        </p:txBody>
       </p:sp>
       <p:sp>
         <p:nvSpPr>
@@ -6738,7 +6812,7 @@
           <a:bodyPr wrap="square" lIns="0" tIns="0" rIns="0" bIns="0" rtlCol="0" anchor="ctr"/>
           <a:lstStyle/>
           <a:p>
-            <a:pPr algn="ctr" indent="0" marL="0">
+            <a:pPr marL="0" indent="0" algn="ctr">
               <a:buNone/>
             </a:pPr>
             <a:r>
@@ -6777,7 +6851,7 @@
           <a:bodyPr wrap="square" lIns="0" tIns="0" rIns="0" bIns="0" rtlCol="0" anchor="t"/>
           <a:lstStyle/>
           <a:p>
-            <a:pPr indent="0" marL="0">
+            <a:pPr marL="0" indent="0">
               <a:buNone/>
             </a:pPr>
             <a:r>
@@ -6816,7 +6890,7 @@
           <a:bodyPr wrap="square" lIns="0" tIns="0" rIns="0" bIns="0" rtlCol="0" anchor="t"/>
           <a:lstStyle/>
           <a:p>
-            <a:pPr indent="0" marL="0">
+            <a:pPr marL="0" indent="0">
               <a:buNone/>
             </a:pPr>
             <a:r>
@@ -6853,6 +6927,13 @@
           </a:solidFill>
           <a:ln/>
         </p:spPr>
+        <p:txBody>
+          <a:bodyPr/>
+          <a:lstStyle/>
+          <a:p>
+            <a:endParaRPr lang="ja-JP" altLang="en-US"/>
+          </a:p>
+        </p:txBody>
       </p:sp>
       <p:sp>
         <p:nvSpPr>
@@ -6875,7 +6956,7 @@
           <a:bodyPr wrap="square" lIns="0" tIns="0" rIns="0" bIns="0" rtlCol="0" anchor="ctr"/>
           <a:lstStyle/>
           <a:p>
-            <a:pPr algn="ctr" indent="0" marL="0">
+            <a:pPr marL="0" indent="0" algn="ctr">
               <a:buNone/>
             </a:pPr>
             <a:r>
@@ -6914,7 +6995,7 @@
           <a:bodyPr wrap="square" lIns="0" tIns="0" rIns="0" bIns="0" rtlCol="0" anchor="t"/>
           <a:lstStyle/>
           <a:p>
-            <a:pPr indent="0" marL="0">
+            <a:pPr marL="0" indent="0">
               <a:buNone/>
             </a:pPr>
             <a:r>
@@ -6953,7 +7034,7 @@
           <a:bodyPr wrap="square" lIns="0" tIns="0" rIns="0" bIns="0" rtlCol="0" anchor="t"/>
           <a:lstStyle/>
           <a:p>
-            <a:pPr indent="0" marL="0">
+            <a:pPr marL="0" indent="0">
               <a:buNone/>
             </a:pPr>
             <a:r>
@@ -6990,6 +7071,13 @@
           </a:solidFill>
           <a:ln/>
         </p:spPr>
+        <p:txBody>
+          <a:bodyPr/>
+          <a:lstStyle/>
+          <a:p>
+            <a:endParaRPr lang="ja-JP" altLang="en-US"/>
+          </a:p>
+        </p:txBody>
       </p:sp>
       <p:sp>
         <p:nvSpPr>
@@ -7012,7 +7100,7 @@
           <a:bodyPr wrap="square" lIns="0" tIns="0" rIns="0" bIns="0" rtlCol="0" anchor="ctr"/>
           <a:lstStyle/>
           <a:p>
-            <a:pPr algn="ctr" indent="0" marL="0">
+            <a:pPr marL="0" indent="0" algn="ctr">
               <a:buNone/>
             </a:pPr>
             <a:r>
@@ -7051,7 +7139,7 @@
           <a:bodyPr wrap="square" lIns="0" tIns="0" rIns="0" bIns="0" rtlCol="0" anchor="t"/>
           <a:lstStyle/>
           <a:p>
-            <a:pPr indent="0" marL="0">
+            <a:pPr marL="0" indent="0">
               <a:buNone/>
             </a:pPr>
             <a:r>
@@ -7090,7 +7178,7 @@
           <a:bodyPr wrap="square" lIns="0" tIns="0" rIns="0" bIns="0" rtlCol="0" anchor="t"/>
           <a:lstStyle/>
           <a:p>
-            <a:pPr indent="0" marL="0">
+            <a:pPr marL="0" indent="0">
               <a:buNone/>
             </a:pPr>
             <a:r>
@@ -7127,6 +7215,13 @@
           </a:solidFill>
           <a:ln/>
         </p:spPr>
+        <p:txBody>
+          <a:bodyPr/>
+          <a:lstStyle/>
+          <a:p>
+            <a:endParaRPr lang="ja-JP" altLang="en-US"/>
+          </a:p>
+        </p:txBody>
       </p:sp>
       <p:sp>
         <p:nvSpPr>
@@ -7149,7 +7244,7 @@
           <a:bodyPr wrap="square" lIns="0" tIns="0" rIns="0" bIns="0" rtlCol="0" anchor="ctr"/>
           <a:lstStyle/>
           <a:p>
-            <a:pPr algn="ctr" indent="0" marL="0">
+            <a:pPr marL="0" indent="0" algn="ctr">
               <a:buNone/>
             </a:pPr>
             <a:r>
@@ -7188,7 +7283,7 @@
           <a:bodyPr wrap="square" lIns="0" tIns="0" rIns="0" bIns="0" rtlCol="0" anchor="t"/>
           <a:lstStyle/>
           <a:p>
-            <a:pPr indent="0" marL="0">
+            <a:pPr marL="0" indent="0">
               <a:buNone/>
             </a:pPr>
             <a:r>
@@ -7227,7 +7322,7 @@
           <a:bodyPr wrap="square" lIns="0" tIns="0" rIns="0" bIns="0" rtlCol="0" anchor="t"/>
           <a:lstStyle/>
           <a:p>
-            <a:pPr indent="0" marL="0">
+            <a:pPr marL="0" indent="0">
               <a:buNone/>
             </a:pPr>
             <a:r>
@@ -7264,6 +7359,13 @@
           </a:solidFill>
           <a:ln/>
         </p:spPr>
+        <p:txBody>
+          <a:bodyPr/>
+          <a:lstStyle/>
+          <a:p>
+            <a:endParaRPr lang="ja-JP" altLang="en-US"/>
+          </a:p>
+        </p:txBody>
       </p:sp>
       <p:sp>
         <p:nvSpPr>
@@ -7286,7 +7388,7 @@
           <a:bodyPr wrap="square" lIns="0" tIns="0" rIns="0" bIns="0" rtlCol="0" anchor="ctr"/>
           <a:lstStyle/>
           <a:p>
-            <a:pPr algn="ctr" indent="0" marL="0">
+            <a:pPr marL="0" indent="0" algn="ctr">
               <a:buNone/>
             </a:pPr>
             <a:r>
@@ -7300,9 +7402,6 @@
               </a:rPr>
               <a:t>緊急提案: </a:t>
             </a:r>
-            <a:pPr algn="ctr" indent="0" marL="0">
-              <a:buNone/>
-            </a:pPr>
             <a:r>
               <a:rPr lang="en-US" sz="1300" dirty="0">
                 <a:solidFill>
@@ -7334,6 +7433,7 @@
         <a:solidFill>
           <a:srgbClr val="122342"/>
         </a:solidFill>
+        <a:effectLst/>
       </p:bgPr>
     </p:bg>
     <p:spTree>
@@ -7369,6 +7469,13 @@
           </a:solidFill>
           <a:ln/>
         </p:spPr>
+        <p:txBody>
+          <a:bodyPr/>
+          <a:lstStyle/>
+          <a:p>
+            <a:endParaRPr lang="ja-JP" altLang="en-US"/>
+          </a:p>
+        </p:txBody>
       </p:sp>
       <p:sp>
         <p:nvSpPr>
@@ -7391,7 +7498,7 @@
           <a:bodyPr wrap="square" lIns="0" tIns="0" rIns="0" bIns="0" rtlCol="0" anchor="ctr"/>
           <a:lstStyle/>
           <a:p>
-            <a:pPr indent="0" marL="0">
+            <a:pPr marL="0" indent="0">
               <a:buNone/>
             </a:pPr>
             <a:r>
@@ -7430,7 +7537,7 @@
           <a:bodyPr wrap="square" lIns="0" tIns="0" rIns="0" bIns="0" rtlCol="0" anchor="ctr"/>
           <a:lstStyle/>
           <a:p>
-            <a:pPr algn="r" indent="0" marL="0">
+            <a:pPr marL="0" indent="0" algn="r">
               <a:buNone/>
             </a:pPr>
             <a:r>
@@ -7469,7 +7576,7 @@
           <a:bodyPr wrap="square" lIns="0" tIns="0" rIns="0" bIns="0" rtlCol="0" anchor="ctr"/>
           <a:lstStyle/>
           <a:p>
-            <a:pPr indent="0" marL="0">
+            <a:pPr marL="0" indent="0">
               <a:buNone/>
             </a:pPr>
             <a:r>
@@ -7508,7 +7615,7 @@
           <a:bodyPr wrap="square" lIns="0" tIns="0" rIns="0" bIns="0" rtlCol="0" anchor="ctr"/>
           <a:lstStyle/>
           <a:p>
-            <a:pPr indent="0" marL="0">
+            <a:pPr marL="0" indent="0">
               <a:buNone/>
             </a:pPr>
             <a:r>
@@ -7545,18 +7652,25 @@
           </a:solidFill>
           <a:ln/>
         </p:spPr>
+        <p:txBody>
+          <a:bodyPr/>
+          <a:lstStyle/>
+          <a:p>
+            <a:endParaRPr lang="ja-JP" altLang="en-US"/>
+          </a:p>
+        </p:txBody>
       </p:sp>
       <p:pic>
         <p:nvPicPr>
-          <p:cNvPr id="8" name="Image 0" descr="/Users/kubotatoru/ai-management/docs/admin/slides/weekend_holiday_kpi/charts/10_action_roadmap.png">    </p:cNvPr>
+          <p:cNvPr id="8" name="Image 0" descr="/Users/kubotatoru/ai-management/docs/admin/slides/weekend_holiday_kpi/charts/10_action_roadmap.png"/>
           <p:cNvPicPr>
             <a:picLocks noChangeAspect="1"/>
           </p:cNvPicPr>
           <p:nvPr/>
         </p:nvPicPr>
         <p:blipFill>
-          <a:blip r:embed="rId1"/>
-          <a:srcRect l="0" r="0" t="0" b="0"/>
+          <a:blip r:embed="rId3"/>
+          <a:srcRect/>
           <a:stretch/>
         </p:blipFill>
         <p:spPr>
@@ -7593,6 +7707,13 @@
             <a:prstDash val="solid"/>
           </a:ln>
         </p:spPr>
+        <p:txBody>
+          <a:bodyPr/>
+          <a:lstStyle/>
+          <a:p>
+            <a:endParaRPr lang="ja-JP" altLang="en-US"/>
+          </a:p>
+        </p:txBody>
       </p:sp>
       <p:sp>
         <p:nvSpPr>
@@ -7613,6 +7734,13 @@
           </a:solidFill>
           <a:ln/>
         </p:spPr>
+        <p:txBody>
+          <a:bodyPr/>
+          <a:lstStyle/>
+          <a:p>
+            <a:endParaRPr lang="ja-JP" altLang="en-US"/>
+          </a:p>
+        </p:txBody>
       </p:sp>
       <p:sp>
         <p:nvSpPr>
@@ -7635,7 +7763,7 @@
           <a:bodyPr wrap="square" lIns="0" tIns="0" rIns="0" bIns="0" rtlCol="0" anchor="ctr"/>
           <a:lstStyle/>
           <a:p>
-            <a:pPr indent="0" marL="0">
+            <a:pPr marL="0" indent="0">
               <a:buNone/>
             </a:pPr>
             <a:r>
@@ -7674,7 +7802,7 @@
           <a:bodyPr wrap="square" lIns="0" tIns="0" rIns="0" bIns="0" rtlCol="0" anchor="t"/>
           <a:lstStyle/>
           <a:p>
-            <a:pPr indent="0" marL="0">
+            <a:pPr marL="0" indent="0">
               <a:buNone/>
             </a:pPr>
             <a:r>
@@ -7716,6 +7844,13 @@
             <a:prstDash val="solid"/>
           </a:ln>
         </p:spPr>
+        <p:txBody>
+          <a:bodyPr/>
+          <a:lstStyle/>
+          <a:p>
+            <a:endParaRPr lang="ja-JP" altLang="en-US"/>
+          </a:p>
+        </p:txBody>
       </p:sp>
       <p:sp>
         <p:nvSpPr>
@@ -7736,6 +7871,13 @@
           </a:solidFill>
           <a:ln/>
         </p:spPr>
+        <p:txBody>
+          <a:bodyPr/>
+          <a:lstStyle/>
+          <a:p>
+            <a:endParaRPr lang="ja-JP" altLang="en-US"/>
+          </a:p>
+        </p:txBody>
       </p:sp>
       <p:sp>
         <p:nvSpPr>
@@ -7758,7 +7900,7 @@
           <a:bodyPr wrap="square" lIns="0" tIns="0" rIns="0" bIns="0" rtlCol="0" anchor="ctr"/>
           <a:lstStyle/>
           <a:p>
-            <a:pPr indent="0" marL="0">
+            <a:pPr marL="0" indent="0">
               <a:buNone/>
             </a:pPr>
             <a:r>
@@ -7797,7 +7939,7 @@
           <a:bodyPr wrap="square" lIns="0" tIns="0" rIns="0" bIns="0" rtlCol="0" anchor="t"/>
           <a:lstStyle/>
           <a:p>
-            <a:pPr indent="0" marL="0">
+            <a:pPr marL="0" indent="0">
               <a:buNone/>
             </a:pPr>
             <a:r>
@@ -7839,6 +7981,13 @@
             <a:prstDash val="solid"/>
           </a:ln>
         </p:spPr>
+        <p:txBody>
+          <a:bodyPr/>
+          <a:lstStyle/>
+          <a:p>
+            <a:endParaRPr lang="ja-JP" altLang="en-US"/>
+          </a:p>
+        </p:txBody>
       </p:sp>
       <p:sp>
         <p:nvSpPr>
@@ -7859,6 +8008,13 @@
           </a:solidFill>
           <a:ln/>
         </p:spPr>
+        <p:txBody>
+          <a:bodyPr/>
+          <a:lstStyle/>
+          <a:p>
+            <a:endParaRPr lang="ja-JP" altLang="en-US"/>
+          </a:p>
+        </p:txBody>
       </p:sp>
       <p:sp>
         <p:nvSpPr>
@@ -7881,7 +8037,7 @@
           <a:bodyPr wrap="square" lIns="0" tIns="0" rIns="0" bIns="0" rtlCol="0" anchor="ctr"/>
           <a:lstStyle/>
           <a:p>
-            <a:pPr indent="0" marL="0">
+            <a:pPr marL="0" indent="0">
               <a:buNone/>
             </a:pPr>
             <a:r>
@@ -7920,7 +8076,7 @@
           <a:bodyPr wrap="square" lIns="0" tIns="0" rIns="0" bIns="0" rtlCol="0" anchor="t"/>
           <a:lstStyle/>
           <a:p>
-            <a:pPr indent="0" marL="0">
+            <a:pPr marL="0" indent="0">
               <a:buNone/>
             </a:pPr>
             <a:r>
@@ -7962,6 +8118,13 @@
             <a:prstDash val="solid"/>
           </a:ln>
         </p:spPr>
+        <p:txBody>
+          <a:bodyPr/>
+          <a:lstStyle/>
+          <a:p>
+            <a:endParaRPr lang="ja-JP" altLang="en-US"/>
+          </a:p>
+        </p:txBody>
       </p:sp>
       <p:sp>
         <p:nvSpPr>
@@ -7982,6 +8145,13 @@
           </a:solidFill>
           <a:ln/>
         </p:spPr>
+        <p:txBody>
+          <a:bodyPr/>
+          <a:lstStyle/>
+          <a:p>
+            <a:endParaRPr lang="ja-JP" altLang="en-US"/>
+          </a:p>
+        </p:txBody>
       </p:sp>
       <p:sp>
         <p:nvSpPr>
@@ -8004,7 +8174,7 @@
           <a:bodyPr wrap="square" lIns="0" tIns="0" rIns="0" bIns="0" rtlCol="0" anchor="ctr"/>
           <a:lstStyle/>
           <a:p>
-            <a:pPr indent="0" marL="0">
+            <a:pPr marL="0" indent="0">
               <a:buNone/>
             </a:pPr>
             <a:r>
@@ -8043,7 +8213,7 @@
           <a:bodyPr wrap="square" lIns="0" tIns="0" rIns="0" bIns="0" rtlCol="0" anchor="t"/>
           <a:lstStyle/>
           <a:p>
-            <a:pPr indent="0" marL="0">
+            <a:pPr marL="0" indent="0">
               <a:buNone/>
             </a:pPr>
             <a:r>
@@ -8080,6 +8250,13 @@
           </a:solidFill>
           <a:ln/>
         </p:spPr>
+        <p:txBody>
+          <a:bodyPr/>
+          <a:lstStyle/>
+          <a:p>
+            <a:endParaRPr lang="ja-JP" altLang="en-US"/>
+          </a:p>
+        </p:txBody>
       </p:sp>
       <p:sp>
         <p:nvSpPr>
@@ -8102,7 +8279,7 @@
           <a:bodyPr wrap="square" lIns="0" tIns="0" rIns="0" bIns="0" rtlCol="0" anchor="ctr"/>
           <a:lstStyle/>
           <a:p>
-            <a:pPr indent="0" marL="0">
+            <a:pPr marL="0" indent="0">
               <a:buNone/>
             </a:pPr>
             <a:r>
@@ -8141,7 +8318,7 @@
           <a:bodyPr wrap="square" lIns="0" tIns="0" rIns="0" bIns="0" rtlCol="0" anchor="t"/>
           <a:lstStyle/>
           <a:p>
-            <a:pPr indent="0" marL="0">
+            <a:pPr marL="0" indent="0">
               <a:buNone/>
             </a:pPr>
             <a:r>
@@ -8158,7 +8335,7 @@
             <a:endParaRPr lang="en-US" sz="1100" dirty="0"/>
           </a:p>
           <a:p>
-            <a:pPr indent="0" marL="0">
+            <a:pPr marL="0" indent="0">
               <a:buNone/>
             </a:pPr>
             <a:r>
@@ -8192,6 +8369,7 @@
         <a:solidFill>
           <a:srgbClr val="F7F5F0"/>
         </a:solidFill>
+        <a:effectLst/>
       </p:bgPr>
     </p:bg>
     <p:spTree>
@@ -8227,6 +8405,13 @@
           </a:solidFill>
           <a:ln/>
         </p:spPr>
+        <p:txBody>
+          <a:bodyPr/>
+          <a:lstStyle/>
+          <a:p>
+            <a:endParaRPr lang="ja-JP" altLang="en-US"/>
+          </a:p>
+        </p:txBody>
       </p:sp>
       <p:sp>
         <p:nvSpPr>
@@ -8249,7 +8434,7 @@
           <a:bodyPr wrap="square" lIns="0" tIns="0" rIns="0" bIns="0" rtlCol="0" anchor="ctr"/>
           <a:lstStyle/>
           <a:p>
-            <a:pPr indent="0" marL="0">
+            <a:pPr marL="0" indent="0">
               <a:buNone/>
             </a:pPr>
             <a:r>
@@ -8288,7 +8473,7 @@
           <a:bodyPr wrap="square" lIns="0" tIns="0" rIns="0" bIns="0" rtlCol="0" anchor="ctr"/>
           <a:lstStyle/>
           <a:p>
-            <a:pPr algn="r" indent="0" marL="0">
+            <a:pPr marL="0" indent="0" algn="r">
               <a:buNone/>
             </a:pPr>
             <a:r>
@@ -8327,7 +8512,7 @@
           <a:bodyPr wrap="square" lIns="0" tIns="0" rIns="0" bIns="0" rtlCol="0" anchor="ctr"/>
           <a:lstStyle/>
           <a:p>
-            <a:pPr indent="0" marL="0">
+            <a:pPr marL="0" indent="0">
               <a:buNone/>
             </a:pPr>
             <a:r>
@@ -8366,7 +8551,7 @@
           <a:bodyPr wrap="square" lIns="0" tIns="0" rIns="0" bIns="0" rtlCol="0" anchor="ctr"/>
           <a:lstStyle/>
           <a:p>
-            <a:pPr indent="0" marL="0">
+            <a:pPr marL="0" indent="0">
               <a:buNone/>
             </a:pPr>
             <a:r>
@@ -8403,6 +8588,13 @@
           </a:solidFill>
           <a:ln/>
         </p:spPr>
+        <p:txBody>
+          <a:bodyPr/>
+          <a:lstStyle/>
+          <a:p>
+            <a:endParaRPr lang="ja-JP" altLang="en-US"/>
+          </a:p>
+        </p:txBody>
       </p:sp>
       <p:sp>
         <p:nvSpPr>
@@ -8425,7 +8617,7 @@
           <a:bodyPr wrap="square" lIns="0" tIns="0" rIns="0" bIns="0" rtlCol="0" anchor="ctr"/>
           <a:lstStyle/>
           <a:p>
-            <a:pPr indent="0" marL="0">
+            <a:pPr marL="0" indent="0">
               <a:buNone/>
             </a:pPr>
             <a:r>
@@ -8464,7 +8656,7 @@
           <a:bodyPr wrap="square" lIns="0" tIns="0" rIns="0" bIns="0" rtlCol="0" anchor="ctr"/>
           <a:lstStyle/>
           <a:p>
-            <a:pPr indent="0" marL="0">
+            <a:pPr marL="0" indent="0">
               <a:buNone/>
             </a:pPr>
             <a:r>
@@ -8501,6 +8693,13 @@
           </a:solidFill>
           <a:ln/>
         </p:spPr>
+        <p:txBody>
+          <a:bodyPr/>
+          <a:lstStyle/>
+          <a:p>
+            <a:endParaRPr lang="ja-JP" altLang="en-US"/>
+          </a:p>
+        </p:txBody>
       </p:sp>
       <p:sp>
         <p:nvSpPr>
@@ -8523,7 +8722,7 @@
           <a:bodyPr wrap="square" lIns="0" tIns="0" rIns="0" bIns="0" rtlCol="0" anchor="ctr"/>
           <a:lstStyle/>
           <a:p>
-            <a:pPr algn="ctr" indent="0" marL="0">
+            <a:pPr marL="0" indent="0" algn="ctr">
               <a:buNone/>
             </a:pPr>
             <a:r>
@@ -8562,11 +8761,11 @@
           <a:bodyPr wrap="square" lIns="0" tIns="0" rIns="0" bIns="0" rtlCol="0" anchor="t"/>
           <a:lstStyle/>
           <a:p>
-            <a:pPr indent="0" marL="0">
-              <a:buNone/>
-            </a:pPr>
-            <a:r>
-              <a:rPr lang="en-US" sz="1300" b="1" dirty="0">
+            <a:pPr marL="0" indent="0">
+              <a:buNone/>
+            </a:pPr>
+            <a:r>
+              <a:rPr lang="en-US" sz="1300" b="1" dirty="0" err="1">
                 <a:solidFill>
                   <a:srgbClr val="1E3A5F"/>
                 </a:solidFill>
@@ -8574,7 +8773,18 @@
                 <a:ea typeface="Yu Gothic UI" pitchFamily="34" charset="-122"/>
                 <a:cs typeface="Yu Gothic UI" pitchFamily="34" charset="-120"/>
               </a:rPr>
-              <a:t>緊急は 8 割ではなく 58%</a:t>
+              <a:t>緊急予定外入院は</a:t>
+            </a:r>
+            <a:r>
+              <a:rPr lang="en-US" sz="1300" b="1" dirty="0">
+                <a:solidFill>
+                  <a:srgbClr val="1E3A5F"/>
+                </a:solidFill>
+                <a:latin typeface="Yu Gothic UI" pitchFamily="34" charset="0"/>
+                <a:ea typeface="Yu Gothic UI" pitchFamily="34" charset="-122"/>
+                <a:cs typeface="Yu Gothic UI" pitchFamily="34" charset="-120"/>
+              </a:rPr>
+              <a:t>  58%</a:t>
             </a:r>
             <a:endParaRPr lang="en-US" sz="1300" dirty="0"/>
           </a:p>
@@ -8601,7 +8811,7 @@
           <a:bodyPr wrap="square" lIns="0" tIns="0" rIns="0" bIns="0" rtlCol="0" anchor="t"/>
           <a:lstStyle/>
           <a:p>
-            <a:pPr indent="0" marL="0">
+            <a:pPr marL="0" indent="0">
               <a:buNone/>
             </a:pPr>
             <a:r>
@@ -8638,6 +8848,13 @@
           </a:solidFill>
           <a:ln/>
         </p:spPr>
+        <p:txBody>
+          <a:bodyPr/>
+          <a:lstStyle/>
+          <a:p>
+            <a:endParaRPr lang="ja-JP" altLang="en-US"/>
+          </a:p>
+        </p:txBody>
       </p:sp>
       <p:sp>
         <p:nvSpPr>
@@ -8660,7 +8877,7 @@
           <a:bodyPr wrap="square" lIns="0" tIns="0" rIns="0" bIns="0" rtlCol="0" anchor="ctr"/>
           <a:lstStyle/>
           <a:p>
-            <a:pPr algn="ctr" indent="0" marL="0">
+            <a:pPr marL="0" indent="0" algn="ctr">
               <a:buNone/>
             </a:pPr>
             <a:r>
@@ -8699,7 +8916,7 @@
           <a:bodyPr wrap="square" lIns="0" tIns="0" rIns="0" bIns="0" rtlCol="0" anchor="t"/>
           <a:lstStyle/>
           <a:p>
-            <a:pPr indent="0" marL="0">
+            <a:pPr marL="0" indent="0">
               <a:buNone/>
             </a:pPr>
             <a:r>
@@ -8738,7 +8955,7 @@
           <a:bodyPr wrap="square" lIns="0" tIns="0" rIns="0" bIns="0" rtlCol="0" anchor="t"/>
           <a:lstStyle/>
           <a:p>
-            <a:pPr indent="0" marL="0">
+            <a:pPr marL="0" indent="0">
               <a:buNone/>
             </a:pPr>
             <a:r>
@@ -8775,6 +8992,13 @@
           </a:solidFill>
           <a:ln/>
         </p:spPr>
+        <p:txBody>
+          <a:bodyPr/>
+          <a:lstStyle/>
+          <a:p>
+            <a:endParaRPr lang="ja-JP" altLang="en-US"/>
+          </a:p>
+        </p:txBody>
       </p:sp>
       <p:sp>
         <p:nvSpPr>
@@ -8797,7 +9021,7 @@
           <a:bodyPr wrap="square" lIns="0" tIns="0" rIns="0" bIns="0" rtlCol="0" anchor="ctr"/>
           <a:lstStyle/>
           <a:p>
-            <a:pPr algn="ctr" indent="0" marL="0">
+            <a:pPr marL="0" indent="0" algn="ctr">
               <a:buNone/>
             </a:pPr>
             <a:r>
@@ -8836,7 +9060,7 @@
           <a:bodyPr wrap="square" lIns="0" tIns="0" rIns="0" bIns="0" rtlCol="0" anchor="t"/>
           <a:lstStyle/>
           <a:p>
-            <a:pPr indent="0" marL="0">
+            <a:pPr marL="0" indent="0">
               <a:buNone/>
             </a:pPr>
             <a:r>
@@ -8875,7 +9099,7 @@
           <a:bodyPr wrap="square" lIns="0" tIns="0" rIns="0" bIns="0" rtlCol="0" anchor="t"/>
           <a:lstStyle/>
           <a:p>
-            <a:pPr indent="0" marL="0">
+            <a:pPr marL="0" indent="0">
               <a:buNone/>
             </a:pPr>
             <a:r>
@@ -8912,6 +9136,13 @@
           </a:solidFill>
           <a:ln/>
         </p:spPr>
+        <p:txBody>
+          <a:bodyPr/>
+          <a:lstStyle/>
+          <a:p>
+            <a:endParaRPr lang="ja-JP" altLang="en-US"/>
+          </a:p>
+        </p:txBody>
       </p:sp>
       <p:sp>
         <p:nvSpPr>
@@ -8934,7 +9165,7 @@
           <a:bodyPr wrap="square" lIns="0" tIns="0" rIns="0" bIns="0" rtlCol="0" anchor="ctr"/>
           <a:lstStyle/>
           <a:p>
-            <a:pPr algn="ctr" indent="0" marL="0">
+            <a:pPr marL="0" indent="0" algn="ctr">
               <a:buNone/>
             </a:pPr>
             <a:r>
@@ -8973,7 +9204,7 @@
           <a:bodyPr wrap="square" lIns="0" tIns="0" rIns="0" bIns="0" rtlCol="0" anchor="t"/>
           <a:lstStyle/>
           <a:p>
-            <a:pPr indent="0" marL="0">
+            <a:pPr marL="0" indent="0">
               <a:buNone/>
             </a:pPr>
             <a:r>
@@ -9012,7 +9243,7 @@
           <a:bodyPr wrap="square" lIns="0" tIns="0" rIns="0" bIns="0" rtlCol="0" anchor="t"/>
           <a:lstStyle/>
           <a:p>
-            <a:pPr indent="0" marL="0">
+            <a:pPr marL="0" indent="0">
               <a:buNone/>
             </a:pPr>
             <a:r>
@@ -9049,6 +9280,13 @@
           </a:solidFill>
           <a:ln/>
         </p:spPr>
+        <p:txBody>
+          <a:bodyPr/>
+          <a:lstStyle/>
+          <a:p>
+            <a:endParaRPr lang="ja-JP" altLang="en-US"/>
+          </a:p>
+        </p:txBody>
       </p:sp>
       <p:sp>
         <p:nvSpPr>
@@ -9069,6 +9307,13 @@
           </a:solidFill>
           <a:ln/>
         </p:spPr>
+        <p:txBody>
+          <a:bodyPr/>
+          <a:lstStyle/>
+          <a:p>
+            <a:endParaRPr lang="ja-JP" altLang="en-US"/>
+          </a:p>
+        </p:txBody>
       </p:sp>
       <p:sp>
         <p:nvSpPr>
@@ -9091,7 +9336,7 @@
           <a:bodyPr wrap="square" lIns="0" tIns="0" rIns="0" bIns="0" rtlCol="0" anchor="ctr"/>
           <a:lstStyle/>
           <a:p>
-            <a:pPr algn="ctr" indent="0" marL="0">
+            <a:pPr marL="0" indent="0" algn="ctr">
               <a:buNone/>
             </a:pPr>
             <a:r>
@@ -9130,7 +9375,7 @@
           <a:bodyPr wrap="square" lIns="0" tIns="0" rIns="0" bIns="0" rtlCol="0" anchor="t"/>
           <a:lstStyle/>
           <a:p>
-            <a:pPr indent="0" marL="0">
+            <a:pPr marL="0" indent="0">
               <a:buNone/>
             </a:pPr>
             <a:r>
@@ -9169,7 +9414,7 @@
           <a:bodyPr wrap="square" lIns="0" tIns="0" rIns="0" bIns="0" rtlCol="0" anchor="t"/>
           <a:lstStyle/>
           <a:p>
-            <a:pPr indent="0" marL="0">
+            <a:pPr marL="0" indent="0">
               <a:buNone/>
             </a:pPr>
             <a:r>
@@ -9206,6 +9451,13 @@
           </a:solidFill>
           <a:ln/>
         </p:spPr>
+        <p:txBody>
+          <a:bodyPr/>
+          <a:lstStyle/>
+          <a:p>
+            <a:endParaRPr lang="ja-JP" altLang="en-US"/>
+          </a:p>
+        </p:txBody>
       </p:sp>
       <p:sp>
         <p:nvSpPr>
@@ -9228,7 +9480,7 @@
           <a:bodyPr wrap="square" lIns="0" tIns="0" rIns="0" bIns="0" rtlCol="0" anchor="ctr"/>
           <a:lstStyle/>
           <a:p>
-            <a:pPr algn="ctr" indent="0" marL="0">
+            <a:pPr marL="0" indent="0" algn="ctr">
               <a:buNone/>
             </a:pPr>
             <a:r>
@@ -9267,7 +9519,7 @@
           <a:bodyPr wrap="square" lIns="0" tIns="0" rIns="0" bIns="0" rtlCol="0" anchor="t"/>
           <a:lstStyle/>
           <a:p>
-            <a:pPr indent="0" marL="0">
+            <a:pPr marL="0" indent="0">
               <a:buNone/>
             </a:pPr>
             <a:r>
@@ -9306,7 +9558,7 @@
           <a:bodyPr wrap="square" lIns="0" tIns="0" rIns="0" bIns="0" rtlCol="0" anchor="t"/>
           <a:lstStyle/>
           <a:p>
-            <a:pPr indent="0" marL="0">
+            <a:pPr marL="0" indent="0">
               <a:buNone/>
             </a:pPr>
             <a:r>
@@ -9343,6 +9595,13 @@
           </a:solidFill>
           <a:ln/>
         </p:spPr>
+        <p:txBody>
+          <a:bodyPr/>
+          <a:lstStyle/>
+          <a:p>
+            <a:endParaRPr lang="ja-JP" altLang="en-US"/>
+          </a:p>
+        </p:txBody>
       </p:sp>
       <p:sp>
         <p:nvSpPr>
@@ -9365,7 +9624,7 @@
           <a:bodyPr wrap="square" lIns="0" tIns="0" rIns="0" bIns="0" rtlCol="0" anchor="ctr"/>
           <a:lstStyle/>
           <a:p>
-            <a:pPr algn="ctr" indent="0" marL="0">
+            <a:pPr marL="0" indent="0" algn="ctr">
               <a:buNone/>
             </a:pPr>
             <a:r>
@@ -9404,7 +9663,7 @@
           <a:bodyPr wrap="square" lIns="0" tIns="0" rIns="0" bIns="0" rtlCol="0" anchor="t"/>
           <a:lstStyle/>
           <a:p>
-            <a:pPr indent="0" marL="0">
+            <a:pPr marL="0" indent="0">
               <a:buNone/>
             </a:pPr>
             <a:r>
@@ -9443,7 +9702,7 @@
           <a:bodyPr wrap="square" lIns="0" tIns="0" rIns="0" bIns="0" rtlCol="0" anchor="t"/>
           <a:lstStyle/>
           <a:p>
-            <a:pPr indent="0" marL="0">
+            <a:pPr marL="0" indent="0">
               <a:buNone/>
             </a:pPr>
             <a:r>
@@ -9480,6 +9739,13 @@
           </a:solidFill>
           <a:ln/>
         </p:spPr>
+        <p:txBody>
+          <a:bodyPr/>
+          <a:lstStyle/>
+          <a:p>
+            <a:endParaRPr lang="ja-JP" altLang="en-US"/>
+          </a:p>
+        </p:txBody>
       </p:sp>
       <p:sp>
         <p:nvSpPr>
@@ -9502,7 +9768,7 @@
           <a:bodyPr wrap="square" lIns="0" tIns="0" rIns="0" bIns="0" rtlCol="0" anchor="ctr"/>
           <a:lstStyle/>
           <a:p>
-            <a:pPr algn="ctr" indent="0" marL="0">
+            <a:pPr marL="0" indent="0" algn="ctr">
               <a:buNone/>
             </a:pPr>
             <a:r>
@@ -9516,9 +9782,6 @@
               </a:rPr>
               <a:t>目標 KPI  </a:t>
             </a:r>
-            <a:pPr algn="ctr" indent="0" marL="0">
-              <a:buNone/>
-            </a:pPr>
             <a:r>
               <a:rPr lang="en-US" sz="1100" dirty="0">
                 <a:solidFill>
@@ -9555,7 +9818,7 @@
           <a:bodyPr wrap="square" lIns="0" tIns="0" rIns="0" bIns="0" rtlCol="0" anchor="ctr"/>
           <a:lstStyle/>
           <a:p>
-            <a:pPr algn="ctr" indent="0" marL="0">
+            <a:pPr marL="0" indent="0" algn="ctr">
               <a:buNone/>
             </a:pPr>
             <a:r>
@@ -9589,6 +9852,7 @@
         <a:solidFill>
           <a:srgbClr val="F7F5F0"/>
         </a:solidFill>
+        <a:effectLst/>
       </p:bgPr>
     </p:bg>
     <p:spTree>
@@ -9624,6 +9888,13 @@
           </a:solidFill>
           <a:ln/>
         </p:spPr>
+        <p:txBody>
+          <a:bodyPr/>
+          <a:lstStyle/>
+          <a:p>
+            <a:endParaRPr lang="ja-JP" altLang="en-US"/>
+          </a:p>
+        </p:txBody>
       </p:sp>
       <p:sp>
         <p:nvSpPr>
@@ -9646,7 +9917,7 @@
           <a:bodyPr wrap="square" lIns="0" tIns="0" rIns="0" bIns="0" rtlCol="0" anchor="ctr"/>
           <a:lstStyle/>
           <a:p>
-            <a:pPr indent="0" marL="0">
+            <a:pPr marL="0" indent="0">
               <a:buNone/>
             </a:pPr>
             <a:r>
@@ -9685,7 +9956,7 @@
           <a:bodyPr wrap="square" lIns="0" tIns="0" rIns="0" bIns="0" rtlCol="0" anchor="ctr"/>
           <a:lstStyle/>
           <a:p>
-            <a:pPr algn="r" indent="0" marL="0">
+            <a:pPr marL="0" indent="0" algn="r">
               <a:buNone/>
             </a:pPr>
             <a:r>
@@ -9724,7 +9995,7 @@
           <a:bodyPr wrap="square" lIns="0" tIns="0" rIns="0" bIns="0" rtlCol="0" anchor="ctr"/>
           <a:lstStyle/>
           <a:p>
-            <a:pPr indent="0" marL="0">
+            <a:pPr marL="0" indent="0">
               <a:buNone/>
             </a:pPr>
             <a:r>
@@ -9763,7 +10034,7 @@
           <a:bodyPr wrap="square" lIns="0" tIns="0" rIns="0" bIns="0" rtlCol="0" anchor="ctr"/>
           <a:lstStyle/>
           <a:p>
-            <a:pPr indent="0" marL="0">
+            <a:pPr marL="0" indent="0">
               <a:buNone/>
             </a:pPr>
             <a:r>
@@ -9800,6 +10071,13 @@
           </a:solidFill>
           <a:ln/>
         </p:spPr>
+        <p:txBody>
+          <a:bodyPr/>
+          <a:lstStyle/>
+          <a:p>
+            <a:endParaRPr lang="ja-JP" altLang="en-US"/>
+          </a:p>
+        </p:txBody>
       </p:sp>
       <p:sp>
         <p:nvSpPr>
@@ -9825,13 +10103,20 @@
             <a:prstDash val="solid"/>
           </a:ln>
           <a:effectLst>
-            <a:outerShdw sx="100000" sy="100000" kx="0" ky="0" algn="bl" rotWithShape="0" blurRad="127000" dist="38100" dir="5400000">
+            <a:outerShdw blurRad="127000" dist="38100" dir="5400000" algn="bl" rotWithShape="0">
               <a:srgbClr val="000000">
                 <a:alpha val="8000"/>
               </a:srgbClr>
             </a:outerShdw>
           </a:effectLst>
         </p:spPr>
+        <p:txBody>
+          <a:bodyPr/>
+          <a:lstStyle/>
+          <a:p>
+            <a:endParaRPr lang="ja-JP" altLang="en-US"/>
+          </a:p>
+        </p:txBody>
       </p:sp>
       <p:sp>
         <p:nvSpPr>
@@ -9854,7 +10139,7 @@
           <a:bodyPr wrap="square" lIns="0" tIns="0" rIns="0" bIns="0" rtlCol="0" anchor="ctr"/>
           <a:lstStyle/>
           <a:p>
-            <a:pPr algn="l" indent="0" marL="0">
+            <a:pPr marL="0" indent="0" algn="l">
               <a:buNone/>
             </a:pPr>
             <a:r>
@@ -9868,9 +10153,6 @@
               </a:rPr>
               <a:t>1,876</a:t>
             </a:r>
-            <a:pPr algn="l" indent="0" marL="0">
-              <a:buNone/>
-            </a:pPr>
             <a:r>
               <a:rPr lang="en-US" sz="1300" dirty="0">
                 <a:solidFill>
@@ -9907,7 +10189,7 @@
           <a:bodyPr wrap="square" lIns="0" tIns="0" rIns="0" bIns="0" rtlCol="0" anchor="t"/>
           <a:lstStyle/>
           <a:p>
-            <a:pPr indent="0" marL="0">
+            <a:pPr marL="0" indent="0">
               <a:buNone/>
             </a:pPr>
             <a:r>
@@ -9949,13 +10231,20 @@
             <a:prstDash val="solid"/>
           </a:ln>
           <a:effectLst>
-            <a:outerShdw sx="100000" sy="100000" kx="0" ky="0" algn="bl" rotWithShape="0" blurRad="127000" dist="38100" dir="5400000">
+            <a:outerShdw blurRad="127000" dist="38100" dir="5400000" algn="bl" rotWithShape="0">
               <a:srgbClr val="000000">
                 <a:alpha val="8000"/>
               </a:srgbClr>
             </a:outerShdw>
           </a:effectLst>
         </p:spPr>
+        <p:txBody>
+          <a:bodyPr/>
+          <a:lstStyle/>
+          <a:p>
+            <a:endParaRPr lang="ja-JP" altLang="en-US"/>
+          </a:p>
+        </p:txBody>
       </p:sp>
       <p:sp>
         <p:nvSpPr>
@@ -9978,7 +10267,7 @@
           <a:bodyPr wrap="square" lIns="0" tIns="0" rIns="0" bIns="0" rtlCol="0" anchor="ctr"/>
           <a:lstStyle/>
           <a:p>
-            <a:pPr algn="l" indent="0" marL="0">
+            <a:pPr marL="0" indent="0" algn="l">
               <a:buNone/>
             </a:pPr>
             <a:r>
@@ -9992,9 +10281,6 @@
               </a:rPr>
               <a:t>365</a:t>
             </a:r>
-            <a:pPr algn="l" indent="0" marL="0">
-              <a:buNone/>
-            </a:pPr>
             <a:r>
               <a:rPr lang="en-US" sz="1300" dirty="0">
                 <a:solidFill>
@@ -10031,7 +10317,7 @@
           <a:bodyPr wrap="square" lIns="0" tIns="0" rIns="0" bIns="0" rtlCol="0" anchor="t"/>
           <a:lstStyle/>
           <a:p>
-            <a:pPr indent="0" marL="0">
+            <a:pPr marL="0" indent="0">
               <a:buNone/>
             </a:pPr>
             <a:r>
@@ -10073,13 +10359,20 @@
             <a:prstDash val="solid"/>
           </a:ln>
           <a:effectLst>
-            <a:outerShdw sx="100000" sy="100000" kx="0" ky="0" algn="bl" rotWithShape="0" blurRad="127000" dist="38100" dir="5400000">
+            <a:outerShdw blurRad="127000" dist="38100" dir="5400000" algn="bl" rotWithShape="0">
               <a:srgbClr val="000000">
                 <a:alpha val="8000"/>
               </a:srgbClr>
             </a:outerShdw>
           </a:effectLst>
         </p:spPr>
+        <p:txBody>
+          <a:bodyPr/>
+          <a:lstStyle/>
+          <a:p>
+            <a:endParaRPr lang="ja-JP" altLang="en-US"/>
+          </a:p>
+        </p:txBody>
       </p:sp>
       <p:sp>
         <p:nvSpPr>
@@ -10102,7 +10395,7 @@
           <a:bodyPr wrap="square" lIns="0" tIns="0" rIns="0" bIns="0" rtlCol="0" anchor="ctr"/>
           <a:lstStyle/>
           <a:p>
-            <a:pPr algn="l" indent="0" marL="0">
+            <a:pPr marL="0" indent="0" algn="l">
               <a:buNone/>
             </a:pPr>
             <a:r>
@@ -10116,9 +10409,6 @@
               </a:rPr>
               <a:t>795</a:t>
             </a:r>
-            <a:pPr algn="l" indent="0" marL="0">
-              <a:buNone/>
-            </a:pPr>
             <a:r>
               <a:rPr lang="en-US" sz="1300" dirty="0">
                 <a:solidFill>
@@ -10155,7 +10445,7 @@
           <a:bodyPr wrap="square" lIns="0" tIns="0" rIns="0" bIns="0" rtlCol="0" anchor="t"/>
           <a:lstStyle/>
           <a:p>
-            <a:pPr indent="0" marL="0">
+            <a:pPr marL="0" indent="0">
               <a:buNone/>
             </a:pPr>
             <a:r>
@@ -10197,13 +10487,20 @@
             <a:prstDash val="solid"/>
           </a:ln>
           <a:effectLst>
-            <a:outerShdw sx="100000" sy="100000" kx="0" ky="0" algn="bl" rotWithShape="0" blurRad="127000" dist="38100" dir="5400000">
+            <a:outerShdw blurRad="127000" dist="38100" dir="5400000" algn="bl" rotWithShape="0">
               <a:srgbClr val="000000">
                 <a:alpha val="8000"/>
               </a:srgbClr>
             </a:outerShdw>
           </a:effectLst>
         </p:spPr>
+        <p:txBody>
+          <a:bodyPr/>
+          <a:lstStyle/>
+          <a:p>
+            <a:endParaRPr lang="ja-JP" altLang="en-US"/>
+          </a:p>
+        </p:txBody>
       </p:sp>
       <p:sp>
         <p:nvSpPr>
@@ -10226,7 +10523,7 @@
           <a:bodyPr wrap="square" lIns="0" tIns="0" rIns="0" bIns="0" rtlCol="0" anchor="ctr"/>
           <a:lstStyle/>
           <a:p>
-            <a:pPr algn="l" indent="0" marL="0">
+            <a:pPr marL="0" indent="0" algn="l">
               <a:buNone/>
             </a:pPr>
             <a:r>
@@ -10240,9 +10537,6 @@
               </a:rPr>
               <a:t>1,081</a:t>
             </a:r>
-            <a:pPr algn="l" indent="0" marL="0">
-              <a:buNone/>
-            </a:pPr>
             <a:r>
               <a:rPr lang="en-US" sz="1300" dirty="0">
                 <a:solidFill>
@@ -10279,7 +10573,7 @@
           <a:bodyPr wrap="square" lIns="0" tIns="0" rIns="0" bIns="0" rtlCol="0" anchor="t"/>
           <a:lstStyle/>
           <a:p>
-            <a:pPr indent="0" marL="0">
+            <a:pPr marL="0" indent="0">
               <a:buNone/>
             </a:pPr>
             <a:r>
@@ -10321,13 +10615,20 @@
             <a:prstDash val="solid"/>
           </a:ln>
           <a:effectLst>
-            <a:outerShdw sx="100000" sy="100000" kx="0" ky="0" algn="bl" rotWithShape="0" blurRad="101600" dist="25400" dir="5400000">
+            <a:outerShdw blurRad="101600" dist="25400" dir="5400000" algn="bl" rotWithShape="0">
               <a:srgbClr val="000000">
                 <a:alpha val="6000"/>
               </a:srgbClr>
             </a:outerShdw>
           </a:effectLst>
         </p:spPr>
+        <p:txBody>
+          <a:bodyPr/>
+          <a:lstStyle/>
+          <a:p>
+            <a:endParaRPr lang="ja-JP" altLang="en-US"/>
+          </a:p>
+        </p:txBody>
       </p:sp>
       <p:sp>
         <p:nvSpPr>
@@ -10350,7 +10651,7 @@
           <a:bodyPr wrap="square" lIns="0" tIns="0" rIns="0" bIns="0" rtlCol="0" anchor="ctr"/>
           <a:lstStyle/>
           <a:p>
-            <a:pPr indent="0" marL="0">
+            <a:pPr marL="0" indent="0">
               <a:buNone/>
             </a:pPr>
             <a:r>
@@ -10389,7 +10690,7 @@
           <a:bodyPr wrap="square" lIns="0" tIns="0" rIns="0" bIns="0" rtlCol="0" anchor="ctr"/>
           <a:lstStyle/>
           <a:p>
-            <a:pPr indent="0" marL="0">
+            <a:pPr marL="0" indent="0">
               <a:buNone/>
             </a:pPr>
             <a:r>
@@ -10428,7 +10729,7 @@
           <a:bodyPr wrap="square" lIns="0" tIns="0" rIns="0" bIns="0" rtlCol="0" anchor="ctr"/>
           <a:lstStyle/>
           <a:p>
-            <a:pPr indent="0" marL="0">
+            <a:pPr marL="0" indent="0">
               <a:buNone/>
             </a:pPr>
             <a:r>
@@ -10467,7 +10768,7 @@
           <a:bodyPr wrap="square" lIns="0" tIns="0" rIns="0" bIns="0" rtlCol="0" anchor="ctr"/>
           <a:lstStyle/>
           <a:p>
-            <a:pPr indent="0" marL="0">
+            <a:pPr marL="0" indent="0">
               <a:buNone/>
             </a:pPr>
             <a:r>
@@ -10506,7 +10807,7 @@
           <a:bodyPr wrap="square" lIns="0" tIns="0" rIns="0" bIns="0" rtlCol="0" anchor="ctr"/>
           <a:lstStyle/>
           <a:p>
-            <a:pPr indent="0" marL="0">
+            <a:pPr marL="0" indent="0">
               <a:buNone/>
             </a:pPr>
             <a:r>
@@ -10545,7 +10846,7 @@
           <a:bodyPr wrap="square" lIns="0" tIns="0" rIns="0" bIns="0" rtlCol="0" anchor="ctr"/>
           <a:lstStyle/>
           <a:p>
-            <a:pPr indent="0" marL="0">
+            <a:pPr marL="0" indent="0">
               <a:buNone/>
             </a:pPr>
             <a:r>
@@ -10584,7 +10885,7 @@
           <a:bodyPr wrap="square" lIns="0" tIns="0" rIns="0" bIns="0" rtlCol="0" anchor="ctr"/>
           <a:lstStyle/>
           <a:p>
-            <a:pPr indent="0" marL="0">
+            <a:pPr marL="0" indent="0">
               <a:buNone/>
             </a:pPr>
             <a:r>
@@ -10623,7 +10924,7 @@
           <a:bodyPr wrap="square" lIns="0" tIns="0" rIns="0" bIns="0" rtlCol="0" anchor="ctr"/>
           <a:lstStyle/>
           <a:p>
-            <a:pPr indent="0" marL="0">
+            <a:pPr marL="0" indent="0">
               <a:buNone/>
             </a:pPr>
             <a:r>
@@ -10662,7 +10963,7 @@
           <a:bodyPr wrap="square" lIns="0" tIns="0" rIns="0" bIns="0" rtlCol="0" anchor="ctr"/>
           <a:lstStyle/>
           <a:p>
-            <a:pPr indent="0" marL="0">
+            <a:pPr marL="0" indent="0">
               <a:buNone/>
             </a:pPr>
             <a:r>
@@ -10701,7 +11002,7 @@
           <a:bodyPr wrap="square" lIns="0" tIns="0" rIns="0" bIns="0" rtlCol="0" anchor="ctr"/>
           <a:lstStyle/>
           <a:p>
-            <a:pPr indent="0" marL="0">
+            <a:pPr marL="0" indent="0">
               <a:buNone/>
             </a:pPr>
             <a:r>
@@ -10740,7 +11041,7 @@
           <a:bodyPr wrap="square" lIns="0" tIns="0" rIns="0" bIns="0" rtlCol="0" anchor="ctr"/>
           <a:lstStyle/>
           <a:p>
-            <a:pPr indent="0" marL="0">
+            <a:pPr marL="0" indent="0">
               <a:buNone/>
             </a:pPr>
             <a:r>
@@ -10777,6 +11078,13 @@
           </a:solidFill>
           <a:ln/>
         </p:spPr>
+        <p:txBody>
+          <a:bodyPr/>
+          <a:lstStyle/>
+          <a:p>
+            <a:endParaRPr lang="ja-JP" altLang="en-US"/>
+          </a:p>
+        </p:txBody>
       </p:sp>
       <p:sp>
         <p:nvSpPr>
@@ -10799,7 +11107,7 @@
           <a:bodyPr wrap="square" lIns="0" tIns="0" rIns="0" bIns="0" rtlCol="0" anchor="ctr"/>
           <a:lstStyle/>
           <a:p>
-            <a:pPr algn="ctr" indent="0" marL="0">
+            <a:pPr marL="0" indent="0" algn="ctr">
               <a:buNone/>
             </a:pPr>
             <a:r>
@@ -10813,9 +11121,6 @@
               </a:rPr>
               <a:t>ソース: </a:t>
             </a:r>
-            <a:pPr algn="ctr" indent="0" marL="0">
-              <a:buNone/>
-            </a:pPr>
             <a:r>
               <a:rPr lang="en-US" sz="1000" dirty="0">
                 <a:solidFill>
@@ -10827,9 +11132,6 @@
               </a:rPr>
               <a:t>data/admissions_consolidated_dedup.csv  |  </a:t>
             </a:r>
-            <a:pPr algn="ctr" indent="0" marL="0">
-              <a:buNone/>
-            </a:pPr>
             <a:r>
               <a:rPr lang="en-US" sz="1000" b="1" dirty="0">
                 <a:solidFill>
@@ -10841,9 +11143,6 @@
               </a:rPr>
               <a:t>重複検出キー: </a:t>
             </a:r>
-            <a:pPr algn="ctr" indent="0" marL="0">
-              <a:buNone/>
-            </a:pPr>
             <a:r>
               <a:rPr lang="en-US" sz="1000" dirty="0">
                 <a:solidFill>
@@ -10875,6 +11174,7 @@
         <a:solidFill>
           <a:srgbClr val="F7F5F0"/>
         </a:solidFill>
+        <a:effectLst/>
       </p:bgPr>
     </p:bg>
     <p:spTree>
@@ -10910,6 +11210,13 @@
           </a:solidFill>
           <a:ln/>
         </p:spPr>
+        <p:txBody>
+          <a:bodyPr/>
+          <a:lstStyle/>
+          <a:p>
+            <a:endParaRPr lang="ja-JP" altLang="en-US"/>
+          </a:p>
+        </p:txBody>
       </p:sp>
       <p:sp>
         <p:nvSpPr>
@@ -10932,7 +11239,7 @@
           <a:bodyPr wrap="square" lIns="0" tIns="0" rIns="0" bIns="0" rtlCol="0" anchor="ctr"/>
           <a:lstStyle/>
           <a:p>
-            <a:pPr indent="0" marL="0">
+            <a:pPr marL="0" indent="0">
               <a:buNone/>
             </a:pPr>
             <a:r>
@@ -10971,7 +11278,7 @@
           <a:bodyPr wrap="square" lIns="0" tIns="0" rIns="0" bIns="0" rtlCol="0" anchor="ctr"/>
           <a:lstStyle/>
           <a:p>
-            <a:pPr algn="r" indent="0" marL="0">
+            <a:pPr marL="0" indent="0" algn="r">
               <a:buNone/>
             </a:pPr>
             <a:r>
@@ -11010,7 +11317,7 @@
           <a:bodyPr wrap="square" lIns="0" tIns="0" rIns="0" bIns="0" rtlCol="0" anchor="ctr"/>
           <a:lstStyle/>
           <a:p>
-            <a:pPr indent="0" marL="0">
+            <a:pPr marL="0" indent="0">
               <a:buNone/>
             </a:pPr>
             <a:r>
@@ -11049,7 +11356,7 @@
           <a:bodyPr wrap="square" lIns="0" tIns="0" rIns="0" bIns="0" rtlCol="0" anchor="ctr"/>
           <a:lstStyle/>
           <a:p>
-            <a:pPr indent="0" marL="0">
+            <a:pPr marL="0" indent="0">
               <a:buNone/>
             </a:pPr>
             <a:r>
@@ -11086,18 +11393,25 @@
           </a:solidFill>
           <a:ln/>
         </p:spPr>
+        <p:txBody>
+          <a:bodyPr/>
+          <a:lstStyle/>
+          <a:p>
+            <a:endParaRPr lang="ja-JP" altLang="en-US"/>
+          </a:p>
+        </p:txBody>
       </p:sp>
       <p:pic>
         <p:nvPicPr>
-          <p:cNvPr id="8" name="Image 0" descr="/Users/kubotatoru/ai-management/docs/admin/slides/weekend_holiday_kpi/charts/01_dow_admissions.png">    </p:cNvPr>
+          <p:cNvPr id="8" name="Image 0" descr="/Users/kubotatoru/ai-management/docs/admin/slides/weekend_holiday_kpi/charts/01_dow_admissions.png"/>
           <p:cNvPicPr>
             <a:picLocks noChangeAspect="1"/>
           </p:cNvPicPr>
           <p:nvPr/>
         </p:nvPicPr>
         <p:blipFill>
-          <a:blip r:embed="rId1"/>
-          <a:srcRect l="0" r="0" t="0" b="0"/>
+          <a:blip r:embed="rId3"/>
+          <a:srcRect/>
           <a:stretch/>
         </p:blipFill>
         <p:spPr>
@@ -11134,13 +11448,20 @@
             <a:prstDash val="solid"/>
           </a:ln>
           <a:effectLst>
-            <a:outerShdw sx="100000" sy="100000" kx="0" ky="0" algn="bl" rotWithShape="0" blurRad="101600" dist="25400" dir="5400000">
+            <a:outerShdw blurRad="101600" dist="25400" dir="5400000" algn="bl" rotWithShape="0">
               <a:srgbClr val="000000">
                 <a:alpha val="8000"/>
               </a:srgbClr>
             </a:outerShdw>
           </a:effectLst>
         </p:spPr>
+        <p:txBody>
+          <a:bodyPr/>
+          <a:lstStyle/>
+          <a:p>
+            <a:endParaRPr lang="ja-JP" altLang="en-US"/>
+          </a:p>
+        </p:txBody>
       </p:sp>
       <p:sp>
         <p:nvSpPr>
@@ -11161,6 +11482,13 @@
           </a:solidFill>
           <a:ln/>
         </p:spPr>
+        <p:txBody>
+          <a:bodyPr/>
+          <a:lstStyle/>
+          <a:p>
+            <a:endParaRPr lang="ja-JP" altLang="en-US"/>
+          </a:p>
+        </p:txBody>
       </p:sp>
       <p:sp>
         <p:nvSpPr>
@@ -11183,7 +11511,7 @@
           <a:bodyPr wrap="square" lIns="0" tIns="0" rIns="0" bIns="0" rtlCol="0" anchor="t"/>
           <a:lstStyle/>
           <a:p>
-            <a:pPr indent="0" marL="0">
+            <a:pPr marL="0" indent="0">
               <a:buNone/>
             </a:pPr>
             <a:r>
@@ -11222,7 +11550,7 @@
           <a:bodyPr wrap="square" lIns="0" tIns="0" rIns="0" bIns="0" rtlCol="0" anchor="t"/>
           <a:lstStyle/>
           <a:p>
-            <a:pPr indent="0" marL="0">
+            <a:pPr marL="0" indent="0">
               <a:buNone/>
             </a:pPr>
             <a:r>
@@ -11264,13 +11592,20 @@
             <a:prstDash val="solid"/>
           </a:ln>
           <a:effectLst>
-            <a:outerShdw sx="100000" sy="100000" kx="0" ky="0" algn="bl" rotWithShape="0" blurRad="101600" dist="25400" dir="5400000">
+            <a:outerShdw blurRad="101600" dist="25400" dir="5400000" algn="bl" rotWithShape="0">
               <a:srgbClr val="000000">
                 <a:alpha val="8000"/>
               </a:srgbClr>
             </a:outerShdw>
           </a:effectLst>
         </p:spPr>
+        <p:txBody>
+          <a:bodyPr/>
+          <a:lstStyle/>
+          <a:p>
+            <a:endParaRPr lang="ja-JP" altLang="en-US"/>
+          </a:p>
+        </p:txBody>
       </p:sp>
       <p:sp>
         <p:nvSpPr>
@@ -11291,6 +11626,13 @@
           </a:solidFill>
           <a:ln/>
         </p:spPr>
+        <p:txBody>
+          <a:bodyPr/>
+          <a:lstStyle/>
+          <a:p>
+            <a:endParaRPr lang="ja-JP" altLang="en-US"/>
+          </a:p>
+        </p:txBody>
       </p:sp>
       <p:sp>
         <p:nvSpPr>
@@ -11313,7 +11655,7 @@
           <a:bodyPr wrap="square" lIns="0" tIns="0" rIns="0" bIns="0" rtlCol="0" anchor="t"/>
           <a:lstStyle/>
           <a:p>
-            <a:pPr indent="0" marL="0">
+            <a:pPr marL="0" indent="0">
               <a:buNone/>
             </a:pPr>
             <a:r>
@@ -11352,7 +11694,7 @@
           <a:bodyPr wrap="square" lIns="0" tIns="0" rIns="0" bIns="0" rtlCol="0" anchor="t"/>
           <a:lstStyle/>
           <a:p>
-            <a:pPr indent="0" marL="0">
+            <a:pPr marL="0" indent="0">
               <a:buNone/>
             </a:pPr>
             <a:r>
@@ -11394,13 +11736,20 @@
             <a:prstDash val="solid"/>
           </a:ln>
           <a:effectLst>
-            <a:outerShdw sx="100000" sy="100000" kx="0" ky="0" algn="bl" rotWithShape="0" blurRad="101600" dist="25400" dir="5400000">
+            <a:outerShdw blurRad="101600" dist="25400" dir="5400000" algn="bl" rotWithShape="0">
               <a:srgbClr val="000000">
                 <a:alpha val="8000"/>
               </a:srgbClr>
             </a:outerShdw>
           </a:effectLst>
         </p:spPr>
+        <p:txBody>
+          <a:bodyPr/>
+          <a:lstStyle/>
+          <a:p>
+            <a:endParaRPr lang="ja-JP" altLang="en-US"/>
+          </a:p>
+        </p:txBody>
       </p:sp>
       <p:sp>
         <p:nvSpPr>
@@ -11421,6 +11770,13 @@
           </a:solidFill>
           <a:ln/>
         </p:spPr>
+        <p:txBody>
+          <a:bodyPr/>
+          <a:lstStyle/>
+          <a:p>
+            <a:endParaRPr lang="ja-JP" altLang="en-US"/>
+          </a:p>
+        </p:txBody>
       </p:sp>
       <p:sp>
         <p:nvSpPr>
@@ -11443,7 +11799,7 @@
           <a:bodyPr wrap="square" lIns="0" tIns="0" rIns="0" bIns="0" rtlCol="0" anchor="t"/>
           <a:lstStyle/>
           <a:p>
-            <a:pPr indent="0" marL="0">
+            <a:pPr marL="0" indent="0">
               <a:buNone/>
             </a:pPr>
             <a:r>
@@ -11482,7 +11838,7 @@
           <a:bodyPr wrap="square" lIns="0" tIns="0" rIns="0" bIns="0" rtlCol="0" anchor="t"/>
           <a:lstStyle/>
           <a:p>
-            <a:pPr indent="0" marL="0">
+            <a:pPr marL="0" indent="0">
               <a:buNone/>
             </a:pPr>
             <a:r>
@@ -11516,6 +11872,7 @@
         <a:solidFill>
           <a:srgbClr val="F7F5F0"/>
         </a:solidFill>
+        <a:effectLst/>
       </p:bgPr>
     </p:bg>
     <p:spTree>
@@ -11551,6 +11908,13 @@
           </a:solidFill>
           <a:ln/>
         </p:spPr>
+        <p:txBody>
+          <a:bodyPr/>
+          <a:lstStyle/>
+          <a:p>
+            <a:endParaRPr lang="ja-JP" altLang="en-US"/>
+          </a:p>
+        </p:txBody>
       </p:sp>
       <p:sp>
         <p:nvSpPr>
@@ -11573,7 +11937,7 @@
           <a:bodyPr wrap="square" lIns="0" tIns="0" rIns="0" bIns="0" rtlCol="0" anchor="ctr"/>
           <a:lstStyle/>
           <a:p>
-            <a:pPr indent="0" marL="0">
+            <a:pPr marL="0" indent="0">
               <a:buNone/>
             </a:pPr>
             <a:r>
@@ -11612,7 +11976,7 @@
           <a:bodyPr wrap="square" lIns="0" tIns="0" rIns="0" bIns="0" rtlCol="0" anchor="ctr"/>
           <a:lstStyle/>
           <a:p>
-            <a:pPr algn="r" indent="0" marL="0">
+            <a:pPr marL="0" indent="0" algn="r">
               <a:buNone/>
             </a:pPr>
             <a:r>
@@ -11651,7 +12015,7 @@
           <a:bodyPr wrap="square" lIns="0" tIns="0" rIns="0" bIns="0" rtlCol="0" anchor="ctr"/>
           <a:lstStyle/>
           <a:p>
-            <a:pPr indent="0" marL="0">
+            <a:pPr marL="0" indent="0">
               <a:buNone/>
             </a:pPr>
             <a:r>
@@ -11690,7 +12054,7 @@
           <a:bodyPr wrap="square" lIns="0" tIns="0" rIns="0" bIns="0" rtlCol="0" anchor="ctr"/>
           <a:lstStyle/>
           <a:p>
-            <a:pPr indent="0" marL="0">
+            <a:pPr marL="0" indent="0">
               <a:buNone/>
             </a:pPr>
             <a:r>
@@ -11727,18 +12091,25 @@
           </a:solidFill>
           <a:ln/>
         </p:spPr>
+        <p:txBody>
+          <a:bodyPr/>
+          <a:lstStyle/>
+          <a:p>
+            <a:endParaRPr lang="ja-JP" altLang="en-US"/>
+          </a:p>
+        </p:txBody>
       </p:sp>
       <p:pic>
         <p:nvPicPr>
-          <p:cNvPr id="8" name="Image 0" descr="/Users/kubotatoru/ai-management/docs/admin/slides/weekend_holiday_kpi/charts/02_dow_boxplot.png">    </p:cNvPr>
+          <p:cNvPr id="8" name="Image 0" descr="/Users/kubotatoru/ai-management/docs/admin/slides/weekend_holiday_kpi/charts/02_dow_boxplot.png"/>
           <p:cNvPicPr>
             <a:picLocks noChangeAspect="1"/>
           </p:cNvPicPr>
           <p:nvPr/>
         </p:nvPicPr>
         <p:blipFill>
-          <a:blip r:embed="rId1"/>
-          <a:srcRect l="0" r="0" t="0" b="0"/>
+          <a:blip r:embed="rId3"/>
+          <a:srcRect/>
           <a:stretch/>
         </p:blipFill>
         <p:spPr>
@@ -11775,13 +12146,20 @@
             <a:prstDash val="solid"/>
           </a:ln>
           <a:effectLst>
-            <a:outerShdw sx="100000" sy="100000" kx="0" ky="0" algn="bl" rotWithShape="0" blurRad="101600" dist="25400" dir="5400000">
+            <a:outerShdw blurRad="101600" dist="25400" dir="5400000" algn="bl" rotWithShape="0">
               <a:srgbClr val="000000">
                 <a:alpha val="8000"/>
               </a:srgbClr>
             </a:outerShdw>
           </a:effectLst>
         </p:spPr>
+        <p:txBody>
+          <a:bodyPr/>
+          <a:lstStyle/>
+          <a:p>
+            <a:endParaRPr lang="ja-JP" altLang="en-US"/>
+          </a:p>
+        </p:txBody>
       </p:sp>
       <p:sp>
         <p:nvSpPr>
@@ -11802,6 +12180,13 @@
           </a:solidFill>
           <a:ln/>
         </p:spPr>
+        <p:txBody>
+          <a:bodyPr/>
+          <a:lstStyle/>
+          <a:p>
+            <a:endParaRPr lang="ja-JP" altLang="en-US"/>
+          </a:p>
+        </p:txBody>
       </p:sp>
       <p:sp>
         <p:nvSpPr>
@@ -11824,7 +12209,7 @@
           <a:bodyPr wrap="square" lIns="0" tIns="0" rIns="0" bIns="0" rtlCol="0" anchor="t"/>
           <a:lstStyle/>
           <a:p>
-            <a:pPr indent="0" marL="0">
+            <a:pPr marL="0" indent="0">
               <a:buNone/>
             </a:pPr>
             <a:r>
@@ -11863,7 +12248,7 @@
           <a:bodyPr wrap="square" lIns="0" tIns="0" rIns="0" bIns="0" rtlCol="0" anchor="t"/>
           <a:lstStyle/>
           <a:p>
-            <a:pPr indent="0" marL="0">
+            <a:pPr marL="0" indent="0">
               <a:buNone/>
             </a:pPr>
             <a:r>
@@ -11905,13 +12290,20 @@
             <a:prstDash val="solid"/>
           </a:ln>
           <a:effectLst>
-            <a:outerShdw sx="100000" sy="100000" kx="0" ky="0" algn="bl" rotWithShape="0" blurRad="101600" dist="25400" dir="5400000">
+            <a:outerShdw blurRad="101600" dist="25400" dir="5400000" algn="bl" rotWithShape="0">
               <a:srgbClr val="000000">
                 <a:alpha val="8000"/>
               </a:srgbClr>
             </a:outerShdw>
           </a:effectLst>
         </p:spPr>
+        <p:txBody>
+          <a:bodyPr/>
+          <a:lstStyle/>
+          <a:p>
+            <a:endParaRPr lang="ja-JP" altLang="en-US"/>
+          </a:p>
+        </p:txBody>
       </p:sp>
       <p:sp>
         <p:nvSpPr>
@@ -11932,6 +12324,13 @@
           </a:solidFill>
           <a:ln/>
         </p:spPr>
+        <p:txBody>
+          <a:bodyPr/>
+          <a:lstStyle/>
+          <a:p>
+            <a:endParaRPr lang="ja-JP" altLang="en-US"/>
+          </a:p>
+        </p:txBody>
       </p:sp>
       <p:sp>
         <p:nvSpPr>
@@ -11954,7 +12353,7 @@
           <a:bodyPr wrap="square" lIns="0" tIns="0" rIns="0" bIns="0" rtlCol="0" anchor="t"/>
           <a:lstStyle/>
           <a:p>
-            <a:pPr indent="0" marL="0">
+            <a:pPr marL="0" indent="0">
               <a:buNone/>
             </a:pPr>
             <a:r>
@@ -11993,7 +12392,7 @@
           <a:bodyPr wrap="square" lIns="0" tIns="0" rIns="0" bIns="0" rtlCol="0" anchor="t"/>
           <a:lstStyle/>
           <a:p>
-            <a:pPr indent="0" marL="0">
+            <a:pPr marL="0" indent="0">
               <a:buNone/>
             </a:pPr>
             <a:r>
@@ -12035,13 +12434,20 @@
             <a:prstDash val="solid"/>
           </a:ln>
           <a:effectLst>
-            <a:outerShdw sx="100000" sy="100000" kx="0" ky="0" algn="bl" rotWithShape="0" blurRad="101600" dist="25400" dir="5400000">
+            <a:outerShdw blurRad="101600" dist="25400" dir="5400000" algn="bl" rotWithShape="0">
               <a:srgbClr val="000000">
                 <a:alpha val="8000"/>
               </a:srgbClr>
             </a:outerShdw>
           </a:effectLst>
         </p:spPr>
+        <p:txBody>
+          <a:bodyPr/>
+          <a:lstStyle/>
+          <a:p>
+            <a:endParaRPr lang="ja-JP" altLang="en-US"/>
+          </a:p>
+        </p:txBody>
       </p:sp>
       <p:sp>
         <p:nvSpPr>
@@ -12062,6 +12468,13 @@
           </a:solidFill>
           <a:ln/>
         </p:spPr>
+        <p:txBody>
+          <a:bodyPr/>
+          <a:lstStyle/>
+          <a:p>
+            <a:endParaRPr lang="ja-JP" altLang="en-US"/>
+          </a:p>
+        </p:txBody>
       </p:sp>
       <p:sp>
         <p:nvSpPr>
@@ -12084,7 +12497,7 @@
           <a:bodyPr wrap="square" lIns="0" tIns="0" rIns="0" bIns="0" rtlCol="0" anchor="t"/>
           <a:lstStyle/>
           <a:p>
-            <a:pPr indent="0" marL="0">
+            <a:pPr marL="0" indent="0">
               <a:buNone/>
             </a:pPr>
             <a:r>
@@ -12123,7 +12536,7 @@
           <a:bodyPr wrap="square" lIns="0" tIns="0" rIns="0" bIns="0" rtlCol="0" anchor="t"/>
           <a:lstStyle/>
           <a:p>
-            <a:pPr indent="0" marL="0">
+            <a:pPr marL="0" indent="0">
               <a:buNone/>
             </a:pPr>
             <a:r>
@@ -12157,6 +12570,7 @@
         <a:solidFill>
           <a:srgbClr val="F7F5F0"/>
         </a:solidFill>
+        <a:effectLst/>
       </p:bgPr>
     </p:bg>
     <p:spTree>
@@ -12192,6 +12606,13 @@
           </a:solidFill>
           <a:ln/>
         </p:spPr>
+        <p:txBody>
+          <a:bodyPr/>
+          <a:lstStyle/>
+          <a:p>
+            <a:endParaRPr lang="ja-JP" altLang="en-US"/>
+          </a:p>
+        </p:txBody>
       </p:sp>
       <p:sp>
         <p:nvSpPr>
@@ -12214,7 +12635,7 @@
           <a:bodyPr wrap="square" lIns="0" tIns="0" rIns="0" bIns="0" rtlCol="0" anchor="ctr"/>
           <a:lstStyle/>
           <a:p>
-            <a:pPr indent="0" marL="0">
+            <a:pPr marL="0" indent="0">
               <a:buNone/>
             </a:pPr>
             <a:r>
@@ -12253,7 +12674,7 @@
           <a:bodyPr wrap="square" lIns="0" tIns="0" rIns="0" bIns="0" rtlCol="0" anchor="ctr"/>
           <a:lstStyle/>
           <a:p>
-            <a:pPr algn="r" indent="0" marL="0">
+            <a:pPr marL="0" indent="0" algn="r">
               <a:buNone/>
             </a:pPr>
             <a:r>
@@ -12292,7 +12713,7 @@
           <a:bodyPr wrap="square" lIns="0" tIns="0" rIns="0" bIns="0" rtlCol="0" anchor="ctr"/>
           <a:lstStyle/>
           <a:p>
-            <a:pPr indent="0" marL="0">
+            <a:pPr marL="0" indent="0">
               <a:buNone/>
             </a:pPr>
             <a:r>
@@ -12331,7 +12752,7 @@
           <a:bodyPr wrap="square" lIns="0" tIns="0" rIns="0" bIns="0" rtlCol="0" anchor="ctr"/>
           <a:lstStyle/>
           <a:p>
-            <a:pPr indent="0" marL="0">
+            <a:pPr marL="0" indent="0">
               <a:buNone/>
             </a:pPr>
             <a:r>
@@ -12368,18 +12789,25 @@
           </a:solidFill>
           <a:ln/>
         </p:spPr>
+        <p:txBody>
+          <a:bodyPr/>
+          <a:lstStyle/>
+          <a:p>
+            <a:endParaRPr lang="ja-JP" altLang="en-US"/>
+          </a:p>
+        </p:txBody>
       </p:sp>
       <p:pic>
         <p:nvPicPr>
-          <p:cNvPr id="8" name="Image 0" descr="/Users/kubotatoru/ai-management/docs/admin/slides/weekend_holiday_kpi/charts/03_monthly_trend.png">    </p:cNvPr>
+          <p:cNvPr id="8" name="Image 0" descr="/Users/kubotatoru/ai-management/docs/admin/slides/weekend_holiday_kpi/charts/03_monthly_trend.png"/>
           <p:cNvPicPr>
             <a:picLocks noChangeAspect="1"/>
           </p:cNvPicPr>
           <p:nvPr/>
         </p:nvPicPr>
         <p:blipFill>
-          <a:blip r:embed="rId1"/>
-          <a:srcRect l="0" r="0" t="0" b="0"/>
+          <a:blip r:embed="rId3"/>
+          <a:srcRect/>
           <a:stretch/>
         </p:blipFill>
         <p:spPr>
@@ -12416,13 +12844,20 @@
             <a:prstDash val="solid"/>
           </a:ln>
           <a:effectLst>
-            <a:outerShdw sx="100000" sy="100000" kx="0" ky="0" algn="bl" rotWithShape="0" blurRad="127000" dist="38100" dir="5400000">
+            <a:outerShdw blurRad="127000" dist="38100" dir="5400000" algn="bl" rotWithShape="0">
               <a:srgbClr val="000000">
                 <a:alpha val="8000"/>
               </a:srgbClr>
             </a:outerShdw>
           </a:effectLst>
         </p:spPr>
+        <p:txBody>
+          <a:bodyPr/>
+          <a:lstStyle/>
+          <a:p>
+            <a:endParaRPr lang="ja-JP" altLang="en-US"/>
+          </a:p>
+        </p:txBody>
       </p:sp>
       <p:sp>
         <p:nvSpPr>
@@ -12445,7 +12880,7 @@
           <a:bodyPr wrap="square" lIns="0" tIns="0" rIns="0" bIns="0" rtlCol="0" anchor="ctr"/>
           <a:lstStyle/>
           <a:p>
-            <a:pPr algn="l" indent="0" marL="0">
+            <a:pPr marL="0" indent="0" algn="l">
               <a:buNone/>
             </a:pPr>
             <a:r>
@@ -12459,9 +12894,6 @@
               </a:rPr>
               <a:t>4.61</a:t>
             </a:r>
-            <a:pPr algn="l" indent="0" marL="0">
-              <a:buNone/>
-            </a:pPr>
             <a:r>
               <a:rPr lang="en-US" sz="1300" dirty="0">
                 <a:solidFill>
@@ -12498,7 +12930,7 @@
           <a:bodyPr wrap="square" lIns="0" tIns="0" rIns="0" bIns="0" rtlCol="0" anchor="t"/>
           <a:lstStyle/>
           <a:p>
-            <a:pPr indent="0" marL="0">
+            <a:pPr marL="0" indent="0">
               <a:buNone/>
             </a:pPr>
             <a:r>
@@ -12540,13 +12972,20 @@
             <a:prstDash val="solid"/>
           </a:ln>
           <a:effectLst>
-            <a:outerShdw sx="100000" sy="100000" kx="0" ky="0" algn="bl" rotWithShape="0" blurRad="127000" dist="38100" dir="5400000">
+            <a:outerShdw blurRad="127000" dist="38100" dir="5400000" algn="bl" rotWithShape="0">
               <a:srgbClr val="000000">
                 <a:alpha val="8000"/>
               </a:srgbClr>
             </a:outerShdw>
           </a:effectLst>
         </p:spPr>
+        <p:txBody>
+          <a:bodyPr/>
+          <a:lstStyle/>
+          <a:p>
+            <a:endParaRPr lang="ja-JP" altLang="en-US"/>
+          </a:p>
+        </p:txBody>
       </p:sp>
       <p:sp>
         <p:nvSpPr>
@@ -12569,7 +13008,7 @@
           <a:bodyPr wrap="square" lIns="0" tIns="0" rIns="0" bIns="0" rtlCol="0" anchor="ctr"/>
           <a:lstStyle/>
           <a:p>
-            <a:pPr algn="l" indent="0" marL="0">
+            <a:pPr marL="0" indent="0" algn="l">
               <a:buNone/>
             </a:pPr>
             <a:r>
@@ -12583,9 +13022,6 @@
               </a:rPr>
               <a:t>5.71</a:t>
             </a:r>
-            <a:pPr algn="l" indent="0" marL="0">
-              <a:buNone/>
-            </a:pPr>
             <a:r>
               <a:rPr lang="en-US" sz="1300" dirty="0">
                 <a:solidFill>
@@ -12622,7 +13058,7 @@
           <a:bodyPr wrap="square" lIns="0" tIns="0" rIns="0" bIns="0" rtlCol="0" anchor="t"/>
           <a:lstStyle/>
           <a:p>
-            <a:pPr indent="0" marL="0">
+            <a:pPr marL="0" indent="0">
               <a:buNone/>
             </a:pPr>
             <a:r>
@@ -12664,13 +13100,20 @@
             <a:prstDash val="solid"/>
           </a:ln>
           <a:effectLst>
-            <a:outerShdw sx="100000" sy="100000" kx="0" ky="0" algn="bl" rotWithShape="0" blurRad="127000" dist="38100" dir="5400000">
+            <a:outerShdw blurRad="127000" dist="38100" dir="5400000" algn="bl" rotWithShape="0">
               <a:srgbClr val="000000">
                 <a:alpha val="8000"/>
               </a:srgbClr>
             </a:outerShdw>
           </a:effectLst>
         </p:spPr>
+        <p:txBody>
+          <a:bodyPr/>
+          <a:lstStyle/>
+          <a:p>
+            <a:endParaRPr lang="ja-JP" altLang="en-US"/>
+          </a:p>
+        </p:txBody>
       </p:sp>
       <p:sp>
         <p:nvSpPr>
@@ -12693,7 +13136,7 @@
           <a:bodyPr wrap="square" lIns="0" tIns="0" rIns="0" bIns="0" rtlCol="0" anchor="ctr"/>
           <a:lstStyle/>
           <a:p>
-            <a:pPr algn="l" indent="0" marL="0">
+            <a:pPr marL="0" indent="0" algn="l">
               <a:buNone/>
             </a:pPr>
             <a:r>
@@ -12707,9 +13150,6 @@
               </a:rPr>
               <a:t>1.1</a:t>
             </a:r>
-            <a:pPr algn="l" indent="0" marL="0">
-              <a:buNone/>
-            </a:pPr>
             <a:r>
               <a:rPr lang="en-US" sz="1300" dirty="0">
                 <a:solidFill>
@@ -12746,7 +13186,7 @@
           <a:bodyPr wrap="square" lIns="0" tIns="0" rIns="0" bIns="0" rtlCol="0" anchor="t"/>
           <a:lstStyle/>
           <a:p>
-            <a:pPr indent="0" marL="0">
+            <a:pPr marL="0" indent="0">
               <a:buNone/>
             </a:pPr>
             <a:r>
@@ -12783,6 +13223,13 @@
           </a:solidFill>
           <a:ln/>
         </p:spPr>
+        <p:txBody>
+          <a:bodyPr/>
+          <a:lstStyle/>
+          <a:p>
+            <a:endParaRPr lang="ja-JP" altLang="en-US"/>
+          </a:p>
+        </p:txBody>
       </p:sp>
       <p:sp>
         <p:nvSpPr>
@@ -12805,7 +13252,7 @@
           <a:bodyPr wrap="square" lIns="0" tIns="0" rIns="0" bIns="0" rtlCol="0" anchor="ctr"/>
           <a:lstStyle/>
           <a:p>
-            <a:pPr algn="ctr" indent="0" marL="0">
+            <a:pPr marL="0" indent="0" algn="ctr">
               <a:buNone/>
             </a:pPr>
             <a:r>
@@ -12839,6 +13286,7 @@
         <a:solidFill>
           <a:srgbClr val="F7F5F0"/>
         </a:solidFill>
+        <a:effectLst/>
       </p:bgPr>
     </p:bg>
     <p:spTree>
@@ -12874,6 +13322,13 @@
           </a:solidFill>
           <a:ln/>
         </p:spPr>
+        <p:txBody>
+          <a:bodyPr/>
+          <a:lstStyle/>
+          <a:p>
+            <a:endParaRPr lang="ja-JP" altLang="en-US"/>
+          </a:p>
+        </p:txBody>
       </p:sp>
       <p:sp>
         <p:nvSpPr>
@@ -12896,7 +13351,7 @@
           <a:bodyPr wrap="square" lIns="0" tIns="0" rIns="0" bIns="0" rtlCol="0" anchor="ctr"/>
           <a:lstStyle/>
           <a:p>
-            <a:pPr indent="0" marL="0">
+            <a:pPr marL="0" indent="0">
               <a:buNone/>
             </a:pPr>
             <a:r>
@@ -12935,7 +13390,7 @@
           <a:bodyPr wrap="square" lIns="0" tIns="0" rIns="0" bIns="0" rtlCol="0" anchor="ctr"/>
           <a:lstStyle/>
           <a:p>
-            <a:pPr algn="r" indent="0" marL="0">
+            <a:pPr marL="0" indent="0" algn="r">
               <a:buNone/>
             </a:pPr>
             <a:r>
@@ -12974,7 +13429,7 @@
           <a:bodyPr wrap="square" lIns="0" tIns="0" rIns="0" bIns="0" rtlCol="0" anchor="ctr"/>
           <a:lstStyle/>
           <a:p>
-            <a:pPr indent="0" marL="0">
+            <a:pPr marL="0" indent="0">
               <a:buNone/>
             </a:pPr>
             <a:r>
@@ -13013,7 +13468,7 @@
           <a:bodyPr wrap="square" lIns="0" tIns="0" rIns="0" bIns="0" rtlCol="0" anchor="ctr"/>
           <a:lstStyle/>
           <a:p>
-            <a:pPr indent="0" marL="0">
+            <a:pPr marL="0" indent="0">
               <a:buNone/>
             </a:pPr>
             <a:r>
@@ -13050,18 +13505,25 @@
           </a:solidFill>
           <a:ln/>
         </p:spPr>
+        <p:txBody>
+          <a:bodyPr/>
+          <a:lstStyle/>
+          <a:p>
+            <a:endParaRPr lang="ja-JP" altLang="en-US"/>
+          </a:p>
+        </p:txBody>
       </p:sp>
       <p:pic>
         <p:nvPicPr>
-          <p:cNvPr id="8" name="Image 0" descr="/Users/kubotatoru/ai-management/docs/admin/slides/weekend_holiday_kpi/charts/04_holiday_drop.png">    </p:cNvPr>
+          <p:cNvPr id="8" name="Image 0" descr="/Users/kubotatoru/ai-management/docs/admin/slides/weekend_holiday_kpi/charts/04_holiday_drop.png"/>
           <p:cNvPicPr>
             <a:picLocks noChangeAspect="1"/>
           </p:cNvPicPr>
           <p:nvPr/>
         </p:nvPicPr>
         <p:blipFill>
-          <a:blip r:embed="rId1"/>
-          <a:srcRect l="0" r="0" t="0" b="0"/>
+          <a:blip r:embed="rId3"/>
+          <a:srcRect/>
           <a:stretch/>
         </p:blipFill>
         <p:spPr>
@@ -13093,6 +13555,13 @@
           </a:solidFill>
           <a:ln/>
         </p:spPr>
+        <p:txBody>
+          <a:bodyPr/>
+          <a:lstStyle/>
+          <a:p>
+            <a:endParaRPr lang="ja-JP" altLang="en-US"/>
+          </a:p>
+        </p:txBody>
       </p:sp>
       <p:sp>
         <p:nvSpPr>
@@ -13115,7 +13584,7 @@
           <a:bodyPr wrap="square" lIns="0" tIns="0" rIns="0" bIns="0" rtlCol="0" anchor="ctr"/>
           <a:lstStyle/>
           <a:p>
-            <a:pPr algn="ctr" indent="0" marL="0">
+            <a:pPr marL="0" indent="0" algn="ctr">
               <a:buNone/>
             </a:pPr>
             <a:r>
@@ -13154,7 +13623,7 @@
           <a:bodyPr wrap="square" lIns="0" tIns="0" rIns="0" bIns="0" rtlCol="0" anchor="t"/>
           <a:lstStyle/>
           <a:p>
-            <a:pPr algn="ctr" indent="0" marL="0">
+            <a:pPr marL="0" indent="0" algn="ctr">
               <a:buNone/>
             </a:pPr>
             <a:r>
@@ -13171,7 +13640,7 @@
             <a:endParaRPr lang="en-US" sz="1300" dirty="0"/>
           </a:p>
           <a:p>
-            <a:pPr algn="ctr" indent="0" marL="0">
+            <a:pPr marL="0" indent="0" algn="ctr">
               <a:buNone/>
             </a:pPr>
             <a:r>
@@ -13213,13 +13682,20 @@
             <a:prstDash val="solid"/>
           </a:ln>
           <a:effectLst>
-            <a:outerShdw sx="100000" sy="100000" kx="0" ky="0" algn="bl" rotWithShape="0" blurRad="101600" dist="25400" dir="5400000">
+            <a:outerShdw blurRad="101600" dist="25400" dir="5400000" algn="bl" rotWithShape="0">
               <a:srgbClr val="000000">
                 <a:alpha val="8000"/>
               </a:srgbClr>
             </a:outerShdw>
           </a:effectLst>
         </p:spPr>
+        <p:txBody>
+          <a:bodyPr/>
+          <a:lstStyle/>
+          <a:p>
+            <a:endParaRPr lang="ja-JP" altLang="en-US"/>
+          </a:p>
+        </p:txBody>
       </p:sp>
       <p:sp>
         <p:nvSpPr>
@@ -13240,6 +13716,13 @@
           </a:solidFill>
           <a:ln/>
         </p:spPr>
+        <p:txBody>
+          <a:bodyPr/>
+          <a:lstStyle/>
+          <a:p>
+            <a:endParaRPr lang="ja-JP" altLang="en-US"/>
+          </a:p>
+        </p:txBody>
       </p:sp>
       <p:sp>
         <p:nvSpPr>
@@ -13262,7 +13745,7 @@
           <a:bodyPr wrap="square" lIns="0" tIns="0" rIns="0" bIns="0" rtlCol="0" anchor="t"/>
           <a:lstStyle/>
           <a:p>
-            <a:pPr indent="0" marL="0">
+            <a:pPr marL="0" indent="0">
               <a:buNone/>
             </a:pPr>
             <a:r>
@@ -13301,7 +13784,7 @@
           <a:bodyPr wrap="square" lIns="0" tIns="0" rIns="0" bIns="0" rtlCol="0" anchor="t"/>
           <a:lstStyle/>
           <a:p>
-            <a:pPr indent="0" marL="0">
+            <a:pPr marL="0" indent="0">
               <a:buNone/>
             </a:pPr>
             <a:r>
@@ -13343,13 +13826,20 @@
             <a:prstDash val="solid"/>
           </a:ln>
           <a:effectLst>
-            <a:outerShdw sx="100000" sy="100000" kx="0" ky="0" algn="bl" rotWithShape="0" blurRad="101600" dist="25400" dir="5400000">
+            <a:outerShdw blurRad="101600" dist="25400" dir="5400000" algn="bl" rotWithShape="0">
               <a:srgbClr val="000000">
                 <a:alpha val="8000"/>
               </a:srgbClr>
             </a:outerShdw>
           </a:effectLst>
         </p:spPr>
+        <p:txBody>
+          <a:bodyPr/>
+          <a:lstStyle/>
+          <a:p>
+            <a:endParaRPr lang="ja-JP" altLang="en-US"/>
+          </a:p>
+        </p:txBody>
       </p:sp>
       <p:sp>
         <p:nvSpPr>
@@ -13370,6 +13860,13 @@
           </a:solidFill>
           <a:ln/>
         </p:spPr>
+        <p:txBody>
+          <a:bodyPr/>
+          <a:lstStyle/>
+          <a:p>
+            <a:endParaRPr lang="ja-JP" altLang="en-US"/>
+          </a:p>
+        </p:txBody>
       </p:sp>
       <p:sp>
         <p:nvSpPr>
@@ -13392,7 +13889,7 @@
           <a:bodyPr wrap="square" lIns="0" tIns="0" rIns="0" bIns="0" rtlCol="0" anchor="t"/>
           <a:lstStyle/>
           <a:p>
-            <a:pPr indent="0" marL="0">
+            <a:pPr marL="0" indent="0">
               <a:buNone/>
             </a:pPr>
             <a:r>
@@ -13431,7 +13928,7 @@
           <a:bodyPr wrap="square" lIns="0" tIns="0" rIns="0" bIns="0" rtlCol="0" anchor="t"/>
           <a:lstStyle/>
           <a:p>
-            <a:pPr indent="0" marL="0">
+            <a:pPr marL="0" indent="0">
               <a:buNone/>
             </a:pPr>
             <a:r>
@@ -13473,13 +13970,20 @@
             <a:prstDash val="solid"/>
           </a:ln>
           <a:effectLst>
-            <a:outerShdw sx="100000" sy="100000" kx="0" ky="0" algn="bl" rotWithShape="0" blurRad="101600" dist="25400" dir="5400000">
+            <a:outerShdw blurRad="101600" dist="25400" dir="5400000" algn="bl" rotWithShape="0">
               <a:srgbClr val="000000">
                 <a:alpha val="8000"/>
               </a:srgbClr>
             </a:outerShdw>
           </a:effectLst>
         </p:spPr>
+        <p:txBody>
+          <a:bodyPr/>
+          <a:lstStyle/>
+          <a:p>
+            <a:endParaRPr lang="ja-JP" altLang="en-US"/>
+          </a:p>
+        </p:txBody>
       </p:sp>
       <p:sp>
         <p:nvSpPr>
@@ -13500,6 +14004,13 @@
           </a:solidFill>
           <a:ln/>
         </p:spPr>
+        <p:txBody>
+          <a:bodyPr/>
+          <a:lstStyle/>
+          <a:p>
+            <a:endParaRPr lang="ja-JP" altLang="en-US"/>
+          </a:p>
+        </p:txBody>
       </p:sp>
       <p:sp>
         <p:nvSpPr>
@@ -13522,7 +14033,7 @@
           <a:bodyPr wrap="square" lIns="0" tIns="0" rIns="0" bIns="0" rtlCol="0" anchor="t"/>
           <a:lstStyle/>
           <a:p>
-            <a:pPr indent="0" marL="0">
+            <a:pPr marL="0" indent="0">
               <a:buNone/>
             </a:pPr>
             <a:r>
@@ -13549,7 +14060,7 @@
         <p:spPr>
           <a:xfrm>
             <a:off x="8275320" y="6263640"/>
-            <a:ext cx="3337560" cy="-91440"/>
+            <a:ext cx="3337560" cy="0"/>
           </a:xfrm>
           <a:prstGeom prst="rect">
             <a:avLst/>
@@ -13561,7 +14072,7 @@
           <a:bodyPr wrap="square" lIns="0" tIns="0" rIns="0" bIns="0" rtlCol="0" anchor="t"/>
           <a:lstStyle/>
           <a:p>
-            <a:pPr indent="0" marL="0">
+            <a:pPr marL="0" indent="0">
               <a:buNone/>
             </a:pPr>
             <a:r>
@@ -13595,6 +14106,7 @@
         <a:solidFill>
           <a:srgbClr val="F7F5F0"/>
         </a:solidFill>
+        <a:effectLst/>
       </p:bgPr>
     </p:bg>
     <p:spTree>
@@ -13630,6 +14142,13 @@
           </a:solidFill>
           <a:ln/>
         </p:spPr>
+        <p:txBody>
+          <a:bodyPr/>
+          <a:lstStyle/>
+          <a:p>
+            <a:endParaRPr lang="ja-JP" altLang="en-US"/>
+          </a:p>
+        </p:txBody>
       </p:sp>
       <p:sp>
         <p:nvSpPr>
@@ -13652,7 +14171,7 @@
           <a:bodyPr wrap="square" lIns="0" tIns="0" rIns="0" bIns="0" rtlCol="0" anchor="ctr"/>
           <a:lstStyle/>
           <a:p>
-            <a:pPr indent="0" marL="0">
+            <a:pPr marL="0" indent="0">
               <a:buNone/>
             </a:pPr>
             <a:r>
@@ -13691,7 +14210,7 @@
           <a:bodyPr wrap="square" lIns="0" tIns="0" rIns="0" bIns="0" rtlCol="0" anchor="ctr"/>
           <a:lstStyle/>
           <a:p>
-            <a:pPr algn="r" indent="0" marL="0">
+            <a:pPr marL="0" indent="0" algn="r">
               <a:buNone/>
             </a:pPr>
             <a:r>
@@ -13730,7 +14249,7 @@
           <a:bodyPr wrap="square" lIns="0" tIns="0" rIns="0" bIns="0" rtlCol="0" anchor="ctr"/>
           <a:lstStyle/>
           <a:p>
-            <a:pPr indent="0" marL="0">
+            <a:pPr marL="0" indent="0">
               <a:buNone/>
             </a:pPr>
             <a:r>
@@ -13769,7 +14288,7 @@
           <a:bodyPr wrap="square" lIns="0" tIns="0" rIns="0" bIns="0" rtlCol="0" anchor="ctr"/>
           <a:lstStyle/>
           <a:p>
-            <a:pPr indent="0" marL="0">
+            <a:pPr marL="0" indent="0">
               <a:buNone/>
             </a:pPr>
             <a:r>
@@ -13806,18 +14325,25 @@
           </a:solidFill>
           <a:ln/>
         </p:spPr>
+        <p:txBody>
+          <a:bodyPr/>
+          <a:lstStyle/>
+          <a:p>
+            <a:endParaRPr lang="ja-JP" altLang="en-US"/>
+          </a:p>
+        </p:txBody>
       </p:sp>
       <p:pic>
         <p:nvPicPr>
-          <p:cNvPr id="8" name="Image 0" descr="/Users/kubotatoru/ai-management/docs/admin/slides/weekend_holiday_kpi/charts/07_gw_daily.png">    </p:cNvPr>
+          <p:cNvPr id="8" name="Image 0" descr="/Users/kubotatoru/ai-management/docs/admin/slides/weekend_holiday_kpi/charts/07_gw_daily.png"/>
           <p:cNvPicPr>
             <a:picLocks noChangeAspect="1"/>
           </p:cNvPicPr>
           <p:nvPr/>
         </p:nvPicPr>
         <p:blipFill>
-          <a:blip r:embed="rId1"/>
-          <a:srcRect l="0" r="0" t="0" b="0"/>
+          <a:blip r:embed="rId3"/>
+          <a:srcRect/>
           <a:stretch/>
         </p:blipFill>
         <p:spPr>
@@ -13854,13 +14380,20 @@
             <a:prstDash val="solid"/>
           </a:ln>
           <a:effectLst>
-            <a:outerShdw sx="100000" sy="100000" kx="0" ky="0" algn="bl" rotWithShape="0" blurRad="101600" dist="25400" dir="5400000">
+            <a:outerShdw blurRad="101600" dist="25400" dir="5400000" algn="bl" rotWithShape="0">
               <a:srgbClr val="000000">
                 <a:alpha val="8000"/>
               </a:srgbClr>
             </a:outerShdw>
           </a:effectLst>
         </p:spPr>
+        <p:txBody>
+          <a:bodyPr/>
+          <a:lstStyle/>
+          <a:p>
+            <a:endParaRPr lang="ja-JP" altLang="en-US"/>
+          </a:p>
+        </p:txBody>
       </p:sp>
       <p:sp>
         <p:nvSpPr>
@@ -13881,6 +14414,13 @@
           </a:solidFill>
           <a:ln/>
         </p:spPr>
+        <p:txBody>
+          <a:bodyPr/>
+          <a:lstStyle/>
+          <a:p>
+            <a:endParaRPr lang="ja-JP" altLang="en-US"/>
+          </a:p>
+        </p:txBody>
       </p:sp>
       <p:sp>
         <p:nvSpPr>
@@ -13903,7 +14443,7 @@
           <a:bodyPr wrap="square" lIns="0" tIns="0" rIns="0" bIns="0" rtlCol="0" anchor="t"/>
           <a:lstStyle/>
           <a:p>
-            <a:pPr indent="0" marL="0">
+            <a:pPr marL="0" indent="0">
               <a:buNone/>
             </a:pPr>
             <a:r>
@@ -13942,7 +14482,7 @@
           <a:bodyPr wrap="square" lIns="0" tIns="0" rIns="0" bIns="0" rtlCol="0" anchor="t"/>
           <a:lstStyle/>
           <a:p>
-            <a:pPr indent="0" marL="0">
+            <a:pPr marL="0" indent="0">
               <a:buNone/>
             </a:pPr>
             <a:r>
@@ -13984,13 +14524,20 @@
             <a:prstDash val="solid"/>
           </a:ln>
           <a:effectLst>
-            <a:outerShdw sx="100000" sy="100000" kx="0" ky="0" algn="bl" rotWithShape="0" blurRad="101600" dist="25400" dir="5400000">
+            <a:outerShdw blurRad="101600" dist="25400" dir="5400000" algn="bl" rotWithShape="0">
               <a:srgbClr val="000000">
                 <a:alpha val="8000"/>
               </a:srgbClr>
             </a:outerShdw>
           </a:effectLst>
         </p:spPr>
+        <p:txBody>
+          <a:bodyPr/>
+          <a:lstStyle/>
+          <a:p>
+            <a:endParaRPr lang="ja-JP" altLang="en-US"/>
+          </a:p>
+        </p:txBody>
       </p:sp>
       <p:sp>
         <p:nvSpPr>
@@ -14011,6 +14558,13 @@
           </a:solidFill>
           <a:ln/>
         </p:spPr>
+        <p:txBody>
+          <a:bodyPr/>
+          <a:lstStyle/>
+          <a:p>
+            <a:endParaRPr lang="ja-JP" altLang="en-US"/>
+          </a:p>
+        </p:txBody>
       </p:sp>
       <p:sp>
         <p:nvSpPr>
@@ -14033,7 +14587,7 @@
           <a:bodyPr wrap="square" lIns="0" tIns="0" rIns="0" bIns="0" rtlCol="0" anchor="t"/>
           <a:lstStyle/>
           <a:p>
-            <a:pPr indent="0" marL="0">
+            <a:pPr marL="0" indent="0">
               <a:buNone/>
             </a:pPr>
             <a:r>
@@ -14072,7 +14626,7 @@
           <a:bodyPr wrap="square" lIns="0" tIns="0" rIns="0" bIns="0" rtlCol="0" anchor="t"/>
           <a:lstStyle/>
           <a:p>
-            <a:pPr indent="0" marL="0">
+            <a:pPr marL="0" indent="0">
               <a:buNone/>
             </a:pPr>
             <a:r>
@@ -14114,13 +14668,20 @@
             <a:prstDash val="solid"/>
           </a:ln>
           <a:effectLst>
-            <a:outerShdw sx="100000" sy="100000" kx="0" ky="0" algn="bl" rotWithShape="0" blurRad="101600" dist="25400" dir="5400000">
+            <a:outerShdw blurRad="101600" dist="25400" dir="5400000" algn="bl" rotWithShape="0">
               <a:srgbClr val="000000">
                 <a:alpha val="8000"/>
               </a:srgbClr>
             </a:outerShdw>
           </a:effectLst>
         </p:spPr>
+        <p:txBody>
+          <a:bodyPr/>
+          <a:lstStyle/>
+          <a:p>
+            <a:endParaRPr lang="ja-JP" altLang="en-US"/>
+          </a:p>
+        </p:txBody>
       </p:sp>
       <p:sp>
         <p:nvSpPr>
@@ -14141,6 +14702,13 @@
           </a:solidFill>
           <a:ln/>
         </p:spPr>
+        <p:txBody>
+          <a:bodyPr/>
+          <a:lstStyle/>
+          <a:p>
+            <a:endParaRPr lang="ja-JP" altLang="en-US"/>
+          </a:p>
+        </p:txBody>
       </p:sp>
       <p:sp>
         <p:nvSpPr>
@@ -14163,7 +14731,7 @@
           <a:bodyPr wrap="square" lIns="0" tIns="0" rIns="0" bIns="0" rtlCol="0" anchor="t"/>
           <a:lstStyle/>
           <a:p>
-            <a:pPr indent="0" marL="0">
+            <a:pPr marL="0" indent="0">
               <a:buNone/>
             </a:pPr>
             <a:r>
@@ -14202,7 +14770,7 @@
           <a:bodyPr wrap="square" lIns="0" tIns="0" rIns="0" bIns="0" rtlCol="0" anchor="t"/>
           <a:lstStyle/>
           <a:p>
-            <a:pPr indent="0" marL="0">
+            <a:pPr marL="0" indent="0">
               <a:buNone/>
             </a:pPr>
             <a:r>
@@ -14236,6 +14804,7 @@
         <a:solidFill>
           <a:srgbClr val="F7F5F0"/>
         </a:solidFill>
+        <a:effectLst/>
       </p:bgPr>
     </p:bg>
     <p:spTree>
@@ -14271,6 +14840,13 @@
           </a:solidFill>
           <a:ln/>
         </p:spPr>
+        <p:txBody>
+          <a:bodyPr/>
+          <a:lstStyle/>
+          <a:p>
+            <a:endParaRPr lang="ja-JP" altLang="en-US"/>
+          </a:p>
+        </p:txBody>
       </p:sp>
       <p:sp>
         <p:nvSpPr>
@@ -14293,7 +14869,7 @@
           <a:bodyPr wrap="square" lIns="0" tIns="0" rIns="0" bIns="0" rtlCol="0" anchor="ctr"/>
           <a:lstStyle/>
           <a:p>
-            <a:pPr indent="0" marL="0">
+            <a:pPr marL="0" indent="0">
               <a:buNone/>
             </a:pPr>
             <a:r>
@@ -14332,7 +14908,7 @@
           <a:bodyPr wrap="square" lIns="0" tIns="0" rIns="0" bIns="0" rtlCol="0" anchor="ctr"/>
           <a:lstStyle/>
           <a:p>
-            <a:pPr algn="r" indent="0" marL="0">
+            <a:pPr marL="0" indent="0" algn="r">
               <a:buNone/>
             </a:pPr>
             <a:r>
@@ -14371,7 +14947,7 @@
           <a:bodyPr wrap="square" lIns="0" tIns="0" rIns="0" bIns="0" rtlCol="0" anchor="ctr"/>
           <a:lstStyle/>
           <a:p>
-            <a:pPr indent="0" marL="0">
+            <a:pPr marL="0" indent="0">
               <a:buNone/>
             </a:pPr>
             <a:r>
@@ -14410,7 +14986,7 @@
           <a:bodyPr wrap="square" lIns="0" tIns="0" rIns="0" bIns="0" rtlCol="0" anchor="ctr"/>
           <a:lstStyle/>
           <a:p>
-            <a:pPr indent="0" marL="0">
+            <a:pPr marL="0" indent="0">
               <a:buNone/>
             </a:pPr>
             <a:r>
@@ -14447,18 +15023,25 @@
           </a:solidFill>
           <a:ln/>
         </p:spPr>
+        <p:txBody>
+          <a:bodyPr/>
+          <a:lstStyle/>
+          <a:p>
+            <a:endParaRPr lang="ja-JP" altLang="en-US"/>
+          </a:p>
+        </p:txBody>
       </p:sp>
       <p:pic>
         <p:nvPicPr>
-          <p:cNvPr id="8" name="Image 0" descr="/Users/kubotatoru/ai-management/docs/admin/slides/weekend_holiday_kpi/charts/08_nenmatsu_daily.png">    </p:cNvPr>
+          <p:cNvPr id="8" name="Image 0" descr="/Users/kubotatoru/ai-management/docs/admin/slides/weekend_holiday_kpi/charts/08_nenmatsu_daily.png"/>
           <p:cNvPicPr>
             <a:picLocks noChangeAspect="1"/>
           </p:cNvPicPr>
           <p:nvPr/>
         </p:nvPicPr>
         <p:blipFill>
-          <a:blip r:embed="rId1"/>
-          <a:srcRect l="0" r="0" t="0" b="0"/>
+          <a:blip r:embed="rId3"/>
+          <a:srcRect/>
           <a:stretch/>
         </p:blipFill>
         <p:spPr>
@@ -14495,13 +15078,20 @@
             <a:prstDash val="solid"/>
           </a:ln>
           <a:effectLst>
-            <a:outerShdw sx="100000" sy="100000" kx="0" ky="0" algn="bl" rotWithShape="0" blurRad="101600" dist="25400" dir="5400000">
+            <a:outerShdw blurRad="101600" dist="25400" dir="5400000" algn="bl" rotWithShape="0">
               <a:srgbClr val="000000">
                 <a:alpha val="8000"/>
               </a:srgbClr>
             </a:outerShdw>
           </a:effectLst>
         </p:spPr>
+        <p:txBody>
+          <a:bodyPr/>
+          <a:lstStyle/>
+          <a:p>
+            <a:endParaRPr lang="ja-JP" altLang="en-US"/>
+          </a:p>
+        </p:txBody>
       </p:sp>
       <p:sp>
         <p:nvSpPr>
@@ -14522,6 +15112,13 @@
           </a:solidFill>
           <a:ln/>
         </p:spPr>
+        <p:txBody>
+          <a:bodyPr/>
+          <a:lstStyle/>
+          <a:p>
+            <a:endParaRPr lang="ja-JP" altLang="en-US"/>
+          </a:p>
+        </p:txBody>
       </p:sp>
       <p:sp>
         <p:nvSpPr>
@@ -14544,7 +15141,7 @@
           <a:bodyPr wrap="square" lIns="0" tIns="0" rIns="0" bIns="0" rtlCol="0" anchor="t"/>
           <a:lstStyle/>
           <a:p>
-            <a:pPr indent="0" marL="0">
+            <a:pPr marL="0" indent="0">
               <a:buNone/>
             </a:pPr>
             <a:r>
@@ -14583,7 +15180,7 @@
           <a:bodyPr wrap="square" lIns="0" tIns="0" rIns="0" bIns="0" rtlCol="0" anchor="t"/>
           <a:lstStyle/>
           <a:p>
-            <a:pPr indent="0" marL="0">
+            <a:pPr marL="0" indent="0">
               <a:buNone/>
             </a:pPr>
             <a:r>
@@ -14625,13 +15222,20 @@
             <a:prstDash val="solid"/>
           </a:ln>
           <a:effectLst>
-            <a:outerShdw sx="100000" sy="100000" kx="0" ky="0" algn="bl" rotWithShape="0" blurRad="101600" dist="25400" dir="5400000">
+            <a:outerShdw blurRad="101600" dist="25400" dir="5400000" algn="bl" rotWithShape="0">
               <a:srgbClr val="000000">
                 <a:alpha val="8000"/>
               </a:srgbClr>
             </a:outerShdw>
           </a:effectLst>
         </p:spPr>
+        <p:txBody>
+          <a:bodyPr/>
+          <a:lstStyle/>
+          <a:p>
+            <a:endParaRPr lang="ja-JP" altLang="en-US"/>
+          </a:p>
+        </p:txBody>
       </p:sp>
       <p:sp>
         <p:nvSpPr>
@@ -14652,6 +15256,13 @@
           </a:solidFill>
           <a:ln/>
         </p:spPr>
+        <p:txBody>
+          <a:bodyPr/>
+          <a:lstStyle/>
+          <a:p>
+            <a:endParaRPr lang="ja-JP" altLang="en-US"/>
+          </a:p>
+        </p:txBody>
       </p:sp>
       <p:sp>
         <p:nvSpPr>
@@ -14674,7 +15285,7 @@
           <a:bodyPr wrap="square" lIns="0" tIns="0" rIns="0" bIns="0" rtlCol="0" anchor="t"/>
           <a:lstStyle/>
           <a:p>
-            <a:pPr indent="0" marL="0">
+            <a:pPr marL="0" indent="0">
               <a:buNone/>
             </a:pPr>
             <a:r>
@@ -14713,7 +15324,7 @@
           <a:bodyPr wrap="square" lIns="0" tIns="0" rIns="0" bIns="0" rtlCol="0" anchor="t"/>
           <a:lstStyle/>
           <a:p>
-            <a:pPr indent="0" marL="0">
+            <a:pPr marL="0" indent="0">
               <a:buNone/>
             </a:pPr>
             <a:r>
@@ -14755,13 +15366,20 @@
             <a:prstDash val="solid"/>
           </a:ln>
           <a:effectLst>
-            <a:outerShdw sx="100000" sy="100000" kx="0" ky="0" algn="bl" rotWithShape="0" blurRad="101600" dist="25400" dir="5400000">
+            <a:outerShdw blurRad="101600" dist="25400" dir="5400000" algn="bl" rotWithShape="0">
               <a:srgbClr val="000000">
                 <a:alpha val="8000"/>
               </a:srgbClr>
             </a:outerShdw>
           </a:effectLst>
         </p:spPr>
+        <p:txBody>
+          <a:bodyPr/>
+          <a:lstStyle/>
+          <a:p>
+            <a:endParaRPr lang="ja-JP" altLang="en-US"/>
+          </a:p>
+        </p:txBody>
       </p:sp>
       <p:sp>
         <p:nvSpPr>
@@ -14782,6 +15400,13 @@
           </a:solidFill>
           <a:ln/>
         </p:spPr>
+        <p:txBody>
+          <a:bodyPr/>
+          <a:lstStyle/>
+          <a:p>
+            <a:endParaRPr lang="ja-JP" altLang="en-US"/>
+          </a:p>
+        </p:txBody>
       </p:sp>
       <p:sp>
         <p:nvSpPr>
@@ -14804,7 +15429,7 @@
           <a:bodyPr wrap="square" lIns="0" tIns="0" rIns="0" bIns="0" rtlCol="0" anchor="t"/>
           <a:lstStyle/>
           <a:p>
-            <a:pPr indent="0" marL="0">
+            <a:pPr marL="0" indent="0">
               <a:buNone/>
             </a:pPr>
             <a:r>
@@ -14843,7 +15468,7 @@
           <a:bodyPr wrap="square" lIns="0" tIns="0" rIns="0" bIns="0" rtlCol="0" anchor="t"/>
           <a:lstStyle/>
           <a:p>
-            <a:pPr indent="0" marL="0">
+            <a:pPr marL="0" indent="0">
               <a:buNone/>
             </a:pPr>
             <a:r>
@@ -15162,4 +15787,319 @@
     </a:ext>
   </a:extLst>
 </a:theme>
+</file>
+
+<file path=ppt/theme/theme2.xml><?xml version="1.0" encoding="utf-8"?>
+<a:theme xmlns:a="http://schemas.openxmlformats.org/drawingml/2006/main" name="Office テーマ">
+  <a:themeElements>
+    <a:clrScheme name="Office">
+      <a:dk1>
+        <a:sysClr val="windowText" lastClr="000000"/>
+      </a:dk1>
+      <a:lt1>
+        <a:sysClr val="window" lastClr="FFFFFF"/>
+      </a:lt1>
+      <a:dk2>
+        <a:srgbClr val="0E2841"/>
+      </a:dk2>
+      <a:lt2>
+        <a:srgbClr val="E8E8E8"/>
+      </a:lt2>
+      <a:accent1>
+        <a:srgbClr val="156082"/>
+      </a:accent1>
+      <a:accent2>
+        <a:srgbClr val="E97132"/>
+      </a:accent2>
+      <a:accent3>
+        <a:srgbClr val="196B24"/>
+      </a:accent3>
+      <a:accent4>
+        <a:srgbClr val="0F9ED5"/>
+      </a:accent4>
+      <a:accent5>
+        <a:srgbClr val="A02B93"/>
+      </a:accent5>
+      <a:accent6>
+        <a:srgbClr val="4EA72E"/>
+      </a:accent6>
+      <a:hlink>
+        <a:srgbClr val="467886"/>
+      </a:hlink>
+      <a:folHlink>
+        <a:srgbClr val="96607D"/>
+      </a:folHlink>
+    </a:clrScheme>
+    <a:fontScheme name="Office">
+      <a:majorFont>
+        <a:latin typeface="游ゴシック Light" panose="02110004020202020204"/>
+        <a:ea typeface=""/>
+        <a:cs typeface=""/>
+        <a:font script="Jpan" typeface="游ゴシック Light"/>
+        <a:font script="Hang" typeface="맑은 고딕"/>
+        <a:font script="Hans" typeface="等线 Light"/>
+        <a:font script="Hant" typeface="新細明體"/>
+        <a:font script="Arab" typeface="Times New Roman"/>
+        <a:font script="Hebr" typeface="Times New Roman"/>
+        <a:font script="Thai" typeface="Angsana New"/>
+        <a:font script="Ethi" typeface="Nyala"/>
+        <a:font script="Beng" typeface="Vrinda"/>
+        <a:font script="Gujr" typeface="Shruti"/>
+        <a:font script="Khmr" typeface="MoolBoran"/>
+        <a:font script="Knda" typeface="Tunga"/>
+        <a:font script="Guru" typeface="Raavi"/>
+        <a:font script="Cans" typeface="Euphemia"/>
+        <a:font script="Cher" typeface="Plantagenet Cherokee"/>
+        <a:font script="Yiii" typeface="Microsoft Yi Baiti"/>
+        <a:font script="Tibt" typeface="Microsoft Himalaya"/>
+        <a:font script="Thaa" typeface="MV Boli"/>
+        <a:font script="Deva" typeface="Mangal"/>
+        <a:font script="Telu" typeface="Gautami"/>
+        <a:font script="Taml" typeface="Latha"/>
+        <a:font script="Syrc" typeface="Estrangelo Edessa"/>
+        <a:font script="Orya" typeface="Kalinga"/>
+        <a:font script="Mlym" typeface="Kartika"/>
+        <a:font script="Laoo" typeface="DokChampa"/>
+        <a:font script="Sinh" typeface="Iskoola Pota"/>
+        <a:font script="Mong" typeface="Mongolian Baiti"/>
+        <a:font script="Viet" typeface="Times New Roman"/>
+        <a:font script="Uigh" typeface="Microsoft Uighur"/>
+        <a:font script="Geor" typeface="Sylfaen"/>
+        <a:font script="Armn" typeface="Arial"/>
+        <a:font script="Bugi" typeface="Leelawadee UI"/>
+        <a:font script="Bopo" typeface="Microsoft JhengHei"/>
+        <a:font script="Java" typeface="Javanese Text"/>
+        <a:font script="Lisu" typeface="Segoe UI"/>
+        <a:font script="Mymr" typeface="Myanmar Text"/>
+        <a:font script="Nkoo" typeface="Ebrima"/>
+        <a:font script="Olck" typeface="Nirmala UI"/>
+        <a:font script="Osma" typeface="Ebrima"/>
+        <a:font script="Phag" typeface="Phagspa"/>
+        <a:font script="Syrn" typeface="Estrangelo Edessa"/>
+        <a:font script="Syrj" typeface="Estrangelo Edessa"/>
+        <a:font script="Syre" typeface="Estrangelo Edessa"/>
+        <a:font script="Sora" typeface="Nirmala UI"/>
+        <a:font script="Tale" typeface="Microsoft Tai Le"/>
+        <a:font script="Talu" typeface="Microsoft New Tai Lue"/>
+        <a:font script="Tfng" typeface="Ebrima"/>
+      </a:majorFont>
+      <a:minorFont>
+        <a:latin typeface="游ゴシック" panose="02110004020202020204"/>
+        <a:ea typeface=""/>
+        <a:cs typeface=""/>
+        <a:font script="Jpan" typeface="游ゴシック"/>
+        <a:font script="Hang" typeface="맑은 고딕"/>
+        <a:font script="Hans" typeface="等线"/>
+        <a:font script="Hant" typeface="新細明體"/>
+        <a:font script="Arab" typeface="Arial"/>
+        <a:font script="Hebr" typeface="Arial"/>
+        <a:font script="Thai" typeface="Cordia New"/>
+        <a:font script="Ethi" typeface="Nyala"/>
+        <a:font script="Beng" typeface="Vrinda"/>
+        <a:font script="Gujr" typeface="Shruti"/>
+        <a:font script="Khmr" typeface="DaunPenh"/>
+        <a:font script="Knda" typeface="Tunga"/>
+        <a:font script="Guru" typeface="Raavi"/>
+        <a:font script="Cans" typeface="Euphemia"/>
+        <a:font script="Cher" typeface="Plantagenet Cherokee"/>
+        <a:font script="Yiii" typeface="Microsoft Yi Baiti"/>
+        <a:font script="Tibt" typeface="Microsoft Himalaya"/>
+        <a:font script="Thaa" typeface="MV Boli"/>
+        <a:font script="Deva" typeface="Mangal"/>
+        <a:font script="Telu" typeface="Gautami"/>
+        <a:font script="Taml" typeface="Latha"/>
+        <a:font script="Syrc" typeface="Estrangelo Edessa"/>
+        <a:font script="Orya" typeface="Kalinga"/>
+        <a:font script="Mlym" typeface="Kartika"/>
+        <a:font script="Laoo" typeface="DokChampa"/>
+        <a:font script="Sinh" typeface="Iskoola Pota"/>
+        <a:font script="Mong" typeface="Mongolian Baiti"/>
+        <a:font script="Viet" typeface="Arial"/>
+        <a:font script="Uigh" typeface="Microsoft Uighur"/>
+        <a:font script="Geor" typeface="Sylfaen"/>
+        <a:font script="Armn" typeface="Arial"/>
+        <a:font script="Bugi" typeface="Leelawadee UI"/>
+        <a:font script="Bopo" typeface="Microsoft JhengHei"/>
+        <a:font script="Java" typeface="Javanese Text"/>
+        <a:font script="Lisu" typeface="Segoe UI"/>
+        <a:font script="Mymr" typeface="Myanmar Text"/>
+        <a:font script="Nkoo" typeface="Ebrima"/>
+        <a:font script="Olck" typeface="Nirmala UI"/>
+        <a:font script="Osma" typeface="Ebrima"/>
+        <a:font script="Phag" typeface="Phagspa"/>
+        <a:font script="Syrn" typeface="Estrangelo Edessa"/>
+        <a:font script="Syrj" typeface="Estrangelo Edessa"/>
+        <a:font script="Syre" typeface="Estrangelo Edessa"/>
+        <a:font script="Sora" typeface="Nirmala UI"/>
+        <a:font script="Tale" typeface="Microsoft Tai Le"/>
+        <a:font script="Talu" typeface="Microsoft New Tai Lue"/>
+        <a:font script="Tfng" typeface="Ebrima"/>
+      </a:minorFont>
+    </a:fontScheme>
+    <a:fmtScheme name="Office">
+      <a:fillStyleLst>
+        <a:solidFill>
+          <a:schemeClr val="phClr"/>
+        </a:solidFill>
+        <a:gradFill rotWithShape="1">
+          <a:gsLst>
+            <a:gs pos="0">
+              <a:schemeClr val="phClr">
+                <a:lumMod val="110000"/>
+                <a:satMod val="105000"/>
+                <a:tint val="67000"/>
+              </a:schemeClr>
+            </a:gs>
+            <a:gs pos="50000">
+              <a:schemeClr val="phClr">
+                <a:lumMod val="105000"/>
+                <a:satMod val="103000"/>
+                <a:tint val="73000"/>
+              </a:schemeClr>
+            </a:gs>
+            <a:gs pos="100000">
+              <a:schemeClr val="phClr">
+                <a:lumMod val="105000"/>
+                <a:satMod val="109000"/>
+                <a:tint val="81000"/>
+              </a:schemeClr>
+            </a:gs>
+          </a:gsLst>
+          <a:lin ang="5400000" scaled="0"/>
+        </a:gradFill>
+        <a:gradFill rotWithShape="1">
+          <a:gsLst>
+            <a:gs pos="0">
+              <a:schemeClr val="phClr">
+                <a:satMod val="103000"/>
+                <a:lumMod val="102000"/>
+                <a:tint val="94000"/>
+              </a:schemeClr>
+            </a:gs>
+            <a:gs pos="50000">
+              <a:schemeClr val="phClr">
+                <a:satMod val="110000"/>
+                <a:lumMod val="100000"/>
+                <a:shade val="100000"/>
+              </a:schemeClr>
+            </a:gs>
+            <a:gs pos="100000">
+              <a:schemeClr val="phClr">
+                <a:lumMod val="99000"/>
+                <a:satMod val="120000"/>
+                <a:shade val="78000"/>
+              </a:schemeClr>
+            </a:gs>
+          </a:gsLst>
+          <a:lin ang="5400000" scaled="0"/>
+        </a:gradFill>
+      </a:fillStyleLst>
+      <a:lnStyleLst>
+        <a:ln w="12700" cap="flat" cmpd="sng" algn="ctr">
+          <a:solidFill>
+            <a:schemeClr val="phClr"/>
+          </a:solidFill>
+          <a:prstDash val="solid"/>
+          <a:miter lim="800000"/>
+        </a:ln>
+        <a:ln w="19050" cap="flat" cmpd="sng" algn="ctr">
+          <a:solidFill>
+            <a:schemeClr val="phClr"/>
+          </a:solidFill>
+          <a:prstDash val="solid"/>
+          <a:miter lim="800000"/>
+        </a:ln>
+        <a:ln w="25400" cap="flat" cmpd="sng" algn="ctr">
+          <a:solidFill>
+            <a:schemeClr val="phClr"/>
+          </a:solidFill>
+          <a:prstDash val="solid"/>
+          <a:miter lim="800000"/>
+        </a:ln>
+      </a:lnStyleLst>
+      <a:effectStyleLst>
+        <a:effectStyle>
+          <a:effectLst/>
+        </a:effectStyle>
+        <a:effectStyle>
+          <a:effectLst/>
+        </a:effectStyle>
+        <a:effectStyle>
+          <a:effectLst>
+            <a:outerShdw blurRad="57150" dist="19050" dir="5400000" algn="ctr" rotWithShape="0">
+              <a:srgbClr val="000000">
+                <a:alpha val="63000"/>
+              </a:srgbClr>
+            </a:outerShdw>
+          </a:effectLst>
+        </a:effectStyle>
+      </a:effectStyleLst>
+      <a:bgFillStyleLst>
+        <a:solidFill>
+          <a:schemeClr val="phClr"/>
+        </a:solidFill>
+        <a:solidFill>
+          <a:schemeClr val="phClr">
+            <a:tint val="95000"/>
+            <a:satMod val="170000"/>
+          </a:schemeClr>
+        </a:solidFill>
+        <a:gradFill rotWithShape="1">
+          <a:gsLst>
+            <a:gs pos="0">
+              <a:schemeClr val="phClr">
+                <a:tint val="93000"/>
+                <a:satMod val="150000"/>
+                <a:shade val="98000"/>
+                <a:lumMod val="102000"/>
+              </a:schemeClr>
+            </a:gs>
+            <a:gs pos="50000">
+              <a:schemeClr val="phClr">
+                <a:tint val="98000"/>
+                <a:satMod val="130000"/>
+                <a:shade val="90000"/>
+                <a:lumMod val="103000"/>
+              </a:schemeClr>
+            </a:gs>
+            <a:gs pos="100000">
+              <a:schemeClr val="phClr">
+                <a:shade val="63000"/>
+                <a:satMod val="120000"/>
+              </a:schemeClr>
+            </a:gs>
+          </a:gsLst>
+          <a:lin ang="5400000" scaled="0"/>
+        </a:gradFill>
+      </a:bgFillStyleLst>
+    </a:fmtScheme>
+  </a:themeElements>
+  <a:objectDefaults>
+    <a:lnDef>
+      <a:spPr/>
+      <a:bodyPr/>
+      <a:lstStyle/>
+      <a:style>
+        <a:lnRef idx="2">
+          <a:schemeClr val="accent1"/>
+        </a:lnRef>
+        <a:fillRef idx="0">
+          <a:schemeClr val="accent1"/>
+        </a:fillRef>
+        <a:effectRef idx="1">
+          <a:schemeClr val="accent1"/>
+        </a:effectRef>
+        <a:fontRef idx="minor">
+          <a:schemeClr val="tx1"/>
+        </a:fontRef>
+      </a:style>
+    </a:lnDef>
+  </a:objectDefaults>
+  <a:extraClrSchemeLst/>
+  <a:extLst>
+    <a:ext uri="{05A4C25C-085E-4340-85A3-A5531E510DB2}">
+      <thm15:themeFamily xmlns:thm15="http://schemas.microsoft.com/office/thememl/2012/main" name="Office Theme" id="{2E142A2C-CD16-42D6-873A-C26D2A0506FA}" vid="{1BDDFF52-6CD6-40A5-AB3C-68EB2F1E4D0A}"/>
+    </a:ext>
+  </a:extLst>
+</a:theme>
 </file>
--- a/docs/admin/slides/weekend_holiday_kpi/weekend_holiday_kpi.pptx
+++ b/docs/admin/slides/weekend_holiday_kpi/weekend_holiday_kpi.pptx
@@ -3303,7 +3303,7 @@
       </p:sp>
       <p:pic>
         <p:nvPicPr>
-          <p:cNvPr id="8" name="Image 0" descr="/Users/torukubota/ai-management/docs/admin/slides/weekend_holiday_kpi/charts/05_emergency_hour.png">    </p:cNvPr>
+          <p:cNvPr id="8" name="Image 0" descr="/Users/kubotatoru/ai-management/docs/admin/slides/weekend_holiday_kpi/charts/05_emergency_hour.png">    </p:cNvPr>
           <p:cNvPicPr>
             <a:picLocks noChangeAspect="1"/>
           </p:cNvPicPr>
@@ -3929,7 +3929,7 @@
       </p:sp>
       <p:pic>
         <p:nvPicPr>
-          <p:cNvPr id="8" name="Image 0" descr="/Users/torukubota/ai-management/docs/admin/slides/weekend_holiday_kpi/charts/11_lead_time_dist.png">    </p:cNvPr>
+          <p:cNvPr id="8" name="Image 0" descr="/Users/kubotatoru/ai-management/docs/admin/slides/weekend_holiday_kpi/charts/11_lead_time_dist.png">    </p:cNvPr>
           <p:cNvPicPr>
             <a:picLocks noChangeAspect="1"/>
           </p:cNvPicPr>
@@ -4611,7 +4611,7 @@
       </p:sp>
       <p:pic>
         <p:nvPicPr>
-          <p:cNvPr id="8" name="Image 0" descr="/Users/torukubota/ai-management/docs/admin/slides/weekend_holiday_kpi/charts/12_register_dow_vs_admit_dow.png">    </p:cNvPr>
+          <p:cNvPr id="8" name="Image 0" descr="/Users/kubotatoru/ai-management/docs/admin/slides/weekend_holiday_kpi/charts/12_register_dow_vs_admit_dow.png">    </p:cNvPr>
           <p:cNvPicPr>
             <a:picLocks noChangeAspect="1"/>
           </p:cNvPicPr>
@@ -5252,7 +5252,7 @@
       </p:sp>
       <p:pic>
         <p:nvPicPr>
-          <p:cNvPr id="8" name="Image 0" descr="/Users/torukubota/ai-management/docs/admin/slides/weekend_holiday_kpi/charts/13_holiday_lead_window.png">    </p:cNvPr>
+          <p:cNvPr id="8" name="Image 0" descr="/Users/kubotatoru/ai-management/docs/admin/slides/weekend_holiday_kpi/charts/13_holiday_lead_window.png">    </p:cNvPr>
           <p:cNvPicPr>
             <a:picLocks noChangeAspect="1"/>
           </p:cNvPicPr>
@@ -5952,7 +5952,7 @@
       </p:sp>
       <p:pic>
         <p:nvPicPr>
-          <p:cNvPr id="8" name="Image 0" descr="/Users/torukubota/ai-management/docs/admin/slides/weekend_holiday_kpi/charts/06_category_comparison.png">    </p:cNvPr>
+          <p:cNvPr id="8" name="Image 0" descr="/Users/kubotatoru/ai-management/docs/admin/slides/weekend_holiday_kpi/charts/06_category_comparison.png">    </p:cNvPr>
           <p:cNvPicPr>
             <a:picLocks noChangeAspect="1"/>
           </p:cNvPicPr>
@@ -7043,7 +7043,7 @@
       </p:sp>
       <p:pic>
         <p:nvPicPr>
-          <p:cNvPr id="19" name="Image 0" descr="/Users/torukubota/ai-management/docs/admin/slides/weekend_holiday_kpi/charts/09_impact_simulation.png">    </p:cNvPr>
+          <p:cNvPr id="19" name="Image 0" descr="/Users/kubotatoru/ai-management/docs/admin/slides/weekend_holiday_kpi/charts/09_impact_simulation.png">    </p:cNvPr>
           <p:cNvPicPr>
             <a:picLocks noChangeAspect="1"/>
           </p:cNvPicPr>
@@ -7468,7 +7468,7 @@
       </p:sp>
       <p:pic>
         <p:nvPicPr>
-          <p:cNvPr id="8" name="Image 0" descr="/Users/torukubota/ai-management/docs/admin/slides/weekend_holiday_kpi/charts/01_dow_admissions.png">    </p:cNvPr>
+          <p:cNvPr id="8" name="Image 0" descr="/Users/kubotatoru/ai-management/docs/admin/slides/weekend_holiday_kpi/charts/01_dow_admissions.png">    </p:cNvPr>
           <p:cNvPicPr>
             <a:picLocks noChangeAspect="1"/>
           </p:cNvPicPr>
@@ -8445,7 +8445,7 @@
                 <a:ea typeface="Yu Gothic" pitchFamily="34" charset="-122"/>
                 <a:cs typeface="Yu Gothic" pitchFamily="34" charset="-120"/>
               </a:rPr>
-              <a:t>救急搬送後 5F 53.1% / 6F 61.1%（基準 15% の 3.5-4.1 倍）、85+ 27.3% を理事会四半期報告</a:t>
+              <a:t>予定外入院率 5F 53.1% / 6F 61.1%（2 値分類、救急搬送後厳密値は精査中）、85+ 27.3% を理事会四半期報告</a:t>
             </a:r>
             <a:endParaRPr lang="en-US" sz="1100" dirty="0"/>
           </a:p>
@@ -8712,7 +8712,7 @@
                 <a:ea typeface="Yu Gothic UI" pitchFamily="34" charset="-122"/>
                 <a:cs typeface="Yu Gothic UI" pitchFamily="34" charset="-120"/>
               </a:rPr>
-              <a:t>制度基準</a:t>
+              <a:t>参考値/基準</a:t>
             </a:r>
             <a:endParaRPr lang="en-US" sz="1100" dirty="0"/>
           </a:p>
@@ -8790,7 +8790,7 @@
                 <a:ea typeface="Yu Gothic UI" pitchFamily="34" charset="-122"/>
                 <a:cs typeface="Yu Gothic UI" pitchFamily="34" charset="-120"/>
               </a:rPr>
-              <a:t>倍率・コメント</a:t>
+              <a:t>備考</a:t>
             </a:r>
             <a:endParaRPr lang="en-US" sz="1100" dirty="0"/>
           </a:p>
@@ -8854,7 +8854,7 @@
                 <a:ea typeface="Yu Gothic" pitchFamily="34" charset="-122"/>
                 <a:cs typeface="Yu Gothic" pitchFamily="34" charset="-120"/>
               </a:rPr>
-              <a:t>救急搬送後 5F（通年）</a:t>
+              <a:t>予定外入院 5F（通年・2値分類）</a:t>
             </a:r>
             <a:endParaRPr lang="en-US" sz="1050" dirty="0"/>
           </a:p>
@@ -8893,7 +8893,7 @@
                 <a:ea typeface="Yu Gothic" pitchFamily="34" charset="-122"/>
                 <a:cs typeface="Yu Gothic" pitchFamily="34" charset="-120"/>
               </a:rPr>
-              <a:t>15% 以上</a:t>
+              <a:t>参考値</a:t>
             </a:r>
             <a:endParaRPr lang="en-US" sz="1050" dirty="0"/>
           </a:p>
@@ -8971,7 +8971,7 @@
                 <a:ea typeface="Yu Gothic" pitchFamily="34" charset="-122"/>
                 <a:cs typeface="Yu Gothic" pitchFamily="34" charset="-120"/>
               </a:rPr>
-              <a:t>約 3.5 倍</a:t>
+              <a:t>救急+他経路込み</a:t>
             </a:r>
             <a:endParaRPr lang="en-US" sz="1050" dirty="0"/>
           </a:p>
@@ -9035,7 +9035,7 @@
                 <a:ea typeface="Yu Gothic" pitchFamily="34" charset="-122"/>
                 <a:cs typeface="Yu Gothic" pitchFamily="34" charset="-120"/>
               </a:rPr>
-              <a:t>救急搬送後 6F（通年）</a:t>
+              <a:t>予定外入院 6F（通年・2値分類）</a:t>
             </a:r>
             <a:endParaRPr lang="en-US" sz="1050" dirty="0"/>
           </a:p>
@@ -9074,7 +9074,7 @@
                 <a:ea typeface="Yu Gothic" pitchFamily="34" charset="-122"/>
                 <a:cs typeface="Yu Gothic" pitchFamily="34" charset="-120"/>
               </a:rPr>
-              <a:t>15% 以上</a:t>
+              <a:t>参考値</a:t>
             </a:r>
             <a:endParaRPr lang="en-US" sz="1050" dirty="0"/>
           </a:p>
@@ -9152,7 +9152,7 @@
                 <a:ea typeface="Yu Gothic" pitchFamily="34" charset="-122"/>
                 <a:cs typeface="Yu Gothic" pitchFamily="34" charset="-120"/>
               </a:rPr>
-              <a:t>約 4.1 倍</a:t>
+              <a:t>救急+他経路込み</a:t>
             </a:r>
             <a:endParaRPr lang="en-US" sz="1050" dirty="0"/>
           </a:p>
@@ -9216,7 +9216,7 @@
                 <a:ea typeface="Yu Gothic" pitchFamily="34" charset="-122"/>
                 <a:cs typeface="Yu Gothic" pitchFamily="34" charset="-120"/>
               </a:rPr>
-              <a:t>救急搬送後 5F（rolling 3ヶ月）</a:t>
+              <a:t>予定外入院 5F（rolling 3ヶ月）</a:t>
             </a:r>
             <a:endParaRPr lang="en-US" sz="1050" dirty="0"/>
           </a:p>
@@ -9255,7 +9255,7 @@
                 <a:ea typeface="Yu Gothic" pitchFamily="34" charset="-122"/>
                 <a:cs typeface="Yu Gothic" pitchFamily="34" charset="-120"/>
               </a:rPr>
-              <a:t>15% 以上</a:t>
+              <a:t>参考値</a:t>
             </a:r>
             <a:endParaRPr lang="en-US" sz="1050" dirty="0"/>
           </a:p>
@@ -9333,7 +9333,7 @@
                 <a:ea typeface="Yu Gothic" pitchFamily="34" charset="-122"/>
                 <a:cs typeface="Yu Gothic" pitchFamily="34" charset="-120"/>
               </a:rPr>
-              <a:t>3.6 倍</a:t>
+              <a:t>救急+他経路込み</a:t>
             </a:r>
             <a:endParaRPr lang="en-US" sz="1050" dirty="0"/>
           </a:p>
@@ -9397,7 +9397,7 @@
                 <a:ea typeface="Yu Gothic" pitchFamily="34" charset="-122"/>
                 <a:cs typeface="Yu Gothic" pitchFamily="34" charset="-120"/>
               </a:rPr>
-              <a:t>救急搬送後 6F（rolling 3ヶ月）</a:t>
+              <a:t>予定外入院 6F（rolling 3ヶ月）</a:t>
             </a:r>
             <a:endParaRPr lang="en-US" sz="1050" dirty="0"/>
           </a:p>
@@ -9436,7 +9436,7 @@
                 <a:ea typeface="Yu Gothic" pitchFamily="34" charset="-122"/>
                 <a:cs typeface="Yu Gothic" pitchFamily="34" charset="-120"/>
               </a:rPr>
-              <a:t>15% 以上</a:t>
+              <a:t>参考値</a:t>
             </a:r>
             <a:endParaRPr lang="en-US" sz="1050" dirty="0"/>
           </a:p>
@@ -9514,7 +9514,7 @@
                 <a:ea typeface="Yu Gothic" pitchFamily="34" charset="-122"/>
                 <a:cs typeface="Yu Gothic" pitchFamily="34" charset="-120"/>
               </a:rPr>
-              <a:t>4.0 倍</a:t>
+              <a:t>救急+他経路込み</a:t>
             </a:r>
             <a:endParaRPr lang="en-US" sz="1050" dirty="0"/>
           </a:p>
@@ -11964,7 +11964,7 @@
                 <a:ea typeface="Yu Gothic UI" pitchFamily="34" charset="-122"/>
                 <a:cs typeface="Yu Gothic UI" pitchFamily="34" charset="-120"/>
               </a:rPr>
-              <a:t>5F 54.4% / 6F 60.1%（約 3.6-4.0 倍）</a:t>
+              <a:t>予定外入院率※ 5F 54.4% / 6F 60.1%</a:t>
             </a:r>
             <a:endParaRPr lang="en-US" sz="1050" dirty="0"/>
           </a:p>
@@ -14135,7 +14135,7 @@
       </p:sp>
       <p:pic>
         <p:nvPicPr>
-          <p:cNvPr id="8" name="Image 0" descr="/Users/torukubota/ai-management/docs/admin/slides/weekend_holiday_kpi/charts/10_action_roadmap.png">    </p:cNvPr>
+          <p:cNvPr id="8" name="Image 0" descr="/Users/kubotatoru/ai-management/docs/admin/slides/weekend_holiday_kpi/charts/10_action_roadmap.png">    </p:cNvPr>
           <p:cNvPicPr>
             <a:picLocks noChangeAspect="1"/>
           </p:cNvPicPr>
@@ -15248,7 +15248,7 @@
                 <a:ea typeface="Yu Gothic" pitchFamily="34" charset="-122"/>
                 <a:cs typeface="Yu Gothic" pitchFamily="34" charset="-120"/>
               </a:rPr>
-              <a:t>全項目で安全マージンを持って達成。救急搬送後 5F 53.1% / 6F 61.1%（基準 15% の 3.5-4.1 倍）、85+ 27.3%、推定 LOS 5F 16.5 / 6F 15.6 日（緩和後 21 日に対し 4-5 日の余裕）。</a:t>
+              <a:t>LOS・85+ 比率は安全マージンを持って達成。予定外入院率 5F 53.1% / 6F 61.1%（2 値分類のため制度上の救急搬送後厳密値は精査中だが、基準 15% 達成見込み）、85+ 27.3%、推定 LOS 5F 16.5 / 6F 15.6 日（緩和後 21 日に対し 4-5 日の余裕）。救急搬送後厳密値は2026-07 頃の純実データ蓄積後に確定（手動シード入力で bridge 中）。</a:t>
             </a:r>
             <a:endParaRPr lang="en-US" sz="1000" dirty="0"/>
           </a:p>
@@ -15371,7 +15371,7 @@
                 <a:ea typeface="Yu Gothic" pitchFamily="34" charset="-122"/>
                 <a:cs typeface="Yu Gothic" pitchFamily="34" charset="-120"/>
               </a:rPr>
-              <a:t>救急搬送後割合が 3.5-4.1 倍の余裕なので十分にある。現在月 22 名 → 月 30 名程度は技術的可能。ただし消化器内科・紹介元病院との段階的調整が前提。v4 では Day 5/6 境界の影響を可視化する仕組みを整備。</a:t>
+              <a:t>予定外入院率が 50-60% と高水準のため、制度上の救急搬送後厳密値（精査中）も基準 15% に対して十分な余裕がある見込み。現在月 22 名 → 月 30 名程度は技術的可能。ただし消化器内科・紹介元病院との段階的調整が前提。最終判断は事務の入院経路 5 区分再エクスポート後に制度上の救急搬送後値で行う。v4 では Day 5/6 境界の影響を可視化する仕組みを整備。</a:t>
             </a:r>
             <a:endParaRPr lang="en-US" sz="1000" dirty="0"/>
           </a:p>
@@ -18032,7 +18032,7 @@
       </p:sp>
       <p:pic>
         <p:nvPicPr>
-          <p:cNvPr id="8" name="Image 0" descr="/Users/torukubota/ai-management/docs/admin/slides/weekend_holiday_kpi/charts/01_dow_admissions.png">    </p:cNvPr>
+          <p:cNvPr id="8" name="Image 0" descr="/Users/kubotatoru/ai-management/docs/admin/slides/weekend_holiday_kpi/charts/01_dow_admissions.png">    </p:cNvPr>
           <p:cNvPicPr>
             <a:picLocks noChangeAspect="1"/>
           </p:cNvPicPr>
@@ -18732,7 +18732,7 @@
       </p:sp>
       <p:pic>
         <p:nvPicPr>
-          <p:cNvPr id="8" name="Image 0" descr="/Users/torukubota/ai-management/docs/admin/slides/weekend_holiday_kpi/charts/02_dow_boxplot.png">    </p:cNvPr>
+          <p:cNvPr id="8" name="Image 0" descr="/Users/kubotatoru/ai-management/docs/admin/slides/weekend_holiday_kpi/charts/02_dow_boxplot.png">    </p:cNvPr>
           <p:cNvPicPr>
             <a:picLocks noChangeAspect="1"/>
           </p:cNvPicPr>
@@ -19373,7 +19373,7 @@
       </p:sp>
       <p:pic>
         <p:nvPicPr>
-          <p:cNvPr id="8" name="Image 0" descr="/Users/torukubota/ai-management/docs/admin/slides/weekend_holiday_kpi/charts/03_monthly_trend.png">    </p:cNvPr>
+          <p:cNvPr id="8" name="Image 0" descr="/Users/kubotatoru/ai-management/docs/admin/slides/weekend_holiday_kpi/charts/03_monthly_trend.png">    </p:cNvPr>
           <p:cNvPicPr>
             <a:picLocks noChangeAspect="1"/>
           </p:cNvPicPr>
@@ -20055,7 +20055,7 @@
       </p:sp>
       <p:pic>
         <p:nvPicPr>
-          <p:cNvPr id="8" name="Image 0" descr="/Users/torukubota/ai-management/docs/admin/slides/weekend_holiday_kpi/charts/04_holiday_drop.png">    </p:cNvPr>
+          <p:cNvPr id="8" name="Image 0" descr="/Users/kubotatoru/ai-management/docs/admin/slides/weekend_holiday_kpi/charts/04_holiday_drop.png">    </p:cNvPr>
           <p:cNvPicPr>
             <a:picLocks noChangeAspect="1"/>
           </p:cNvPicPr>
@@ -20811,7 +20811,7 @@
       </p:sp>
       <p:pic>
         <p:nvPicPr>
-          <p:cNvPr id="8" name="Image 0" descr="/Users/torukubota/ai-management/docs/admin/slides/weekend_holiday_kpi/charts/07_gw_daily.png">    </p:cNvPr>
+          <p:cNvPr id="8" name="Image 0" descr="/Users/kubotatoru/ai-management/docs/admin/slides/weekend_holiday_kpi/charts/07_gw_daily.png">    </p:cNvPr>
           <p:cNvPicPr>
             <a:picLocks noChangeAspect="1"/>
           </p:cNvPicPr>
@@ -21452,7 +21452,7 @@
       </p:sp>
       <p:pic>
         <p:nvPicPr>
-          <p:cNvPr id="8" name="Image 0" descr="/Users/torukubota/ai-management/docs/admin/slides/weekend_holiday_kpi/charts/08_nenmatsu_daily.png">    </p:cNvPr>
+          <p:cNvPr id="8" name="Image 0" descr="/Users/kubotatoru/ai-management/docs/admin/slides/weekend_holiday_kpi/charts/08_nenmatsu_daily.png">    </p:cNvPr>
           <p:cNvPicPr>
             <a:picLocks noChangeAspect="1"/>
           </p:cNvPicPr>
